--- a/ML_Project_9_Group_3_Presentation.pptx
+++ b/ML_Project_9_Group_3_Presentation.pptx
@@ -1623,7 +1623,7 @@
   <p:cSld>
     <p:spTree>
       <p:nvGrpSpPr>
-        <p:cNvPr id="333" name="Shape 333"/>
+        <p:cNvPr id="334" name="Shape 334"/>
         <p:cNvGrpSpPr/>
         <p:nvPr/>
       </p:nvGrpSpPr>
@@ -1637,7 +1637,7 @@
       </p:grpSpPr>
       <p:sp>
         <p:nvSpPr>
-          <p:cNvPr id="334" name="Google Shape;334;h55f610596eb4887f_0_15:notes"/>
+          <p:cNvPr id="335" name="Google Shape;335;h55f610596eb4887f_0_15:notes"/>
           <p:cNvSpPr/>
           <p:nvPr>
             <p:ph idx="2" type="sldImg"/>
@@ -1672,7 +1672,7 @@
       </p:sp>
       <p:sp>
         <p:nvSpPr>
-          <p:cNvPr id="335" name="Google Shape;335;h55f610596eb4887f_0_15:notes"/>
+          <p:cNvPr id="336" name="Google Shape;336;h55f610596eb4887f_0_15:notes"/>
           <p:cNvSpPr txBox="1"/>
           <p:nvPr>
             <p:ph idx="1" type="body"/>
@@ -1722,7 +1722,7 @@
   <p:cSld>
     <p:spTree>
       <p:nvGrpSpPr>
-        <p:cNvPr id="352" name="Shape 352"/>
+        <p:cNvPr id="353" name="Shape 353"/>
         <p:cNvGrpSpPr/>
         <p:nvPr/>
       </p:nvGrpSpPr>
@@ -1736,7 +1736,7 @@
       </p:grpSpPr>
       <p:sp>
         <p:nvSpPr>
-          <p:cNvPr id="353" name="Google Shape;353;h55f610596eb4887f_0_20:notes"/>
+          <p:cNvPr id="354" name="Google Shape;354;h55f610596eb4887f_0_20:notes"/>
           <p:cNvSpPr/>
           <p:nvPr>
             <p:ph idx="2" type="sldImg"/>
@@ -1771,7 +1771,7 @@
       </p:sp>
       <p:sp>
         <p:nvSpPr>
-          <p:cNvPr id="354" name="Google Shape;354;h55f610596eb4887f_0_20:notes"/>
+          <p:cNvPr id="355" name="Google Shape;355;h55f610596eb4887f_0_20:notes"/>
           <p:cNvSpPr txBox="1"/>
           <p:nvPr>
             <p:ph idx="1" type="body"/>
@@ -1821,7 +1821,7 @@
   <p:cSld>
     <p:spTree>
       <p:nvGrpSpPr>
-        <p:cNvPr id="364" name="Shape 364"/>
+        <p:cNvPr id="365" name="Shape 365"/>
         <p:cNvGrpSpPr/>
         <p:nvPr/>
       </p:nvGrpSpPr>
@@ -1835,7 +1835,7 @@
       </p:grpSpPr>
       <p:sp>
         <p:nvSpPr>
-          <p:cNvPr id="365" name="Google Shape;365;p:notes"/>
+          <p:cNvPr id="366" name="Google Shape;366;p:notes"/>
           <p:cNvSpPr/>
           <p:nvPr>
             <p:ph idx="2" type="sldImg"/>
@@ -1870,7 +1870,7 @@
       </p:sp>
       <p:sp>
         <p:nvSpPr>
-          <p:cNvPr id="366" name="Google Shape;366;p:notes"/>
+          <p:cNvPr id="367" name="Google Shape;367;p:notes"/>
           <p:cNvSpPr txBox="1"/>
           <p:nvPr>
             <p:ph idx="1" type="body"/>
@@ -1920,7 +1920,7 @@
   <p:cSld>
     <p:spTree>
       <p:nvGrpSpPr>
-        <p:cNvPr id="375" name="Shape 375"/>
+        <p:cNvPr id="376" name="Shape 376"/>
         <p:cNvGrpSpPr/>
         <p:nvPr/>
       </p:nvGrpSpPr>
@@ -1934,7 +1934,7 @@
       </p:grpSpPr>
       <p:sp>
         <p:nvSpPr>
-          <p:cNvPr id="376" name="Google Shape;376;h55f610596eb4887f_0_0:notes"/>
+          <p:cNvPr id="377" name="Google Shape;377;h55f610596eb4887f_0_0:notes"/>
           <p:cNvSpPr/>
           <p:nvPr>
             <p:ph idx="2" type="sldImg"/>
@@ -1969,7 +1969,7 @@
       </p:sp>
       <p:sp>
         <p:nvSpPr>
-          <p:cNvPr id="377" name="Google Shape;377;h55f610596eb4887f_0_0:notes"/>
+          <p:cNvPr id="378" name="Google Shape;378;h55f610596eb4887f_0_0:notes"/>
           <p:cNvSpPr txBox="1"/>
           <p:nvPr>
             <p:ph idx="1" type="body"/>
@@ -2019,7 +2019,7 @@
   <p:cSld>
     <p:spTree>
       <p:nvGrpSpPr>
-        <p:cNvPr id="382" name="Shape 382"/>
+        <p:cNvPr id="383" name="Shape 383"/>
         <p:cNvGrpSpPr/>
         <p:nvPr/>
       </p:nvGrpSpPr>
@@ -2033,7 +2033,7 @@
       </p:grpSpPr>
       <p:sp>
         <p:nvSpPr>
-          <p:cNvPr id="383" name="Google Shape;383;h55f610596eb4887f_0_5:notes"/>
+          <p:cNvPr id="384" name="Google Shape;384;h55f610596eb4887f_0_5:notes"/>
           <p:cNvSpPr/>
           <p:nvPr>
             <p:ph idx="2" type="sldImg"/>
@@ -2068,7 +2068,7 @@
       </p:sp>
       <p:sp>
         <p:nvSpPr>
-          <p:cNvPr id="384" name="Google Shape;384;h55f610596eb4887f_0_5:notes"/>
+          <p:cNvPr id="385" name="Google Shape;385;h55f610596eb4887f_0_5:notes"/>
           <p:cNvSpPr txBox="1"/>
           <p:nvPr>
             <p:ph idx="1" type="body"/>
@@ -2275,7 +2275,7 @@
   <p:cSld>
     <p:spTree>
       <p:nvGrpSpPr>
-        <p:cNvPr id="389" name="Shape 389"/>
+        <p:cNvPr id="390" name="Shape 390"/>
         <p:cNvGrpSpPr/>
         <p:nvPr/>
       </p:nvGrpSpPr>
@@ -2289,7 +2289,7 @@
       </p:grpSpPr>
       <p:sp>
         <p:nvSpPr>
-          <p:cNvPr id="390" name="Google Shape;390;h55f610596eb4887f_0_10:notes"/>
+          <p:cNvPr id="391" name="Google Shape;391;h55f610596eb4887f_0_10:notes"/>
           <p:cNvSpPr/>
           <p:nvPr>
             <p:ph idx="2" type="sldImg"/>
@@ -2324,7 +2324,7 @@
       </p:sp>
       <p:sp>
         <p:nvSpPr>
-          <p:cNvPr id="391" name="Google Shape;391;h55f610596eb4887f_0_10:notes"/>
+          <p:cNvPr id="392" name="Google Shape;392;h55f610596eb4887f_0_10:notes"/>
           <p:cNvSpPr txBox="1"/>
           <p:nvPr>
             <p:ph idx="1" type="body"/>
@@ -2374,7 +2374,7 @@
   <p:cSld>
     <p:spTree>
       <p:nvGrpSpPr>
-        <p:cNvPr id="396" name="Shape 396"/>
+        <p:cNvPr id="397" name="Shape 397"/>
         <p:cNvGrpSpPr/>
         <p:nvPr/>
       </p:nvGrpSpPr>
@@ -2388,7 +2388,7 @@
       </p:grpSpPr>
       <p:sp>
         <p:nvSpPr>
-          <p:cNvPr id="397" name="Google Shape;397;h1eb388ce2fcb6e8_2_0:notes"/>
+          <p:cNvPr id="398" name="Google Shape;398;h1eb388ce2fcb6e8_2_0:notes"/>
           <p:cNvSpPr/>
           <p:nvPr>
             <p:ph idx="2" type="sldImg"/>
@@ -2423,7 +2423,7 @@
       </p:sp>
       <p:sp>
         <p:nvSpPr>
-          <p:cNvPr id="398" name="Google Shape;398;h1eb388ce2fcb6e8_2_0:notes"/>
+          <p:cNvPr id="399" name="Google Shape;399;h1eb388ce2fcb6e8_2_0:notes"/>
           <p:cNvSpPr txBox="1"/>
           <p:nvPr>
             <p:ph idx="1" type="body"/>
@@ -2473,7 +2473,7 @@
   <p:cSld>
     <p:spTree>
       <p:nvGrpSpPr>
-        <p:cNvPr id="403" name="Shape 403"/>
+        <p:cNvPr id="404" name="Shape 404"/>
         <p:cNvGrpSpPr/>
         <p:nvPr/>
       </p:nvGrpSpPr>
@@ -2487,7 +2487,7 @@
       </p:grpSpPr>
       <p:sp>
         <p:nvSpPr>
-          <p:cNvPr id="404" name="Google Shape;404;h2c8f91d5f6982453_13_0:notes"/>
+          <p:cNvPr id="405" name="Google Shape;405;h2c8f91d5f6982453_13_0:notes"/>
           <p:cNvSpPr/>
           <p:nvPr>
             <p:ph idx="2" type="sldImg"/>
@@ -2532,7 +2532,7 @@
       </p:sp>
       <p:sp>
         <p:nvSpPr>
-          <p:cNvPr id="405" name="Google Shape;405;h2c8f91d5f6982453_13_0:notes"/>
+          <p:cNvPr id="406" name="Google Shape;406;h2c8f91d5f6982453_13_0:notes"/>
           <p:cNvSpPr txBox="1"/>
           <p:nvPr>
             <p:ph idx="1" type="body"/>
@@ -2575,7 +2575,7 @@
       </p:sp>
       <p:sp>
         <p:nvSpPr>
-          <p:cNvPr id="406" name="Google Shape;406;h2c8f91d5f6982453_13_0:notes"/>
+          <p:cNvPr id="407" name="Google Shape;407;h2c8f91d5f6982453_13_0:notes"/>
           <p:cNvSpPr txBox="1"/>
           <p:nvPr>
             <p:ph idx="12" type="sldNum"/>
@@ -20351,8 +20351,8 @@
         </p:nvSpPr>
         <p:spPr>
           <a:xfrm>
-            <a:off x="2989851" y="3053322"/>
-            <a:ext cx="3164295" cy="276999"/>
+            <a:off x="2854200" y="3053325"/>
+            <a:ext cx="3435600" cy="284700"/>
           </a:xfrm>
           <a:prstGeom prst="rect">
             <a:avLst/>
@@ -20468,7 +20468,7 @@
             </a:r>
             <a:r>
               <a:rPr lang="en" sz="3300"/>
-              <a:t>              </a:t>
+              <a:t>           </a:t>
             </a:r>
             <a:r>
               <a:rPr b="1" lang="en" sz="3300">
@@ -20477,7 +20477,7 @@
                 <a:cs typeface="Arial"/>
                 <a:sym typeface="Arial"/>
               </a:rPr>
-              <a:t>Linear Model: Evaluation Result</a:t>
+              <a:t>Linear Regression: Evaluation Result</a:t>
             </a:r>
             <a:r>
               <a:rPr b="1" lang="en" sz="3300">
@@ -20832,7 +20832,7 @@
             <a:tbl>
               <a:tblPr bandRow="1" firstRow="1">
                 <a:noFill/>
-                <a:tableStyleId>{8DD880F3-B267-4A19-8CC4-8528E6AE9A93}</a:tableStyleId>
+                <a:tableStyleId>{33845540-4549-48E9-B17C-92D9A22C0115}</a:tableStyleId>
               </a:tblPr>
               <a:tblGrid>
                 <a:gridCol w="3789000"/>
@@ -21256,7 +21256,7 @@
         </p:spPr>
         <p:txBody>
           <a:bodyPr anchorCtr="0" anchor="t" bIns="0" lIns="0" spcFirstLastPara="1" rIns="0" wrap="square" tIns="0">
-            <a:normAutofit/>
+            <a:normAutofit fontScale="90000"/>
           </a:bodyPr>
           <a:lstStyle/>
           <a:p>
@@ -21273,23 +21273,28 @@
               <a:buClr>
                 <a:srgbClr val="1B2A3A"/>
               </a:buClr>
-              <a:buSzPts val="4200"/>
+              <a:buSzPct val="100000"/>
               <a:buFont typeface="Georgia"/>
               <a:buNone/>
             </a:pPr>
             <a:r>
-              <a:rPr b="0" i="0" lang="en" sz="4200">
+              <a:rPr b="1" i="0" lang="en" sz="4200">
                 <a:solidFill>
                   <a:srgbClr val="1B2A3A"/>
                 </a:solidFill>
-                <a:latin typeface="Georgia"/>
-                <a:ea typeface="Georgia"/>
-                <a:cs typeface="Georgia"/>
-                <a:sym typeface="Georgia"/>
+                <a:latin typeface="Arial"/>
+                <a:ea typeface="Arial"/>
+                <a:cs typeface="Arial"/>
+                <a:sym typeface="Arial"/>
               </a:rPr>
               <a:t>Decision Tree Regressor</a:t>
             </a:r>
-            <a:endParaRPr sz="4200"/>
+            <a:endParaRPr b="1" sz="4200">
+              <a:latin typeface="Arial"/>
+              <a:ea typeface="Arial"/>
+              <a:cs typeface="Arial"/>
+              <a:sym typeface="Arial"/>
+            </a:endParaRPr>
           </a:p>
         </p:txBody>
       </p:sp>
@@ -21401,8 +21406,8 @@
         </p:nvSpPr>
         <p:spPr>
           <a:xfrm>
-            <a:off x="609600" y="609600"/>
-            <a:ext cx="8162544" cy="396240"/>
+            <a:off x="609600" y="232350"/>
+            <a:ext cx="8162400" cy="396300"/>
           </a:xfrm>
           <a:prstGeom prst="rect">
             <a:avLst/>
@@ -21414,7 +21419,7 @@
         </p:spPr>
         <p:txBody>
           <a:bodyPr anchorCtr="0" anchor="t" bIns="0" lIns="0" spcFirstLastPara="1" rIns="0" wrap="square" tIns="0">
-            <a:normAutofit/>
+            <a:noAutofit/>
           </a:bodyPr>
           <a:lstStyle/>
           <a:p>
@@ -21431,23 +21436,37 @@
               <a:buClr>
                 <a:srgbClr val="1B2A3A"/>
               </a:buClr>
-              <a:buSzPts val="2700"/>
+              <a:buSzPts val="2430"/>
               <a:buFont typeface="Georgia"/>
               <a:buNone/>
             </a:pPr>
             <a:r>
-              <a:rPr b="0" i="0" lang="en" sz="2700">
+              <a:rPr b="1" lang="en" sz="3130">
+                <a:latin typeface="Arial"/>
+                <a:ea typeface="Arial"/>
+                <a:cs typeface="Arial"/>
+                <a:sym typeface="Arial"/>
+              </a:rPr>
+              <a:t>                  </a:t>
+            </a:r>
+            <a:r>
+              <a:rPr b="1" i="0" lang="en" sz="3330">
                 <a:solidFill>
                   <a:srgbClr val="1B2A3A"/>
                 </a:solidFill>
-                <a:latin typeface="Georgia"/>
-                <a:ea typeface="Georgia"/>
-                <a:cs typeface="Georgia"/>
-                <a:sym typeface="Georgia"/>
+                <a:latin typeface="Arial"/>
+                <a:ea typeface="Arial"/>
+                <a:cs typeface="Arial"/>
+                <a:sym typeface="Arial"/>
               </a:rPr>
               <a:t>Effect of tree depth</a:t>
             </a:r>
-            <a:endParaRPr sz="2700"/>
+            <a:endParaRPr b="1" sz="3330">
+              <a:latin typeface="Arial"/>
+              <a:ea typeface="Arial"/>
+              <a:cs typeface="Arial"/>
+              <a:sym typeface="Arial"/>
+            </a:endParaRPr>
           </a:p>
         </p:txBody>
       </p:sp>
@@ -21835,8 +21854,8 @@
         </p:nvSpPr>
         <p:spPr>
           <a:xfrm>
-            <a:off x="609600" y="609600"/>
-            <a:ext cx="8162544" cy="396240"/>
+            <a:off x="609600" y="296925"/>
+            <a:ext cx="8162400" cy="396300"/>
           </a:xfrm>
           <a:prstGeom prst="rect">
             <a:avLst/>
@@ -21848,11 +21867,11 @@
         </p:spPr>
         <p:txBody>
           <a:bodyPr anchorCtr="0" anchor="t" bIns="0" lIns="0" spcFirstLastPara="1" rIns="0" wrap="square" tIns="0">
-            <a:normAutofit/>
+            <a:noAutofit/>
           </a:bodyPr>
           <a:lstStyle/>
           <a:p>
-            <a:pPr indent="0" lvl="0" marL="0" rtl="0" algn="l">
+            <a:pPr indent="0" lvl="0" marL="0" rtl="0" algn="ctr">
               <a:lnSpc>
                 <a:spcPct val="110000"/>
               </a:lnSpc>
@@ -21865,23 +21884,28 @@
               <a:buClr>
                 <a:srgbClr val="1B2A3A"/>
               </a:buClr>
-              <a:buSzPts val="2700"/>
+              <a:buSzPts val="2430"/>
               <a:buFont typeface="Georgia"/>
               <a:buNone/>
             </a:pPr>
             <a:r>
-              <a:rPr b="0" i="0" lang="en" sz="2700">
+              <a:rPr b="1" i="0" lang="en" sz="3330">
                 <a:solidFill>
                   <a:srgbClr val="1B2A3A"/>
                 </a:solidFill>
-                <a:latin typeface="Georgia"/>
-                <a:ea typeface="Georgia"/>
-                <a:cs typeface="Georgia"/>
-                <a:sym typeface="Georgia"/>
+                <a:latin typeface="Arial"/>
+                <a:ea typeface="Arial"/>
+                <a:cs typeface="Arial"/>
+                <a:sym typeface="Arial"/>
               </a:rPr>
               <a:t>Generalization check</a:t>
             </a:r>
-            <a:endParaRPr sz="2700"/>
+            <a:endParaRPr b="1" sz="3330">
+              <a:latin typeface="Arial"/>
+              <a:ea typeface="Arial"/>
+              <a:cs typeface="Arial"/>
+              <a:sym typeface="Arial"/>
+            </a:endParaRPr>
           </a:p>
         </p:txBody>
       </p:sp>
@@ -21927,7 +21951,7 @@
             <a:tbl>
               <a:tblPr>
                 <a:noFill/>
-                <a:tableStyleId>{F8EE354C-3E2A-4422-89BC-CC35F2F1C3C6}</a:tableStyleId>
+                <a:tableStyleId>{D04487E2-8379-458E-89A5-9EFA157CD851}</a:tableStyleId>
               </a:tblPr>
               <a:tblGrid>
                 <a:gridCol w="975350"/>
@@ -23218,8 +23242,8 @@
         </p:nvSpPr>
         <p:spPr>
           <a:xfrm>
-            <a:off x="609600" y="609600"/>
-            <a:ext cx="8162544" cy="396240"/>
+            <a:off x="609600" y="328200"/>
+            <a:ext cx="8162400" cy="396300"/>
           </a:xfrm>
           <a:prstGeom prst="rect">
             <a:avLst/>
@@ -23231,11 +23255,11 @@
         </p:spPr>
         <p:txBody>
           <a:bodyPr anchorCtr="0" anchor="t" bIns="0" lIns="0" spcFirstLastPara="1" rIns="0" wrap="square" tIns="0">
-            <a:normAutofit/>
+            <a:noAutofit/>
           </a:bodyPr>
           <a:lstStyle/>
           <a:p>
-            <a:pPr indent="0" lvl="0" marL="0" rtl="0" algn="l">
+            <a:pPr indent="0" lvl="0" marL="0" rtl="0" algn="ctr">
               <a:lnSpc>
                 <a:spcPct val="110000"/>
               </a:lnSpc>
@@ -23248,23 +23272,28 @@
               <a:buClr>
                 <a:srgbClr val="1B2A3A"/>
               </a:buClr>
-              <a:buSzPts val="2700"/>
+              <a:buSzPts val="2430"/>
               <a:buFont typeface="Georgia"/>
               <a:buNone/>
             </a:pPr>
             <a:r>
-              <a:rPr b="0" i="0" lang="en" sz="2700">
+              <a:rPr b="1" i="0" lang="en" sz="3330">
                 <a:solidFill>
                   <a:srgbClr val="1B2A3A"/>
                 </a:solidFill>
-                <a:latin typeface="Georgia"/>
-                <a:ea typeface="Georgia"/>
-                <a:cs typeface="Georgia"/>
-                <a:sym typeface="Georgia"/>
+                <a:latin typeface="Arial"/>
+                <a:ea typeface="Arial"/>
+                <a:cs typeface="Arial"/>
+                <a:sym typeface="Arial"/>
               </a:rPr>
               <a:t>Error by building type</a:t>
             </a:r>
-            <a:endParaRPr sz="2700"/>
+            <a:endParaRPr b="1" sz="3330">
+              <a:latin typeface="Arial"/>
+              <a:ea typeface="Arial"/>
+              <a:cs typeface="Arial"/>
+              <a:sym typeface="Arial"/>
+            </a:endParaRPr>
           </a:p>
         </p:txBody>
       </p:sp>
@@ -23610,6 +23639,51 @@
           </a:p>
         </p:txBody>
       </p:sp>
+      <p:sp>
+        <p:nvSpPr>
+          <p:cNvPr id="333" name="Google Shape;333;p42"/>
+          <p:cNvSpPr txBox="1"/>
+          <p:nvPr/>
+        </p:nvSpPr>
+        <p:spPr>
+          <a:xfrm>
+            <a:off x="3116325" y="839000"/>
+            <a:ext cx="6045000" cy="369300"/>
+          </a:xfrm>
+          <a:prstGeom prst="rect">
+            <a:avLst/>
+          </a:prstGeom>
+          <a:noFill/>
+          <a:ln>
+            <a:noFill/>
+          </a:ln>
+        </p:spPr>
+        <p:txBody>
+          <a:bodyPr anchorCtr="0" anchor="t" bIns="91425" lIns="91425" spcFirstLastPara="1" rIns="91425" wrap="square" tIns="91425">
+            <a:spAutoFit/>
+          </a:bodyPr>
+          <a:lstStyle/>
+          <a:p>
+            <a:pPr indent="0" lvl="0" marL="0" rtl="0" algn="l">
+              <a:spcBef>
+                <a:spcPts val="0"/>
+              </a:spcBef>
+              <a:spcAft>
+                <a:spcPts val="0"/>
+              </a:spcAft>
+              <a:buNone/>
+            </a:pPr>
+            <a:r>
+              <a:t/>
+            </a:r>
+            <a:endParaRPr sz="1200">
+              <a:solidFill>
+                <a:srgbClr val="1B2A3A"/>
+              </a:solidFill>
+            </a:endParaRPr>
+          </a:p>
+        </p:txBody>
+      </p:sp>
     </p:spTree>
   </p:cSld>
   <p:clrMapOvr>
@@ -23623,7 +23697,7 @@
   <p:cSld>
     <p:spTree>
       <p:nvGrpSpPr>
-        <p:cNvPr id="336" name="Shape 336"/>
+        <p:cNvPr id="337" name="Shape 337"/>
         <p:cNvGrpSpPr/>
         <p:nvPr/>
       </p:nvGrpSpPr>
@@ -23637,7 +23711,7 @@
       </p:grpSpPr>
       <p:sp>
         <p:nvSpPr>
-          <p:cNvPr id="337" name="Google Shape;337;p43"/>
+          <p:cNvPr id="338" name="Google Shape;338;p43"/>
           <p:cNvSpPr txBox="1"/>
           <p:nvPr>
             <p:ph idx="4294967295" type="ctrTitle"/>
@@ -23696,7 +23770,7 @@
       </p:sp>
       <p:sp>
         <p:nvSpPr>
-          <p:cNvPr id="338" name="Google Shape;338;p43"/>
+          <p:cNvPr id="339" name="Google Shape;339;p43"/>
           <p:cNvSpPr/>
           <p:nvPr/>
         </p:nvSpPr>
@@ -23753,7 +23827,7 @@
       </p:sp>
       <p:sp>
         <p:nvSpPr>
-          <p:cNvPr id="339" name="Google Shape;339;p43"/>
+          <p:cNvPr id="340" name="Google Shape;340;p43"/>
           <p:cNvSpPr txBox="1"/>
           <p:nvPr/>
         </p:nvSpPr>
@@ -23926,7 +24000,7 @@
       </p:sp>
       <p:sp>
         <p:nvSpPr>
-          <p:cNvPr id="340" name="Google Shape;340;p43"/>
+          <p:cNvPr id="341" name="Google Shape;341;p43"/>
           <p:cNvSpPr/>
           <p:nvPr/>
         </p:nvSpPr>
@@ -23985,7 +24059,7 @@
       </p:sp>
       <p:sp>
         <p:nvSpPr>
-          <p:cNvPr id="341" name="Google Shape;341;p43"/>
+          <p:cNvPr id="342" name="Google Shape;342;p43"/>
           <p:cNvSpPr txBox="1"/>
           <p:nvPr/>
         </p:nvSpPr>
@@ -24035,7 +24109,7 @@
       </p:sp>
       <p:sp>
         <p:nvSpPr>
-          <p:cNvPr id="342" name="Google Shape;342;p43"/>
+          <p:cNvPr id="343" name="Google Shape;343;p43"/>
           <p:cNvSpPr/>
           <p:nvPr/>
         </p:nvSpPr>
@@ -24092,7 +24166,7 @@
       </p:sp>
       <p:sp>
         <p:nvSpPr>
-          <p:cNvPr id="343" name="Google Shape;343;p43"/>
+          <p:cNvPr id="344" name="Google Shape;344;p43"/>
           <p:cNvSpPr txBox="1"/>
           <p:nvPr/>
         </p:nvSpPr>
@@ -24225,7 +24299,7 @@
       </p:sp>
       <p:sp>
         <p:nvSpPr>
-          <p:cNvPr id="344" name="Google Shape;344;p43"/>
+          <p:cNvPr id="345" name="Google Shape;345;p43"/>
           <p:cNvSpPr/>
           <p:nvPr/>
         </p:nvSpPr>
@@ -24284,7 +24358,7 @@
       </p:sp>
       <p:sp>
         <p:nvSpPr>
-          <p:cNvPr id="345" name="Google Shape;345;p43"/>
+          <p:cNvPr id="346" name="Google Shape;346;p43"/>
           <p:cNvSpPr/>
           <p:nvPr/>
         </p:nvSpPr>
@@ -24343,7 +24417,7 @@
       </p:sp>
       <p:sp>
         <p:nvSpPr>
-          <p:cNvPr id="346" name="Google Shape;346;p43"/>
+          <p:cNvPr id="347" name="Google Shape;347;p43"/>
           <p:cNvSpPr/>
           <p:nvPr/>
         </p:nvSpPr>
@@ -24400,7 +24474,7 @@
       </p:sp>
       <p:sp>
         <p:nvSpPr>
-          <p:cNvPr id="347" name="Google Shape;347;p43"/>
+          <p:cNvPr id="348" name="Google Shape;348;p43"/>
           <p:cNvSpPr/>
           <p:nvPr/>
         </p:nvSpPr>
@@ -24457,7 +24531,7 @@
       </p:sp>
       <p:sp>
         <p:nvSpPr>
-          <p:cNvPr id="348" name="Google Shape;348;p43"/>
+          <p:cNvPr id="349" name="Google Shape;349;p43"/>
           <p:cNvSpPr txBox="1"/>
           <p:nvPr/>
         </p:nvSpPr>
@@ -24538,7 +24612,7 @@
       </p:sp>
       <p:sp>
         <p:nvSpPr>
-          <p:cNvPr id="349" name="Google Shape;349;p43"/>
+          <p:cNvPr id="350" name="Google Shape;350;p43"/>
           <p:cNvSpPr txBox="1"/>
           <p:nvPr/>
         </p:nvSpPr>
@@ -24668,7 +24742,7 @@
       </p:sp>
       <p:sp>
         <p:nvSpPr>
-          <p:cNvPr id="350" name="Google Shape;350;p43"/>
+          <p:cNvPr id="351" name="Google Shape;351;p43"/>
           <p:cNvSpPr txBox="1"/>
           <p:nvPr/>
         </p:nvSpPr>
@@ -24741,7 +24815,7 @@
       </p:sp>
       <p:sp>
         <p:nvSpPr>
-          <p:cNvPr id="351" name="Google Shape;351;p43"/>
+          <p:cNvPr id="352" name="Google Shape;352;p43"/>
           <p:cNvSpPr txBox="1"/>
           <p:nvPr/>
         </p:nvSpPr>
@@ -24875,7 +24949,7 @@
   <p:cSld>
     <p:spTree>
       <p:nvGrpSpPr>
-        <p:cNvPr id="355" name="Shape 355"/>
+        <p:cNvPr id="356" name="Shape 356"/>
         <p:cNvGrpSpPr/>
         <p:nvPr/>
       </p:nvGrpSpPr>
@@ -24889,7 +24963,7 @@
       </p:grpSpPr>
       <p:sp>
         <p:nvSpPr>
-          <p:cNvPr id="356" name="Google Shape;356;p44"/>
+          <p:cNvPr id="357" name="Google Shape;357;p44"/>
           <p:cNvSpPr txBox="1"/>
           <p:nvPr>
             <p:ph idx="4294967295" type="ctrTitle"/>
@@ -24957,7 +25031,7 @@
       </p:sp>
       <p:sp>
         <p:nvSpPr>
-          <p:cNvPr id="357" name="Google Shape;357;p44"/>
+          <p:cNvPr id="358" name="Google Shape;358;p44"/>
           <p:cNvSpPr/>
           <p:nvPr/>
         </p:nvSpPr>
@@ -25014,7 +25088,7 @@
       </p:sp>
       <p:sp>
         <p:nvSpPr>
-          <p:cNvPr id="358" name="Google Shape;358;p44"/>
+          <p:cNvPr id="359" name="Google Shape;359;p44"/>
           <p:cNvSpPr txBox="1"/>
           <p:nvPr/>
         </p:nvSpPr>
@@ -25036,78 +25110,6 @@
             <a:spAutoFit/>
           </a:bodyPr>
           <a:lstStyle/>
-          <a:p>
-            <a:pPr indent="0" lvl="0" marL="0" marR="0" rtl="0" algn="l">
-              <a:spcBef>
-                <a:spcPts val="0"/>
-              </a:spcBef>
-              <a:spcAft>
-                <a:spcPts val="0"/>
-              </a:spcAft>
-              <a:buNone/>
-            </a:pPr>
-            <a:r>
-              <a:t/>
-            </a:r>
-            <a:endParaRPr sz="1400">
-              <a:solidFill>
-                <a:schemeClr val="dk1"/>
-              </a:solidFill>
-              <a:latin typeface="Arial"/>
-              <a:ea typeface="Arial"/>
-              <a:cs typeface="Arial"/>
-              <a:sym typeface="Arial"/>
-            </a:endParaRPr>
-          </a:p>
-        </p:txBody>
-      </p:sp>
-      <p:sp>
-        <p:nvSpPr>
-          <p:cNvPr id="359" name="Google Shape;359;p44"/>
-          <p:cNvSpPr txBox="1"/>
-          <p:nvPr/>
-        </p:nvSpPr>
-        <p:spPr>
-          <a:xfrm>
-            <a:off x="1941305" y="1900674"/>
-            <a:ext cx="464100" cy="700200"/>
-          </a:xfrm>
-          <a:prstGeom prst="rect">
-            <a:avLst/>
-          </a:prstGeom>
-          <a:noFill/>
-          <a:ln>
-            <a:noFill/>
-          </a:ln>
-        </p:spPr>
-        <p:txBody>
-          <a:bodyPr anchorCtr="0" anchor="t" bIns="34275" lIns="68575" spcFirstLastPara="1" rIns="68575" wrap="square" tIns="34275">
-            <a:spAutoFit/>
-          </a:bodyPr>
-          <a:lstStyle/>
-          <a:p>
-            <a:pPr indent="0" lvl="0" marL="0" marR="0" rtl="0" algn="l">
-              <a:spcBef>
-                <a:spcPts val="0"/>
-              </a:spcBef>
-              <a:spcAft>
-                <a:spcPts val="0"/>
-              </a:spcAft>
-              <a:buNone/>
-            </a:pPr>
-            <a:r>
-              <a:t/>
-            </a:r>
-            <a:endParaRPr b="1" sz="2700">
-              <a:solidFill>
-                <a:schemeClr val="dk1"/>
-              </a:solidFill>
-              <a:latin typeface="Arial"/>
-              <a:ea typeface="Arial"/>
-              <a:cs typeface="Arial"/>
-              <a:sym typeface="Arial"/>
-            </a:endParaRPr>
-          </a:p>
           <a:p>
             <a:pPr indent="0" lvl="0" marL="0" marR="0" rtl="0" algn="l">
               <a:spcBef>
@@ -25141,8 +25143,8 @@
         </p:nvSpPr>
         <p:spPr>
           <a:xfrm>
-            <a:off x="3893191" y="1911616"/>
-            <a:ext cx="506100" cy="700200"/>
+            <a:off x="1941305" y="1900674"/>
+            <a:ext cx="464100" cy="700200"/>
           </a:xfrm>
           <a:prstGeom prst="rect">
             <a:avLst/>
@@ -25213,6 +25215,78 @@
         </p:nvSpPr>
         <p:spPr>
           <a:xfrm>
+            <a:off x="3893191" y="1911616"/>
+            <a:ext cx="506100" cy="700200"/>
+          </a:xfrm>
+          <a:prstGeom prst="rect">
+            <a:avLst/>
+          </a:prstGeom>
+          <a:noFill/>
+          <a:ln>
+            <a:noFill/>
+          </a:ln>
+        </p:spPr>
+        <p:txBody>
+          <a:bodyPr anchorCtr="0" anchor="t" bIns="34275" lIns="68575" spcFirstLastPara="1" rIns="68575" wrap="square" tIns="34275">
+            <a:spAutoFit/>
+          </a:bodyPr>
+          <a:lstStyle/>
+          <a:p>
+            <a:pPr indent="0" lvl="0" marL="0" marR="0" rtl="0" algn="l">
+              <a:spcBef>
+                <a:spcPts val="0"/>
+              </a:spcBef>
+              <a:spcAft>
+                <a:spcPts val="0"/>
+              </a:spcAft>
+              <a:buNone/>
+            </a:pPr>
+            <a:r>
+              <a:t/>
+            </a:r>
+            <a:endParaRPr b="1" sz="2700">
+              <a:solidFill>
+                <a:schemeClr val="dk1"/>
+              </a:solidFill>
+              <a:latin typeface="Arial"/>
+              <a:ea typeface="Arial"/>
+              <a:cs typeface="Arial"/>
+              <a:sym typeface="Arial"/>
+            </a:endParaRPr>
+          </a:p>
+          <a:p>
+            <a:pPr indent="0" lvl="0" marL="0" marR="0" rtl="0" algn="l">
+              <a:spcBef>
+                <a:spcPts val="0"/>
+              </a:spcBef>
+              <a:spcAft>
+                <a:spcPts val="0"/>
+              </a:spcAft>
+              <a:buNone/>
+            </a:pPr>
+            <a:r>
+              <a:t/>
+            </a:r>
+            <a:endParaRPr sz="1400">
+              <a:solidFill>
+                <a:schemeClr val="dk1"/>
+              </a:solidFill>
+              <a:latin typeface="Arial"/>
+              <a:ea typeface="Arial"/>
+              <a:cs typeface="Arial"/>
+              <a:sym typeface="Arial"/>
+            </a:endParaRPr>
+          </a:p>
+        </p:txBody>
+      </p:sp>
+      <p:sp>
+        <p:nvSpPr>
+          <p:cNvPr id="362" name="Google Shape;362;p44"/>
+          <p:cNvSpPr txBox="1"/>
+          <p:nvPr/>
+        </p:nvSpPr>
+        <p:spPr>
+          <a:xfrm>
             <a:off x="5937230" y="1900674"/>
             <a:ext cx="138600" cy="700200"/>
           </a:xfrm>
@@ -25279,7 +25353,7 @@
       </p:sp>
       <p:graphicFrame>
         <p:nvGraphicFramePr>
-          <p:cNvPr id="362" name="Google Shape;362;p44"/>
+          <p:cNvPr id="363" name="Google Shape;363;p44"/>
           <p:cNvGraphicFramePr/>
           <p:nvPr/>
         </p:nvGraphicFramePr>
@@ -25292,7 +25366,7 @@
             <a:tbl>
               <a:tblPr bandRow="1" firstRow="1">
                 <a:noFill/>
-                <a:tableStyleId>{8DD880F3-B267-4A19-8CC4-8528E6AE9A93}</a:tableStyleId>
+                <a:tableStyleId>{33845540-4549-48E9-B17C-92D9A22C0115}</a:tableStyleId>
               </a:tblPr>
               <a:tblGrid>
                 <a:gridCol w="3789000"/>
@@ -25547,7 +25621,7 @@
       </p:graphicFrame>
       <p:sp>
         <p:nvSpPr>
-          <p:cNvPr id="363" name="Google Shape;363;p44"/>
+          <p:cNvPr id="364" name="Google Shape;364;p44"/>
           <p:cNvSpPr txBox="1"/>
           <p:nvPr/>
         </p:nvSpPr>
@@ -25608,7 +25682,7 @@
   <p:cSld>
     <p:spTree>
       <p:nvGrpSpPr>
-        <p:cNvPr id="367" name="Shape 367"/>
+        <p:cNvPr id="368" name="Shape 368"/>
         <p:cNvGrpSpPr/>
         <p:nvPr/>
       </p:nvGrpSpPr>
@@ -25622,7 +25696,7 @@
       </p:grpSpPr>
       <p:sp>
         <p:nvSpPr>
-          <p:cNvPr id="368" name="Google Shape;368;p45"/>
+          <p:cNvPr id="369" name="Google Shape;369;p45"/>
           <p:cNvSpPr txBox="1"/>
           <p:nvPr>
             <p:ph idx="1" type="subTitle"/>
@@ -25774,7 +25848,7 @@
       </p:sp>
       <p:sp>
         <p:nvSpPr>
-          <p:cNvPr id="369" name="Google Shape;369;p45"/>
+          <p:cNvPr id="370" name="Google Shape;370;p45"/>
           <p:cNvSpPr txBox="1"/>
           <p:nvPr/>
         </p:nvSpPr>
@@ -25854,7 +25928,7 @@
       </p:sp>
       <p:sp>
         <p:nvSpPr>
-          <p:cNvPr id="370" name="Google Shape;370;p45"/>
+          <p:cNvPr id="371" name="Google Shape;371;p45"/>
           <p:cNvSpPr txBox="1"/>
           <p:nvPr/>
         </p:nvSpPr>
@@ -25934,7 +26008,7 @@
       </p:sp>
       <p:sp>
         <p:nvSpPr>
-          <p:cNvPr id="371" name="Google Shape;371;p45"/>
+          <p:cNvPr id="372" name="Google Shape;372;p45"/>
           <p:cNvSpPr txBox="1"/>
           <p:nvPr/>
         </p:nvSpPr>
@@ -26033,7 +26107,7 @@
       </p:sp>
       <p:sp>
         <p:nvSpPr>
-          <p:cNvPr id="372" name="Google Shape;372;p45"/>
+          <p:cNvPr id="373" name="Google Shape;373;p45"/>
           <p:cNvSpPr txBox="1"/>
           <p:nvPr/>
         </p:nvSpPr>
@@ -26132,7 +26206,7 @@
       </p:sp>
       <p:pic>
         <p:nvPicPr>
-          <p:cNvPr id="373" name="Google Shape;373;p45" title="WhatsApp Image 2026-10-24 at 20.25.17.jpeg"/>
+          <p:cNvPr id="374" name="Google Shape;374;p45" title="WhatsApp Image 2026-10-24 at 20.25.17.jpeg"/>
           <p:cNvPicPr preferRelativeResize="0"/>
           <p:nvPr/>
         </p:nvPicPr>
@@ -26160,7 +26234,7 @@
       </p:pic>
       <p:sp>
         <p:nvSpPr>
-          <p:cNvPr id="374" name="Google Shape;374;p45"/>
+          <p:cNvPr id="375" name="Google Shape;375;p45"/>
           <p:cNvSpPr txBox="1"/>
           <p:nvPr/>
         </p:nvSpPr>
@@ -26289,7 +26363,7 @@
   <p:cSld>
     <p:spTree>
       <p:nvGrpSpPr>
-        <p:cNvPr id="378" name="Shape 378"/>
+        <p:cNvPr id="379" name="Shape 379"/>
         <p:cNvGrpSpPr/>
         <p:nvPr/>
       </p:nvGrpSpPr>
@@ -26303,7 +26377,7 @@
       </p:grpSpPr>
       <p:sp>
         <p:nvSpPr>
-          <p:cNvPr id="379" name="Google Shape;379;p46"/>
+          <p:cNvPr id="380" name="Google Shape;380;p46"/>
           <p:cNvSpPr txBox="1"/>
           <p:nvPr>
             <p:ph type="title"/>
@@ -26447,7 +26521,7 @@
       </p:sp>
       <p:sp>
         <p:nvSpPr>
-          <p:cNvPr id="380" name="Google Shape;380;p46"/>
+          <p:cNvPr id="381" name="Google Shape;381;p46"/>
           <p:cNvSpPr txBox="1"/>
           <p:nvPr/>
         </p:nvSpPr>
@@ -26572,7 +26646,7 @@
       </p:sp>
       <p:pic>
         <p:nvPicPr>
-          <p:cNvPr id="381" name="Google Shape;381;p46" title="WhatsApp Image 2026-10-24 at 20.25.17 (1).jpeg"/>
+          <p:cNvPr id="382" name="Google Shape;382;p46" title="WhatsApp Image 2026-10-24 at 20.25.17 (1).jpeg"/>
           <p:cNvPicPr preferRelativeResize="0"/>
           <p:nvPr/>
         </p:nvPicPr>
@@ -26611,7 +26685,7 @@
   <p:cSld>
     <p:spTree>
       <p:nvGrpSpPr>
-        <p:cNvPr id="385" name="Shape 385"/>
+        <p:cNvPr id="386" name="Shape 386"/>
         <p:cNvGrpSpPr/>
         <p:nvPr/>
       </p:nvGrpSpPr>
@@ -26625,7 +26699,7 @@
       </p:grpSpPr>
       <p:sp>
         <p:nvSpPr>
-          <p:cNvPr id="386" name="Google Shape;386;p47"/>
+          <p:cNvPr id="387" name="Google Shape;387;p47"/>
           <p:cNvSpPr txBox="1"/>
           <p:nvPr>
             <p:ph type="title"/>
@@ -26704,7 +26778,7 @@
       </p:sp>
       <p:pic>
         <p:nvPicPr>
-          <p:cNvPr id="387" name="Google Shape;387;p47" title="WhatsApp Image 2026-10-24 at 20.25.18.jpeg"/>
+          <p:cNvPr id="388" name="Google Shape;388;p47" title="WhatsApp Image 2026-10-24 at 20.25.18.jpeg"/>
           <p:cNvPicPr preferRelativeResize="0"/>
           <p:nvPr/>
         </p:nvPicPr>
@@ -26732,7 +26806,7 @@
       </p:pic>
       <p:sp>
         <p:nvSpPr>
-          <p:cNvPr id="388" name="Google Shape;388;p47"/>
+          <p:cNvPr id="389" name="Google Shape;389;p47"/>
           <p:cNvSpPr txBox="1"/>
           <p:nvPr/>
         </p:nvSpPr>
@@ -26964,7 +27038,7 @@
             <a:tbl>
               <a:tblPr>
                 <a:noFill/>
-                <a:tableStyleId>{FA9B127D-79E6-40F0-A62D-5778406C1AF8}</a:tableStyleId>
+                <a:tableStyleId>{70CC8A99-5F05-45A2-BA69-08FDE87F0AAC}</a:tableStyleId>
               </a:tblPr>
               <a:tblGrid>
                 <a:gridCol w="1964700"/>
@@ -28080,7 +28154,7 @@
   <p:cSld>
     <p:spTree>
       <p:nvGrpSpPr>
-        <p:cNvPr id="392" name="Shape 392"/>
+        <p:cNvPr id="393" name="Shape 393"/>
         <p:cNvGrpSpPr/>
         <p:nvPr/>
       </p:nvGrpSpPr>
@@ -28094,7 +28168,7 @@
       </p:grpSpPr>
       <p:sp>
         <p:nvSpPr>
-          <p:cNvPr id="393" name="Google Shape;393;p48"/>
+          <p:cNvPr id="394" name="Google Shape;394;p48"/>
           <p:cNvSpPr txBox="1"/>
           <p:nvPr>
             <p:ph type="title"/>
@@ -28238,7 +28312,7 @@
       </p:sp>
       <p:pic>
         <p:nvPicPr>
-          <p:cNvPr id="394" name="Google Shape;394;p48" title="WhatsApp Image 2026-10-24 at 20.25.18 (1).jpeg"/>
+          <p:cNvPr id="395" name="Google Shape;395;p48" title="WhatsApp Image 2026-10-24 at 20.25.18 (1).jpeg"/>
           <p:cNvPicPr preferRelativeResize="0"/>
           <p:nvPr/>
         </p:nvPicPr>
@@ -28266,7 +28340,7 @@
       </p:pic>
       <p:sp>
         <p:nvSpPr>
-          <p:cNvPr id="395" name="Google Shape;395;p48"/>
+          <p:cNvPr id="396" name="Google Shape;396;p48"/>
           <p:cNvSpPr txBox="1"/>
           <p:nvPr/>
         </p:nvSpPr>
@@ -28394,7 +28468,7 @@
   <p:cSld>
     <p:spTree>
       <p:nvGrpSpPr>
-        <p:cNvPr id="399" name="Shape 399"/>
+        <p:cNvPr id="400" name="Shape 400"/>
         <p:cNvGrpSpPr/>
         <p:nvPr/>
       </p:nvGrpSpPr>
@@ -28408,7 +28482,7 @@
       </p:grpSpPr>
       <p:sp>
         <p:nvSpPr>
-          <p:cNvPr id="400" name="Google Shape;400;p49"/>
+          <p:cNvPr id="401" name="Google Shape;401;p49"/>
           <p:cNvSpPr txBox="1"/>
           <p:nvPr>
             <p:ph type="title"/>
@@ -28568,7 +28642,7 @@
       </p:sp>
       <p:sp>
         <p:nvSpPr>
-          <p:cNvPr id="401" name="Google Shape;401;p49"/>
+          <p:cNvPr id="402" name="Google Shape;402;p49"/>
           <p:cNvSpPr txBox="1"/>
           <p:nvPr/>
         </p:nvSpPr>
@@ -28658,7 +28732,7 @@
       </p:sp>
       <p:pic>
         <p:nvPicPr>
-          <p:cNvPr id="402" name="Google Shape;402;p49" title="R2_Score.jpeg"/>
+          <p:cNvPr id="403" name="Google Shape;403;p49" title="R2_Score.jpeg"/>
           <p:cNvPicPr preferRelativeResize="0"/>
           <p:nvPr/>
         </p:nvPicPr>
@@ -28697,7 +28771,7 @@
   <p:cSld>
     <p:spTree>
       <p:nvGrpSpPr>
-        <p:cNvPr id="407" name="Shape 407"/>
+        <p:cNvPr id="408" name="Shape 408"/>
         <p:cNvGrpSpPr/>
         <p:nvPr/>
       </p:nvGrpSpPr>
@@ -28711,7 +28785,7 @@
       </p:grpSpPr>
       <p:sp>
         <p:nvSpPr>
-          <p:cNvPr id="408" name="Google Shape;408;p50"/>
+          <p:cNvPr id="409" name="Google Shape;409;p50"/>
           <p:cNvSpPr/>
           <p:nvPr/>
         </p:nvSpPr>
@@ -28761,7 +28835,7 @@
       </p:sp>
       <p:cxnSp>
         <p:nvCxnSpPr>
-          <p:cNvPr id="409" name="Google Shape;409;p50"/>
+          <p:cNvPr id="410" name="Google Shape;410;p50"/>
           <p:cNvCxnSpPr/>
           <p:nvPr/>
         </p:nvCxnSpPr>
@@ -28787,7 +28861,7 @@
       </p:cxnSp>
       <p:sp>
         <p:nvSpPr>
-          <p:cNvPr id="410" name="Google Shape;410;p50"/>
+          <p:cNvPr id="411" name="Google Shape;411;p50"/>
           <p:cNvSpPr/>
           <p:nvPr/>
         </p:nvSpPr>
@@ -28844,7 +28918,7 @@
       </p:sp>
       <p:sp>
         <p:nvSpPr>
-          <p:cNvPr id="411" name="Google Shape;411;p50"/>
+          <p:cNvPr id="412" name="Google Shape;412;p50"/>
           <p:cNvSpPr txBox="1"/>
           <p:nvPr/>
         </p:nvSpPr>
@@ -28894,7 +28968,7 @@
       </p:sp>
       <p:cxnSp>
         <p:nvCxnSpPr>
-          <p:cNvPr id="412" name="Google Shape;412;p50"/>
+          <p:cNvPr id="413" name="Google Shape;413;p50"/>
           <p:cNvCxnSpPr/>
           <p:nvPr/>
         </p:nvCxnSpPr>
@@ -28920,7 +28994,7 @@
       </p:cxnSp>
       <p:sp>
         <p:nvSpPr>
-          <p:cNvPr id="413" name="Google Shape;413;p50"/>
+          <p:cNvPr id="414" name="Google Shape;414;p50"/>
           <p:cNvSpPr txBox="1"/>
           <p:nvPr/>
         </p:nvSpPr>
@@ -29116,7 +29190,7 @@
       </p:sp>
       <p:sp>
         <p:nvSpPr>
-          <p:cNvPr id="414" name="Google Shape;414;p50"/>
+          <p:cNvPr id="415" name="Google Shape;415;p50"/>
           <p:cNvSpPr txBox="1"/>
           <p:nvPr/>
         </p:nvSpPr>
@@ -29204,7 +29278,7 @@
       </p:sp>
       <p:sp>
         <p:nvSpPr>
-          <p:cNvPr id="415" name="Google Shape;415;p50"/>
+          <p:cNvPr id="416" name="Google Shape;416;p50"/>
           <p:cNvSpPr/>
           <p:nvPr/>
         </p:nvSpPr>
@@ -29254,7 +29328,7 @@
       </p:sp>
       <p:cxnSp>
         <p:nvCxnSpPr>
-          <p:cNvPr id="416" name="Google Shape;416;p50"/>
+          <p:cNvPr id="417" name="Google Shape;417;p50"/>
           <p:cNvCxnSpPr/>
           <p:nvPr/>
         </p:nvCxnSpPr>
@@ -29280,7 +29354,7 @@
       </p:cxnSp>
       <p:sp>
         <p:nvSpPr>
-          <p:cNvPr id="417" name="Google Shape;417;p50"/>
+          <p:cNvPr id="418" name="Google Shape;418;p50"/>
           <p:cNvSpPr txBox="1"/>
           <p:nvPr/>
         </p:nvSpPr>
@@ -29368,7 +29442,7 @@
       </p:sp>
       <p:pic>
         <p:nvPicPr>
-          <p:cNvPr id="418" name="Google Shape;418;p50"/>
+          <p:cNvPr id="419" name="Google Shape;419;p50"/>
           <p:cNvPicPr preferRelativeResize="0"/>
           <p:nvPr/>
         </p:nvPicPr>
@@ -33403,7 +33477,7 @@
                 <a:cs typeface="Arial"/>
                 <a:sym typeface="Arial"/>
               </a:rPr>
-              <a:t>Linear Model: Implementation</a:t>
+              <a:t>Linear Regression: Implementation</a:t>
             </a:r>
             <a:br>
               <a:rPr lang="en" sz="2100"/>
@@ -34766,7 +34840,7 @@
                 <a:cs typeface="Arial"/>
                 <a:sym typeface="Arial"/>
               </a:rPr>
-              <a:t>Linear Model: Implementation</a:t>
+              <a:t>Linear Regression: Implementation</a:t>
             </a:r>
             <a:br>
               <a:rPr lang="en" sz="2100"/>
@@ -36184,44 +36258,44 @@
 </file>
 
 <file path=ppt/theme/theme1.xml><?xml version="1.0" encoding="utf-8"?>
-<a:theme xmlns:a="http://schemas.openxmlformats.org/drawingml/2006/main" xmlns:r="http://schemas.openxmlformats.org/officeDocument/2006/relationships" name="Decision Tree Model: Implementation &amp; Evaluation">
+<a:theme xmlns:a="http://schemas.openxmlformats.org/drawingml/2006/main" xmlns:r="http://schemas.openxmlformats.org/officeDocument/2006/relationships">
   <a:themeElements>
-    <a:clrScheme name="Decision Tree Model: Implementation &amp; Evaluation">
+    <a:clrScheme name="Default">
       <a:dk1>
-        <a:srgbClr val="1B2A3A"/>
+        <a:srgbClr val="000000"/>
       </a:dk1>
       <a:lt1>
         <a:srgbClr val="FFFFFF"/>
       </a:lt1>
       <a:dk2>
-        <a:srgbClr val="545F6B"/>
+        <a:srgbClr val="158158"/>
       </a:dk2>
       <a:lt2>
-        <a:srgbClr val="E8EAEB"/>
+        <a:srgbClr val="F3F3F3"/>
       </a:lt2>
       <a:accent1>
-        <a:srgbClr val="B85A14"/>
+        <a:srgbClr val="058DC7"/>
       </a:accent1>
       <a:accent2>
-        <a:srgbClr val="5B6672"/>
+        <a:srgbClr val="50B432"/>
       </a:accent2>
       <a:accent3>
-        <a:srgbClr val="9AA0A6"/>
+        <a:srgbClr val="ED561B"/>
       </a:accent3>
       <a:accent4>
-        <a:srgbClr val="767F89"/>
+        <a:srgbClr val="EDEF00"/>
       </a:accent4>
       <a:accent5>
-        <a:srgbClr val="989FA6"/>
+        <a:srgbClr val="24CBE5"/>
       </a:accent5>
       <a:accent6>
-        <a:srgbClr val="BBBFC4"/>
+        <a:srgbClr val="64E572"/>
       </a:accent6>
       <a:hlink>
-        <a:srgbClr val="0563C1"/>
+        <a:srgbClr val="2200CC"/>
       </a:hlink>
       <a:folHlink>
-        <a:srgbClr val="954F72"/>
+        <a:srgbClr val="551A8B"/>
       </a:folHlink>
     </a:clrScheme>
     <a:fontScheme name="Office">
@@ -36463,44 +36537,44 @@
 </file>
 
 <file path=ppt/theme/theme2.xml><?xml version="1.0" encoding="utf-8"?>
-<a:theme xmlns:a="http://schemas.openxmlformats.org/drawingml/2006/main" xmlns:r="http://schemas.openxmlformats.org/officeDocument/2006/relationships" name="Office Theme">
+<a:theme xmlns:a="http://schemas.openxmlformats.org/drawingml/2006/main" xmlns:r="http://schemas.openxmlformats.org/officeDocument/2006/relationships" name="Decision Tree Model: Implementation &amp; Evaluation">
   <a:themeElements>
-    <a:clrScheme name="Office">
+    <a:clrScheme name="Decision Tree Model: Implementation &amp; Evaluation">
       <a:dk1>
-        <a:srgbClr val="000000"/>
+        <a:srgbClr val="1B2A3A"/>
       </a:dk1>
       <a:lt1>
         <a:srgbClr val="FFFFFF"/>
       </a:lt1>
       <a:dk2>
-        <a:srgbClr val="0E2841"/>
+        <a:srgbClr val="545F6B"/>
       </a:dk2>
       <a:lt2>
-        <a:srgbClr val="E8E8E8"/>
+        <a:srgbClr val="E8EAEB"/>
       </a:lt2>
       <a:accent1>
-        <a:srgbClr val="156082"/>
+        <a:srgbClr val="B85A14"/>
       </a:accent1>
       <a:accent2>
-        <a:srgbClr val="E97132"/>
+        <a:srgbClr val="5B6672"/>
       </a:accent2>
       <a:accent3>
-        <a:srgbClr val="196B24"/>
+        <a:srgbClr val="9AA0A6"/>
       </a:accent3>
       <a:accent4>
-        <a:srgbClr val="0F9ED5"/>
+        <a:srgbClr val="767F89"/>
       </a:accent4>
       <a:accent5>
-        <a:srgbClr val="A02B93"/>
+        <a:srgbClr val="989FA6"/>
       </a:accent5>
       <a:accent6>
-        <a:srgbClr val="4EA72E"/>
+        <a:srgbClr val="BBBFC4"/>
       </a:accent6>
       <a:hlink>
-        <a:srgbClr val="467886"/>
+        <a:srgbClr val="0563C1"/>
       </a:hlink>
       <a:folHlink>
-        <a:srgbClr val="96607D"/>
+        <a:srgbClr val="954F72"/>
       </a:folHlink>
     </a:clrScheme>
     <a:fontScheme name="Office">
@@ -37021,9 +37095,9 @@
 </file>
 
 <file path=ppt/theme/theme4.xml><?xml version="1.0" encoding="utf-8"?>
-<a:theme xmlns:a="http://schemas.openxmlformats.org/drawingml/2006/main" xmlns:r="http://schemas.openxmlformats.org/officeDocument/2006/relationships">
+<a:theme xmlns:a="http://schemas.openxmlformats.org/drawingml/2006/main" xmlns:r="http://schemas.openxmlformats.org/officeDocument/2006/relationships" name="Office Theme">
   <a:themeElements>
-    <a:clrScheme name="Default">
+    <a:clrScheme name="Office">
       <a:dk1>
         <a:srgbClr val="000000"/>
       </a:dk1>
@@ -37031,34 +37105,34 @@
         <a:srgbClr val="FFFFFF"/>
       </a:lt1>
       <a:dk2>
-        <a:srgbClr val="158158"/>
+        <a:srgbClr val="0E2841"/>
       </a:dk2>
       <a:lt2>
-        <a:srgbClr val="F3F3F3"/>
+        <a:srgbClr val="E8E8E8"/>
       </a:lt2>
       <a:accent1>
-        <a:srgbClr val="058DC7"/>
+        <a:srgbClr val="156082"/>
       </a:accent1>
       <a:accent2>
-        <a:srgbClr val="50B432"/>
+        <a:srgbClr val="E97132"/>
       </a:accent2>
       <a:accent3>
-        <a:srgbClr val="ED561B"/>
+        <a:srgbClr val="196B24"/>
       </a:accent3>
       <a:accent4>
-        <a:srgbClr val="EDEF00"/>
+        <a:srgbClr val="0F9ED5"/>
       </a:accent4>
       <a:accent5>
-        <a:srgbClr val="24CBE5"/>
+        <a:srgbClr val="A02B93"/>
       </a:accent5>
       <a:accent6>
-        <a:srgbClr val="64E572"/>
+        <a:srgbClr val="4EA72E"/>
       </a:accent6>
       <a:hlink>
-        <a:srgbClr val="2200CC"/>
+        <a:srgbClr val="467886"/>
       </a:hlink>
       <a:folHlink>
-        <a:srgbClr val="551A8B"/>
+        <a:srgbClr val="96607D"/>
       </a:folHlink>
     </a:clrScheme>
     <a:fontScheme name="Office">

--- a/ML_Project_9_Group_3_Presentation.pptx
+++ b/ML_Project_9_Group_3_Presentation.pptx
@@ -32,28 +32,29 @@
     <p:sldId id="275" r:id="rId28"/>
     <p:sldId id="276" r:id="rId29"/>
     <p:sldId id="277" r:id="rId30"/>
+    <p:sldId id="278" r:id="rId31"/>
   </p:sldIdLst>
   <p:sldSz cy="5143500" cx="9144000"/>
   <p:notesSz cx="6858000" cy="9144000"/>
   <p:embeddedFontLst>
     <p:embeddedFont>
       <p:font typeface="IBM Plex Sans"/>
-      <p:regular r:id="rId31"/>
-      <p:bold r:id="rId32"/>
-      <p:italic r:id="rId33"/>
-      <p:boldItalic r:id="rId34"/>
+      <p:regular r:id="rId32"/>
+      <p:bold r:id="rId33"/>
+      <p:italic r:id="rId34"/>
+      <p:boldItalic r:id="rId35"/>
     </p:embeddedFont>
     <p:embeddedFont>
       <p:font typeface="Play"/>
-      <p:regular r:id="rId35"/>
-      <p:bold r:id="rId36"/>
+      <p:regular r:id="rId36"/>
+      <p:bold r:id="rId37"/>
     </p:embeddedFont>
     <p:embeddedFont>
       <p:font typeface="DM Sans"/>
-      <p:regular r:id="rId37"/>
-      <p:bold r:id="rId38"/>
-      <p:italic r:id="rId39"/>
-      <p:boldItalic r:id="rId40"/>
+      <p:regular r:id="rId38"/>
+      <p:bold r:id="rId39"/>
+      <p:italic r:id="rId40"/>
+      <p:boldItalic r:id="rId41"/>
     </p:embeddedFont>
   </p:embeddedFontLst>
   <p:defaultTextStyle>
@@ -834,7 +835,7 @@
   <p:cSld>
     <p:spTree>
       <p:nvGrpSpPr>
-        <p:cNvPr id="276" name="Shape 276"/>
+        <p:cNvPr id="258" name="Shape 258"/>
         <p:cNvGrpSpPr/>
         <p:nvPr/>
       </p:nvGrpSpPr>
@@ -848,7 +849,7 @@
       </p:grpSpPr>
       <p:sp>
         <p:nvSpPr>
-          <p:cNvPr id="277" name="Google Shape;277;h2c8f91d5f6982453_18_45:notes"/>
+          <p:cNvPr id="259" name="Google Shape;259;h2c8f91d5f6982453_35_0:notes"/>
           <p:cNvSpPr/>
           <p:nvPr>
             <p:ph idx="2" type="sldImg"/>
@@ -893,7 +894,7 @@
       </p:sp>
       <p:sp>
         <p:nvSpPr>
-          <p:cNvPr id="278" name="Google Shape;278;h2c8f91d5f6982453_18_45:notes"/>
+          <p:cNvPr id="260" name="Google Shape;260;h2c8f91d5f6982453_35_0:notes"/>
           <p:cNvSpPr txBox="1"/>
           <p:nvPr>
             <p:ph idx="1" type="body"/>
@@ -936,7 +937,7 @@
       </p:sp>
       <p:sp>
         <p:nvSpPr>
-          <p:cNvPr id="279" name="Google Shape;279;h2c8f91d5f6982453_18_45:notes"/>
+          <p:cNvPr id="261" name="Google Shape;261;h2c8f91d5f6982453_35_0:notes"/>
           <p:cNvSpPr txBox="1"/>
           <p:nvPr>
             <p:ph idx="12" type="sldNum"/>
@@ -991,7 +992,7 @@
   <p:cSld>
     <p:spTree>
       <p:nvGrpSpPr>
-        <p:cNvPr id="289" name="Shape 289"/>
+        <p:cNvPr id="284" name="Shape 284"/>
         <p:cNvGrpSpPr/>
         <p:nvPr/>
       </p:nvGrpSpPr>
@@ -1005,7 +1006,164 @@
       </p:grpSpPr>
       <p:sp>
         <p:nvSpPr>
-          <p:cNvPr id="290" name="Google Shape;290;h1eb388ce2fcb6e8_16_7:notes"/>
+          <p:cNvPr id="285" name="Google Shape;285;h2c8f91d5f6982453_18_45:notes"/>
+          <p:cNvSpPr/>
+          <p:nvPr>
+            <p:ph idx="2" type="sldImg"/>
+          </p:nvPr>
+        </p:nvSpPr>
+        <p:spPr>
+          <a:xfrm>
+            <a:off x="685800" y="1143000"/>
+            <a:ext cx="5486400" cy="3086100"/>
+          </a:xfrm>
+          <a:custGeom>
+            <a:rect b="b" l="l" r="r" t="t"/>
+            <a:pathLst>
+              <a:path extrusionOk="0" h="120000" w="120000">
+                <a:moveTo>
+                  <a:pt x="0" y="0"/>
+                </a:moveTo>
+                <a:lnTo>
+                  <a:pt x="120000" y="0"/>
+                </a:lnTo>
+                <a:lnTo>
+                  <a:pt x="120000" y="120000"/>
+                </a:lnTo>
+                <a:lnTo>
+                  <a:pt x="0" y="120000"/>
+                </a:lnTo>
+                <a:close/>
+              </a:path>
+            </a:pathLst>
+          </a:custGeom>
+          <a:noFill/>
+          <a:ln cap="flat" cmpd="sng" w="12700">
+            <a:solidFill>
+              <a:srgbClr val="000000"/>
+            </a:solidFill>
+            <a:prstDash val="solid"/>
+            <a:round/>
+            <a:headEnd len="sm" w="sm" type="none"/>
+            <a:tailEnd len="sm" w="sm" type="none"/>
+          </a:ln>
+        </p:spPr>
+      </p:sp>
+      <p:sp>
+        <p:nvSpPr>
+          <p:cNvPr id="286" name="Google Shape;286;h2c8f91d5f6982453_18_45:notes"/>
+          <p:cNvSpPr txBox="1"/>
+          <p:nvPr>
+            <p:ph idx="1" type="body"/>
+          </p:nvPr>
+        </p:nvSpPr>
+        <p:spPr>
+          <a:xfrm>
+            <a:off x="685800" y="4400550"/>
+            <a:ext cx="5486400" cy="3600450"/>
+          </a:xfrm>
+          <a:prstGeom prst="rect">
+            <a:avLst/>
+          </a:prstGeom>
+          <a:noFill/>
+          <a:ln>
+            <a:noFill/>
+          </a:ln>
+        </p:spPr>
+        <p:txBody>
+          <a:bodyPr anchorCtr="0" anchor="t" bIns="45700" lIns="91425" spcFirstLastPara="1" rIns="91425" wrap="square" tIns="45700">
+            <a:noAutofit/>
+          </a:bodyPr>
+          <a:lstStyle/>
+          <a:p>
+            <a:pPr indent="0" lvl="0" marL="0" rtl="0" algn="l">
+              <a:spcBef>
+                <a:spcPts val="0"/>
+              </a:spcBef>
+              <a:spcAft>
+                <a:spcPts val="0"/>
+              </a:spcAft>
+              <a:buNone/>
+            </a:pPr>
+            <a:r>
+              <a:t/>
+            </a:r>
+            <a:endParaRPr/>
+          </a:p>
+        </p:txBody>
+      </p:sp>
+      <p:sp>
+        <p:nvSpPr>
+          <p:cNvPr id="287" name="Google Shape;287;h2c8f91d5f6982453_18_45:notes"/>
+          <p:cNvSpPr txBox="1"/>
+          <p:nvPr>
+            <p:ph idx="12" type="sldNum"/>
+          </p:nvPr>
+        </p:nvSpPr>
+        <p:spPr>
+          <a:xfrm>
+            <a:off x="3884613" y="8685213"/>
+            <a:ext cx="2971800" cy="458787"/>
+          </a:xfrm>
+          <a:prstGeom prst="rect">
+            <a:avLst/>
+          </a:prstGeom>
+          <a:noFill/>
+          <a:ln>
+            <a:noFill/>
+          </a:ln>
+        </p:spPr>
+        <p:txBody>
+          <a:bodyPr anchorCtr="0" anchor="b" bIns="45700" lIns="91425" spcFirstLastPara="1" rIns="91425" wrap="square" tIns="45700">
+            <a:noAutofit/>
+          </a:bodyPr>
+          <a:lstStyle/>
+          <a:p>
+            <a:pPr indent="0" lvl="0" marL="0" rtl="0" algn="r">
+              <a:spcBef>
+                <a:spcPts val="0"/>
+              </a:spcBef>
+              <a:spcAft>
+                <a:spcPts val="0"/>
+              </a:spcAft>
+              <a:buNone/>
+            </a:pPr>
+            <a:fld id="{00000000-1234-1234-1234-123412341234}" type="slidenum">
+              <a:rPr lang="en"/>
+              <a:t>‹#›</a:t>
+            </a:fld>
+            <a:endParaRPr/>
+          </a:p>
+        </p:txBody>
+      </p:sp>
+    </p:spTree>
+  </p:cSld>
+  <p:clrMapOvr>
+    <a:masterClrMapping/>
+  </p:clrMapOvr>
+</p:notes>
+</file>
+
+<file path=ppt/notesSlides/notesSlide12.xml><?xml version="1.0" encoding="utf-8"?>
+<p:notes xmlns:a="http://schemas.openxmlformats.org/drawingml/2006/main" xmlns:r="http://schemas.openxmlformats.org/officeDocument/2006/relationships" xmlns:mc="http://schemas.openxmlformats.org/markup-compatibility/2006" xmlns:mv="urn:schemas-microsoft-com:mac:vml" xmlns:p="http://schemas.openxmlformats.org/presentationml/2006/main" xmlns:c="http://schemas.openxmlformats.org/drawingml/2006/chart" xmlns:dgm="http://schemas.openxmlformats.org/drawingml/2006/diagram" xmlns:o="urn:schemas-microsoft-com:office:office" xmlns:v="urn:schemas-microsoft-com:vml" xmlns:pvml="urn:schemas-microsoft-com:office:powerpoint" xmlns:com="http://schemas.openxmlformats.org/drawingml/2006/compatibility" xmlns:p14="http://schemas.microsoft.com/office/powerpoint/2010/main" xmlns:p15="http://schemas.microsoft.com/office/powerpoint/2012/main" xmlns:ahyp="http://schemas.microsoft.com/office/drawing/2018/hyperlinkcolor" showMasterPhAnim="0" showMasterSp="0">
+  <p:cSld>
+    <p:spTree>
+      <p:nvGrpSpPr>
+        <p:cNvPr id="297" name="Shape 297"/>
+        <p:cNvGrpSpPr/>
+        <p:nvPr/>
+      </p:nvGrpSpPr>
+      <p:grpSpPr>
+        <a:xfrm>
+          <a:off x="0" y="0"/>
+          <a:ext cx="0" cy="0"/>
+          <a:chOff x="0" y="0"/>
+          <a:chExt cx="0" cy="0"/>
+        </a:xfrm>
+      </p:grpSpPr>
+      <p:sp>
+        <p:nvSpPr>
+          <p:cNvPr id="298" name="Google Shape;298;h1eb388ce2fcb6e8_16_7:notes"/>
           <p:cNvSpPr/>
           <p:nvPr>
             <p:ph idx="2" type="sldImg"/>
@@ -1050,7 +1208,7 @@
       </p:sp>
       <p:sp>
         <p:nvSpPr>
-          <p:cNvPr id="291" name="Google Shape;291;h1eb388ce2fcb6e8_16_7:notes"/>
+          <p:cNvPr id="299" name="Google Shape;299;h1eb388ce2fcb6e8_16_7:notes"/>
           <p:cNvSpPr txBox="1"/>
           <p:nvPr>
             <p:ph idx="1" type="body"/>
@@ -1094,7 +1252,7 @@
       </p:sp>
       <p:sp>
         <p:nvSpPr>
-          <p:cNvPr id="292" name="Google Shape;292;h1eb388ce2fcb6e8_16_7:notes"/>
+          <p:cNvPr id="300" name="Google Shape;300;h1eb388ce2fcb6e8_16_7:notes"/>
           <p:cNvSpPr txBox="1"/>
           <p:nvPr>
             <p:ph idx="12" type="sldNum"/>
@@ -1144,12 +1302,12 @@
 </p:notes>
 </file>
 
-<file path=ppt/notesSlides/notesSlide12.xml><?xml version="1.0" encoding="utf-8"?>
+<file path=ppt/notesSlides/notesSlide13.xml><?xml version="1.0" encoding="utf-8"?>
 <p:notes xmlns:a="http://schemas.openxmlformats.org/drawingml/2006/main" xmlns:r="http://schemas.openxmlformats.org/officeDocument/2006/relationships" xmlns:mc="http://schemas.openxmlformats.org/markup-compatibility/2006" xmlns:mv="urn:schemas-microsoft-com:mac:vml" xmlns:p="http://schemas.openxmlformats.org/presentationml/2006/main" xmlns:c="http://schemas.openxmlformats.org/drawingml/2006/chart" xmlns:dgm="http://schemas.openxmlformats.org/drawingml/2006/diagram" xmlns:o="urn:schemas-microsoft-com:office:office" xmlns:v="urn:schemas-microsoft-com:vml" xmlns:pvml="urn:schemas-microsoft-com:office:powerpoint" xmlns:com="http://schemas.openxmlformats.org/drawingml/2006/compatibility" xmlns:p14="http://schemas.microsoft.com/office/powerpoint/2010/main" xmlns:p15="http://schemas.microsoft.com/office/powerpoint/2012/main" xmlns:ahyp="http://schemas.microsoft.com/office/drawing/2018/hyperlinkcolor" showMasterPhAnim="0" showMasterSp="0">
   <p:cSld>
     <p:spTree>
       <p:nvGrpSpPr>
-        <p:cNvPr id="297" name="Shape 297"/>
+        <p:cNvPr id="305" name="Shape 305"/>
         <p:cNvGrpSpPr/>
         <p:nvPr/>
       </p:nvGrpSpPr>
@@ -1163,7 +1321,7 @@
       </p:grpSpPr>
       <p:sp>
         <p:nvSpPr>
-          <p:cNvPr id="298" name="Google Shape;298;h1eb388ce2fcb6e8_16_77:notes"/>
+          <p:cNvPr id="306" name="Google Shape;306;h1eb388ce2fcb6e8_16_77:notes"/>
           <p:cNvSpPr/>
           <p:nvPr>
             <p:ph idx="2" type="sldImg"/>
@@ -1208,7 +1366,7 @@
       </p:sp>
       <p:sp>
         <p:nvSpPr>
-          <p:cNvPr id="299" name="Google Shape;299;h1eb388ce2fcb6e8_16_77:notes"/>
+          <p:cNvPr id="307" name="Google Shape;307;h1eb388ce2fcb6e8_16_77:notes"/>
           <p:cNvSpPr txBox="1"/>
           <p:nvPr>
             <p:ph idx="1" type="body"/>
@@ -1252,7 +1410,7 @@
       </p:sp>
       <p:sp>
         <p:nvSpPr>
-          <p:cNvPr id="300" name="Google Shape;300;h1eb388ce2fcb6e8_16_77:notes"/>
+          <p:cNvPr id="308" name="Google Shape;308;h1eb388ce2fcb6e8_16_77:notes"/>
           <p:cNvSpPr txBox="1"/>
           <p:nvPr>
             <p:ph idx="12" type="sldNum"/>
@@ -1302,12 +1460,12 @@
 </p:notes>
 </file>
 
-<file path=ppt/notesSlides/notesSlide13.xml><?xml version="1.0" encoding="utf-8"?>
+<file path=ppt/notesSlides/notesSlide14.xml><?xml version="1.0" encoding="utf-8"?>
 <p:notes xmlns:a="http://schemas.openxmlformats.org/drawingml/2006/main" xmlns:r="http://schemas.openxmlformats.org/officeDocument/2006/relationships" xmlns:mc="http://schemas.openxmlformats.org/markup-compatibility/2006" xmlns:mv="urn:schemas-microsoft-com:mac:vml" xmlns:p="http://schemas.openxmlformats.org/presentationml/2006/main" xmlns:c="http://schemas.openxmlformats.org/drawingml/2006/chart" xmlns:dgm="http://schemas.openxmlformats.org/drawingml/2006/diagram" xmlns:o="urn:schemas-microsoft-com:office:office" xmlns:v="urn:schemas-microsoft-com:vml" xmlns:pvml="urn:schemas-microsoft-com:office:powerpoint" xmlns:com="http://schemas.openxmlformats.org/drawingml/2006/compatibility" xmlns:p14="http://schemas.microsoft.com/office/powerpoint/2010/main" xmlns:p15="http://schemas.microsoft.com/office/powerpoint/2012/main" xmlns:ahyp="http://schemas.microsoft.com/office/drawing/2018/hyperlinkcolor" showMasterPhAnim="0" showMasterSp="0">
   <p:cSld>
     <p:spTree>
       <p:nvGrpSpPr>
-        <p:cNvPr id="309" name="Shape 309"/>
+        <p:cNvPr id="317" name="Shape 317"/>
         <p:cNvGrpSpPr/>
         <p:nvPr/>
       </p:nvGrpSpPr>
@@ -1321,7 +1479,7 @@
       </p:grpSpPr>
       <p:sp>
         <p:nvSpPr>
-          <p:cNvPr id="310" name="Google Shape;310;h1eb388ce2fcb6e8_16_89:notes"/>
+          <p:cNvPr id="318" name="Google Shape;318;h1eb388ce2fcb6e8_16_89:notes"/>
           <p:cNvSpPr/>
           <p:nvPr>
             <p:ph idx="2" type="sldImg"/>
@@ -1366,7 +1524,7 @@
       </p:sp>
       <p:sp>
         <p:nvSpPr>
-          <p:cNvPr id="311" name="Google Shape;311;h1eb388ce2fcb6e8_16_89:notes"/>
+          <p:cNvPr id="319" name="Google Shape;319;h1eb388ce2fcb6e8_16_89:notes"/>
           <p:cNvSpPr txBox="1"/>
           <p:nvPr>
             <p:ph idx="1" type="body"/>
@@ -1410,7 +1568,7 @@
       </p:sp>
       <p:sp>
         <p:nvSpPr>
-          <p:cNvPr id="312" name="Google Shape;312;h1eb388ce2fcb6e8_16_89:notes"/>
+          <p:cNvPr id="320" name="Google Shape;320;h1eb388ce2fcb6e8_16_89:notes"/>
           <p:cNvSpPr txBox="1"/>
           <p:nvPr>
             <p:ph idx="12" type="sldNum"/>
@@ -1460,12 +1618,12 @@
 </p:notes>
 </file>
 
-<file path=ppt/notesSlides/notesSlide14.xml><?xml version="1.0" encoding="utf-8"?>
+<file path=ppt/notesSlides/notesSlide15.xml><?xml version="1.0" encoding="utf-8"?>
 <p:notes xmlns:a="http://schemas.openxmlformats.org/drawingml/2006/main" xmlns:r="http://schemas.openxmlformats.org/officeDocument/2006/relationships" xmlns:mc="http://schemas.openxmlformats.org/markup-compatibility/2006" xmlns:mv="urn:schemas-microsoft-com:mac:vml" xmlns:p="http://schemas.openxmlformats.org/presentationml/2006/main" xmlns:c="http://schemas.openxmlformats.org/drawingml/2006/chart" xmlns:dgm="http://schemas.openxmlformats.org/drawingml/2006/diagram" xmlns:o="urn:schemas-microsoft-com:office:office" xmlns:v="urn:schemas-microsoft-com:vml" xmlns:pvml="urn:schemas-microsoft-com:office:powerpoint" xmlns:com="http://schemas.openxmlformats.org/drawingml/2006/compatibility" xmlns:p14="http://schemas.microsoft.com/office/powerpoint/2010/main" xmlns:p15="http://schemas.microsoft.com/office/powerpoint/2012/main" xmlns:ahyp="http://schemas.microsoft.com/office/drawing/2018/hyperlinkcolor" showMasterPhAnim="0" showMasterSp="0">
   <p:cSld>
     <p:spTree>
       <p:nvGrpSpPr>
-        <p:cNvPr id="321" name="Shape 321"/>
+        <p:cNvPr id="329" name="Shape 329"/>
         <p:cNvGrpSpPr/>
         <p:nvPr/>
       </p:nvGrpSpPr>
@@ -1479,7 +1637,7 @@
       </p:grpSpPr>
       <p:sp>
         <p:nvSpPr>
-          <p:cNvPr id="322" name="Google Shape;322;h1eb388ce2fcb6e8_16_101:notes"/>
+          <p:cNvPr id="330" name="Google Shape;330;h1eb388ce2fcb6e8_16_101:notes"/>
           <p:cNvSpPr/>
           <p:nvPr>
             <p:ph idx="2" type="sldImg"/>
@@ -1524,7 +1682,7 @@
       </p:sp>
       <p:sp>
         <p:nvSpPr>
-          <p:cNvPr id="323" name="Google Shape;323;h1eb388ce2fcb6e8_16_101:notes"/>
+          <p:cNvPr id="331" name="Google Shape;331;h1eb388ce2fcb6e8_16_101:notes"/>
           <p:cNvSpPr txBox="1"/>
           <p:nvPr>
             <p:ph idx="1" type="body"/>
@@ -1568,7 +1726,7 @@
       </p:sp>
       <p:sp>
         <p:nvSpPr>
-          <p:cNvPr id="324" name="Google Shape;324;h1eb388ce2fcb6e8_16_101:notes"/>
+          <p:cNvPr id="332" name="Google Shape;332;h1eb388ce2fcb6e8_16_101:notes"/>
           <p:cNvSpPr txBox="1"/>
           <p:nvPr>
             <p:ph idx="12" type="sldNum"/>
@@ -1618,12 +1776,12 @@
 </p:notes>
 </file>
 
-<file path=ppt/notesSlides/notesSlide15.xml><?xml version="1.0" encoding="utf-8"?>
+<file path=ppt/notesSlides/notesSlide16.xml><?xml version="1.0" encoding="utf-8"?>
 <p:notes xmlns:a="http://schemas.openxmlformats.org/drawingml/2006/main" xmlns:r="http://schemas.openxmlformats.org/officeDocument/2006/relationships" xmlns:mc="http://schemas.openxmlformats.org/markup-compatibility/2006" xmlns:mv="urn:schemas-microsoft-com:mac:vml" xmlns:p="http://schemas.openxmlformats.org/presentationml/2006/main" xmlns:c="http://schemas.openxmlformats.org/drawingml/2006/chart" xmlns:dgm="http://schemas.openxmlformats.org/drawingml/2006/diagram" xmlns:o="urn:schemas-microsoft-com:office:office" xmlns:v="urn:schemas-microsoft-com:vml" xmlns:pvml="urn:schemas-microsoft-com:office:powerpoint" xmlns:com="http://schemas.openxmlformats.org/drawingml/2006/compatibility" xmlns:p14="http://schemas.microsoft.com/office/powerpoint/2010/main" xmlns:p15="http://schemas.microsoft.com/office/powerpoint/2012/main" xmlns:ahyp="http://schemas.microsoft.com/office/drawing/2018/hyperlinkcolor" showMasterPhAnim="0" showMasterSp="0">
   <p:cSld>
     <p:spTree>
       <p:nvGrpSpPr>
-        <p:cNvPr id="334" name="Shape 334"/>
+        <p:cNvPr id="342" name="Shape 342"/>
         <p:cNvGrpSpPr/>
         <p:nvPr/>
       </p:nvGrpSpPr>
@@ -1637,7 +1795,7 @@
       </p:grpSpPr>
       <p:sp>
         <p:nvSpPr>
-          <p:cNvPr id="335" name="Google Shape;335;h55f610596eb4887f_0_15:notes"/>
+          <p:cNvPr id="343" name="Google Shape;343;h55f610596eb4887f_0_15:notes"/>
           <p:cNvSpPr/>
           <p:nvPr>
             <p:ph idx="2" type="sldImg"/>
@@ -1672,7 +1830,7 @@
       </p:sp>
       <p:sp>
         <p:nvSpPr>
-          <p:cNvPr id="336" name="Google Shape;336;h55f610596eb4887f_0_15:notes"/>
+          <p:cNvPr id="344" name="Google Shape;344;h55f610596eb4887f_0_15:notes"/>
           <p:cNvSpPr txBox="1"/>
           <p:nvPr>
             <p:ph idx="1" type="body"/>
@@ -1717,12 +1875,12 @@
 </p:notes>
 </file>
 
-<file path=ppt/notesSlides/notesSlide16.xml><?xml version="1.0" encoding="utf-8"?>
+<file path=ppt/notesSlides/notesSlide17.xml><?xml version="1.0" encoding="utf-8"?>
 <p:notes xmlns:a="http://schemas.openxmlformats.org/drawingml/2006/main" xmlns:r="http://schemas.openxmlformats.org/officeDocument/2006/relationships" xmlns:mc="http://schemas.openxmlformats.org/markup-compatibility/2006" xmlns:mv="urn:schemas-microsoft-com:mac:vml" xmlns:p="http://schemas.openxmlformats.org/presentationml/2006/main" xmlns:c="http://schemas.openxmlformats.org/drawingml/2006/chart" xmlns:dgm="http://schemas.openxmlformats.org/drawingml/2006/diagram" xmlns:o="urn:schemas-microsoft-com:office:office" xmlns:v="urn:schemas-microsoft-com:vml" xmlns:pvml="urn:schemas-microsoft-com:office:powerpoint" xmlns:com="http://schemas.openxmlformats.org/drawingml/2006/compatibility" xmlns:p14="http://schemas.microsoft.com/office/powerpoint/2010/main" xmlns:p15="http://schemas.microsoft.com/office/powerpoint/2012/main" xmlns:ahyp="http://schemas.microsoft.com/office/drawing/2018/hyperlinkcolor" showMasterPhAnim="0" showMasterSp="0">
   <p:cSld>
     <p:spTree>
       <p:nvGrpSpPr>
-        <p:cNvPr id="353" name="Shape 353"/>
+        <p:cNvPr id="361" name="Shape 361"/>
         <p:cNvGrpSpPr/>
         <p:nvPr/>
       </p:nvGrpSpPr>
@@ -1736,7 +1894,7 @@
       </p:grpSpPr>
       <p:sp>
         <p:nvSpPr>
-          <p:cNvPr id="354" name="Google Shape;354;h55f610596eb4887f_0_20:notes"/>
+          <p:cNvPr id="362" name="Google Shape;362;h55f610596eb4887f_0_20:notes"/>
           <p:cNvSpPr/>
           <p:nvPr>
             <p:ph idx="2" type="sldImg"/>
@@ -1771,7 +1929,7 @@
       </p:sp>
       <p:sp>
         <p:nvSpPr>
-          <p:cNvPr id="355" name="Google Shape;355;h55f610596eb4887f_0_20:notes"/>
+          <p:cNvPr id="363" name="Google Shape;363;h55f610596eb4887f_0_20:notes"/>
           <p:cNvSpPr txBox="1"/>
           <p:nvPr>
             <p:ph idx="1" type="body"/>
@@ -1816,12 +1974,12 @@
 </p:notes>
 </file>
 
-<file path=ppt/notesSlides/notesSlide17.xml><?xml version="1.0" encoding="utf-8"?>
+<file path=ppt/notesSlides/notesSlide18.xml><?xml version="1.0" encoding="utf-8"?>
 <p:notes xmlns:a="http://schemas.openxmlformats.org/drawingml/2006/main" xmlns:r="http://schemas.openxmlformats.org/officeDocument/2006/relationships" xmlns:mc="http://schemas.openxmlformats.org/markup-compatibility/2006" xmlns:mv="urn:schemas-microsoft-com:mac:vml" xmlns:p="http://schemas.openxmlformats.org/presentationml/2006/main" xmlns:c="http://schemas.openxmlformats.org/drawingml/2006/chart" xmlns:dgm="http://schemas.openxmlformats.org/drawingml/2006/diagram" xmlns:o="urn:schemas-microsoft-com:office:office" xmlns:v="urn:schemas-microsoft-com:vml" xmlns:pvml="urn:schemas-microsoft-com:office:powerpoint" xmlns:com="http://schemas.openxmlformats.org/drawingml/2006/compatibility" xmlns:p14="http://schemas.microsoft.com/office/powerpoint/2010/main" xmlns:p15="http://schemas.microsoft.com/office/powerpoint/2012/main" xmlns:ahyp="http://schemas.microsoft.com/office/drawing/2018/hyperlinkcolor" showMasterPhAnim="0" showMasterSp="0">
   <p:cSld>
     <p:spTree>
       <p:nvGrpSpPr>
-        <p:cNvPr id="365" name="Shape 365"/>
+        <p:cNvPr id="373" name="Shape 373"/>
         <p:cNvGrpSpPr/>
         <p:nvPr/>
       </p:nvGrpSpPr>
@@ -1835,7 +1993,7 @@
       </p:grpSpPr>
       <p:sp>
         <p:nvSpPr>
-          <p:cNvPr id="366" name="Google Shape;366;p:notes"/>
+          <p:cNvPr id="374" name="Google Shape;374;p:notes"/>
           <p:cNvSpPr/>
           <p:nvPr>
             <p:ph idx="2" type="sldImg"/>
@@ -1870,7 +2028,7 @@
       </p:sp>
       <p:sp>
         <p:nvSpPr>
-          <p:cNvPr id="367" name="Google Shape;367;p:notes"/>
+          <p:cNvPr id="375" name="Google Shape;375;p:notes"/>
           <p:cNvSpPr txBox="1"/>
           <p:nvPr>
             <p:ph idx="1" type="body"/>
@@ -1915,12 +2073,12 @@
 </p:notes>
 </file>
 
-<file path=ppt/notesSlides/notesSlide18.xml><?xml version="1.0" encoding="utf-8"?>
+<file path=ppt/notesSlides/notesSlide19.xml><?xml version="1.0" encoding="utf-8"?>
 <p:notes xmlns:a="http://schemas.openxmlformats.org/drawingml/2006/main" xmlns:r="http://schemas.openxmlformats.org/officeDocument/2006/relationships" xmlns:mc="http://schemas.openxmlformats.org/markup-compatibility/2006" xmlns:mv="urn:schemas-microsoft-com:mac:vml" xmlns:p="http://schemas.openxmlformats.org/presentationml/2006/main" xmlns:c="http://schemas.openxmlformats.org/drawingml/2006/chart" xmlns:dgm="http://schemas.openxmlformats.org/drawingml/2006/diagram" xmlns:o="urn:schemas-microsoft-com:office:office" xmlns:v="urn:schemas-microsoft-com:vml" xmlns:pvml="urn:schemas-microsoft-com:office:powerpoint" xmlns:com="http://schemas.openxmlformats.org/drawingml/2006/compatibility" xmlns:p14="http://schemas.microsoft.com/office/powerpoint/2010/main" xmlns:p15="http://schemas.microsoft.com/office/powerpoint/2012/main" xmlns:ahyp="http://schemas.microsoft.com/office/drawing/2018/hyperlinkcolor" showMasterPhAnim="0" showMasterSp="0">
   <p:cSld>
     <p:spTree>
       <p:nvGrpSpPr>
-        <p:cNvPr id="376" name="Shape 376"/>
+        <p:cNvPr id="384" name="Shape 384"/>
         <p:cNvGrpSpPr/>
         <p:nvPr/>
       </p:nvGrpSpPr>
@@ -1934,7 +2092,7 @@
       </p:grpSpPr>
       <p:sp>
         <p:nvSpPr>
-          <p:cNvPr id="377" name="Google Shape;377;h55f610596eb4887f_0_0:notes"/>
+          <p:cNvPr id="385" name="Google Shape;385;h55f610596eb4887f_0_0:notes"/>
           <p:cNvSpPr/>
           <p:nvPr>
             <p:ph idx="2" type="sldImg"/>
@@ -1969,106 +2127,7 @@
       </p:sp>
       <p:sp>
         <p:nvSpPr>
-          <p:cNvPr id="378" name="Google Shape;378;h55f610596eb4887f_0_0:notes"/>
-          <p:cNvSpPr txBox="1"/>
-          <p:nvPr>
-            <p:ph idx="1" type="body"/>
-          </p:nvPr>
-        </p:nvSpPr>
-        <p:spPr>
-          <a:xfrm>
-            <a:off x="685800" y="4343400"/>
-            <a:ext cx="5486400" cy="4114800"/>
-          </a:xfrm>
-          <a:prstGeom prst="rect">
-            <a:avLst/>
-          </a:prstGeom>
-        </p:spPr>
-        <p:txBody>
-          <a:bodyPr anchorCtr="0" anchor="t" bIns="91425" lIns="91425" spcFirstLastPara="1" rIns="91425" wrap="square" tIns="91425">
-            <a:noAutofit/>
-          </a:bodyPr>
-          <a:lstStyle/>
-          <a:p>
-            <a:pPr indent="0" lvl="0" marL="0" rtl="0" algn="l">
-              <a:spcBef>
-                <a:spcPts val="0"/>
-              </a:spcBef>
-              <a:spcAft>
-                <a:spcPts val="0"/>
-              </a:spcAft>
-              <a:buNone/>
-            </a:pPr>
-            <a:r>
-              <a:t/>
-            </a:r>
-            <a:endParaRPr/>
-          </a:p>
-        </p:txBody>
-      </p:sp>
-    </p:spTree>
-  </p:cSld>
-  <p:clrMapOvr>
-    <a:masterClrMapping/>
-  </p:clrMapOvr>
-</p:notes>
-</file>
-
-<file path=ppt/notesSlides/notesSlide19.xml><?xml version="1.0" encoding="utf-8"?>
-<p:notes xmlns:a="http://schemas.openxmlformats.org/drawingml/2006/main" xmlns:r="http://schemas.openxmlformats.org/officeDocument/2006/relationships" xmlns:mc="http://schemas.openxmlformats.org/markup-compatibility/2006" xmlns:mv="urn:schemas-microsoft-com:mac:vml" xmlns:p="http://schemas.openxmlformats.org/presentationml/2006/main" xmlns:c="http://schemas.openxmlformats.org/drawingml/2006/chart" xmlns:dgm="http://schemas.openxmlformats.org/drawingml/2006/diagram" xmlns:o="urn:schemas-microsoft-com:office:office" xmlns:v="urn:schemas-microsoft-com:vml" xmlns:pvml="urn:schemas-microsoft-com:office:powerpoint" xmlns:com="http://schemas.openxmlformats.org/drawingml/2006/compatibility" xmlns:p14="http://schemas.microsoft.com/office/powerpoint/2010/main" xmlns:p15="http://schemas.microsoft.com/office/powerpoint/2012/main" xmlns:ahyp="http://schemas.microsoft.com/office/drawing/2018/hyperlinkcolor" showMasterPhAnim="0" showMasterSp="0">
-  <p:cSld>
-    <p:spTree>
-      <p:nvGrpSpPr>
-        <p:cNvPr id="383" name="Shape 383"/>
-        <p:cNvGrpSpPr/>
-        <p:nvPr/>
-      </p:nvGrpSpPr>
-      <p:grpSpPr>
-        <a:xfrm>
-          <a:off x="0" y="0"/>
-          <a:ext cx="0" cy="0"/>
-          <a:chOff x="0" y="0"/>
-          <a:chExt cx="0" cy="0"/>
-        </a:xfrm>
-      </p:grpSpPr>
-      <p:sp>
-        <p:nvSpPr>
-          <p:cNvPr id="384" name="Google Shape;384;h55f610596eb4887f_0_5:notes"/>
-          <p:cNvSpPr/>
-          <p:nvPr>
-            <p:ph idx="2" type="sldImg"/>
-          </p:nvPr>
-        </p:nvSpPr>
-        <p:spPr>
-          <a:xfrm>
-            <a:off x="381300" y="685800"/>
-            <a:ext cx="6096000" cy="3429000"/>
-          </a:xfrm>
-          <a:custGeom>
-            <a:rect b="b" l="l" r="r" t="t"/>
-            <a:pathLst>
-              <a:path extrusionOk="0" h="120000" w="120000">
-                <a:moveTo>
-                  <a:pt x="0" y="0"/>
-                </a:moveTo>
-                <a:lnTo>
-                  <a:pt x="120000" y="0"/>
-                </a:lnTo>
-                <a:lnTo>
-                  <a:pt x="120000" y="120000"/>
-                </a:lnTo>
-                <a:lnTo>
-                  <a:pt x="0" y="120000"/>
-                </a:lnTo>
-                <a:close/>
-              </a:path>
-            </a:pathLst>
-          </a:custGeom>
-        </p:spPr>
-      </p:sp>
-      <p:sp>
-        <p:nvSpPr>
-          <p:cNvPr id="385" name="Google Shape;385;h55f610596eb4887f_0_5:notes"/>
+          <p:cNvPr id="386" name="Google Shape;386;h55f610596eb4887f_0_0:notes"/>
           <p:cNvSpPr txBox="1"/>
           <p:nvPr>
             <p:ph idx="1" type="body"/>
@@ -2275,7 +2334,7 @@
   <p:cSld>
     <p:spTree>
       <p:nvGrpSpPr>
-        <p:cNvPr id="390" name="Shape 390"/>
+        <p:cNvPr id="391" name="Shape 391"/>
         <p:cNvGrpSpPr/>
         <p:nvPr/>
       </p:nvGrpSpPr>
@@ -2289,7 +2348,7 @@
       </p:grpSpPr>
       <p:sp>
         <p:nvSpPr>
-          <p:cNvPr id="391" name="Google Shape;391;h55f610596eb4887f_0_10:notes"/>
+          <p:cNvPr id="392" name="Google Shape;392;h55f610596eb4887f_0_5:notes"/>
           <p:cNvSpPr/>
           <p:nvPr>
             <p:ph idx="2" type="sldImg"/>
@@ -2324,7 +2383,7 @@
       </p:sp>
       <p:sp>
         <p:nvSpPr>
-          <p:cNvPr id="392" name="Google Shape;392;h55f610596eb4887f_0_10:notes"/>
+          <p:cNvPr id="393" name="Google Shape;393;h55f610596eb4887f_0_5:notes"/>
           <p:cNvSpPr txBox="1"/>
           <p:nvPr>
             <p:ph idx="1" type="body"/>
@@ -2374,7 +2433,7 @@
   <p:cSld>
     <p:spTree>
       <p:nvGrpSpPr>
-        <p:cNvPr id="397" name="Shape 397"/>
+        <p:cNvPr id="398" name="Shape 398"/>
         <p:cNvGrpSpPr/>
         <p:nvPr/>
       </p:nvGrpSpPr>
@@ -2388,7 +2447,7 @@
       </p:grpSpPr>
       <p:sp>
         <p:nvSpPr>
-          <p:cNvPr id="398" name="Google Shape;398;h1eb388ce2fcb6e8_2_0:notes"/>
+          <p:cNvPr id="399" name="Google Shape;399;h55f610596eb4887f_0_10:notes"/>
           <p:cNvSpPr/>
           <p:nvPr>
             <p:ph idx="2" type="sldImg"/>
@@ -2423,7 +2482,7 @@
       </p:sp>
       <p:sp>
         <p:nvSpPr>
-          <p:cNvPr id="399" name="Google Shape;399;h1eb388ce2fcb6e8_2_0:notes"/>
+          <p:cNvPr id="400" name="Google Shape;400;h55f610596eb4887f_0_10:notes"/>
           <p:cNvSpPr txBox="1"/>
           <p:nvPr>
             <p:ph idx="1" type="body"/>
@@ -2473,7 +2532,7 @@
   <p:cSld>
     <p:spTree>
       <p:nvGrpSpPr>
-        <p:cNvPr id="404" name="Shape 404"/>
+        <p:cNvPr id="405" name="Shape 405"/>
         <p:cNvGrpSpPr/>
         <p:nvPr/>
       </p:nvGrpSpPr>
@@ -2487,7 +2546,106 @@
       </p:grpSpPr>
       <p:sp>
         <p:nvSpPr>
-          <p:cNvPr id="405" name="Google Shape;405;h2c8f91d5f6982453_13_0:notes"/>
+          <p:cNvPr id="406" name="Google Shape;406;h1eb388ce2fcb6e8_2_0:notes"/>
+          <p:cNvSpPr/>
+          <p:nvPr>
+            <p:ph idx="2" type="sldImg"/>
+          </p:nvPr>
+        </p:nvSpPr>
+        <p:spPr>
+          <a:xfrm>
+            <a:off x="381300" y="685800"/>
+            <a:ext cx="6096000" cy="3429000"/>
+          </a:xfrm>
+          <a:custGeom>
+            <a:rect b="b" l="l" r="r" t="t"/>
+            <a:pathLst>
+              <a:path extrusionOk="0" h="120000" w="120000">
+                <a:moveTo>
+                  <a:pt x="0" y="0"/>
+                </a:moveTo>
+                <a:lnTo>
+                  <a:pt x="120000" y="0"/>
+                </a:lnTo>
+                <a:lnTo>
+                  <a:pt x="120000" y="120000"/>
+                </a:lnTo>
+                <a:lnTo>
+                  <a:pt x="0" y="120000"/>
+                </a:lnTo>
+                <a:close/>
+              </a:path>
+            </a:pathLst>
+          </a:custGeom>
+        </p:spPr>
+      </p:sp>
+      <p:sp>
+        <p:nvSpPr>
+          <p:cNvPr id="407" name="Google Shape;407;h1eb388ce2fcb6e8_2_0:notes"/>
+          <p:cNvSpPr txBox="1"/>
+          <p:nvPr>
+            <p:ph idx="1" type="body"/>
+          </p:nvPr>
+        </p:nvSpPr>
+        <p:spPr>
+          <a:xfrm>
+            <a:off x="685800" y="4343400"/>
+            <a:ext cx="5486400" cy="4114800"/>
+          </a:xfrm>
+          <a:prstGeom prst="rect">
+            <a:avLst/>
+          </a:prstGeom>
+        </p:spPr>
+        <p:txBody>
+          <a:bodyPr anchorCtr="0" anchor="t" bIns="91425" lIns="91425" spcFirstLastPara="1" rIns="91425" wrap="square" tIns="91425">
+            <a:noAutofit/>
+          </a:bodyPr>
+          <a:lstStyle/>
+          <a:p>
+            <a:pPr indent="0" lvl="0" marL="0" rtl="0" algn="l">
+              <a:spcBef>
+                <a:spcPts val="0"/>
+              </a:spcBef>
+              <a:spcAft>
+                <a:spcPts val="0"/>
+              </a:spcAft>
+              <a:buNone/>
+            </a:pPr>
+            <a:r>
+              <a:t/>
+            </a:r>
+            <a:endParaRPr/>
+          </a:p>
+        </p:txBody>
+      </p:sp>
+    </p:spTree>
+  </p:cSld>
+  <p:clrMapOvr>
+    <a:masterClrMapping/>
+  </p:clrMapOvr>
+</p:notes>
+</file>
+
+<file path=ppt/notesSlides/notesSlide23.xml><?xml version="1.0" encoding="utf-8"?>
+<p:notes xmlns:a="http://schemas.openxmlformats.org/drawingml/2006/main" xmlns:r="http://schemas.openxmlformats.org/officeDocument/2006/relationships" xmlns:mc="http://schemas.openxmlformats.org/markup-compatibility/2006" xmlns:mv="urn:schemas-microsoft-com:mac:vml" xmlns:p="http://schemas.openxmlformats.org/presentationml/2006/main" xmlns:c="http://schemas.openxmlformats.org/drawingml/2006/chart" xmlns:dgm="http://schemas.openxmlformats.org/drawingml/2006/diagram" xmlns:o="urn:schemas-microsoft-com:office:office" xmlns:v="urn:schemas-microsoft-com:vml" xmlns:pvml="urn:schemas-microsoft-com:office:powerpoint" xmlns:com="http://schemas.openxmlformats.org/drawingml/2006/compatibility" xmlns:p14="http://schemas.microsoft.com/office/powerpoint/2010/main" xmlns:p15="http://schemas.microsoft.com/office/powerpoint/2012/main" xmlns:ahyp="http://schemas.microsoft.com/office/drawing/2018/hyperlinkcolor" showMasterPhAnim="0" showMasterSp="0">
+  <p:cSld>
+    <p:spTree>
+      <p:nvGrpSpPr>
+        <p:cNvPr id="412" name="Shape 412"/>
+        <p:cNvGrpSpPr/>
+        <p:nvPr/>
+      </p:nvGrpSpPr>
+      <p:grpSpPr>
+        <a:xfrm>
+          <a:off x="0" y="0"/>
+          <a:ext cx="0" cy="0"/>
+          <a:chOff x="0" y="0"/>
+          <a:chExt cx="0" cy="0"/>
+        </a:xfrm>
+      </p:grpSpPr>
+      <p:sp>
+        <p:nvSpPr>
+          <p:cNvPr id="413" name="Google Shape;413;h2c8f91d5f6982453_13_0:notes"/>
           <p:cNvSpPr/>
           <p:nvPr>
             <p:ph idx="2" type="sldImg"/>
@@ -2532,7 +2690,7 @@
       </p:sp>
       <p:sp>
         <p:nvSpPr>
-          <p:cNvPr id="406" name="Google Shape;406;h2c8f91d5f6982453_13_0:notes"/>
+          <p:cNvPr id="414" name="Google Shape;414;h2c8f91d5f6982453_13_0:notes"/>
           <p:cNvSpPr txBox="1"/>
           <p:nvPr>
             <p:ph idx="1" type="body"/>
@@ -2575,7 +2733,7 @@
       </p:sp>
       <p:sp>
         <p:nvSpPr>
-          <p:cNvPr id="407" name="Google Shape;407;h2c8f91d5f6982453_13_0:notes"/>
+          <p:cNvPr id="415" name="Google Shape;415;h2c8f91d5f6982453_13_0:notes"/>
           <p:cNvSpPr txBox="1"/>
           <p:nvPr>
             <p:ph idx="12" type="sldNum"/>
@@ -3428,7 +3586,7 @@
       </p:grpSpPr>
       <p:sp>
         <p:nvSpPr>
-          <p:cNvPr id="231" name="Google Shape;231;h2c8f91d5f6982453_18_0:notes"/>
+          <p:cNvPr id="231" name="Google Shape;231;h311e2f078bc59eea_0_0:notes"/>
           <p:cNvSpPr/>
           <p:nvPr>
             <p:ph idx="2" type="sldImg"/>
@@ -3473,7 +3631,7 @@
       </p:sp>
       <p:sp>
         <p:nvSpPr>
-          <p:cNvPr id="232" name="Google Shape;232;h2c8f91d5f6982453_18_0:notes"/>
+          <p:cNvPr id="232" name="Google Shape;232;h311e2f078bc59eea_0_0:notes"/>
           <p:cNvSpPr txBox="1"/>
           <p:nvPr>
             <p:ph idx="1" type="body"/>
@@ -3482,7 +3640,7 @@
         <p:spPr>
           <a:xfrm>
             <a:off x="685800" y="4400550"/>
-            <a:ext cx="5486400" cy="3600450"/>
+            <a:ext cx="5486400" cy="3600600"/>
           </a:xfrm>
           <a:prstGeom prst="rect">
             <a:avLst/>
@@ -3516,7 +3674,7 @@
       </p:sp>
       <p:sp>
         <p:nvSpPr>
-          <p:cNvPr id="233" name="Google Shape;233;h2c8f91d5f6982453_18_0:notes"/>
+          <p:cNvPr id="233" name="Google Shape;233;h311e2f078bc59eea_0_0:notes"/>
           <p:cNvSpPr txBox="1"/>
           <p:nvPr>
             <p:ph idx="12" type="sldNum"/>
@@ -3525,7 +3683,7 @@
         <p:spPr>
           <a:xfrm>
             <a:off x="3884613" y="8685213"/>
-            <a:ext cx="2971800" cy="458787"/>
+            <a:ext cx="2971800" cy="458700"/>
           </a:xfrm>
           <a:prstGeom prst="rect">
             <a:avLst/>
@@ -3571,7 +3729,7 @@
   <p:cSld>
     <p:spTree>
       <p:nvGrpSpPr>
-        <p:cNvPr id="250" name="Shape 250"/>
+        <p:cNvPr id="238" name="Shape 238"/>
         <p:cNvGrpSpPr/>
         <p:nvPr/>
       </p:nvGrpSpPr>
@@ -3585,7 +3743,7 @@
       </p:grpSpPr>
       <p:sp>
         <p:nvSpPr>
-          <p:cNvPr id="251" name="Google Shape;251;h2c8f91d5f6982453_35_0:notes"/>
+          <p:cNvPr id="239" name="Google Shape;239;h2c8f91d5f6982453_18_0:notes"/>
           <p:cNvSpPr/>
           <p:nvPr>
             <p:ph idx="2" type="sldImg"/>
@@ -3630,7 +3788,7 @@
       </p:sp>
       <p:sp>
         <p:nvSpPr>
-          <p:cNvPr id="252" name="Google Shape;252;h2c8f91d5f6982453_35_0:notes"/>
+          <p:cNvPr id="240" name="Google Shape;240;h2c8f91d5f6982453_18_0:notes"/>
           <p:cNvSpPr txBox="1"/>
           <p:nvPr>
             <p:ph idx="1" type="body"/>
@@ -3673,7 +3831,7 @@
       </p:sp>
       <p:sp>
         <p:nvSpPr>
-          <p:cNvPr id="253" name="Google Shape;253;h2c8f91d5f6982453_35_0:notes"/>
+          <p:cNvPr id="241" name="Google Shape;241;h2c8f91d5f6982453_18_0:notes"/>
           <p:cNvSpPr txBox="1"/>
           <p:nvPr>
             <p:ph idx="12" type="sldNum"/>
@@ -20406,7 +20564,7 @@
   <p:cSld>
     <p:spTree>
       <p:nvGrpSpPr>
-        <p:cNvPr id="280" name="Shape 280"/>
+        <p:cNvPr id="262" name="Shape 262"/>
         <p:cNvGrpSpPr/>
         <p:nvPr/>
       </p:nvGrpSpPr>
@@ -20420,7 +20578,1496 @@
       </p:grpSpPr>
       <p:sp>
         <p:nvSpPr>
+          <p:cNvPr id="263" name="Google Shape;263;p38"/>
+          <p:cNvSpPr txBox="1"/>
+          <p:nvPr>
+            <p:ph type="ctrTitle"/>
+          </p:nvPr>
+        </p:nvSpPr>
+        <p:spPr>
+          <a:xfrm flipH="1">
+            <a:off x="-4" y="146957"/>
+            <a:ext cx="9144001" cy="734785"/>
+          </a:xfrm>
+          <a:prstGeom prst="rect">
+            <a:avLst/>
+          </a:prstGeom>
+          <a:noFill/>
+          <a:ln>
+            <a:noFill/>
+          </a:ln>
+        </p:spPr>
+        <p:txBody>
+          <a:bodyPr anchorCtr="0" anchor="b" bIns="34275" lIns="68575" spcFirstLastPara="1" rIns="68575" wrap="square" tIns="34275">
+            <a:noAutofit/>
+          </a:bodyPr>
+          <a:lstStyle/>
+          <a:p>
+            <a:pPr indent="0" lvl="0" marL="0" rtl="0" algn="l">
+              <a:lnSpc>
+                <a:spcPct val="90000"/>
+              </a:lnSpc>
+              <a:spcBef>
+                <a:spcPts val="0"/>
+              </a:spcBef>
+              <a:spcAft>
+                <a:spcPts val="0"/>
+              </a:spcAft>
+              <a:buClr>
+                <a:schemeClr val="dk1"/>
+              </a:buClr>
+              <a:buSzPts val="2100"/>
+              <a:buFont typeface="Play"/>
+              <a:buNone/>
+            </a:pPr>
+            <a:r>
+              <a:rPr lang="en" sz="2100"/>
+              <a:t>                       </a:t>
+            </a:r>
+            <a:r>
+              <a:rPr b="1" lang="en" sz="3300">
+                <a:latin typeface="Arial"/>
+                <a:ea typeface="Arial"/>
+                <a:cs typeface="Arial"/>
+                <a:sym typeface="Arial"/>
+              </a:rPr>
+              <a:t>Linear Regression: Implementation</a:t>
+            </a:r>
+            <a:br>
+              <a:rPr lang="en" sz="2100"/>
+            </a:br>
+            <a:endParaRPr sz="2100"/>
+          </a:p>
+        </p:txBody>
+      </p:sp>
+      <p:sp>
+        <p:nvSpPr>
+          <p:cNvPr id="264" name="Google Shape;264;p38"/>
+          <p:cNvSpPr/>
+          <p:nvPr/>
+        </p:nvSpPr>
+        <p:spPr>
+          <a:xfrm>
+            <a:off x="155121" y="700496"/>
+            <a:ext cx="8752115" cy="34289"/>
+          </a:xfrm>
+          <a:prstGeom prst="rect">
+            <a:avLst/>
+          </a:prstGeom>
+          <a:solidFill>
+            <a:srgbClr val="BFBFBF"/>
+          </a:solidFill>
+          <a:ln cap="flat" cmpd="sng" w="19050">
+            <a:solidFill>
+              <a:srgbClr val="082836"/>
+            </a:solidFill>
+            <a:prstDash val="solid"/>
+            <a:miter lim="8000"/>
+            <a:headEnd len="sm" w="sm" type="none"/>
+            <a:tailEnd len="sm" w="sm" type="none"/>
+          </a:ln>
+        </p:spPr>
+        <p:txBody>
+          <a:bodyPr anchorCtr="0" anchor="ctr" bIns="34275" lIns="68575" spcFirstLastPara="1" rIns="68575" wrap="square" tIns="34275">
+            <a:noAutofit/>
+          </a:bodyPr>
+          <a:lstStyle/>
+          <a:p>
+            <a:pPr indent="0" lvl="0" marL="0" marR="0" rtl="0" algn="ctr">
+              <a:spcBef>
+                <a:spcPts val="0"/>
+              </a:spcBef>
+              <a:spcAft>
+                <a:spcPts val="0"/>
+              </a:spcAft>
+              <a:buNone/>
+            </a:pPr>
+            <a:r>
+              <a:t/>
+            </a:r>
+            <a:endParaRPr sz="1400">
+              <a:solidFill>
+                <a:schemeClr val="lt1"/>
+              </a:solidFill>
+              <a:latin typeface="Arial"/>
+              <a:ea typeface="Arial"/>
+              <a:cs typeface="Arial"/>
+              <a:sym typeface="Arial"/>
+            </a:endParaRPr>
+          </a:p>
+        </p:txBody>
+      </p:sp>
+      <p:sp>
+        <p:nvSpPr>
+          <p:cNvPr id="265" name="Google Shape;265;p38"/>
+          <p:cNvSpPr txBox="1"/>
+          <p:nvPr/>
+        </p:nvSpPr>
+        <p:spPr>
+          <a:xfrm>
+            <a:off x="1175657" y="2416628"/>
+            <a:ext cx="138548" cy="276999"/>
+          </a:xfrm>
+          <a:prstGeom prst="rect">
+            <a:avLst/>
+          </a:prstGeom>
+          <a:noFill/>
+          <a:ln>
+            <a:noFill/>
+          </a:ln>
+        </p:spPr>
+        <p:txBody>
+          <a:bodyPr anchorCtr="0" anchor="t" bIns="34275" lIns="68575" spcFirstLastPara="1" rIns="68575" wrap="square" tIns="34275">
+            <a:spAutoFit/>
+          </a:bodyPr>
+          <a:lstStyle/>
+          <a:p>
+            <a:pPr indent="0" lvl="0" marL="0" marR="0" rtl="0" algn="l">
+              <a:spcBef>
+                <a:spcPts val="0"/>
+              </a:spcBef>
+              <a:spcAft>
+                <a:spcPts val="0"/>
+              </a:spcAft>
+              <a:buNone/>
+            </a:pPr>
+            <a:r>
+              <a:t/>
+            </a:r>
+            <a:endParaRPr sz="1400">
+              <a:solidFill>
+                <a:schemeClr val="dk1"/>
+              </a:solidFill>
+              <a:latin typeface="Arial"/>
+              <a:ea typeface="Arial"/>
+              <a:cs typeface="Arial"/>
+              <a:sym typeface="Arial"/>
+            </a:endParaRPr>
+          </a:p>
+        </p:txBody>
+      </p:sp>
+      <p:sp>
+        <p:nvSpPr>
+          <p:cNvPr id="266" name="Google Shape;266;p38"/>
+          <p:cNvSpPr txBox="1"/>
+          <p:nvPr/>
+        </p:nvSpPr>
+        <p:spPr>
+          <a:xfrm>
+            <a:off x="215860" y="1036671"/>
+            <a:ext cx="2341048" cy="438581"/>
+          </a:xfrm>
+          <a:prstGeom prst="rect">
+            <a:avLst/>
+          </a:prstGeom>
+          <a:noFill/>
+          <a:ln>
+            <a:noFill/>
+          </a:ln>
+        </p:spPr>
+        <p:txBody>
+          <a:bodyPr anchorCtr="0" anchor="t" bIns="34275" lIns="68575" spcFirstLastPara="1" rIns="68575" wrap="square" tIns="34275">
+            <a:spAutoFit/>
+          </a:bodyPr>
+          <a:lstStyle/>
+          <a:p>
+            <a:pPr indent="0" lvl="0" marL="0" marR="0" rtl="0" algn="l">
+              <a:spcBef>
+                <a:spcPts val="0"/>
+              </a:spcBef>
+              <a:spcAft>
+                <a:spcPts val="0"/>
+              </a:spcAft>
+              <a:buNone/>
+            </a:pPr>
+            <a:r>
+              <a:rPr b="1" lang="en" sz="2400">
+                <a:solidFill>
+                  <a:schemeClr val="dk1"/>
+                </a:solidFill>
+                <a:latin typeface="Arial"/>
+                <a:ea typeface="Arial"/>
+                <a:cs typeface="Arial"/>
+                <a:sym typeface="Arial"/>
+              </a:rPr>
+              <a:t>Model Pipeline</a:t>
+            </a:r>
+            <a:endParaRPr b="1" sz="2400">
+              <a:solidFill>
+                <a:schemeClr val="dk1"/>
+              </a:solidFill>
+              <a:latin typeface="Arial"/>
+              <a:ea typeface="Arial"/>
+              <a:cs typeface="Arial"/>
+              <a:sym typeface="Arial"/>
+            </a:endParaRPr>
+          </a:p>
+        </p:txBody>
+      </p:sp>
+      <p:sp>
+        <p:nvSpPr>
+          <p:cNvPr id="267" name="Google Shape;267;p38"/>
+          <p:cNvSpPr/>
+          <p:nvPr/>
+        </p:nvSpPr>
+        <p:spPr>
+          <a:xfrm>
+            <a:off x="363927" y="1749631"/>
+            <a:ext cx="1600200" cy="648300"/>
+          </a:xfrm>
+          <a:prstGeom prst="roundRect">
+            <a:avLst>
+              <a:gd fmla="val 16667" name="adj"/>
+            </a:avLst>
+          </a:prstGeom>
+          <a:solidFill>
+            <a:srgbClr val="D9E5F8"/>
+          </a:solidFill>
+          <a:ln cap="flat" cmpd="sng" w="19050">
+            <a:solidFill>
+              <a:srgbClr val="F2F2F2"/>
+            </a:solidFill>
+            <a:prstDash val="solid"/>
+            <a:miter lim="8000"/>
+            <a:headEnd len="sm" w="sm" type="none"/>
+            <a:tailEnd len="sm" w="sm" type="none"/>
+          </a:ln>
+          <a:effectLst>
+            <a:outerShdw blurRad="50800" rotWithShape="0" algn="tl" dir="2700000" dist="38100">
+              <a:srgbClr val="000000">
+                <a:alpha val="40000"/>
+              </a:srgbClr>
+            </a:outerShdw>
+          </a:effectLst>
+        </p:spPr>
+        <p:txBody>
+          <a:bodyPr anchorCtr="0" anchor="ctr" bIns="34275" lIns="68575" spcFirstLastPara="1" rIns="68575" wrap="square" tIns="34275">
+            <a:noAutofit/>
+          </a:bodyPr>
+          <a:lstStyle/>
+          <a:p>
+            <a:pPr indent="0" lvl="0" marL="0" marR="0" rtl="0" algn="ctr">
+              <a:spcBef>
+                <a:spcPts val="0"/>
+              </a:spcBef>
+              <a:spcAft>
+                <a:spcPts val="0"/>
+              </a:spcAft>
+              <a:buNone/>
+            </a:pPr>
+            <a:r>
+              <a:rPr lang="en" sz="1400">
+                <a:solidFill>
+                  <a:schemeClr val="dk1"/>
+                </a:solidFill>
+                <a:latin typeface="Arial"/>
+                <a:ea typeface="Arial"/>
+                <a:cs typeface="Arial"/>
+                <a:sym typeface="Arial"/>
+              </a:rPr>
+              <a:t>Input Feature</a:t>
+            </a:r>
+            <a:endParaRPr sz="1400">
+              <a:solidFill>
+                <a:schemeClr val="lt1"/>
+              </a:solidFill>
+              <a:latin typeface="Arial"/>
+              <a:ea typeface="Arial"/>
+              <a:cs typeface="Arial"/>
+              <a:sym typeface="Arial"/>
+            </a:endParaRPr>
+          </a:p>
+        </p:txBody>
+      </p:sp>
+      <p:sp>
+        <p:nvSpPr>
+          <p:cNvPr id="268" name="Google Shape;268;p38"/>
+          <p:cNvSpPr txBox="1"/>
+          <p:nvPr/>
+        </p:nvSpPr>
+        <p:spPr>
+          <a:xfrm>
+            <a:off x="1964125" y="1852912"/>
+            <a:ext cx="819600" cy="700200"/>
+          </a:xfrm>
+          <a:prstGeom prst="rect">
+            <a:avLst/>
+          </a:prstGeom>
+          <a:noFill/>
+          <a:ln>
+            <a:noFill/>
+          </a:ln>
+        </p:spPr>
+        <p:txBody>
+          <a:bodyPr anchorCtr="0" anchor="t" bIns="34275" lIns="68575" spcFirstLastPara="1" rIns="68575" wrap="square" tIns="34275">
+            <a:spAutoFit/>
+          </a:bodyPr>
+          <a:lstStyle/>
+          <a:p>
+            <a:pPr indent="0" lvl="0" marL="0" marR="0" rtl="0" algn="l">
+              <a:spcBef>
+                <a:spcPts val="0"/>
+              </a:spcBef>
+              <a:spcAft>
+                <a:spcPts val="0"/>
+              </a:spcAft>
+              <a:buNone/>
+            </a:pPr>
+            <a:r>
+              <a:rPr b="1" lang="en" sz="2700">
+                <a:solidFill>
+                  <a:schemeClr val="dk1"/>
+                </a:solidFill>
+                <a:latin typeface="Arial"/>
+                <a:ea typeface="Arial"/>
+                <a:cs typeface="Arial"/>
+                <a:sym typeface="Arial"/>
+              </a:rPr>
+              <a:t>→</a:t>
+            </a:r>
+            <a:endParaRPr sz="1100"/>
+          </a:p>
+          <a:p>
+            <a:pPr indent="0" lvl="0" marL="0" marR="0" rtl="0" algn="l">
+              <a:spcBef>
+                <a:spcPts val="0"/>
+              </a:spcBef>
+              <a:spcAft>
+                <a:spcPts val="0"/>
+              </a:spcAft>
+              <a:buNone/>
+            </a:pPr>
+            <a:r>
+              <a:t/>
+            </a:r>
+            <a:endParaRPr sz="1400">
+              <a:solidFill>
+                <a:schemeClr val="dk1"/>
+              </a:solidFill>
+              <a:latin typeface="Arial"/>
+              <a:ea typeface="Arial"/>
+              <a:cs typeface="Arial"/>
+              <a:sym typeface="Arial"/>
+            </a:endParaRPr>
+          </a:p>
+        </p:txBody>
+      </p:sp>
+      <p:sp>
+        <p:nvSpPr>
+          <p:cNvPr id="269" name="Google Shape;269;p38"/>
+          <p:cNvSpPr/>
+          <p:nvPr/>
+        </p:nvSpPr>
+        <p:spPr>
+          <a:xfrm>
+            <a:off x="2388970" y="1790879"/>
+            <a:ext cx="1600200" cy="648300"/>
+          </a:xfrm>
+          <a:prstGeom prst="roundRect">
+            <a:avLst>
+              <a:gd fmla="val 16667" name="adj"/>
+            </a:avLst>
+          </a:prstGeom>
+          <a:solidFill>
+            <a:srgbClr val="F2CDED"/>
+          </a:solidFill>
+          <a:ln cap="flat" cmpd="sng" w="19050">
+            <a:solidFill>
+              <a:srgbClr val="082836"/>
+            </a:solidFill>
+            <a:prstDash val="solid"/>
+            <a:miter lim="8000"/>
+            <a:headEnd len="sm" w="sm" type="none"/>
+            <a:tailEnd len="sm" w="sm" type="none"/>
+          </a:ln>
+          <a:effectLst>
+            <a:outerShdw blurRad="50800" rotWithShape="0" algn="tl" dir="2700000" dist="38100">
+              <a:srgbClr val="000000">
+                <a:alpha val="40000"/>
+              </a:srgbClr>
+            </a:outerShdw>
+          </a:effectLst>
+        </p:spPr>
+        <p:txBody>
+          <a:bodyPr anchorCtr="0" anchor="ctr" bIns="34275" lIns="68575" spcFirstLastPara="1" rIns="68575" wrap="square" tIns="34275">
+            <a:noAutofit/>
+          </a:bodyPr>
+          <a:lstStyle/>
+          <a:p>
+            <a:pPr indent="0" lvl="0" marL="0" marR="0" rtl="0" algn="ctr">
+              <a:spcBef>
+                <a:spcPts val="0"/>
+              </a:spcBef>
+              <a:spcAft>
+                <a:spcPts val="0"/>
+              </a:spcAft>
+              <a:buNone/>
+            </a:pPr>
+            <a:r>
+              <a:rPr lang="en" sz="1400">
+                <a:solidFill>
+                  <a:schemeClr val="dk1"/>
+                </a:solidFill>
+                <a:latin typeface="Arial"/>
+                <a:ea typeface="Arial"/>
+                <a:cs typeface="Arial"/>
+                <a:sym typeface="Arial"/>
+              </a:rPr>
+              <a:t>Preprocessing</a:t>
+            </a:r>
+            <a:endParaRPr sz="1400">
+              <a:solidFill>
+                <a:schemeClr val="lt1"/>
+              </a:solidFill>
+              <a:latin typeface="Arial"/>
+              <a:ea typeface="Arial"/>
+              <a:cs typeface="Arial"/>
+              <a:sym typeface="Arial"/>
+            </a:endParaRPr>
+          </a:p>
+        </p:txBody>
+      </p:sp>
+      <p:sp>
+        <p:nvSpPr>
+          <p:cNvPr id="270" name="Google Shape;270;p38"/>
+          <p:cNvSpPr/>
+          <p:nvPr/>
+        </p:nvSpPr>
+        <p:spPr>
+          <a:xfrm>
+            <a:off x="4453425" y="1823055"/>
+            <a:ext cx="1681800" cy="648300"/>
+          </a:xfrm>
+          <a:prstGeom prst="roundRect">
+            <a:avLst>
+              <a:gd fmla="val 16667" name="adj"/>
+            </a:avLst>
+          </a:prstGeom>
+          <a:solidFill>
+            <a:srgbClr val="BFBFBF"/>
+          </a:solidFill>
+          <a:ln cap="flat" cmpd="sng" w="19050">
+            <a:solidFill>
+              <a:srgbClr val="082836"/>
+            </a:solidFill>
+            <a:prstDash val="solid"/>
+            <a:miter lim="8000"/>
+            <a:headEnd len="sm" w="sm" type="none"/>
+            <a:tailEnd len="sm" w="sm" type="none"/>
+          </a:ln>
+          <a:effectLst>
+            <a:outerShdw blurRad="50800" rotWithShape="0" algn="tl" dir="2700000" dist="38100">
+              <a:srgbClr val="000000">
+                <a:alpha val="40000"/>
+              </a:srgbClr>
+            </a:outerShdw>
+          </a:effectLst>
+        </p:spPr>
+        <p:txBody>
+          <a:bodyPr anchorCtr="0" anchor="ctr" bIns="34275" lIns="68575" spcFirstLastPara="1" rIns="68575" wrap="square" tIns="34275">
+            <a:noAutofit/>
+          </a:bodyPr>
+          <a:lstStyle/>
+          <a:p>
+            <a:pPr indent="0" lvl="0" marL="0" marR="0" rtl="0" algn="ctr">
+              <a:spcBef>
+                <a:spcPts val="0"/>
+              </a:spcBef>
+              <a:spcAft>
+                <a:spcPts val="0"/>
+              </a:spcAft>
+              <a:buNone/>
+            </a:pPr>
+            <a:r>
+              <a:rPr lang="en" sz="1400">
+                <a:solidFill>
+                  <a:schemeClr val="dk1"/>
+                </a:solidFill>
+                <a:latin typeface="Arial"/>
+                <a:ea typeface="Arial"/>
+                <a:cs typeface="Arial"/>
+                <a:sym typeface="Arial"/>
+              </a:rPr>
+              <a:t>Linear Regression</a:t>
+            </a:r>
+            <a:endParaRPr sz="1400">
+              <a:solidFill>
+                <a:schemeClr val="dk1"/>
+              </a:solidFill>
+              <a:latin typeface="Arial"/>
+              <a:ea typeface="Arial"/>
+              <a:cs typeface="Arial"/>
+              <a:sym typeface="Arial"/>
+            </a:endParaRPr>
+          </a:p>
+        </p:txBody>
+      </p:sp>
+      <p:sp>
+        <p:nvSpPr>
+          <p:cNvPr id="271" name="Google Shape;271;p38"/>
+          <p:cNvSpPr/>
+          <p:nvPr/>
+        </p:nvSpPr>
+        <p:spPr>
+          <a:xfrm>
+            <a:off x="6599470" y="1823053"/>
+            <a:ext cx="1681800" cy="648300"/>
+          </a:xfrm>
+          <a:prstGeom prst="roundRect">
+            <a:avLst>
+              <a:gd fmla="val 16667" name="adj"/>
+            </a:avLst>
+          </a:prstGeom>
+          <a:solidFill>
+            <a:srgbClr val="C1F0C7"/>
+          </a:solidFill>
+          <a:ln cap="flat" cmpd="sng" w="19050">
+            <a:solidFill>
+              <a:srgbClr val="082836"/>
+            </a:solidFill>
+            <a:prstDash val="solid"/>
+            <a:miter lim="8000"/>
+            <a:headEnd len="sm" w="sm" type="none"/>
+            <a:tailEnd len="sm" w="sm" type="none"/>
+          </a:ln>
+          <a:effectLst>
+            <a:outerShdw blurRad="50800" rotWithShape="0" algn="tl" dir="2700000" dist="38100">
+              <a:srgbClr val="000000">
+                <a:alpha val="40000"/>
+              </a:srgbClr>
+            </a:outerShdw>
+          </a:effectLst>
+        </p:spPr>
+        <p:txBody>
+          <a:bodyPr anchorCtr="0" anchor="ctr" bIns="34275" lIns="68575" spcFirstLastPara="1" rIns="68575" wrap="square" tIns="34275">
+            <a:noAutofit/>
+          </a:bodyPr>
+          <a:lstStyle/>
+          <a:p>
+            <a:pPr indent="0" lvl="0" marL="0" marR="0" rtl="0" algn="ctr">
+              <a:spcBef>
+                <a:spcPts val="0"/>
+              </a:spcBef>
+              <a:spcAft>
+                <a:spcPts val="0"/>
+              </a:spcAft>
+              <a:buNone/>
+            </a:pPr>
+            <a:r>
+              <a:rPr lang="en" sz="1400">
+                <a:solidFill>
+                  <a:schemeClr val="dk1"/>
+                </a:solidFill>
+                <a:latin typeface="Arial"/>
+                <a:ea typeface="Arial"/>
+                <a:cs typeface="Arial"/>
+                <a:sym typeface="Arial"/>
+              </a:rPr>
+              <a:t>Predicted </a:t>
+            </a:r>
+            <a:endParaRPr sz="1100"/>
+          </a:p>
+          <a:p>
+            <a:pPr indent="0" lvl="0" marL="0" marR="0" rtl="0" algn="ctr">
+              <a:spcBef>
+                <a:spcPts val="0"/>
+              </a:spcBef>
+              <a:spcAft>
+                <a:spcPts val="0"/>
+              </a:spcAft>
+              <a:buNone/>
+            </a:pPr>
+            <a:r>
+              <a:rPr lang="en" sz="1400">
+                <a:solidFill>
+                  <a:schemeClr val="dk1"/>
+                </a:solidFill>
+                <a:latin typeface="Arial"/>
+                <a:ea typeface="Arial"/>
+                <a:cs typeface="Arial"/>
+                <a:sym typeface="Arial"/>
+              </a:rPr>
+              <a:t>amount_inr</a:t>
+            </a:r>
+            <a:endParaRPr sz="1400">
+              <a:solidFill>
+                <a:schemeClr val="lt1"/>
+              </a:solidFill>
+              <a:latin typeface="Arial"/>
+              <a:ea typeface="Arial"/>
+              <a:cs typeface="Arial"/>
+              <a:sym typeface="Arial"/>
+            </a:endParaRPr>
+          </a:p>
+        </p:txBody>
+      </p:sp>
+      <p:sp>
+        <p:nvSpPr>
+          <p:cNvPr id="272" name="Google Shape;272;p38"/>
+          <p:cNvSpPr txBox="1"/>
+          <p:nvPr/>
+        </p:nvSpPr>
+        <p:spPr>
+          <a:xfrm>
+            <a:off x="4025047" y="1847115"/>
+            <a:ext cx="954900" cy="700200"/>
+          </a:xfrm>
+          <a:prstGeom prst="rect">
+            <a:avLst/>
+          </a:prstGeom>
+          <a:noFill/>
+          <a:ln>
+            <a:noFill/>
+          </a:ln>
+        </p:spPr>
+        <p:txBody>
+          <a:bodyPr anchorCtr="0" anchor="t" bIns="34275" lIns="68575" spcFirstLastPara="1" rIns="68575" wrap="square" tIns="34275">
+            <a:spAutoFit/>
+          </a:bodyPr>
+          <a:lstStyle/>
+          <a:p>
+            <a:pPr indent="0" lvl="0" marL="0" marR="0" rtl="0" algn="l">
+              <a:spcBef>
+                <a:spcPts val="0"/>
+              </a:spcBef>
+              <a:spcAft>
+                <a:spcPts val="0"/>
+              </a:spcAft>
+              <a:buNone/>
+            </a:pPr>
+            <a:r>
+              <a:rPr b="1" lang="en" sz="2700">
+                <a:solidFill>
+                  <a:schemeClr val="dk1"/>
+                </a:solidFill>
+                <a:latin typeface="Arial"/>
+                <a:ea typeface="Arial"/>
+                <a:cs typeface="Arial"/>
+                <a:sym typeface="Arial"/>
+              </a:rPr>
+              <a:t>→</a:t>
+            </a:r>
+            <a:endParaRPr sz="1100"/>
+          </a:p>
+          <a:p>
+            <a:pPr indent="0" lvl="0" marL="0" marR="0" rtl="0" algn="l">
+              <a:spcBef>
+                <a:spcPts val="0"/>
+              </a:spcBef>
+              <a:spcAft>
+                <a:spcPts val="0"/>
+              </a:spcAft>
+              <a:buNone/>
+            </a:pPr>
+            <a:r>
+              <a:t/>
+            </a:r>
+            <a:endParaRPr sz="1400">
+              <a:solidFill>
+                <a:schemeClr val="dk1"/>
+              </a:solidFill>
+              <a:latin typeface="Arial"/>
+              <a:ea typeface="Arial"/>
+              <a:cs typeface="Arial"/>
+              <a:sym typeface="Arial"/>
+            </a:endParaRPr>
+          </a:p>
+        </p:txBody>
+      </p:sp>
+      <p:sp>
+        <p:nvSpPr>
+          <p:cNvPr id="273" name="Google Shape;273;p38"/>
+          <p:cNvSpPr txBox="1"/>
+          <p:nvPr/>
+        </p:nvSpPr>
+        <p:spPr>
+          <a:xfrm>
+            <a:off x="6110514" y="1847113"/>
+            <a:ext cx="1075200" cy="700200"/>
+          </a:xfrm>
+          <a:prstGeom prst="rect">
+            <a:avLst/>
+          </a:prstGeom>
+          <a:noFill/>
+          <a:ln>
+            <a:noFill/>
+          </a:ln>
+        </p:spPr>
+        <p:txBody>
+          <a:bodyPr anchorCtr="0" anchor="t" bIns="34275" lIns="68575" spcFirstLastPara="1" rIns="68575" wrap="square" tIns="34275">
+            <a:spAutoFit/>
+          </a:bodyPr>
+          <a:lstStyle/>
+          <a:p>
+            <a:pPr indent="0" lvl="0" marL="0" marR="0" rtl="0" algn="l">
+              <a:spcBef>
+                <a:spcPts val="0"/>
+              </a:spcBef>
+              <a:spcAft>
+                <a:spcPts val="0"/>
+              </a:spcAft>
+              <a:buNone/>
+            </a:pPr>
+            <a:r>
+              <a:rPr b="1" lang="en" sz="2700">
+                <a:solidFill>
+                  <a:schemeClr val="dk1"/>
+                </a:solidFill>
+                <a:latin typeface="Arial"/>
+                <a:ea typeface="Arial"/>
+                <a:cs typeface="Arial"/>
+                <a:sym typeface="Arial"/>
+              </a:rPr>
+              <a:t>→</a:t>
+            </a:r>
+            <a:endParaRPr sz="1100"/>
+          </a:p>
+          <a:p>
+            <a:pPr indent="0" lvl="0" marL="0" marR="0" rtl="0" algn="l">
+              <a:spcBef>
+                <a:spcPts val="0"/>
+              </a:spcBef>
+              <a:spcAft>
+                <a:spcPts val="0"/>
+              </a:spcAft>
+              <a:buNone/>
+            </a:pPr>
+            <a:r>
+              <a:t/>
+            </a:r>
+            <a:endParaRPr sz="1400">
+              <a:solidFill>
+                <a:schemeClr val="dk1"/>
+              </a:solidFill>
+              <a:latin typeface="Arial"/>
+              <a:ea typeface="Arial"/>
+              <a:cs typeface="Arial"/>
+              <a:sym typeface="Arial"/>
+            </a:endParaRPr>
+          </a:p>
+        </p:txBody>
+      </p:sp>
+      <p:sp>
+        <p:nvSpPr>
+          <p:cNvPr id="274" name="Google Shape;274;p38"/>
+          <p:cNvSpPr txBox="1"/>
+          <p:nvPr/>
+        </p:nvSpPr>
+        <p:spPr>
+          <a:xfrm>
+            <a:off x="246726" y="2754800"/>
+            <a:ext cx="3787800" cy="408000"/>
+          </a:xfrm>
+          <a:prstGeom prst="rect">
+            <a:avLst/>
+          </a:prstGeom>
+          <a:noFill/>
+          <a:ln>
+            <a:noFill/>
+          </a:ln>
+        </p:spPr>
+        <p:txBody>
+          <a:bodyPr anchorCtr="0" anchor="t" bIns="34275" lIns="68575" spcFirstLastPara="1" rIns="68575" wrap="square" tIns="34275">
+            <a:spAutoFit/>
+          </a:bodyPr>
+          <a:lstStyle/>
+          <a:p>
+            <a:pPr indent="0" lvl="0" marL="0" marR="0" rtl="0" algn="l">
+              <a:spcBef>
+                <a:spcPts val="0"/>
+              </a:spcBef>
+              <a:spcAft>
+                <a:spcPts val="0"/>
+              </a:spcAft>
+              <a:buNone/>
+            </a:pPr>
+            <a:r>
+              <a:rPr b="1" lang="en" sz="2200">
+                <a:solidFill>
+                  <a:schemeClr val="dk1"/>
+                </a:solidFill>
+                <a:latin typeface="Arial"/>
+                <a:ea typeface="Arial"/>
+                <a:cs typeface="Arial"/>
+                <a:sym typeface="Arial"/>
+              </a:rPr>
+              <a:t>Evaluation matrices</a:t>
+            </a:r>
+            <a:endParaRPr b="1" sz="2200">
+              <a:solidFill>
+                <a:schemeClr val="dk1"/>
+              </a:solidFill>
+              <a:latin typeface="Arial"/>
+              <a:ea typeface="Arial"/>
+              <a:cs typeface="Arial"/>
+              <a:sym typeface="Arial"/>
+            </a:endParaRPr>
+          </a:p>
+        </p:txBody>
+      </p:sp>
+      <p:sp>
+        <p:nvSpPr>
+          <p:cNvPr id="275" name="Google Shape;275;p38"/>
+          <p:cNvSpPr/>
+          <p:nvPr/>
+        </p:nvSpPr>
+        <p:spPr>
+          <a:xfrm>
+            <a:off x="468628" y="3348293"/>
+            <a:ext cx="2315100" cy="1469700"/>
+          </a:xfrm>
+          <a:prstGeom prst="roundRect">
+            <a:avLst>
+              <a:gd fmla="val 16667" name="adj"/>
+            </a:avLst>
+          </a:prstGeom>
+          <a:solidFill>
+            <a:srgbClr val="D8D8D8"/>
+          </a:solidFill>
+          <a:ln cap="flat" cmpd="sng" w="19050">
+            <a:solidFill>
+              <a:srgbClr val="082836"/>
+            </a:solidFill>
+            <a:prstDash val="solid"/>
+            <a:miter lim="8000"/>
+            <a:headEnd len="sm" w="sm" type="none"/>
+            <a:tailEnd len="sm" w="sm" type="none"/>
+          </a:ln>
+          <a:effectLst>
+            <a:outerShdw blurRad="50800" rotWithShape="0" algn="tl" dir="2700000" dist="38100">
+              <a:srgbClr val="000000">
+                <a:alpha val="40000"/>
+              </a:srgbClr>
+            </a:outerShdw>
+          </a:effectLst>
+        </p:spPr>
+        <p:txBody>
+          <a:bodyPr anchorCtr="0" anchor="ctr" bIns="34275" lIns="68575" spcFirstLastPara="1" rIns="68575" wrap="square" tIns="34275">
+            <a:noAutofit/>
+          </a:bodyPr>
+          <a:lstStyle/>
+          <a:p>
+            <a:pPr indent="0" lvl="0" marL="0" marR="0" rtl="0" algn="ctr">
+              <a:spcBef>
+                <a:spcPts val="0"/>
+              </a:spcBef>
+              <a:spcAft>
+                <a:spcPts val="0"/>
+              </a:spcAft>
+              <a:buNone/>
+            </a:pPr>
+            <a:r>
+              <a:t/>
+            </a:r>
+            <a:endParaRPr sz="1400">
+              <a:solidFill>
+                <a:schemeClr val="lt1"/>
+              </a:solidFill>
+              <a:latin typeface="Arial"/>
+              <a:ea typeface="Arial"/>
+              <a:cs typeface="Arial"/>
+              <a:sym typeface="Arial"/>
+            </a:endParaRPr>
+          </a:p>
+        </p:txBody>
+      </p:sp>
+      <p:sp>
+        <p:nvSpPr>
+          <p:cNvPr id="276" name="Google Shape;276;p38"/>
+          <p:cNvSpPr/>
+          <p:nvPr/>
+        </p:nvSpPr>
+        <p:spPr>
+          <a:xfrm>
+            <a:off x="3137765" y="3316842"/>
+            <a:ext cx="2235300" cy="1469700"/>
+          </a:xfrm>
+          <a:prstGeom prst="roundRect">
+            <a:avLst>
+              <a:gd fmla="val 16667" name="adj"/>
+            </a:avLst>
+          </a:prstGeom>
+          <a:solidFill>
+            <a:srgbClr val="D8D8D8"/>
+          </a:solidFill>
+          <a:ln cap="flat" cmpd="sng" w="19050">
+            <a:solidFill>
+              <a:srgbClr val="082836"/>
+            </a:solidFill>
+            <a:prstDash val="solid"/>
+            <a:miter lim="8000"/>
+            <a:headEnd len="sm" w="sm" type="none"/>
+            <a:tailEnd len="sm" w="sm" type="none"/>
+          </a:ln>
+          <a:effectLst>
+            <a:outerShdw blurRad="50800" rotWithShape="0" algn="tl" dir="2700000" dist="38100">
+              <a:srgbClr val="000000">
+                <a:alpha val="40000"/>
+              </a:srgbClr>
+            </a:outerShdw>
+          </a:effectLst>
+        </p:spPr>
+        <p:txBody>
+          <a:bodyPr anchorCtr="0" anchor="ctr" bIns="34275" lIns="68575" spcFirstLastPara="1" rIns="68575" wrap="square" tIns="34275">
+            <a:noAutofit/>
+          </a:bodyPr>
+          <a:lstStyle/>
+          <a:p>
+            <a:pPr indent="0" lvl="0" marL="0" marR="0" rtl="0" algn="ctr">
+              <a:spcBef>
+                <a:spcPts val="0"/>
+              </a:spcBef>
+              <a:spcAft>
+                <a:spcPts val="0"/>
+              </a:spcAft>
+              <a:buNone/>
+            </a:pPr>
+            <a:r>
+              <a:t/>
+            </a:r>
+            <a:endParaRPr sz="1400">
+              <a:solidFill>
+                <a:schemeClr val="lt1"/>
+              </a:solidFill>
+              <a:latin typeface="Arial"/>
+              <a:ea typeface="Arial"/>
+              <a:cs typeface="Arial"/>
+              <a:sym typeface="Arial"/>
+            </a:endParaRPr>
+          </a:p>
+        </p:txBody>
+      </p:sp>
+      <p:sp>
+        <p:nvSpPr>
+          <p:cNvPr id="277" name="Google Shape;277;p38"/>
+          <p:cNvSpPr/>
+          <p:nvPr/>
+        </p:nvSpPr>
+        <p:spPr>
+          <a:xfrm>
+            <a:off x="5827858" y="3316906"/>
+            <a:ext cx="2235300" cy="1469700"/>
+          </a:xfrm>
+          <a:prstGeom prst="roundRect">
+            <a:avLst>
+              <a:gd fmla="val 16667" name="adj"/>
+            </a:avLst>
+          </a:prstGeom>
+          <a:solidFill>
+            <a:srgbClr val="D8D8D8"/>
+          </a:solidFill>
+          <a:ln cap="flat" cmpd="sng" w="19050">
+            <a:solidFill>
+              <a:srgbClr val="082836"/>
+            </a:solidFill>
+            <a:prstDash val="solid"/>
+            <a:miter lim="8000"/>
+            <a:headEnd len="sm" w="sm" type="none"/>
+            <a:tailEnd len="sm" w="sm" type="none"/>
+          </a:ln>
+          <a:effectLst>
+            <a:outerShdw blurRad="50800" rotWithShape="0" algn="tl" dir="2700000" dist="38100">
+              <a:srgbClr val="000000">
+                <a:alpha val="40000"/>
+              </a:srgbClr>
+            </a:outerShdw>
+          </a:effectLst>
+        </p:spPr>
+        <p:txBody>
+          <a:bodyPr anchorCtr="0" anchor="ctr" bIns="34275" lIns="68575" spcFirstLastPara="1" rIns="68575" wrap="square" tIns="34275">
+            <a:noAutofit/>
+          </a:bodyPr>
+          <a:lstStyle/>
+          <a:p>
+            <a:pPr indent="0" lvl="0" marL="0" marR="0" rtl="0" algn="ctr">
+              <a:spcBef>
+                <a:spcPts val="0"/>
+              </a:spcBef>
+              <a:spcAft>
+                <a:spcPts val="0"/>
+              </a:spcAft>
+              <a:buNone/>
+            </a:pPr>
+            <a:r>
+              <a:t/>
+            </a:r>
+            <a:endParaRPr sz="1400">
+              <a:solidFill>
+                <a:schemeClr val="lt1"/>
+              </a:solidFill>
+              <a:latin typeface="Arial"/>
+              <a:ea typeface="Arial"/>
+              <a:cs typeface="Arial"/>
+              <a:sym typeface="Arial"/>
+            </a:endParaRPr>
+          </a:p>
+        </p:txBody>
+      </p:sp>
+      <p:sp>
+        <p:nvSpPr>
+          <p:cNvPr id="278" name="Google Shape;278;p38"/>
+          <p:cNvSpPr txBox="1"/>
+          <p:nvPr/>
+        </p:nvSpPr>
+        <p:spPr>
+          <a:xfrm>
+            <a:off x="537006" y="3478427"/>
+            <a:ext cx="1871400" cy="284700"/>
+          </a:xfrm>
+          <a:prstGeom prst="rect">
+            <a:avLst/>
+          </a:prstGeom>
+          <a:noFill/>
+          <a:ln>
+            <a:noFill/>
+          </a:ln>
+        </p:spPr>
+        <p:txBody>
+          <a:bodyPr anchorCtr="0" anchor="t" bIns="34275" lIns="68575" spcFirstLastPara="1" rIns="68575" wrap="square" tIns="34275">
+            <a:spAutoFit/>
+          </a:bodyPr>
+          <a:lstStyle/>
+          <a:p>
+            <a:pPr indent="0" lvl="0" marL="0" marR="0" rtl="0" algn="l">
+              <a:spcBef>
+                <a:spcPts val="0"/>
+              </a:spcBef>
+              <a:spcAft>
+                <a:spcPts val="0"/>
+              </a:spcAft>
+              <a:buNone/>
+            </a:pPr>
+            <a:r>
+              <a:rPr b="1" lang="en" sz="1400">
+                <a:solidFill>
+                  <a:schemeClr val="dk1"/>
+                </a:solidFill>
+                <a:latin typeface="Arial"/>
+                <a:ea typeface="Arial"/>
+                <a:cs typeface="Arial"/>
+                <a:sym typeface="Arial"/>
+              </a:rPr>
+              <a:t>1. MAE</a:t>
+            </a:r>
+            <a:endParaRPr b="1" sz="1400">
+              <a:solidFill>
+                <a:schemeClr val="dk1"/>
+              </a:solidFill>
+              <a:latin typeface="Arial"/>
+              <a:ea typeface="Arial"/>
+              <a:cs typeface="Arial"/>
+              <a:sym typeface="Arial"/>
+            </a:endParaRPr>
+          </a:p>
+        </p:txBody>
+      </p:sp>
+      <p:sp>
+        <p:nvSpPr>
+          <p:cNvPr id="279" name="Google Shape;279;p38"/>
+          <p:cNvSpPr txBox="1"/>
+          <p:nvPr/>
+        </p:nvSpPr>
+        <p:spPr>
+          <a:xfrm>
+            <a:off x="591671" y="3782310"/>
+            <a:ext cx="2408400" cy="1023600"/>
+          </a:xfrm>
+          <a:prstGeom prst="rect">
+            <a:avLst/>
+          </a:prstGeom>
+          <a:noFill/>
+          <a:ln>
+            <a:noFill/>
+          </a:ln>
+        </p:spPr>
+        <p:txBody>
+          <a:bodyPr anchorCtr="0" anchor="t" bIns="34275" lIns="68575" spcFirstLastPara="1" rIns="68575" wrap="square" tIns="34275">
+            <a:spAutoFit/>
+          </a:bodyPr>
+          <a:lstStyle/>
+          <a:p>
+            <a:pPr indent="0" lvl="0" marL="0" marR="0" rtl="0" algn="l">
+              <a:spcBef>
+                <a:spcPts val="0"/>
+              </a:spcBef>
+              <a:spcAft>
+                <a:spcPts val="0"/>
+              </a:spcAft>
+              <a:buNone/>
+            </a:pPr>
+            <a:r>
+              <a:rPr lang="en" sz="1200">
+                <a:solidFill>
+                  <a:schemeClr val="dk1"/>
+                </a:solidFill>
+                <a:latin typeface="Arial"/>
+                <a:ea typeface="Arial"/>
+                <a:cs typeface="Arial"/>
+                <a:sym typeface="Arial"/>
+              </a:rPr>
+              <a:t>Average absolute difference between actual and predicted costs. Lower MAE indicates </a:t>
+            </a:r>
+            <a:endParaRPr sz="1100"/>
+          </a:p>
+          <a:p>
+            <a:pPr indent="0" lvl="0" marL="0" marR="0" rtl="0" algn="l">
+              <a:spcBef>
+                <a:spcPts val="0"/>
+              </a:spcBef>
+              <a:spcAft>
+                <a:spcPts val="0"/>
+              </a:spcAft>
+              <a:buNone/>
+            </a:pPr>
+            <a:r>
+              <a:rPr lang="en" sz="1200">
+                <a:solidFill>
+                  <a:schemeClr val="dk1"/>
+                </a:solidFill>
+                <a:latin typeface="Arial"/>
+                <a:ea typeface="Arial"/>
+                <a:cs typeface="Arial"/>
+                <a:sym typeface="Arial"/>
+              </a:rPr>
+              <a:t>better prediction</a:t>
+            </a:r>
+            <a:endParaRPr sz="1100"/>
+          </a:p>
+          <a:p>
+            <a:pPr indent="0" lvl="0" marL="0" marR="0" rtl="0" algn="l">
+              <a:spcBef>
+                <a:spcPts val="0"/>
+              </a:spcBef>
+              <a:spcAft>
+                <a:spcPts val="0"/>
+              </a:spcAft>
+              <a:buNone/>
+            </a:pPr>
+            <a:r>
+              <a:t/>
+            </a:r>
+            <a:endParaRPr sz="1400">
+              <a:solidFill>
+                <a:schemeClr val="dk1"/>
+              </a:solidFill>
+              <a:latin typeface="Arial"/>
+              <a:ea typeface="Arial"/>
+              <a:cs typeface="Arial"/>
+              <a:sym typeface="Arial"/>
+            </a:endParaRPr>
+          </a:p>
+        </p:txBody>
+      </p:sp>
+      <p:sp>
+        <p:nvSpPr>
+          <p:cNvPr id="280" name="Google Shape;280;p38"/>
+          <p:cNvSpPr txBox="1"/>
+          <p:nvPr/>
+        </p:nvSpPr>
+        <p:spPr>
+          <a:xfrm>
+            <a:off x="3181687" y="3412660"/>
+            <a:ext cx="1872900" cy="300000"/>
+          </a:xfrm>
+          <a:prstGeom prst="rect">
+            <a:avLst/>
+          </a:prstGeom>
+          <a:noFill/>
+          <a:ln>
+            <a:noFill/>
+          </a:ln>
+        </p:spPr>
+        <p:txBody>
+          <a:bodyPr anchorCtr="0" anchor="t" bIns="34275" lIns="68575" spcFirstLastPara="1" rIns="68575" wrap="square" tIns="34275">
+            <a:spAutoFit/>
+          </a:bodyPr>
+          <a:lstStyle/>
+          <a:p>
+            <a:pPr indent="0" lvl="0" marL="0" marR="0" rtl="0" algn="l">
+              <a:spcBef>
+                <a:spcPts val="0"/>
+              </a:spcBef>
+              <a:spcAft>
+                <a:spcPts val="0"/>
+              </a:spcAft>
+              <a:buNone/>
+            </a:pPr>
+            <a:r>
+              <a:rPr b="1" lang="en" sz="1500">
+                <a:solidFill>
+                  <a:schemeClr val="dk1"/>
+                </a:solidFill>
+                <a:latin typeface="Arial"/>
+                <a:ea typeface="Arial"/>
+                <a:cs typeface="Arial"/>
+                <a:sym typeface="Arial"/>
+              </a:rPr>
+              <a:t>2. RMSE</a:t>
+            </a:r>
+            <a:endParaRPr b="1" sz="1500">
+              <a:solidFill>
+                <a:schemeClr val="dk1"/>
+              </a:solidFill>
+              <a:latin typeface="Arial"/>
+              <a:ea typeface="Arial"/>
+              <a:cs typeface="Arial"/>
+              <a:sym typeface="Arial"/>
+            </a:endParaRPr>
+          </a:p>
+        </p:txBody>
+      </p:sp>
+      <p:sp>
+        <p:nvSpPr>
           <p:cNvPr id="281" name="Google Shape;281;p38"/>
+          <p:cNvSpPr txBox="1"/>
+          <p:nvPr/>
+        </p:nvSpPr>
+        <p:spPr>
+          <a:xfrm>
+            <a:off x="3273554" y="3763116"/>
+            <a:ext cx="1963800" cy="992700"/>
+          </a:xfrm>
+          <a:prstGeom prst="rect">
+            <a:avLst/>
+          </a:prstGeom>
+          <a:noFill/>
+          <a:ln>
+            <a:noFill/>
+          </a:ln>
+        </p:spPr>
+        <p:txBody>
+          <a:bodyPr anchorCtr="0" anchor="t" bIns="34275" lIns="68575" spcFirstLastPara="1" rIns="68575" wrap="square" tIns="34275">
+            <a:spAutoFit/>
+          </a:bodyPr>
+          <a:lstStyle/>
+          <a:p>
+            <a:pPr indent="0" lvl="0" marL="0" marR="0" rtl="0" algn="l">
+              <a:spcBef>
+                <a:spcPts val="0"/>
+              </a:spcBef>
+              <a:spcAft>
+                <a:spcPts val="0"/>
+              </a:spcAft>
+              <a:buNone/>
+            </a:pPr>
+            <a:r>
+              <a:rPr lang="en" sz="1200">
+                <a:solidFill>
+                  <a:schemeClr val="dk1"/>
+                </a:solidFill>
+                <a:latin typeface="Arial"/>
+                <a:ea typeface="Arial"/>
+                <a:cs typeface="Arial"/>
+                <a:sym typeface="Arial"/>
+              </a:rPr>
+              <a:t>Measures the difference between actual and predicted values, giving more penalty to larger errors..</a:t>
+            </a:r>
+            <a:endParaRPr sz="1400">
+              <a:solidFill>
+                <a:schemeClr val="dk1"/>
+              </a:solidFill>
+              <a:latin typeface="Arial"/>
+              <a:ea typeface="Arial"/>
+              <a:cs typeface="Arial"/>
+              <a:sym typeface="Arial"/>
+            </a:endParaRPr>
+          </a:p>
+        </p:txBody>
+      </p:sp>
+      <p:sp>
+        <p:nvSpPr>
+          <p:cNvPr id="282" name="Google Shape;282;p38"/>
+          <p:cNvSpPr txBox="1"/>
+          <p:nvPr/>
+        </p:nvSpPr>
+        <p:spPr>
+          <a:xfrm>
+            <a:off x="5827850" y="3412654"/>
+            <a:ext cx="1963800" cy="515700"/>
+          </a:xfrm>
+          <a:prstGeom prst="rect">
+            <a:avLst/>
+          </a:prstGeom>
+          <a:noFill/>
+          <a:ln>
+            <a:noFill/>
+          </a:ln>
+        </p:spPr>
+        <p:txBody>
+          <a:bodyPr anchorCtr="0" anchor="t" bIns="34275" lIns="68575" spcFirstLastPara="1" rIns="68575" wrap="square" tIns="34275">
+            <a:spAutoFit/>
+          </a:bodyPr>
+          <a:lstStyle/>
+          <a:p>
+            <a:pPr indent="0" lvl="0" marL="0" marR="0" rtl="0" algn="l">
+              <a:spcBef>
+                <a:spcPts val="0"/>
+              </a:spcBef>
+              <a:spcAft>
+                <a:spcPts val="0"/>
+              </a:spcAft>
+              <a:buNone/>
+            </a:pPr>
+            <a:r>
+              <a:rPr b="1" lang="en" sz="1500">
+                <a:solidFill>
+                  <a:schemeClr val="dk1"/>
+                </a:solidFill>
+                <a:latin typeface="Arial"/>
+                <a:ea typeface="Arial"/>
+                <a:cs typeface="Arial"/>
+                <a:sym typeface="Arial"/>
+              </a:rPr>
+              <a:t>3. R² Score</a:t>
+            </a:r>
+            <a:endParaRPr sz="1500">
+              <a:solidFill>
+                <a:schemeClr val="dk1"/>
+              </a:solidFill>
+              <a:latin typeface="Arial"/>
+              <a:ea typeface="Arial"/>
+              <a:cs typeface="Arial"/>
+              <a:sym typeface="Arial"/>
+            </a:endParaRPr>
+          </a:p>
+          <a:p>
+            <a:pPr indent="0" lvl="0" marL="0" marR="0" rtl="0" algn="l">
+              <a:spcBef>
+                <a:spcPts val="0"/>
+              </a:spcBef>
+              <a:spcAft>
+                <a:spcPts val="0"/>
+              </a:spcAft>
+              <a:buNone/>
+            </a:pPr>
+            <a:r>
+              <a:t/>
+            </a:r>
+            <a:endParaRPr sz="1400">
+              <a:solidFill>
+                <a:schemeClr val="dk1"/>
+              </a:solidFill>
+              <a:latin typeface="Arial"/>
+              <a:ea typeface="Arial"/>
+              <a:cs typeface="Arial"/>
+              <a:sym typeface="Arial"/>
+            </a:endParaRPr>
+          </a:p>
+        </p:txBody>
+      </p:sp>
+      <p:sp>
+        <p:nvSpPr>
+          <p:cNvPr id="283" name="Google Shape;283;p38"/>
+          <p:cNvSpPr txBox="1"/>
+          <p:nvPr/>
+        </p:nvSpPr>
+        <p:spPr>
+          <a:xfrm>
+            <a:off x="5884150" y="3774722"/>
+            <a:ext cx="2122800" cy="1054200"/>
+          </a:xfrm>
+          <a:prstGeom prst="rect">
+            <a:avLst/>
+          </a:prstGeom>
+          <a:noFill/>
+          <a:ln>
+            <a:noFill/>
+          </a:ln>
+        </p:spPr>
+        <p:txBody>
+          <a:bodyPr anchorCtr="0" anchor="t" bIns="34275" lIns="68575" spcFirstLastPara="1" rIns="68575" wrap="square" tIns="34275">
+            <a:spAutoFit/>
+          </a:bodyPr>
+          <a:lstStyle/>
+          <a:p>
+            <a:pPr indent="0" lvl="0" marL="0" marR="0" rtl="0" algn="l">
+              <a:spcBef>
+                <a:spcPts val="0"/>
+              </a:spcBef>
+              <a:spcAft>
+                <a:spcPts val="0"/>
+              </a:spcAft>
+              <a:buNone/>
+            </a:pPr>
+            <a:r>
+              <a:rPr lang="en" sz="1200">
+                <a:solidFill>
+                  <a:schemeClr val="dk1"/>
+                </a:solidFill>
+                <a:latin typeface="Arial"/>
+                <a:ea typeface="Arial"/>
+                <a:cs typeface="Arial"/>
+                <a:sym typeface="Arial"/>
+              </a:rPr>
+              <a:t>Shows how well the model explains variations in the target cost. A value closer to 1 indicates a better fit</a:t>
+            </a:r>
+            <a:r>
+              <a:rPr lang="en" sz="1400">
+                <a:solidFill>
+                  <a:schemeClr val="dk1"/>
+                </a:solidFill>
+                <a:latin typeface="Arial"/>
+                <a:ea typeface="Arial"/>
+                <a:cs typeface="Arial"/>
+                <a:sym typeface="Arial"/>
+              </a:rPr>
+              <a:t>.</a:t>
+            </a:r>
+            <a:endParaRPr sz="1100"/>
+          </a:p>
+          <a:p>
+            <a:pPr indent="0" lvl="0" marL="0" marR="0" rtl="0" algn="l">
+              <a:spcBef>
+                <a:spcPts val="0"/>
+              </a:spcBef>
+              <a:spcAft>
+                <a:spcPts val="0"/>
+              </a:spcAft>
+              <a:buNone/>
+            </a:pPr>
+            <a:r>
+              <a:t/>
+            </a:r>
+            <a:endParaRPr sz="1400">
+              <a:solidFill>
+                <a:schemeClr val="dk1"/>
+              </a:solidFill>
+              <a:latin typeface="Arial"/>
+              <a:ea typeface="Arial"/>
+              <a:cs typeface="Arial"/>
+              <a:sym typeface="Arial"/>
+            </a:endParaRPr>
+          </a:p>
+        </p:txBody>
+      </p:sp>
+    </p:spTree>
+  </p:cSld>
+  <p:clrMapOvr>
+    <a:masterClrMapping/>
+  </p:clrMapOvr>
+</p:sld>
+</file>
+
+<file path=ppt/slides/slide11.xml><?xml version="1.0" encoding="utf-8"?>
+<p:sld xmlns:a="http://schemas.openxmlformats.org/drawingml/2006/main" xmlns:r="http://schemas.openxmlformats.org/officeDocument/2006/relationships" xmlns:mc="http://schemas.openxmlformats.org/markup-compatibility/2006" xmlns:mv="urn:schemas-microsoft-com:mac:vml" xmlns:p="http://schemas.openxmlformats.org/presentationml/2006/main" xmlns:c="http://schemas.openxmlformats.org/drawingml/2006/chart" xmlns:dgm="http://schemas.openxmlformats.org/drawingml/2006/diagram" xmlns:o="urn:schemas-microsoft-com:office:office" xmlns:v="urn:schemas-microsoft-com:vml" xmlns:pvml="urn:schemas-microsoft-com:office:powerpoint" xmlns:com="http://schemas.openxmlformats.org/drawingml/2006/compatibility" xmlns:p14="http://schemas.microsoft.com/office/powerpoint/2010/main" xmlns:p15="http://schemas.microsoft.com/office/powerpoint/2012/main" xmlns:ahyp="http://schemas.microsoft.com/office/drawing/2018/hyperlinkcolor">
+  <p:cSld>
+    <p:spTree>
+      <p:nvGrpSpPr>
+        <p:cNvPr id="288" name="Shape 288"/>
+        <p:cNvGrpSpPr/>
+        <p:nvPr/>
+      </p:nvGrpSpPr>
+      <p:grpSpPr>
+        <a:xfrm>
+          <a:off x="0" y="0"/>
+          <a:ext cx="0" cy="0"/>
+          <a:chOff x="0" y="0"/>
+          <a:chExt cx="0" cy="0"/>
+        </a:xfrm>
+      </p:grpSpPr>
+      <p:sp>
+        <p:nvSpPr>
+          <p:cNvPr id="289" name="Google Shape;289;p39"/>
           <p:cNvSpPr txBox="1"/>
           <p:nvPr>
             <p:ph type="ctrTitle"/>
@@ -20497,7 +22144,7 @@
       </p:sp>
       <p:sp>
         <p:nvSpPr>
-          <p:cNvPr id="282" name="Google Shape;282;p38"/>
+          <p:cNvPr id="290" name="Google Shape;290;p39"/>
           <p:cNvSpPr/>
           <p:nvPr/>
         </p:nvSpPr>
@@ -20554,7 +22201,7 @@
       </p:sp>
       <p:sp>
         <p:nvSpPr>
-          <p:cNvPr id="283" name="Google Shape;283;p38"/>
+          <p:cNvPr id="291" name="Google Shape;291;p39"/>
           <p:cNvSpPr txBox="1"/>
           <p:nvPr/>
         </p:nvSpPr>
@@ -20603,7 +22250,7 @@
       </p:sp>
       <p:sp>
         <p:nvSpPr>
-          <p:cNvPr id="284" name="Google Shape;284;p38"/>
+          <p:cNvPr id="292" name="Google Shape;292;p39"/>
           <p:cNvSpPr txBox="1"/>
           <p:nvPr/>
         </p:nvSpPr>
@@ -20675,7 +22322,7 @@
       </p:sp>
       <p:sp>
         <p:nvSpPr>
-          <p:cNvPr id="285" name="Google Shape;285;p38"/>
+          <p:cNvPr id="293" name="Google Shape;293;p39"/>
           <p:cNvSpPr txBox="1"/>
           <p:nvPr/>
         </p:nvSpPr>
@@ -20747,7 +22394,7 @@
       </p:sp>
       <p:sp>
         <p:nvSpPr>
-          <p:cNvPr id="286" name="Google Shape;286;p38"/>
+          <p:cNvPr id="294" name="Google Shape;294;p39"/>
           <p:cNvSpPr txBox="1"/>
           <p:nvPr/>
         </p:nvSpPr>
@@ -20819,7 +22466,7 @@
       </p:sp>
       <p:graphicFrame>
         <p:nvGraphicFramePr>
-          <p:cNvPr id="287" name="Google Shape;287;p38"/>
+          <p:cNvPr id="295" name="Google Shape;295;p39"/>
           <p:cNvGraphicFramePr/>
           <p:nvPr/>
         </p:nvGraphicFramePr>
@@ -20832,7 +22479,7 @@
             <a:tbl>
               <a:tblPr bandRow="1" firstRow="1">
                 <a:noFill/>
-                <a:tableStyleId>{33845540-4549-48E9-B17C-92D9A22C0115}</a:tableStyleId>
+                <a:tableStyleId>{3BC0AAAB-1D53-4040-A699-5D96CEA510C0}</a:tableStyleId>
               </a:tblPr>
               <a:tblGrid>
                 <a:gridCol w="3789000"/>
@@ -21087,7 +22734,7 @@
       </p:graphicFrame>
       <p:sp>
         <p:nvSpPr>
-          <p:cNvPr id="288" name="Google Shape;288;p38"/>
+          <p:cNvPr id="296" name="Google Shape;296;p39"/>
           <p:cNvSpPr txBox="1"/>
           <p:nvPr/>
         </p:nvSpPr>
@@ -21132,235 +22779,6 @@
               <a:t>Model performance</a:t>
             </a:r>
             <a:endParaRPr sz="1100"/>
-          </a:p>
-        </p:txBody>
-      </p:sp>
-    </p:spTree>
-  </p:cSld>
-  <p:clrMapOvr>
-    <a:masterClrMapping/>
-  </p:clrMapOvr>
-</p:sld>
-</file>
-
-<file path=ppt/slides/slide11.xml><?xml version="1.0" encoding="utf-8"?>
-<p:sld xmlns:a="http://schemas.openxmlformats.org/drawingml/2006/main" xmlns:r="http://schemas.openxmlformats.org/officeDocument/2006/relationships" xmlns:mc="http://schemas.openxmlformats.org/markup-compatibility/2006" xmlns:mv="urn:schemas-microsoft-com:mac:vml" xmlns:p="http://schemas.openxmlformats.org/presentationml/2006/main" xmlns:c="http://schemas.openxmlformats.org/drawingml/2006/chart" xmlns:dgm="http://schemas.openxmlformats.org/drawingml/2006/diagram" xmlns:o="urn:schemas-microsoft-com:office:office" xmlns:v="urn:schemas-microsoft-com:vml" xmlns:pvml="urn:schemas-microsoft-com:office:powerpoint" xmlns:com="http://schemas.openxmlformats.org/drawingml/2006/compatibility" xmlns:p14="http://schemas.microsoft.com/office/powerpoint/2010/main" xmlns:p15="http://schemas.microsoft.com/office/powerpoint/2012/main" xmlns:ahyp="http://schemas.microsoft.com/office/drawing/2018/hyperlinkcolor">
-  <p:cSld>
-    <p:bg>
-      <p:bgPr>
-        <a:solidFill>
-          <a:srgbClr val="FFFFFF"/>
-        </a:solidFill>
-      </p:bgPr>
-    </p:bg>
-    <p:spTree>
-      <p:nvGrpSpPr>
-        <p:cNvPr id="293" name="Shape 293"/>
-        <p:cNvGrpSpPr/>
-        <p:nvPr/>
-      </p:nvGrpSpPr>
-      <p:grpSpPr>
-        <a:xfrm>
-          <a:off x="0" y="0"/>
-          <a:ext cx="0" cy="0"/>
-          <a:chOff x="0" y="0"/>
-          <a:chExt cx="0" cy="0"/>
-        </a:xfrm>
-      </p:grpSpPr>
-      <p:sp>
-        <p:nvSpPr>
-          <p:cNvPr id="294" name="Google Shape;294;p39"/>
-          <p:cNvSpPr/>
-          <p:nvPr/>
-        </p:nvSpPr>
-        <p:spPr>
-          <a:xfrm>
-            <a:off x="609600" y="1697355"/>
-            <a:ext cx="8162544" cy="205740"/>
-          </a:xfrm>
-          <a:prstGeom prst="rect">
-            <a:avLst/>
-          </a:prstGeom>
-          <a:noFill/>
-          <a:ln>
-            <a:noFill/>
-          </a:ln>
-        </p:spPr>
-        <p:txBody>
-          <a:bodyPr anchorCtr="0" anchor="t" bIns="0" lIns="0" spcFirstLastPara="1" rIns="0" wrap="square" tIns="0">
-            <a:noAutofit/>
-          </a:bodyPr>
-          <a:lstStyle/>
-          <a:p>
-            <a:pPr indent="0" lvl="0" marL="0" marR="0" rtl="0" algn="l">
-              <a:lnSpc>
-                <a:spcPct val="140000"/>
-              </a:lnSpc>
-              <a:spcBef>
-                <a:spcPts val="0"/>
-              </a:spcBef>
-              <a:spcAft>
-                <a:spcPts val="0"/>
-              </a:spcAft>
-              <a:buClr>
-                <a:srgbClr val="B85A14"/>
-              </a:buClr>
-              <a:buSzPts val="1100"/>
-              <a:buFont typeface="Arial"/>
-              <a:buNone/>
-            </a:pPr>
-            <a:r>
-              <a:rPr b="0" i="0" lang="en" sz="1100" u="none" cap="none" strike="noStrike">
-                <a:solidFill>
-                  <a:srgbClr val="B85A14"/>
-                </a:solidFill>
-                <a:latin typeface="Arial"/>
-                <a:ea typeface="Arial"/>
-                <a:cs typeface="Arial"/>
-                <a:sym typeface="Arial"/>
-              </a:rPr>
-              <a:t>MACHINE LEARNING PROJECT · MODEL EVALUATION</a:t>
-            </a:r>
-            <a:endParaRPr b="0" i="0" sz="1100" u="none" cap="none" strike="noStrike">
-              <a:solidFill>
-                <a:schemeClr val="dk1"/>
-              </a:solidFill>
-              <a:latin typeface="Arial"/>
-              <a:ea typeface="Arial"/>
-              <a:cs typeface="Arial"/>
-              <a:sym typeface="Arial"/>
-            </a:endParaRPr>
-          </a:p>
-        </p:txBody>
-      </p:sp>
-      <p:sp>
-        <p:nvSpPr>
-          <p:cNvPr id="295" name="Google Shape;295;p39"/>
-          <p:cNvSpPr txBox="1"/>
-          <p:nvPr>
-            <p:ph type="title"/>
-          </p:nvPr>
-        </p:nvSpPr>
-        <p:spPr>
-          <a:xfrm>
-            <a:off x="609600" y="2112645"/>
-            <a:ext cx="8162544" cy="579120"/>
-          </a:xfrm>
-          <a:prstGeom prst="rect">
-            <a:avLst/>
-          </a:prstGeom>
-          <a:noFill/>
-          <a:ln>
-            <a:noFill/>
-          </a:ln>
-        </p:spPr>
-        <p:txBody>
-          <a:bodyPr anchorCtr="0" anchor="t" bIns="0" lIns="0" spcFirstLastPara="1" rIns="0" wrap="square" tIns="0">
-            <a:normAutofit fontScale="90000"/>
-          </a:bodyPr>
-          <a:lstStyle/>
-          <a:p>
-            <a:pPr indent="0" lvl="0" marL="0" rtl="0" algn="l">
-              <a:lnSpc>
-                <a:spcPct val="104999"/>
-              </a:lnSpc>
-              <a:spcBef>
-                <a:spcPts val="0"/>
-              </a:spcBef>
-              <a:spcAft>
-                <a:spcPts val="0"/>
-              </a:spcAft>
-              <a:buClr>
-                <a:srgbClr val="1B2A3A"/>
-              </a:buClr>
-              <a:buSzPct val="100000"/>
-              <a:buFont typeface="Georgia"/>
-              <a:buNone/>
-            </a:pPr>
-            <a:r>
-              <a:rPr b="1" i="0" lang="en" sz="4200">
-                <a:solidFill>
-                  <a:srgbClr val="1B2A3A"/>
-                </a:solidFill>
-                <a:latin typeface="Arial"/>
-                <a:ea typeface="Arial"/>
-                <a:cs typeface="Arial"/>
-                <a:sym typeface="Arial"/>
-              </a:rPr>
-              <a:t>Decision Tree Regressor</a:t>
-            </a:r>
-            <a:endParaRPr b="1" sz="4200">
-              <a:latin typeface="Arial"/>
-              <a:ea typeface="Arial"/>
-              <a:cs typeface="Arial"/>
-              <a:sym typeface="Arial"/>
-            </a:endParaRPr>
-          </a:p>
-        </p:txBody>
-      </p:sp>
-      <p:sp>
-        <p:nvSpPr>
-          <p:cNvPr id="296" name="Google Shape;296;p39"/>
-          <p:cNvSpPr/>
-          <p:nvPr/>
-        </p:nvSpPr>
-        <p:spPr>
-          <a:xfrm>
-            <a:off x="609600" y="2901315"/>
-            <a:ext cx="6376988" cy="563880"/>
-          </a:xfrm>
-          <a:prstGeom prst="rect">
-            <a:avLst/>
-          </a:prstGeom>
-          <a:noFill/>
-          <a:ln>
-            <a:noFill/>
-          </a:ln>
-        </p:spPr>
-        <p:txBody>
-          <a:bodyPr anchorCtr="0" anchor="t" bIns="0" lIns="0" spcFirstLastPara="1" rIns="0" wrap="square" tIns="0">
-            <a:noAutofit/>
-          </a:bodyPr>
-          <a:lstStyle/>
-          <a:p>
-            <a:pPr indent="0" lvl="0" marL="0" marR="0" rtl="0" algn="l">
-              <a:lnSpc>
-                <a:spcPct val="130000"/>
-              </a:lnSpc>
-              <a:spcBef>
-                <a:spcPts val="0"/>
-              </a:spcBef>
-              <a:spcAft>
-                <a:spcPts val="0"/>
-              </a:spcAft>
-              <a:buClr>
-                <a:srgbClr val="5B6672"/>
-              </a:buClr>
-              <a:buSzPts val="1700"/>
-              <a:buFont typeface="Arial"/>
-              <a:buNone/>
-            </a:pPr>
-            <a:r>
-              <a:rPr b="0" i="0" lang="en" sz="1700" u="none" cap="none" strike="noStrike">
-                <a:solidFill>
-                  <a:srgbClr val="5B6672"/>
-                </a:solidFill>
-                <a:latin typeface="Arial"/>
-                <a:ea typeface="Arial"/>
-                <a:cs typeface="Arial"/>
-                <a:sym typeface="Arial"/>
-              </a:rPr>
-              <a:t>Implementation and evaluation for painting cost (amount in INR) prediction</a:t>
-            </a:r>
-            <a:endParaRPr b="0" i="0" sz="1700" u="none" cap="none" strike="noStrike">
-              <a:solidFill>
-                <a:schemeClr val="dk1"/>
-              </a:solidFill>
-              <a:latin typeface="Arial"/>
-              <a:ea typeface="Arial"/>
-              <a:cs typeface="Arial"/>
-              <a:sym typeface="Arial"/>
-            </a:endParaRPr>
           </a:p>
         </p:txBody>
       </p:sp>
@@ -21399,6 +22817,235 @@
       <p:sp>
         <p:nvSpPr>
           <p:cNvPr id="302" name="Google Shape;302;p40"/>
+          <p:cNvSpPr/>
+          <p:nvPr/>
+        </p:nvSpPr>
+        <p:spPr>
+          <a:xfrm>
+            <a:off x="609600" y="1697355"/>
+            <a:ext cx="8162544" cy="205740"/>
+          </a:xfrm>
+          <a:prstGeom prst="rect">
+            <a:avLst/>
+          </a:prstGeom>
+          <a:noFill/>
+          <a:ln>
+            <a:noFill/>
+          </a:ln>
+        </p:spPr>
+        <p:txBody>
+          <a:bodyPr anchorCtr="0" anchor="t" bIns="0" lIns="0" spcFirstLastPara="1" rIns="0" wrap="square" tIns="0">
+            <a:noAutofit/>
+          </a:bodyPr>
+          <a:lstStyle/>
+          <a:p>
+            <a:pPr indent="0" lvl="0" marL="0" marR="0" rtl="0" algn="l">
+              <a:lnSpc>
+                <a:spcPct val="140000"/>
+              </a:lnSpc>
+              <a:spcBef>
+                <a:spcPts val="0"/>
+              </a:spcBef>
+              <a:spcAft>
+                <a:spcPts val="0"/>
+              </a:spcAft>
+              <a:buClr>
+                <a:srgbClr val="B85A14"/>
+              </a:buClr>
+              <a:buSzPts val="1100"/>
+              <a:buFont typeface="Arial"/>
+              <a:buNone/>
+            </a:pPr>
+            <a:r>
+              <a:rPr b="0" i="0" lang="en" sz="1100" u="none" cap="none" strike="noStrike">
+                <a:solidFill>
+                  <a:srgbClr val="B85A14"/>
+                </a:solidFill>
+                <a:latin typeface="Arial"/>
+                <a:ea typeface="Arial"/>
+                <a:cs typeface="Arial"/>
+                <a:sym typeface="Arial"/>
+              </a:rPr>
+              <a:t>MACHINE LEARNING PROJECT · MODEL EVALUATION</a:t>
+            </a:r>
+            <a:endParaRPr b="0" i="0" sz="1100" u="none" cap="none" strike="noStrike">
+              <a:solidFill>
+                <a:schemeClr val="dk1"/>
+              </a:solidFill>
+              <a:latin typeface="Arial"/>
+              <a:ea typeface="Arial"/>
+              <a:cs typeface="Arial"/>
+              <a:sym typeface="Arial"/>
+            </a:endParaRPr>
+          </a:p>
+        </p:txBody>
+      </p:sp>
+      <p:sp>
+        <p:nvSpPr>
+          <p:cNvPr id="303" name="Google Shape;303;p40"/>
+          <p:cNvSpPr txBox="1"/>
+          <p:nvPr>
+            <p:ph type="title"/>
+          </p:nvPr>
+        </p:nvSpPr>
+        <p:spPr>
+          <a:xfrm>
+            <a:off x="609600" y="2112645"/>
+            <a:ext cx="8162544" cy="579120"/>
+          </a:xfrm>
+          <a:prstGeom prst="rect">
+            <a:avLst/>
+          </a:prstGeom>
+          <a:noFill/>
+          <a:ln>
+            <a:noFill/>
+          </a:ln>
+        </p:spPr>
+        <p:txBody>
+          <a:bodyPr anchorCtr="0" anchor="t" bIns="0" lIns="0" spcFirstLastPara="1" rIns="0" wrap="square" tIns="0">
+            <a:normAutofit fontScale="90000"/>
+          </a:bodyPr>
+          <a:lstStyle/>
+          <a:p>
+            <a:pPr indent="0" lvl="0" marL="0" rtl="0" algn="l">
+              <a:lnSpc>
+                <a:spcPct val="104999"/>
+              </a:lnSpc>
+              <a:spcBef>
+                <a:spcPts val="0"/>
+              </a:spcBef>
+              <a:spcAft>
+                <a:spcPts val="0"/>
+              </a:spcAft>
+              <a:buClr>
+                <a:srgbClr val="1B2A3A"/>
+              </a:buClr>
+              <a:buSzPct val="100000"/>
+              <a:buFont typeface="Georgia"/>
+              <a:buNone/>
+            </a:pPr>
+            <a:r>
+              <a:rPr b="1" i="0" lang="en" sz="4200">
+                <a:solidFill>
+                  <a:srgbClr val="1B2A3A"/>
+                </a:solidFill>
+                <a:latin typeface="Arial"/>
+                <a:ea typeface="Arial"/>
+                <a:cs typeface="Arial"/>
+                <a:sym typeface="Arial"/>
+              </a:rPr>
+              <a:t>Decision Tree Regressor</a:t>
+            </a:r>
+            <a:endParaRPr b="1" sz="4200">
+              <a:latin typeface="Arial"/>
+              <a:ea typeface="Arial"/>
+              <a:cs typeface="Arial"/>
+              <a:sym typeface="Arial"/>
+            </a:endParaRPr>
+          </a:p>
+        </p:txBody>
+      </p:sp>
+      <p:sp>
+        <p:nvSpPr>
+          <p:cNvPr id="304" name="Google Shape;304;p40"/>
+          <p:cNvSpPr/>
+          <p:nvPr/>
+        </p:nvSpPr>
+        <p:spPr>
+          <a:xfrm>
+            <a:off x="609600" y="2901315"/>
+            <a:ext cx="6376988" cy="563880"/>
+          </a:xfrm>
+          <a:prstGeom prst="rect">
+            <a:avLst/>
+          </a:prstGeom>
+          <a:noFill/>
+          <a:ln>
+            <a:noFill/>
+          </a:ln>
+        </p:spPr>
+        <p:txBody>
+          <a:bodyPr anchorCtr="0" anchor="t" bIns="0" lIns="0" spcFirstLastPara="1" rIns="0" wrap="square" tIns="0">
+            <a:noAutofit/>
+          </a:bodyPr>
+          <a:lstStyle/>
+          <a:p>
+            <a:pPr indent="0" lvl="0" marL="0" marR="0" rtl="0" algn="l">
+              <a:lnSpc>
+                <a:spcPct val="130000"/>
+              </a:lnSpc>
+              <a:spcBef>
+                <a:spcPts val="0"/>
+              </a:spcBef>
+              <a:spcAft>
+                <a:spcPts val="0"/>
+              </a:spcAft>
+              <a:buClr>
+                <a:srgbClr val="5B6672"/>
+              </a:buClr>
+              <a:buSzPts val="1700"/>
+              <a:buFont typeface="Arial"/>
+              <a:buNone/>
+            </a:pPr>
+            <a:r>
+              <a:rPr b="0" i="0" lang="en" sz="1700" u="none" cap="none" strike="noStrike">
+                <a:solidFill>
+                  <a:srgbClr val="5B6672"/>
+                </a:solidFill>
+                <a:latin typeface="Arial"/>
+                <a:ea typeface="Arial"/>
+                <a:cs typeface="Arial"/>
+                <a:sym typeface="Arial"/>
+              </a:rPr>
+              <a:t>Implementation and evaluation for painting cost (amount in INR) prediction</a:t>
+            </a:r>
+            <a:endParaRPr b="0" i="0" sz="1700" u="none" cap="none" strike="noStrike">
+              <a:solidFill>
+                <a:schemeClr val="dk1"/>
+              </a:solidFill>
+              <a:latin typeface="Arial"/>
+              <a:ea typeface="Arial"/>
+              <a:cs typeface="Arial"/>
+              <a:sym typeface="Arial"/>
+            </a:endParaRPr>
+          </a:p>
+        </p:txBody>
+      </p:sp>
+    </p:spTree>
+  </p:cSld>
+  <p:clrMapOvr>
+    <a:masterClrMapping/>
+  </p:clrMapOvr>
+</p:sld>
+</file>
+
+<file path=ppt/slides/slide13.xml><?xml version="1.0" encoding="utf-8"?>
+<p:sld xmlns:a="http://schemas.openxmlformats.org/drawingml/2006/main" xmlns:r="http://schemas.openxmlformats.org/officeDocument/2006/relationships" xmlns:mc="http://schemas.openxmlformats.org/markup-compatibility/2006" xmlns:mv="urn:schemas-microsoft-com:mac:vml" xmlns:p="http://schemas.openxmlformats.org/presentationml/2006/main" xmlns:c="http://schemas.openxmlformats.org/drawingml/2006/chart" xmlns:dgm="http://schemas.openxmlformats.org/drawingml/2006/diagram" xmlns:o="urn:schemas-microsoft-com:office:office" xmlns:v="urn:schemas-microsoft-com:vml" xmlns:pvml="urn:schemas-microsoft-com:office:powerpoint" xmlns:com="http://schemas.openxmlformats.org/drawingml/2006/compatibility" xmlns:p14="http://schemas.microsoft.com/office/powerpoint/2010/main" xmlns:p15="http://schemas.microsoft.com/office/powerpoint/2012/main" xmlns:ahyp="http://schemas.microsoft.com/office/drawing/2018/hyperlinkcolor">
+  <p:cSld>
+    <p:bg>
+      <p:bgPr>
+        <a:solidFill>
+          <a:srgbClr val="FFFFFF"/>
+        </a:solidFill>
+      </p:bgPr>
+    </p:bg>
+    <p:spTree>
+      <p:nvGrpSpPr>
+        <p:cNvPr id="309" name="Shape 309"/>
+        <p:cNvGrpSpPr/>
+        <p:nvPr/>
+      </p:nvGrpSpPr>
+      <p:grpSpPr>
+        <a:xfrm>
+          <a:off x="0" y="0"/>
+          <a:ext cx="0" cy="0"/>
+          <a:chOff x="0" y="0"/>
+          <a:chExt cx="0" cy="0"/>
+        </a:xfrm>
+      </p:grpSpPr>
+      <p:sp>
+        <p:nvSpPr>
+          <p:cNvPr id="310" name="Google Shape;310;p41"/>
           <p:cNvSpPr txBox="1"/>
           <p:nvPr>
             <p:ph type="title"/>
@@ -21472,7 +23119,7 @@
       </p:sp>
       <p:pic>
         <p:nvPicPr>
-          <p:cNvPr descr="depth plot" id="303" name="Google Shape;303;p40"/>
+          <p:cNvPr descr="depth plot" id="311" name="Google Shape;311;p41"/>
           <p:cNvPicPr preferRelativeResize="0"/>
           <p:nvPr/>
         </p:nvPicPr>
@@ -21499,7 +23146,7 @@
       </p:pic>
       <p:sp>
         <p:nvSpPr>
-          <p:cNvPr id="304" name="Google Shape;304;p40"/>
+          <p:cNvPr id="312" name="Google Shape;312;p41"/>
           <p:cNvSpPr/>
           <p:nvPr/>
         </p:nvSpPr>
@@ -21550,7 +23197,7 @@
       </p:sp>
       <p:sp>
         <p:nvSpPr>
-          <p:cNvPr id="305" name="Google Shape;305;p40"/>
+          <p:cNvPr id="313" name="Google Shape;313;p41"/>
           <p:cNvSpPr/>
           <p:nvPr/>
         </p:nvSpPr>
@@ -21616,7 +23263,7 @@
       </p:sp>
       <p:sp>
         <p:nvSpPr>
-          <p:cNvPr id="306" name="Google Shape;306;p40"/>
+          <p:cNvPr id="314" name="Google Shape;314;p41"/>
           <p:cNvSpPr/>
           <p:nvPr/>
         </p:nvSpPr>
@@ -21682,7 +23329,7 @@
       </p:sp>
       <p:sp>
         <p:nvSpPr>
-          <p:cNvPr id="307" name="Google Shape;307;p40"/>
+          <p:cNvPr id="315" name="Google Shape;315;p41"/>
           <p:cNvSpPr/>
           <p:nvPr/>
         </p:nvSpPr>
@@ -21748,7 +23395,7 @@
       </p:sp>
       <p:sp>
         <p:nvSpPr>
-          <p:cNvPr id="308" name="Google Shape;308;p40"/>
+          <p:cNvPr id="316" name="Google Shape;316;p41"/>
           <p:cNvSpPr/>
           <p:nvPr/>
         </p:nvSpPr>
@@ -21820,7 +23467,7 @@
 </p:sld>
 </file>
 
-<file path=ppt/slides/slide13.xml><?xml version="1.0" encoding="utf-8"?>
+<file path=ppt/slides/slide14.xml><?xml version="1.0" encoding="utf-8"?>
 <p:sld xmlns:a="http://schemas.openxmlformats.org/drawingml/2006/main" xmlns:r="http://schemas.openxmlformats.org/officeDocument/2006/relationships" xmlns:mc="http://schemas.openxmlformats.org/markup-compatibility/2006" xmlns:mv="urn:schemas-microsoft-com:mac:vml" xmlns:p="http://schemas.openxmlformats.org/presentationml/2006/main" xmlns:c="http://schemas.openxmlformats.org/drawingml/2006/chart" xmlns:dgm="http://schemas.openxmlformats.org/drawingml/2006/diagram" xmlns:o="urn:schemas-microsoft-com:office:office" xmlns:v="urn:schemas-microsoft-com:vml" xmlns:pvml="urn:schemas-microsoft-com:office:powerpoint" xmlns:com="http://schemas.openxmlformats.org/drawingml/2006/compatibility" xmlns:p14="http://schemas.microsoft.com/office/powerpoint/2010/main" xmlns:p15="http://schemas.microsoft.com/office/powerpoint/2012/main" xmlns:ahyp="http://schemas.microsoft.com/office/drawing/2018/hyperlinkcolor">
   <p:cSld>
     <p:bg>
@@ -21832,7 +23479,7 @@
     </p:bg>
     <p:spTree>
       <p:nvGrpSpPr>
-        <p:cNvPr id="313" name="Shape 313"/>
+        <p:cNvPr id="321" name="Shape 321"/>
         <p:cNvGrpSpPr/>
         <p:nvPr/>
       </p:nvGrpSpPr>
@@ -21846,7 +23493,7 @@
       </p:grpSpPr>
       <p:sp>
         <p:nvSpPr>
-          <p:cNvPr id="314" name="Google Shape;314;p41"/>
+          <p:cNvPr id="322" name="Google Shape;322;p42"/>
           <p:cNvSpPr txBox="1"/>
           <p:nvPr>
             <p:ph type="title"/>
@@ -21911,7 +23558,7 @@
       </p:sp>
       <p:pic>
         <p:nvPicPr>
-          <p:cNvPr descr="cv plot" id="315" name="Google Shape;315;p41"/>
+          <p:cNvPr descr="cv plot" id="323" name="Google Shape;323;p42"/>
           <p:cNvPicPr preferRelativeResize="0"/>
           <p:nvPr/>
         </p:nvPicPr>
@@ -21938,7 +23585,7 @@
       </p:pic>
       <p:graphicFrame>
         <p:nvGraphicFramePr>
-          <p:cNvPr id="316" name="Google Shape;316;p41"/>
+          <p:cNvPr id="324" name="Google Shape;324;p42"/>
           <p:cNvGraphicFramePr/>
           <p:nvPr/>
         </p:nvGraphicFramePr>
@@ -21951,7 +23598,7 @@
             <a:tbl>
               <a:tblPr>
                 <a:noFill/>
-                <a:tableStyleId>{D04487E2-8379-458E-89A5-9EFA157CD851}</a:tableStyleId>
+                <a:tableStyleId>{CF0F31A1-41D4-4AAF-B530-283CD640ACAE}</a:tableStyleId>
               </a:tblPr>
               <a:tblGrid>
                 <a:gridCol w="975350"/>
@@ -22953,7 +24600,7 @@
       </p:graphicFrame>
       <p:sp>
         <p:nvSpPr>
-          <p:cNvPr id="317" name="Google Shape;317;p41"/>
+          <p:cNvPr id="325" name="Google Shape;325;p42"/>
           <p:cNvSpPr/>
           <p:nvPr/>
         </p:nvSpPr>
@@ -23004,7 +24651,7 @@
       </p:sp>
       <p:sp>
         <p:nvSpPr>
-          <p:cNvPr id="318" name="Google Shape;318;p41"/>
+          <p:cNvPr id="326" name="Google Shape;326;p42"/>
           <p:cNvSpPr/>
           <p:nvPr/>
         </p:nvSpPr>
@@ -23070,7 +24717,7 @@
       </p:sp>
       <p:sp>
         <p:nvSpPr>
-          <p:cNvPr id="319" name="Google Shape;319;p41"/>
+          <p:cNvPr id="327" name="Google Shape;327;p42"/>
           <p:cNvSpPr/>
           <p:nvPr/>
         </p:nvSpPr>
@@ -23136,7 +24783,7 @@
       </p:sp>
       <p:sp>
         <p:nvSpPr>
-          <p:cNvPr id="320" name="Google Shape;320;p41"/>
+          <p:cNvPr id="328" name="Google Shape;328;p42"/>
           <p:cNvSpPr/>
           <p:nvPr/>
         </p:nvSpPr>
@@ -23208,7 +24855,7 @@
 </p:sld>
 </file>
 
-<file path=ppt/slides/slide14.xml><?xml version="1.0" encoding="utf-8"?>
+<file path=ppt/slides/slide15.xml><?xml version="1.0" encoding="utf-8"?>
 <p:sld xmlns:a="http://schemas.openxmlformats.org/drawingml/2006/main" xmlns:r="http://schemas.openxmlformats.org/officeDocument/2006/relationships" xmlns:mc="http://schemas.openxmlformats.org/markup-compatibility/2006" xmlns:mv="urn:schemas-microsoft-com:mac:vml" xmlns:p="http://schemas.openxmlformats.org/presentationml/2006/main" xmlns:c="http://schemas.openxmlformats.org/drawingml/2006/chart" xmlns:dgm="http://schemas.openxmlformats.org/drawingml/2006/diagram" xmlns:o="urn:schemas-microsoft-com:office:office" xmlns:v="urn:schemas-microsoft-com:vml" xmlns:pvml="urn:schemas-microsoft-com:office:powerpoint" xmlns:com="http://schemas.openxmlformats.org/drawingml/2006/compatibility" xmlns:p14="http://schemas.microsoft.com/office/powerpoint/2010/main" xmlns:p15="http://schemas.microsoft.com/office/powerpoint/2012/main" xmlns:ahyp="http://schemas.microsoft.com/office/drawing/2018/hyperlinkcolor">
   <p:cSld>
     <p:bg>
@@ -23220,7 +24867,7 @@
     </p:bg>
     <p:spTree>
       <p:nvGrpSpPr>
-        <p:cNvPr id="325" name="Shape 325"/>
+        <p:cNvPr id="333" name="Shape 333"/>
         <p:cNvGrpSpPr/>
         <p:nvPr/>
       </p:nvGrpSpPr>
@@ -23234,7 +24881,7 @@
       </p:grpSpPr>
       <p:sp>
         <p:nvSpPr>
-          <p:cNvPr id="326" name="Google Shape;326;p42"/>
+          <p:cNvPr id="334" name="Google Shape;334;p43"/>
           <p:cNvSpPr txBox="1"/>
           <p:nvPr>
             <p:ph type="title"/>
@@ -23299,7 +24946,7 @@
       </p:sp>
       <p:pic>
         <p:nvPicPr>
-          <p:cNvPr descr="bt plot" id="327" name="Google Shape;327;p42"/>
+          <p:cNvPr descr="bt plot" id="335" name="Google Shape;335;p43"/>
           <p:cNvPicPr preferRelativeResize="0"/>
           <p:nvPr/>
         </p:nvPicPr>
@@ -23326,7 +24973,7 @@
       </p:pic>
       <p:sp>
         <p:nvSpPr>
-          <p:cNvPr id="328" name="Google Shape;328;p42"/>
+          <p:cNvPr id="336" name="Google Shape;336;p43"/>
           <p:cNvSpPr/>
           <p:nvPr/>
         </p:nvSpPr>
@@ -23377,7 +25024,7 @@
       </p:sp>
       <p:sp>
         <p:nvSpPr>
-          <p:cNvPr id="329" name="Google Shape;329;p42"/>
+          <p:cNvPr id="337" name="Google Shape;337;p43"/>
           <p:cNvSpPr/>
           <p:nvPr/>
         </p:nvSpPr>
@@ -23443,7 +25090,7 @@
       </p:sp>
       <p:sp>
         <p:nvSpPr>
-          <p:cNvPr id="330" name="Google Shape;330;p42"/>
+          <p:cNvPr id="338" name="Google Shape;338;p43"/>
           <p:cNvSpPr/>
           <p:nvPr/>
         </p:nvSpPr>
@@ -23509,7 +25156,7 @@
       </p:sp>
       <p:sp>
         <p:nvSpPr>
-          <p:cNvPr id="331" name="Google Shape;331;p42"/>
+          <p:cNvPr id="339" name="Google Shape;339;p43"/>
           <p:cNvSpPr/>
           <p:nvPr/>
         </p:nvSpPr>
@@ -23575,7 +25222,7 @@
       </p:sp>
       <p:sp>
         <p:nvSpPr>
-          <p:cNvPr id="332" name="Google Shape;332;p42"/>
+          <p:cNvPr id="340" name="Google Shape;340;p43"/>
           <p:cNvSpPr/>
           <p:nvPr/>
         </p:nvSpPr>
@@ -23641,7 +25288,7 @@
       </p:sp>
       <p:sp>
         <p:nvSpPr>
-          <p:cNvPr id="333" name="Google Shape;333;p42"/>
+          <p:cNvPr id="341" name="Google Shape;341;p43"/>
           <p:cNvSpPr txBox="1"/>
           <p:nvPr/>
         </p:nvSpPr>
@@ -23692,12 +25339,12 @@
 </p:sld>
 </file>
 
-<file path=ppt/slides/slide15.xml><?xml version="1.0" encoding="utf-8"?>
+<file path=ppt/slides/slide16.xml><?xml version="1.0" encoding="utf-8"?>
 <p:sld xmlns:a="http://schemas.openxmlformats.org/drawingml/2006/main" xmlns:r="http://schemas.openxmlformats.org/officeDocument/2006/relationships" xmlns:mc="http://schemas.openxmlformats.org/markup-compatibility/2006" xmlns:mv="urn:schemas-microsoft-com:mac:vml" xmlns:p="http://schemas.openxmlformats.org/presentationml/2006/main" xmlns:c="http://schemas.openxmlformats.org/drawingml/2006/chart" xmlns:dgm="http://schemas.openxmlformats.org/drawingml/2006/diagram" xmlns:o="urn:schemas-microsoft-com:office:office" xmlns:v="urn:schemas-microsoft-com:vml" xmlns:pvml="urn:schemas-microsoft-com:office:powerpoint" xmlns:com="http://schemas.openxmlformats.org/drawingml/2006/compatibility" xmlns:p14="http://schemas.microsoft.com/office/powerpoint/2010/main" xmlns:p15="http://schemas.microsoft.com/office/powerpoint/2012/main" xmlns:ahyp="http://schemas.microsoft.com/office/drawing/2018/hyperlinkcolor">
   <p:cSld>
     <p:spTree>
       <p:nvGrpSpPr>
-        <p:cNvPr id="337" name="Shape 337"/>
+        <p:cNvPr id="345" name="Shape 345"/>
         <p:cNvGrpSpPr/>
         <p:nvPr/>
       </p:nvGrpSpPr>
@@ -23711,7 +25358,7 @@
       </p:grpSpPr>
       <p:sp>
         <p:nvSpPr>
-          <p:cNvPr id="338" name="Google Shape;338;p43"/>
+          <p:cNvPr id="346" name="Google Shape;346;p44"/>
           <p:cNvSpPr txBox="1"/>
           <p:nvPr>
             <p:ph idx="4294967295" type="ctrTitle"/>
@@ -23770,7 +25417,7 @@
       </p:sp>
       <p:sp>
         <p:nvSpPr>
-          <p:cNvPr id="339" name="Google Shape;339;p43"/>
+          <p:cNvPr id="347" name="Google Shape;347;p44"/>
           <p:cNvSpPr/>
           <p:nvPr/>
         </p:nvSpPr>
@@ -23827,7 +25474,7 @@
       </p:sp>
       <p:sp>
         <p:nvSpPr>
-          <p:cNvPr id="340" name="Google Shape;340;p43"/>
+          <p:cNvPr id="348" name="Google Shape;348;p44"/>
           <p:cNvSpPr txBox="1"/>
           <p:nvPr/>
         </p:nvSpPr>
@@ -24000,7 +25647,7 @@
       </p:sp>
       <p:sp>
         <p:nvSpPr>
-          <p:cNvPr id="341" name="Google Shape;341;p43"/>
+          <p:cNvPr id="349" name="Google Shape;349;p44"/>
           <p:cNvSpPr/>
           <p:nvPr/>
         </p:nvSpPr>
@@ -24059,7 +25706,7 @@
       </p:sp>
       <p:sp>
         <p:nvSpPr>
-          <p:cNvPr id="342" name="Google Shape;342;p43"/>
+          <p:cNvPr id="350" name="Google Shape;350;p44"/>
           <p:cNvSpPr txBox="1"/>
           <p:nvPr/>
         </p:nvSpPr>
@@ -24109,7 +25756,7 @@
       </p:sp>
       <p:sp>
         <p:nvSpPr>
-          <p:cNvPr id="343" name="Google Shape;343;p43"/>
+          <p:cNvPr id="351" name="Google Shape;351;p44"/>
           <p:cNvSpPr/>
           <p:nvPr/>
         </p:nvSpPr>
@@ -24166,7 +25813,7 @@
       </p:sp>
       <p:sp>
         <p:nvSpPr>
-          <p:cNvPr id="344" name="Google Shape;344;p43"/>
+          <p:cNvPr id="352" name="Google Shape;352;p44"/>
           <p:cNvSpPr txBox="1"/>
           <p:nvPr/>
         </p:nvSpPr>
@@ -24299,7 +25946,7 @@
       </p:sp>
       <p:sp>
         <p:nvSpPr>
-          <p:cNvPr id="345" name="Google Shape;345;p43"/>
+          <p:cNvPr id="353" name="Google Shape;353;p44"/>
           <p:cNvSpPr/>
           <p:nvPr/>
         </p:nvSpPr>
@@ -24358,7 +26005,7 @@
       </p:sp>
       <p:sp>
         <p:nvSpPr>
-          <p:cNvPr id="346" name="Google Shape;346;p43"/>
+          <p:cNvPr id="354" name="Google Shape;354;p44"/>
           <p:cNvSpPr/>
           <p:nvPr/>
         </p:nvSpPr>
@@ -24417,7 +26064,7 @@
       </p:sp>
       <p:sp>
         <p:nvSpPr>
-          <p:cNvPr id="347" name="Google Shape;347;p43"/>
+          <p:cNvPr id="355" name="Google Shape;355;p44"/>
           <p:cNvSpPr/>
           <p:nvPr/>
         </p:nvSpPr>
@@ -24474,7 +26121,7 @@
       </p:sp>
       <p:sp>
         <p:nvSpPr>
-          <p:cNvPr id="348" name="Google Shape;348;p43"/>
+          <p:cNvPr id="356" name="Google Shape;356;p44"/>
           <p:cNvSpPr/>
           <p:nvPr/>
         </p:nvSpPr>
@@ -24531,7 +26178,7 @@
       </p:sp>
       <p:sp>
         <p:nvSpPr>
-          <p:cNvPr id="349" name="Google Shape;349;p43"/>
+          <p:cNvPr id="357" name="Google Shape;357;p44"/>
           <p:cNvSpPr txBox="1"/>
           <p:nvPr/>
         </p:nvSpPr>
@@ -24612,7 +26259,7 @@
       </p:sp>
       <p:sp>
         <p:nvSpPr>
-          <p:cNvPr id="350" name="Google Shape;350;p43"/>
+          <p:cNvPr id="358" name="Google Shape;358;p44"/>
           <p:cNvSpPr txBox="1"/>
           <p:nvPr/>
         </p:nvSpPr>
@@ -24742,7 +26389,7 @@
       </p:sp>
       <p:sp>
         <p:nvSpPr>
-          <p:cNvPr id="351" name="Google Shape;351;p43"/>
+          <p:cNvPr id="359" name="Google Shape;359;p44"/>
           <p:cNvSpPr txBox="1"/>
           <p:nvPr/>
         </p:nvSpPr>
@@ -24815,7 +26462,7 @@
       </p:sp>
       <p:sp>
         <p:nvSpPr>
-          <p:cNvPr id="352" name="Google Shape;352;p43"/>
+          <p:cNvPr id="360" name="Google Shape;360;p44"/>
           <p:cNvSpPr txBox="1"/>
           <p:nvPr/>
         </p:nvSpPr>
@@ -24944,12 +26591,12 @@
 </p:sld>
 </file>
 
-<file path=ppt/slides/slide16.xml><?xml version="1.0" encoding="utf-8"?>
+<file path=ppt/slides/slide17.xml><?xml version="1.0" encoding="utf-8"?>
 <p:sld xmlns:a="http://schemas.openxmlformats.org/drawingml/2006/main" xmlns:r="http://schemas.openxmlformats.org/officeDocument/2006/relationships" xmlns:mc="http://schemas.openxmlformats.org/markup-compatibility/2006" xmlns:mv="urn:schemas-microsoft-com:mac:vml" xmlns:p="http://schemas.openxmlformats.org/presentationml/2006/main" xmlns:c="http://schemas.openxmlformats.org/drawingml/2006/chart" xmlns:dgm="http://schemas.openxmlformats.org/drawingml/2006/diagram" xmlns:o="urn:schemas-microsoft-com:office:office" xmlns:v="urn:schemas-microsoft-com:vml" xmlns:pvml="urn:schemas-microsoft-com:office:powerpoint" xmlns:com="http://schemas.openxmlformats.org/drawingml/2006/compatibility" xmlns:p14="http://schemas.microsoft.com/office/powerpoint/2010/main" xmlns:p15="http://schemas.microsoft.com/office/powerpoint/2012/main" xmlns:ahyp="http://schemas.microsoft.com/office/drawing/2018/hyperlinkcolor">
   <p:cSld>
     <p:spTree>
       <p:nvGrpSpPr>
-        <p:cNvPr id="356" name="Shape 356"/>
+        <p:cNvPr id="364" name="Shape 364"/>
         <p:cNvGrpSpPr/>
         <p:nvPr/>
       </p:nvGrpSpPr>
@@ -24963,7 +26610,7 @@
       </p:grpSpPr>
       <p:sp>
         <p:nvSpPr>
-          <p:cNvPr id="357" name="Google Shape;357;p44"/>
+          <p:cNvPr id="365" name="Google Shape;365;p45"/>
           <p:cNvSpPr txBox="1"/>
           <p:nvPr>
             <p:ph idx="4294967295" type="ctrTitle"/>
@@ -25031,7 +26678,7 @@
       </p:sp>
       <p:sp>
         <p:nvSpPr>
-          <p:cNvPr id="358" name="Google Shape;358;p44"/>
+          <p:cNvPr id="366" name="Google Shape;366;p45"/>
           <p:cNvSpPr/>
           <p:nvPr/>
         </p:nvSpPr>
@@ -25088,7 +26735,7 @@
       </p:sp>
       <p:sp>
         <p:nvSpPr>
-          <p:cNvPr id="359" name="Google Shape;359;p44"/>
+          <p:cNvPr id="367" name="Google Shape;367;p45"/>
           <p:cNvSpPr txBox="1"/>
           <p:nvPr/>
         </p:nvSpPr>
@@ -25137,7 +26784,7 @@
       </p:sp>
       <p:sp>
         <p:nvSpPr>
-          <p:cNvPr id="360" name="Google Shape;360;p44"/>
+          <p:cNvPr id="368" name="Google Shape;368;p45"/>
           <p:cNvSpPr txBox="1"/>
           <p:nvPr/>
         </p:nvSpPr>
@@ -25209,7 +26856,7 @@
       </p:sp>
       <p:sp>
         <p:nvSpPr>
-          <p:cNvPr id="361" name="Google Shape;361;p44"/>
+          <p:cNvPr id="369" name="Google Shape;369;p45"/>
           <p:cNvSpPr txBox="1"/>
           <p:nvPr/>
         </p:nvSpPr>
@@ -25281,7 +26928,7 @@
       </p:sp>
       <p:sp>
         <p:nvSpPr>
-          <p:cNvPr id="362" name="Google Shape;362;p44"/>
+          <p:cNvPr id="370" name="Google Shape;370;p45"/>
           <p:cNvSpPr txBox="1"/>
           <p:nvPr/>
         </p:nvSpPr>
@@ -25353,7 +27000,7 @@
       </p:sp>
       <p:graphicFrame>
         <p:nvGraphicFramePr>
-          <p:cNvPr id="363" name="Google Shape;363;p44"/>
+          <p:cNvPr id="371" name="Google Shape;371;p45"/>
           <p:cNvGraphicFramePr/>
           <p:nvPr/>
         </p:nvGraphicFramePr>
@@ -25366,7 +27013,7 @@
             <a:tbl>
               <a:tblPr bandRow="1" firstRow="1">
                 <a:noFill/>
-                <a:tableStyleId>{33845540-4549-48E9-B17C-92D9A22C0115}</a:tableStyleId>
+                <a:tableStyleId>{3BC0AAAB-1D53-4040-A699-5D96CEA510C0}</a:tableStyleId>
               </a:tblPr>
               <a:tblGrid>
                 <a:gridCol w="3789000"/>
@@ -25621,7 +27268,7 @@
       </p:graphicFrame>
       <p:sp>
         <p:nvSpPr>
-          <p:cNvPr id="364" name="Google Shape;364;p44"/>
+          <p:cNvPr id="372" name="Google Shape;372;p45"/>
           <p:cNvSpPr txBox="1"/>
           <p:nvPr/>
         </p:nvSpPr>
@@ -25677,12 +27324,12 @@
 </p:sld>
 </file>
 
-<file path=ppt/slides/slide17.xml><?xml version="1.0" encoding="utf-8"?>
+<file path=ppt/slides/slide18.xml><?xml version="1.0" encoding="utf-8"?>
 <p:sld xmlns:a="http://schemas.openxmlformats.org/drawingml/2006/main" xmlns:r="http://schemas.openxmlformats.org/officeDocument/2006/relationships" xmlns:mc="http://schemas.openxmlformats.org/markup-compatibility/2006" xmlns:mv="urn:schemas-microsoft-com:mac:vml" xmlns:p="http://schemas.openxmlformats.org/presentationml/2006/main" xmlns:c="http://schemas.openxmlformats.org/drawingml/2006/chart" xmlns:dgm="http://schemas.openxmlformats.org/drawingml/2006/diagram" xmlns:o="urn:schemas-microsoft-com:office:office" xmlns:v="urn:schemas-microsoft-com:vml" xmlns:pvml="urn:schemas-microsoft-com:office:powerpoint" xmlns:com="http://schemas.openxmlformats.org/drawingml/2006/compatibility" xmlns:p14="http://schemas.microsoft.com/office/powerpoint/2010/main" xmlns:p15="http://schemas.microsoft.com/office/powerpoint/2012/main" xmlns:ahyp="http://schemas.microsoft.com/office/drawing/2018/hyperlinkcolor">
   <p:cSld>
     <p:spTree>
       <p:nvGrpSpPr>
-        <p:cNvPr id="368" name="Shape 368"/>
+        <p:cNvPr id="376" name="Shape 376"/>
         <p:cNvGrpSpPr/>
         <p:nvPr/>
       </p:nvGrpSpPr>
@@ -25696,7 +27343,7 @@
       </p:grpSpPr>
       <p:sp>
         <p:nvSpPr>
-          <p:cNvPr id="369" name="Google Shape;369;p45"/>
+          <p:cNvPr id="377" name="Google Shape;377;p46"/>
           <p:cNvSpPr txBox="1"/>
           <p:nvPr>
             <p:ph idx="1" type="subTitle"/>
@@ -25848,7 +27495,7 @@
       </p:sp>
       <p:sp>
         <p:nvSpPr>
-          <p:cNvPr id="370" name="Google Shape;370;p45"/>
+          <p:cNvPr id="378" name="Google Shape;378;p46"/>
           <p:cNvSpPr txBox="1"/>
           <p:nvPr/>
         </p:nvSpPr>
@@ -25928,7 +27575,7 @@
       </p:sp>
       <p:sp>
         <p:nvSpPr>
-          <p:cNvPr id="371" name="Google Shape;371;p45"/>
+          <p:cNvPr id="379" name="Google Shape;379;p46"/>
           <p:cNvSpPr txBox="1"/>
           <p:nvPr/>
         </p:nvSpPr>
@@ -26008,7 +27655,7 @@
       </p:sp>
       <p:sp>
         <p:nvSpPr>
-          <p:cNvPr id="372" name="Google Shape;372;p45"/>
+          <p:cNvPr id="380" name="Google Shape;380;p46"/>
           <p:cNvSpPr txBox="1"/>
           <p:nvPr/>
         </p:nvSpPr>
@@ -26107,7 +27754,7 @@
       </p:sp>
       <p:sp>
         <p:nvSpPr>
-          <p:cNvPr id="373" name="Google Shape;373;p45"/>
+          <p:cNvPr id="381" name="Google Shape;381;p46"/>
           <p:cNvSpPr txBox="1"/>
           <p:nvPr/>
         </p:nvSpPr>
@@ -26206,7 +27853,7 @@
       </p:sp>
       <p:pic>
         <p:nvPicPr>
-          <p:cNvPr id="374" name="Google Shape;374;p45" title="WhatsApp Image 2026-10-24 at 20.25.17.jpeg"/>
+          <p:cNvPr id="382" name="Google Shape;382;p46" title="WhatsApp Image 2026-10-24 at 20.25.17.jpeg"/>
           <p:cNvPicPr preferRelativeResize="0"/>
           <p:nvPr/>
         </p:nvPicPr>
@@ -26234,7 +27881,7 @@
       </p:pic>
       <p:sp>
         <p:nvSpPr>
-          <p:cNvPr id="375" name="Google Shape;375;p45"/>
+          <p:cNvPr id="383" name="Google Shape;383;p46"/>
           <p:cNvSpPr txBox="1"/>
           <p:nvPr/>
         </p:nvSpPr>
@@ -26358,12 +28005,12 @@
 </p:sld>
 </file>
 
-<file path=ppt/slides/slide18.xml><?xml version="1.0" encoding="utf-8"?>
+<file path=ppt/slides/slide19.xml><?xml version="1.0" encoding="utf-8"?>
 <p:sld xmlns:a="http://schemas.openxmlformats.org/drawingml/2006/main" xmlns:r="http://schemas.openxmlformats.org/officeDocument/2006/relationships" xmlns:mc="http://schemas.openxmlformats.org/markup-compatibility/2006" xmlns:mv="urn:schemas-microsoft-com:mac:vml" xmlns:p="http://schemas.openxmlformats.org/presentationml/2006/main" xmlns:c="http://schemas.openxmlformats.org/drawingml/2006/chart" xmlns:dgm="http://schemas.openxmlformats.org/drawingml/2006/diagram" xmlns:o="urn:schemas-microsoft-com:office:office" xmlns:v="urn:schemas-microsoft-com:vml" xmlns:pvml="urn:schemas-microsoft-com:office:powerpoint" xmlns:com="http://schemas.openxmlformats.org/drawingml/2006/compatibility" xmlns:p14="http://schemas.microsoft.com/office/powerpoint/2010/main" xmlns:p15="http://schemas.microsoft.com/office/powerpoint/2012/main" xmlns:ahyp="http://schemas.microsoft.com/office/drawing/2018/hyperlinkcolor">
   <p:cSld>
     <p:spTree>
       <p:nvGrpSpPr>
-        <p:cNvPr id="379" name="Shape 379"/>
+        <p:cNvPr id="387" name="Shape 387"/>
         <p:cNvGrpSpPr/>
         <p:nvPr/>
       </p:nvGrpSpPr>
@@ -26377,7 +28024,7 @@
       </p:grpSpPr>
       <p:sp>
         <p:nvSpPr>
-          <p:cNvPr id="380" name="Google Shape;380;p46"/>
+          <p:cNvPr id="388" name="Google Shape;388;p47"/>
           <p:cNvSpPr txBox="1"/>
           <p:nvPr>
             <p:ph type="title"/>
@@ -26521,7 +28168,7 @@
       </p:sp>
       <p:sp>
         <p:nvSpPr>
-          <p:cNvPr id="381" name="Google Shape;381;p46"/>
+          <p:cNvPr id="389" name="Google Shape;389;p47"/>
           <p:cNvSpPr txBox="1"/>
           <p:nvPr/>
         </p:nvSpPr>
@@ -26646,7 +28293,7 @@
       </p:sp>
       <p:pic>
         <p:nvPicPr>
-          <p:cNvPr id="382" name="Google Shape;382;p46" title="WhatsApp Image 2026-10-24 at 20.25.17 (1).jpeg"/>
+          <p:cNvPr id="390" name="Google Shape;390;p47" title="WhatsApp Image 2026-10-24 at 20.25.17 (1).jpeg"/>
           <p:cNvPicPr preferRelativeResize="0"/>
           <p:nvPr/>
         </p:nvPicPr>
@@ -26672,255 +28319,6 @@
           </a:ln>
         </p:spPr>
       </p:pic>
-    </p:spTree>
-  </p:cSld>
-  <p:clrMapOvr>
-    <a:masterClrMapping/>
-  </p:clrMapOvr>
-</p:sld>
-</file>
-
-<file path=ppt/slides/slide19.xml><?xml version="1.0" encoding="utf-8"?>
-<p:sld xmlns:a="http://schemas.openxmlformats.org/drawingml/2006/main" xmlns:r="http://schemas.openxmlformats.org/officeDocument/2006/relationships" xmlns:mc="http://schemas.openxmlformats.org/markup-compatibility/2006" xmlns:mv="urn:schemas-microsoft-com:mac:vml" xmlns:p="http://schemas.openxmlformats.org/presentationml/2006/main" xmlns:c="http://schemas.openxmlformats.org/drawingml/2006/chart" xmlns:dgm="http://schemas.openxmlformats.org/drawingml/2006/diagram" xmlns:o="urn:schemas-microsoft-com:office:office" xmlns:v="urn:schemas-microsoft-com:vml" xmlns:pvml="urn:schemas-microsoft-com:office:powerpoint" xmlns:com="http://schemas.openxmlformats.org/drawingml/2006/compatibility" xmlns:p14="http://schemas.microsoft.com/office/powerpoint/2010/main" xmlns:p15="http://schemas.microsoft.com/office/powerpoint/2012/main" xmlns:ahyp="http://schemas.microsoft.com/office/drawing/2018/hyperlinkcolor">
-  <p:cSld>
-    <p:spTree>
-      <p:nvGrpSpPr>
-        <p:cNvPr id="386" name="Shape 386"/>
-        <p:cNvGrpSpPr/>
-        <p:nvPr/>
-      </p:nvGrpSpPr>
-      <p:grpSpPr>
-        <a:xfrm>
-          <a:off x="0" y="0"/>
-          <a:ext cx="0" cy="0"/>
-          <a:chOff x="0" y="0"/>
-          <a:chExt cx="0" cy="0"/>
-        </a:xfrm>
-      </p:grpSpPr>
-      <p:sp>
-        <p:nvSpPr>
-          <p:cNvPr id="387" name="Google Shape;387;p47"/>
-          <p:cNvSpPr txBox="1"/>
-          <p:nvPr>
-            <p:ph type="title"/>
-          </p:nvPr>
-        </p:nvSpPr>
-        <p:spPr>
-          <a:xfrm>
-            <a:off x="152400" y="155550"/>
-            <a:ext cx="8839200" cy="558300"/>
-          </a:xfrm>
-          <a:prstGeom prst="rect">
-            <a:avLst/>
-          </a:prstGeom>
-        </p:spPr>
-        <p:txBody>
-          <a:bodyPr anchorCtr="0" anchor="t" bIns="91425" lIns="91425" spcFirstLastPara="1" rIns="91425" wrap="square" tIns="91425">
-            <a:normAutofit fontScale="90000"/>
-          </a:bodyPr>
-          <a:lstStyle/>
-          <a:p>
-            <a:pPr indent="0" lvl="0" marL="0" rtl="0" algn="l">
-              <a:lnSpc>
-                <a:spcPct val="115000"/>
-              </a:lnSpc>
-              <a:spcBef>
-                <a:spcPts val="0"/>
-              </a:spcBef>
-              <a:spcAft>
-                <a:spcPts val="0"/>
-              </a:spcAft>
-              <a:buClr>
-                <a:schemeClr val="dk1"/>
-              </a:buClr>
-              <a:buSzPct val="30137"/>
-              <a:buFont typeface="Arial"/>
-              <a:buNone/>
-            </a:pPr>
-            <a:r>
-              <a:rPr b="1" lang="en" sz="3650">
-                <a:solidFill>
-                  <a:srgbClr val="1F3044"/>
-                </a:solidFill>
-              </a:rPr>
-              <a:t>     Residuals vs. Predicted Painting Costs</a:t>
-            </a:r>
-            <a:endParaRPr b="1" sz="3650">
-              <a:solidFill>
-                <a:srgbClr val="1F3044"/>
-              </a:solidFill>
-            </a:endParaRPr>
-          </a:p>
-          <a:p>
-            <a:pPr indent="0" lvl="0" marL="0" rtl="0" algn="l">
-              <a:lnSpc>
-                <a:spcPct val="115000"/>
-              </a:lnSpc>
-              <a:spcBef>
-                <a:spcPts val="0"/>
-              </a:spcBef>
-              <a:spcAft>
-                <a:spcPts val="0"/>
-              </a:spcAft>
-              <a:buClr>
-                <a:schemeClr val="dk1"/>
-              </a:buClr>
-              <a:buSzPct val="100000"/>
-              <a:buFont typeface="Arial"/>
-              <a:buNone/>
-            </a:pPr>
-            <a:r>
-              <a:t/>
-            </a:r>
-            <a:endParaRPr sz="1100"/>
-          </a:p>
-        </p:txBody>
-      </p:sp>
-      <p:pic>
-        <p:nvPicPr>
-          <p:cNvPr id="388" name="Google Shape;388;p47" title="WhatsApp Image 2026-10-24 at 20.25.18.jpeg"/>
-          <p:cNvPicPr preferRelativeResize="0"/>
-          <p:nvPr/>
-        </p:nvPicPr>
-        <p:blipFill>
-          <a:blip r:embed="rId3">
-            <a:alphaModFix/>
-          </a:blip>
-          <a:stretch>
-            <a:fillRect/>
-          </a:stretch>
-        </p:blipFill>
-        <p:spPr>
-          <a:xfrm>
-            <a:off x="152400" y="849375"/>
-            <a:ext cx="8839200" cy="2856166"/>
-          </a:xfrm>
-          <a:prstGeom prst="rect">
-            <a:avLst/>
-          </a:prstGeom>
-          <a:noFill/>
-          <a:ln>
-            <a:noFill/>
-          </a:ln>
-        </p:spPr>
-      </p:pic>
-      <p:sp>
-        <p:nvSpPr>
-          <p:cNvPr id="389" name="Google Shape;389;p47"/>
-          <p:cNvSpPr txBox="1"/>
-          <p:nvPr/>
-        </p:nvSpPr>
-        <p:spPr>
-          <a:xfrm>
-            <a:off x="570175" y="4098175"/>
-            <a:ext cx="8327100" cy="893100"/>
-          </a:xfrm>
-          <a:prstGeom prst="rect">
-            <a:avLst/>
-          </a:prstGeom>
-          <a:noFill/>
-          <a:ln>
-            <a:noFill/>
-          </a:ln>
-        </p:spPr>
-        <p:txBody>
-          <a:bodyPr anchorCtr="0" anchor="t" bIns="91425" lIns="91425" spcFirstLastPara="1" rIns="91425" wrap="square" tIns="91425">
-            <a:spAutoFit/>
-          </a:bodyPr>
-          <a:lstStyle/>
-          <a:p>
-            <a:pPr indent="0" lvl="0" marL="0" rtl="0" algn="ctr">
-              <a:lnSpc>
-                <a:spcPct val="115000"/>
-              </a:lnSpc>
-              <a:spcBef>
-                <a:spcPts val="0"/>
-              </a:spcBef>
-              <a:spcAft>
-                <a:spcPts val="0"/>
-              </a:spcAft>
-              <a:buClr>
-                <a:schemeClr val="dk1"/>
-              </a:buClr>
-              <a:buSzPts val="1100"/>
-              <a:buFont typeface="Arial"/>
-              <a:buNone/>
-            </a:pPr>
-            <a:r>
-              <a:rPr lang="en" sz="1000">
-                <a:solidFill>
-                  <a:srgbClr val="1F3044"/>
-                </a:solidFill>
-              </a:rPr>
-              <a:t>Residual = actual cost − predicted cost. The dashed horizontal line marks zero error; residuals around zero indicate closer predictions.</a:t>
-            </a:r>
-            <a:endParaRPr sz="1000">
-              <a:solidFill>
-                <a:srgbClr val="1F3044"/>
-              </a:solidFill>
-            </a:endParaRPr>
-          </a:p>
-          <a:p>
-            <a:pPr indent="0" lvl="0" marL="0" rtl="0" algn="l">
-              <a:lnSpc>
-                <a:spcPct val="115000"/>
-              </a:lnSpc>
-              <a:spcBef>
-                <a:spcPts val="200"/>
-              </a:spcBef>
-              <a:spcAft>
-                <a:spcPts val="0"/>
-              </a:spcAft>
-              <a:buClr>
-                <a:schemeClr val="dk1"/>
-              </a:buClr>
-              <a:buSzPts val="1100"/>
-              <a:buFont typeface="Arial"/>
-              <a:buNone/>
-            </a:pPr>
-            <a:r>
-              <a:rPr lang="en" sz="950">
-                <a:solidFill>
-                  <a:srgbClr val="5A6572"/>
-                </a:solidFill>
-              </a:rPr>
-              <a:t>    The spread grows for higher predicted costs, and Decision Tree shows several larger residuals. This suggests high-cost cases are harder to    estimate consistently</a:t>
-            </a:r>
-            <a:endParaRPr sz="950">
-              <a:solidFill>
-                <a:srgbClr val="5A6572"/>
-              </a:solidFill>
-            </a:endParaRPr>
-          </a:p>
-          <a:p>
-            <a:pPr indent="0" lvl="0" marL="0" rtl="0" algn="l">
-              <a:lnSpc>
-                <a:spcPct val="115000"/>
-              </a:lnSpc>
-              <a:spcBef>
-                <a:spcPts val="0"/>
-              </a:spcBef>
-              <a:spcAft>
-                <a:spcPts val="0"/>
-              </a:spcAft>
-              <a:buClr>
-                <a:schemeClr val="dk1"/>
-              </a:buClr>
-              <a:buSzPts val="1100"/>
-              <a:buFont typeface="Arial"/>
-              <a:buNone/>
-            </a:pPr>
-            <a:r>
-              <a:t/>
-            </a:r>
-            <a:endParaRPr sz="1100">
-              <a:solidFill>
-                <a:schemeClr val="dk1"/>
-              </a:solidFill>
-            </a:endParaRPr>
-          </a:p>
-        </p:txBody>
-      </p:sp>
     </p:spTree>
   </p:cSld>
   <p:clrMapOvr>
@@ -27038,7 +28436,7 @@
             <a:tbl>
               <a:tblPr>
                 <a:noFill/>
-                <a:tableStyleId>{70CC8A99-5F05-45A2-BA69-08FDE87F0AAC}</a:tableStyleId>
+                <a:tableStyleId>{B177CFA1-0BE8-4A10-A344-8AC451ACEC89}</a:tableStyleId>
               </a:tblPr>
               <a:tblGrid>
                 <a:gridCol w="1964700"/>
@@ -28154,7 +29552,7 @@
   <p:cSld>
     <p:spTree>
       <p:nvGrpSpPr>
-        <p:cNvPr id="393" name="Shape 393"/>
+        <p:cNvPr id="394" name="Shape 394"/>
         <p:cNvGrpSpPr/>
         <p:nvPr/>
       </p:nvGrpSpPr>
@@ -28168,7 +29566,256 @@
       </p:grpSpPr>
       <p:sp>
         <p:nvSpPr>
-          <p:cNvPr id="394" name="Google Shape;394;p48"/>
+          <p:cNvPr id="395" name="Google Shape;395;p48"/>
+          <p:cNvSpPr txBox="1"/>
+          <p:nvPr>
+            <p:ph type="title"/>
+          </p:nvPr>
+        </p:nvSpPr>
+        <p:spPr>
+          <a:xfrm>
+            <a:off x="152400" y="155550"/>
+            <a:ext cx="8839200" cy="558300"/>
+          </a:xfrm>
+          <a:prstGeom prst="rect">
+            <a:avLst/>
+          </a:prstGeom>
+        </p:spPr>
+        <p:txBody>
+          <a:bodyPr anchorCtr="0" anchor="t" bIns="91425" lIns="91425" spcFirstLastPara="1" rIns="91425" wrap="square" tIns="91425">
+            <a:normAutofit fontScale="90000"/>
+          </a:bodyPr>
+          <a:lstStyle/>
+          <a:p>
+            <a:pPr indent="0" lvl="0" marL="0" rtl="0" algn="l">
+              <a:lnSpc>
+                <a:spcPct val="115000"/>
+              </a:lnSpc>
+              <a:spcBef>
+                <a:spcPts val="0"/>
+              </a:spcBef>
+              <a:spcAft>
+                <a:spcPts val="0"/>
+              </a:spcAft>
+              <a:buClr>
+                <a:schemeClr val="dk1"/>
+              </a:buClr>
+              <a:buSzPct val="30137"/>
+              <a:buFont typeface="Arial"/>
+              <a:buNone/>
+            </a:pPr>
+            <a:r>
+              <a:rPr b="1" lang="en" sz="3650">
+                <a:solidFill>
+                  <a:srgbClr val="1F3044"/>
+                </a:solidFill>
+              </a:rPr>
+              <a:t>     Residuals vs. Predicted Painting Costs</a:t>
+            </a:r>
+            <a:endParaRPr b="1" sz="3650">
+              <a:solidFill>
+                <a:srgbClr val="1F3044"/>
+              </a:solidFill>
+            </a:endParaRPr>
+          </a:p>
+          <a:p>
+            <a:pPr indent="0" lvl="0" marL="0" rtl="0" algn="l">
+              <a:lnSpc>
+                <a:spcPct val="115000"/>
+              </a:lnSpc>
+              <a:spcBef>
+                <a:spcPts val="0"/>
+              </a:spcBef>
+              <a:spcAft>
+                <a:spcPts val="0"/>
+              </a:spcAft>
+              <a:buClr>
+                <a:schemeClr val="dk1"/>
+              </a:buClr>
+              <a:buSzPct val="100000"/>
+              <a:buFont typeface="Arial"/>
+              <a:buNone/>
+            </a:pPr>
+            <a:r>
+              <a:t/>
+            </a:r>
+            <a:endParaRPr sz="1100"/>
+          </a:p>
+        </p:txBody>
+      </p:sp>
+      <p:pic>
+        <p:nvPicPr>
+          <p:cNvPr id="396" name="Google Shape;396;p48" title="WhatsApp Image 2026-10-24 at 20.25.18.jpeg"/>
+          <p:cNvPicPr preferRelativeResize="0"/>
+          <p:nvPr/>
+        </p:nvPicPr>
+        <p:blipFill>
+          <a:blip r:embed="rId3">
+            <a:alphaModFix/>
+          </a:blip>
+          <a:stretch>
+            <a:fillRect/>
+          </a:stretch>
+        </p:blipFill>
+        <p:spPr>
+          <a:xfrm>
+            <a:off x="152400" y="849375"/>
+            <a:ext cx="8839200" cy="2856166"/>
+          </a:xfrm>
+          <a:prstGeom prst="rect">
+            <a:avLst/>
+          </a:prstGeom>
+          <a:noFill/>
+          <a:ln>
+            <a:noFill/>
+          </a:ln>
+        </p:spPr>
+      </p:pic>
+      <p:sp>
+        <p:nvSpPr>
+          <p:cNvPr id="397" name="Google Shape;397;p48"/>
+          <p:cNvSpPr txBox="1"/>
+          <p:nvPr/>
+        </p:nvSpPr>
+        <p:spPr>
+          <a:xfrm>
+            <a:off x="570175" y="4098175"/>
+            <a:ext cx="8327100" cy="893100"/>
+          </a:xfrm>
+          <a:prstGeom prst="rect">
+            <a:avLst/>
+          </a:prstGeom>
+          <a:noFill/>
+          <a:ln>
+            <a:noFill/>
+          </a:ln>
+        </p:spPr>
+        <p:txBody>
+          <a:bodyPr anchorCtr="0" anchor="t" bIns="91425" lIns="91425" spcFirstLastPara="1" rIns="91425" wrap="square" tIns="91425">
+            <a:spAutoFit/>
+          </a:bodyPr>
+          <a:lstStyle/>
+          <a:p>
+            <a:pPr indent="0" lvl="0" marL="0" rtl="0" algn="ctr">
+              <a:lnSpc>
+                <a:spcPct val="115000"/>
+              </a:lnSpc>
+              <a:spcBef>
+                <a:spcPts val="0"/>
+              </a:spcBef>
+              <a:spcAft>
+                <a:spcPts val="0"/>
+              </a:spcAft>
+              <a:buClr>
+                <a:schemeClr val="dk1"/>
+              </a:buClr>
+              <a:buSzPts val="1100"/>
+              <a:buFont typeface="Arial"/>
+              <a:buNone/>
+            </a:pPr>
+            <a:r>
+              <a:rPr lang="en" sz="1000">
+                <a:solidFill>
+                  <a:srgbClr val="1F3044"/>
+                </a:solidFill>
+              </a:rPr>
+              <a:t>Residual = actual cost − predicted cost. The dashed horizontal line marks zero error; residuals around zero indicate closer predictions.</a:t>
+            </a:r>
+            <a:endParaRPr sz="1000">
+              <a:solidFill>
+                <a:srgbClr val="1F3044"/>
+              </a:solidFill>
+            </a:endParaRPr>
+          </a:p>
+          <a:p>
+            <a:pPr indent="0" lvl="0" marL="0" rtl="0" algn="l">
+              <a:lnSpc>
+                <a:spcPct val="115000"/>
+              </a:lnSpc>
+              <a:spcBef>
+                <a:spcPts val="200"/>
+              </a:spcBef>
+              <a:spcAft>
+                <a:spcPts val="0"/>
+              </a:spcAft>
+              <a:buClr>
+                <a:schemeClr val="dk1"/>
+              </a:buClr>
+              <a:buSzPts val="1100"/>
+              <a:buFont typeface="Arial"/>
+              <a:buNone/>
+            </a:pPr>
+            <a:r>
+              <a:rPr lang="en" sz="950">
+                <a:solidFill>
+                  <a:srgbClr val="5A6572"/>
+                </a:solidFill>
+              </a:rPr>
+              <a:t>    The spread grows for higher predicted costs, and Decision Tree shows several larger residuals. This suggests high-cost cases are harder to    estimate consistently</a:t>
+            </a:r>
+            <a:endParaRPr sz="950">
+              <a:solidFill>
+                <a:srgbClr val="5A6572"/>
+              </a:solidFill>
+            </a:endParaRPr>
+          </a:p>
+          <a:p>
+            <a:pPr indent="0" lvl="0" marL="0" rtl="0" algn="l">
+              <a:lnSpc>
+                <a:spcPct val="115000"/>
+              </a:lnSpc>
+              <a:spcBef>
+                <a:spcPts val="0"/>
+              </a:spcBef>
+              <a:spcAft>
+                <a:spcPts val="0"/>
+              </a:spcAft>
+              <a:buClr>
+                <a:schemeClr val="dk1"/>
+              </a:buClr>
+              <a:buSzPts val="1100"/>
+              <a:buFont typeface="Arial"/>
+              <a:buNone/>
+            </a:pPr>
+            <a:r>
+              <a:t/>
+            </a:r>
+            <a:endParaRPr sz="1100">
+              <a:solidFill>
+                <a:schemeClr val="dk1"/>
+              </a:solidFill>
+            </a:endParaRPr>
+          </a:p>
+        </p:txBody>
+      </p:sp>
+    </p:spTree>
+  </p:cSld>
+  <p:clrMapOvr>
+    <a:masterClrMapping/>
+  </p:clrMapOvr>
+</p:sld>
+</file>
+
+<file path=ppt/slides/slide21.xml><?xml version="1.0" encoding="utf-8"?>
+<p:sld xmlns:a="http://schemas.openxmlformats.org/drawingml/2006/main" xmlns:r="http://schemas.openxmlformats.org/officeDocument/2006/relationships" xmlns:mc="http://schemas.openxmlformats.org/markup-compatibility/2006" xmlns:mv="urn:schemas-microsoft-com:mac:vml" xmlns:p="http://schemas.openxmlformats.org/presentationml/2006/main" xmlns:c="http://schemas.openxmlformats.org/drawingml/2006/chart" xmlns:dgm="http://schemas.openxmlformats.org/drawingml/2006/diagram" xmlns:o="urn:schemas-microsoft-com:office:office" xmlns:v="urn:schemas-microsoft-com:vml" xmlns:pvml="urn:schemas-microsoft-com:office:powerpoint" xmlns:com="http://schemas.openxmlformats.org/drawingml/2006/compatibility" xmlns:p14="http://schemas.microsoft.com/office/powerpoint/2010/main" xmlns:p15="http://schemas.microsoft.com/office/powerpoint/2012/main" xmlns:ahyp="http://schemas.microsoft.com/office/drawing/2018/hyperlinkcolor">
+  <p:cSld>
+    <p:spTree>
+      <p:nvGrpSpPr>
+        <p:cNvPr id="401" name="Shape 401"/>
+        <p:cNvGrpSpPr/>
+        <p:nvPr/>
+      </p:nvGrpSpPr>
+      <p:grpSpPr>
+        <a:xfrm>
+          <a:off x="0" y="0"/>
+          <a:ext cx="0" cy="0"/>
+          <a:chOff x="0" y="0"/>
+          <a:chExt cx="0" cy="0"/>
+        </a:xfrm>
+      </p:grpSpPr>
+      <p:sp>
+        <p:nvSpPr>
+          <p:cNvPr id="402" name="Google Shape;402;p49"/>
           <p:cNvSpPr txBox="1"/>
           <p:nvPr>
             <p:ph type="title"/>
@@ -28312,7 +29959,7 @@
       </p:sp>
       <p:pic>
         <p:nvPicPr>
-          <p:cNvPr id="395" name="Google Shape;395;p48" title="WhatsApp Image 2026-10-24 at 20.25.18 (1).jpeg"/>
+          <p:cNvPr id="403" name="Google Shape;403;p49" title="WhatsApp Image 2026-10-24 at 20.25.18 (1).jpeg"/>
           <p:cNvPicPr preferRelativeResize="0"/>
           <p:nvPr/>
         </p:nvPicPr>
@@ -28340,7 +29987,7 @@
       </p:pic>
       <p:sp>
         <p:nvSpPr>
-          <p:cNvPr id="396" name="Google Shape;396;p48"/>
+          <p:cNvPr id="404" name="Google Shape;404;p49"/>
           <p:cNvSpPr txBox="1"/>
           <p:nvPr/>
         </p:nvSpPr>
@@ -28463,12 +30110,12 @@
 </p:sld>
 </file>
 
-<file path=ppt/slides/slide21.xml><?xml version="1.0" encoding="utf-8"?>
+<file path=ppt/slides/slide22.xml><?xml version="1.0" encoding="utf-8"?>
 <p:sld xmlns:a="http://schemas.openxmlformats.org/drawingml/2006/main" xmlns:r="http://schemas.openxmlformats.org/officeDocument/2006/relationships" xmlns:mc="http://schemas.openxmlformats.org/markup-compatibility/2006" xmlns:mv="urn:schemas-microsoft-com:mac:vml" xmlns:p="http://schemas.openxmlformats.org/presentationml/2006/main" xmlns:c="http://schemas.openxmlformats.org/drawingml/2006/chart" xmlns:dgm="http://schemas.openxmlformats.org/drawingml/2006/diagram" xmlns:o="urn:schemas-microsoft-com:office:office" xmlns:v="urn:schemas-microsoft-com:vml" xmlns:pvml="urn:schemas-microsoft-com:office:powerpoint" xmlns:com="http://schemas.openxmlformats.org/drawingml/2006/compatibility" xmlns:p14="http://schemas.microsoft.com/office/powerpoint/2010/main" xmlns:p15="http://schemas.microsoft.com/office/powerpoint/2012/main" xmlns:ahyp="http://schemas.microsoft.com/office/drawing/2018/hyperlinkcolor">
   <p:cSld>
     <p:spTree>
       <p:nvGrpSpPr>
-        <p:cNvPr id="400" name="Shape 400"/>
+        <p:cNvPr id="408" name="Shape 408"/>
         <p:cNvGrpSpPr/>
         <p:nvPr/>
       </p:nvGrpSpPr>
@@ -28482,7 +30129,7 @@
       </p:grpSpPr>
       <p:sp>
         <p:nvSpPr>
-          <p:cNvPr id="401" name="Google Shape;401;p49"/>
+          <p:cNvPr id="409" name="Google Shape;409;p50"/>
           <p:cNvSpPr txBox="1"/>
           <p:nvPr>
             <p:ph type="title"/>
@@ -28642,7 +30289,7 @@
       </p:sp>
       <p:sp>
         <p:nvSpPr>
-          <p:cNvPr id="402" name="Google Shape;402;p49"/>
+          <p:cNvPr id="410" name="Google Shape;410;p50"/>
           <p:cNvSpPr txBox="1"/>
           <p:nvPr/>
         </p:nvSpPr>
@@ -28732,7 +30379,7 @@
       </p:sp>
       <p:pic>
         <p:nvPicPr>
-          <p:cNvPr id="403" name="Google Shape;403;p49" title="R2_Score.jpeg"/>
+          <p:cNvPr id="411" name="Google Shape;411;p50" title="R2_Score.jpeg"/>
           <p:cNvPicPr preferRelativeResize="0"/>
           <p:nvPr/>
         </p:nvPicPr>
@@ -28766,12 +30413,12 @@
 </p:sld>
 </file>
 
-<file path=ppt/slides/slide22.xml><?xml version="1.0" encoding="utf-8"?>
+<file path=ppt/slides/slide23.xml><?xml version="1.0" encoding="utf-8"?>
 <p:sld xmlns:a="http://schemas.openxmlformats.org/drawingml/2006/main" xmlns:r="http://schemas.openxmlformats.org/officeDocument/2006/relationships" xmlns:mc="http://schemas.openxmlformats.org/markup-compatibility/2006" xmlns:mv="urn:schemas-microsoft-com:mac:vml" xmlns:p="http://schemas.openxmlformats.org/presentationml/2006/main" xmlns:c="http://schemas.openxmlformats.org/drawingml/2006/chart" xmlns:dgm="http://schemas.openxmlformats.org/drawingml/2006/diagram" xmlns:o="urn:schemas-microsoft-com:office:office" xmlns:v="urn:schemas-microsoft-com:vml" xmlns:pvml="urn:schemas-microsoft-com:office:powerpoint" xmlns:com="http://schemas.openxmlformats.org/drawingml/2006/compatibility" xmlns:p14="http://schemas.microsoft.com/office/powerpoint/2010/main" xmlns:p15="http://schemas.microsoft.com/office/powerpoint/2012/main" xmlns:ahyp="http://schemas.microsoft.com/office/drawing/2018/hyperlinkcolor">
   <p:cSld>
     <p:spTree>
       <p:nvGrpSpPr>
-        <p:cNvPr id="408" name="Shape 408"/>
+        <p:cNvPr id="416" name="Shape 416"/>
         <p:cNvGrpSpPr/>
         <p:nvPr/>
       </p:nvGrpSpPr>
@@ -28785,7 +30432,7 @@
       </p:grpSpPr>
       <p:sp>
         <p:nvSpPr>
-          <p:cNvPr id="409" name="Google Shape;409;p50"/>
+          <p:cNvPr id="417" name="Google Shape;417;p51"/>
           <p:cNvSpPr/>
           <p:nvPr/>
         </p:nvSpPr>
@@ -28835,7 +30482,7 @@
       </p:sp>
       <p:cxnSp>
         <p:nvCxnSpPr>
-          <p:cNvPr id="410" name="Google Shape;410;p50"/>
+          <p:cNvPr id="418" name="Google Shape;418;p51"/>
           <p:cNvCxnSpPr/>
           <p:nvPr/>
         </p:nvCxnSpPr>
@@ -28861,7 +30508,7 @@
       </p:cxnSp>
       <p:sp>
         <p:nvSpPr>
-          <p:cNvPr id="411" name="Google Shape;411;p50"/>
+          <p:cNvPr id="419" name="Google Shape;419;p51"/>
           <p:cNvSpPr/>
           <p:nvPr/>
         </p:nvSpPr>
@@ -28918,7 +30565,7 @@
       </p:sp>
       <p:sp>
         <p:nvSpPr>
-          <p:cNvPr id="412" name="Google Shape;412;p50"/>
+          <p:cNvPr id="420" name="Google Shape;420;p51"/>
           <p:cNvSpPr txBox="1"/>
           <p:nvPr/>
         </p:nvSpPr>
@@ -28968,7 +30615,7 @@
       </p:sp>
       <p:cxnSp>
         <p:nvCxnSpPr>
-          <p:cNvPr id="413" name="Google Shape;413;p50"/>
+          <p:cNvPr id="421" name="Google Shape;421;p51"/>
           <p:cNvCxnSpPr/>
           <p:nvPr/>
         </p:nvCxnSpPr>
@@ -28994,14 +30641,14 @@
       </p:cxnSp>
       <p:sp>
         <p:nvSpPr>
-          <p:cNvPr id="414" name="Google Shape;414;p50"/>
+          <p:cNvPr id="422" name="Google Shape;422;p51"/>
           <p:cNvSpPr txBox="1"/>
           <p:nvPr/>
         </p:nvSpPr>
         <p:spPr>
           <a:xfrm>
             <a:off x="408975" y="961750"/>
-            <a:ext cx="4002900" cy="931200"/>
+            <a:ext cx="4002900" cy="762000"/>
           </a:xfrm>
           <a:prstGeom prst="rect">
             <a:avLst/>
@@ -29017,7 +30664,7 @@
           </a:bodyPr>
           <a:lstStyle/>
           <a:p>
-            <a:pPr indent="-254000" lvl="0" marL="254000" marR="0" rtl="0" algn="l">
+            <a:pPr indent="-279400" lvl="0" marL="254000" marR="0" rtl="0" algn="l">
               <a:lnSpc>
                 <a:spcPct val="150000"/>
               </a:lnSpc>
@@ -29030,12 +30677,12 @@
               <a:buClr>
                 <a:schemeClr val="dk1"/>
               </a:buClr>
-              <a:buSzPts val="1400"/>
+              <a:buSzPts val="1800"/>
               <a:buFont typeface="Noto Sans Symbols"/>
               <a:buChar char="❑"/>
             </a:pPr>
             <a:r>
-              <a:rPr b="1" lang="en" sz="1400">
+              <a:rPr b="1" lang="en" sz="1800">
                 <a:solidFill>
                   <a:schemeClr val="dk1"/>
                 </a:solidFill>
@@ -29047,7 +30694,7 @@
               <a:t>R</a:t>
             </a:r>
             <a:r>
-              <a:rPr b="1" baseline="30000" lang="en" sz="1400">
+              <a:rPr b="1" baseline="30000" lang="en" sz="1800">
                 <a:solidFill>
                   <a:schemeClr val="dk1"/>
                 </a:solidFill>
@@ -29059,7 +30706,7 @@
               <a:t>2</a:t>
             </a:r>
             <a:r>
-              <a:rPr b="1" lang="en" sz="1400">
+              <a:rPr b="1" lang="en" sz="1800">
                 <a:solidFill>
                   <a:schemeClr val="dk1"/>
                 </a:solidFill>
@@ -29071,7 +30718,7 @@
               <a:t> Score: &gt; 0.9</a:t>
             </a:r>
             <a:r>
-              <a:rPr b="1" lang="en">
+              <a:rPr b="1" lang="en" sz="1800">
                 <a:solidFill>
                   <a:schemeClr val="dk1"/>
                 </a:solidFill>
@@ -29079,7 +30726,7 @@
               <a:t>6</a:t>
             </a:r>
             <a:r>
-              <a:rPr lang="en" sz="1400">
+              <a:rPr lang="en" sz="1800">
                 <a:solidFill>
                   <a:schemeClr val="dk1"/>
                 </a:solidFill>
@@ -29090,25 +30737,7 @@
               </a:rPr>
               <a:t> </a:t>
             </a:r>
-            <a:endParaRPr sz="1100"/>
-          </a:p>
-          <a:p>
-            <a:pPr indent="0" lvl="0" marL="457200" marR="0" rtl="0" algn="l">
-              <a:lnSpc>
-                <a:spcPct val="150000"/>
-              </a:lnSpc>
-              <a:spcBef>
-                <a:spcPts val="0"/>
-              </a:spcBef>
-              <a:spcAft>
-                <a:spcPts val="0"/>
-              </a:spcAft>
-              <a:buNone/>
-            </a:pPr>
-            <a:r>
-              <a:t/>
-            </a:r>
-            <a:endParaRPr sz="1400">
+            <a:endParaRPr sz="1800">
               <a:solidFill>
                 <a:schemeClr val="dk1"/>
               </a:solidFill>
@@ -29119,7 +30748,7 @@
             </a:endParaRPr>
           </a:p>
           <a:p>
-            <a:pPr indent="-254000" lvl="0" marL="254000" marR="0" rtl="0" algn="l">
+            <a:pPr indent="-279400" lvl="0" marL="254000" marR="0" rtl="0" algn="l">
               <a:lnSpc>
                 <a:spcPct val="150000"/>
               </a:lnSpc>
@@ -29132,12 +30761,12 @@
               <a:buClr>
                 <a:schemeClr val="dk1"/>
               </a:buClr>
-              <a:buSzPts val="1400"/>
+              <a:buSzPts val="1800"/>
               <a:buFont typeface="Noto Sans Symbols"/>
               <a:buChar char="❑"/>
             </a:pPr>
             <a:r>
-              <a:rPr b="1" lang="en" sz="1400">
+              <a:rPr b="1" lang="en" sz="1800">
                 <a:solidFill>
                   <a:schemeClr val="dk1"/>
                 </a:solidFill>
@@ -29149,7 +30778,7 @@
               <a:t>Integrated </a:t>
             </a:r>
             <a:r>
-              <a:rPr b="1" lang="en">
+              <a:rPr b="1" lang="en" sz="1800">
                 <a:solidFill>
                   <a:schemeClr val="dk1"/>
                 </a:solidFill>
@@ -29157,7 +30786,7 @@
               <a:t>with</a:t>
             </a:r>
             <a:r>
-              <a:rPr b="1" lang="en" sz="1400">
+              <a:rPr b="1" lang="en" sz="1800">
                 <a:solidFill>
                   <a:schemeClr val="dk1"/>
                 </a:solidFill>
@@ -29169,14 +30798,14 @@
               <a:t> user friendly U</a:t>
             </a:r>
             <a:r>
-              <a:rPr b="1" lang="en">
+              <a:rPr b="1" lang="en" sz="1800">
                 <a:solidFill>
                   <a:schemeClr val="dk1"/>
                 </a:solidFill>
               </a:rPr>
               <a:t>I</a:t>
             </a:r>
-            <a:endParaRPr sz="1400">
+            <a:endParaRPr sz="1800">
               <a:solidFill>
                 <a:schemeClr val="dk1"/>
               </a:solidFill>
@@ -29190,14 +30819,14 @@
       </p:sp>
       <p:sp>
         <p:nvSpPr>
-          <p:cNvPr id="415" name="Google Shape;415;p50"/>
+          <p:cNvPr id="423" name="Google Shape;423;p51"/>
           <p:cNvSpPr txBox="1"/>
           <p:nvPr/>
         </p:nvSpPr>
         <p:spPr>
           <a:xfrm>
-            <a:off x="4611208" y="674702"/>
-            <a:ext cx="4848300" cy="615600"/>
+            <a:off x="4611200" y="674700"/>
+            <a:ext cx="4409700" cy="615600"/>
           </a:xfrm>
           <a:prstGeom prst="rect">
             <a:avLst/>
@@ -29278,14 +30907,14 @@
       </p:sp>
       <p:sp>
         <p:nvSpPr>
-          <p:cNvPr id="416" name="Google Shape;416;p50"/>
+          <p:cNvPr id="424" name="Google Shape;424;p51"/>
           <p:cNvSpPr/>
           <p:nvPr/>
         </p:nvSpPr>
         <p:spPr>
           <a:xfrm>
-            <a:off x="408975" y="2886950"/>
-            <a:ext cx="3548700" cy="966600"/>
+            <a:off x="165175" y="2571750"/>
+            <a:ext cx="4144800" cy="1087500"/>
           </a:xfrm>
           <a:prstGeom prst="rect">
             <a:avLst/>
@@ -29311,7 +30940,7 @@
               <a:buNone/>
             </a:pPr>
             <a:r>
-              <a:rPr b="0" lang="en" sz="5400" cap="none">
+              <a:rPr b="0" lang="en" sz="6600" cap="none">
                 <a:solidFill>
                   <a:schemeClr val="dk1"/>
                 </a:solidFill>
@@ -29322,13 +30951,13 @@
               </a:rPr>
               <a:t>Thank You</a:t>
             </a:r>
-            <a:endParaRPr sz="1100"/>
+            <a:endParaRPr sz="2300"/>
           </a:p>
         </p:txBody>
       </p:sp>
       <p:cxnSp>
         <p:nvCxnSpPr>
-          <p:cNvPr id="417" name="Google Shape;417;p50"/>
+          <p:cNvPr id="425" name="Google Shape;425;p51"/>
           <p:cNvCxnSpPr/>
           <p:nvPr/>
         </p:nvCxnSpPr>
@@ -29354,13 +30983,132 @@
       </p:cxnSp>
       <p:sp>
         <p:nvSpPr>
-          <p:cNvPr id="418" name="Google Shape;418;p50"/>
+          <p:cNvPr id="426" name="Google Shape;426;p51"/>
           <p:cNvSpPr txBox="1"/>
           <p:nvPr/>
         </p:nvSpPr>
         <p:spPr>
           <a:xfrm>
-            <a:off x="4611208" y="1401231"/>
+            <a:off x="4611201" y="1293323"/>
+            <a:ext cx="4532700" cy="831300"/>
+          </a:xfrm>
+          <a:prstGeom prst="rect">
+            <a:avLst/>
+          </a:prstGeom>
+          <a:noFill/>
+          <a:ln>
+            <a:noFill/>
+          </a:ln>
+        </p:spPr>
+        <p:txBody>
+          <a:bodyPr anchorCtr="0" anchor="t" bIns="34275" lIns="68575" spcFirstLastPara="1" rIns="68575" wrap="square" tIns="34275">
+            <a:spAutoFit/>
+          </a:bodyPr>
+          <a:lstStyle/>
+          <a:p>
+            <a:pPr indent="0" lvl="0" marL="0" marR="0" rtl="0" algn="l">
+              <a:spcBef>
+                <a:spcPts val="0"/>
+              </a:spcBef>
+              <a:spcAft>
+                <a:spcPts val="0"/>
+              </a:spcAft>
+              <a:buClr>
+                <a:schemeClr val="dk1"/>
+              </a:buClr>
+              <a:buSzPts val="1400"/>
+              <a:buFont typeface="Arial"/>
+              <a:buNone/>
+            </a:pPr>
+            <a:r>
+              <a:rPr b="1" i="0" lang="en" sz="1400" u="sng">
+                <a:solidFill>
+                  <a:schemeClr val="dk1"/>
+                </a:solidFill>
+                <a:latin typeface="Arial"/>
+                <a:ea typeface="Arial"/>
+                <a:cs typeface="Arial"/>
+                <a:sym typeface="Arial"/>
+              </a:rPr>
+              <a:t>D</a:t>
+            </a:r>
+            <a:r>
+              <a:rPr b="1" lang="en" u="sng">
+                <a:solidFill>
+                  <a:schemeClr val="dk1"/>
+                </a:solidFill>
+              </a:rPr>
+              <a:t>ataset</a:t>
+            </a:r>
+            <a:endParaRPr sz="1100"/>
+          </a:p>
+          <a:p>
+            <a:pPr indent="0" lvl="0" marL="0" marR="0" rtl="0" algn="l">
+              <a:spcBef>
+                <a:spcPts val="900"/>
+              </a:spcBef>
+              <a:spcAft>
+                <a:spcPts val="0"/>
+              </a:spcAft>
+              <a:buNone/>
+            </a:pPr>
+            <a:r>
+              <a:rPr lang="en" u="sng">
+                <a:solidFill>
+                  <a:schemeClr val="hlink"/>
+                </a:solidFill>
+                <a:hlinkClick r:id="rId4"/>
+              </a:rPr>
+              <a:t>https://www.kaggle.com/datasets/kaiwalyaatulraut/construction-and-electrical-boq-dataset</a:t>
+            </a:r>
+            <a:endParaRPr b="0" i="0" sz="900">
+              <a:solidFill>
+                <a:srgbClr val="56536B"/>
+              </a:solidFill>
+              <a:latin typeface="DM Sans"/>
+              <a:ea typeface="DM Sans"/>
+              <a:cs typeface="DM Sans"/>
+              <a:sym typeface="DM Sans"/>
+            </a:endParaRPr>
+          </a:p>
+        </p:txBody>
+      </p:sp>
+      <p:pic>
+        <p:nvPicPr>
+          <p:cNvPr id="427" name="Google Shape;427;p51"/>
+          <p:cNvPicPr preferRelativeResize="0"/>
+          <p:nvPr/>
+        </p:nvPicPr>
+        <p:blipFill rotWithShape="1">
+          <a:blip r:embed="rId5">
+            <a:alphaModFix/>
+          </a:blip>
+          <a:srcRect b="0" l="0" r="0" t="0"/>
+          <a:stretch/>
+        </p:blipFill>
+        <p:spPr>
+          <a:xfrm>
+            <a:off x="5045400" y="2861950"/>
+            <a:ext cx="1629904" cy="1629875"/>
+          </a:xfrm>
+          <a:prstGeom prst="rect">
+            <a:avLst/>
+          </a:prstGeom>
+          <a:noFill/>
+          <a:ln>
+            <a:noFill/>
+          </a:ln>
+        </p:spPr>
+      </p:pic>
+      <p:sp>
+        <p:nvSpPr>
+          <p:cNvPr id="428" name="Google Shape;428;p51"/>
+          <p:cNvSpPr txBox="1"/>
+          <p:nvPr/>
+        </p:nvSpPr>
+        <p:spPr>
+          <a:xfrm>
+            <a:off x="4611208" y="2119803"/>
             <a:ext cx="4848300" cy="615600"/>
           </a:xfrm>
           <a:prstGeom prst="rect">
@@ -29424,7 +31172,7 @@
                 <a:ea typeface="Arial"/>
                 <a:cs typeface="Arial"/>
                 <a:sym typeface="Arial"/>
-                <a:hlinkClick r:id="rId4"/>
+                <a:hlinkClick r:id="rId6"/>
               </a:rPr>
               <a:t>https://painting-cost-prediction.streamlit.app/</a:t>
             </a:r>
@@ -29440,33 +31188,6 @@
           </a:p>
         </p:txBody>
       </p:sp>
-      <p:pic>
-        <p:nvPicPr>
-          <p:cNvPr id="419" name="Google Shape;419;p50"/>
-          <p:cNvPicPr preferRelativeResize="0"/>
-          <p:nvPr/>
-        </p:nvPicPr>
-        <p:blipFill rotWithShape="1">
-          <a:blip r:embed="rId5">
-            <a:alphaModFix/>
-          </a:blip>
-          <a:srcRect b="0" l="0" r="0" t="0"/>
-          <a:stretch/>
-        </p:blipFill>
-        <p:spPr>
-          <a:xfrm>
-            <a:off x="4964636" y="2212218"/>
-            <a:ext cx="2129530" cy="2129530"/>
-          </a:xfrm>
-          <a:prstGeom prst="rect">
-            <a:avLst/>
-          </a:prstGeom>
-          <a:noFill/>
-          <a:ln>
-            <a:noFill/>
-          </a:ln>
-        </p:spPr>
-      </p:pic>
     </p:spTree>
   </p:cSld>
   <p:clrMapOvr>
@@ -33422,9 +35143,133 @@
           <a:chExt cx="0" cy="0"/>
         </a:xfrm>
       </p:grpSpPr>
+      <p:cxnSp>
+        <p:nvCxnSpPr>
+          <p:cNvPr id="235" name="Google Shape;235;p36"/>
+          <p:cNvCxnSpPr/>
+          <p:nvPr/>
+        </p:nvCxnSpPr>
+        <p:spPr>
+          <a:xfrm>
+            <a:off x="0" y="758960"/>
+            <a:ext cx="9144000" cy="0"/>
+          </a:xfrm>
+          <a:prstGeom prst="straightConnector1">
+            <a:avLst/>
+          </a:prstGeom>
+          <a:noFill/>
+          <a:ln cap="flat" cmpd="sng" w="19050">
+            <a:solidFill>
+              <a:schemeClr val="dk1"/>
+            </a:solidFill>
+            <a:prstDash val="solid"/>
+            <a:miter lim="8000"/>
+            <a:headEnd len="sm" w="sm" type="none"/>
+            <a:tailEnd len="sm" w="sm" type="none"/>
+          </a:ln>
+        </p:spPr>
+      </p:cxnSp>
       <p:sp>
         <p:nvSpPr>
-          <p:cNvPr id="235" name="Google Shape;235;p36"/>
+          <p:cNvPr id="236" name="Google Shape;236;p36"/>
+          <p:cNvSpPr txBox="1"/>
+          <p:nvPr/>
+        </p:nvSpPr>
+        <p:spPr>
+          <a:xfrm>
+            <a:off x="0" y="86740"/>
+            <a:ext cx="9144000" cy="577200"/>
+          </a:xfrm>
+          <a:prstGeom prst="rect">
+            <a:avLst/>
+          </a:prstGeom>
+          <a:noFill/>
+          <a:ln>
+            <a:noFill/>
+          </a:ln>
+        </p:spPr>
+        <p:txBody>
+          <a:bodyPr anchorCtr="0" anchor="t" bIns="34275" lIns="68575" spcFirstLastPara="1" rIns="68575" wrap="square" tIns="34275">
+            <a:spAutoFit/>
+          </a:bodyPr>
+          <a:lstStyle/>
+          <a:p>
+            <a:pPr indent="0" lvl="0" marL="0" marR="0" rtl="0" algn="ctr">
+              <a:spcBef>
+                <a:spcPts val="0"/>
+              </a:spcBef>
+              <a:spcAft>
+                <a:spcPts val="0"/>
+              </a:spcAft>
+              <a:buNone/>
+            </a:pPr>
+            <a:r>
+              <a:rPr b="1" lang="en" sz="3300">
+                <a:solidFill>
+                  <a:schemeClr val="dk1"/>
+                </a:solidFill>
+              </a:rPr>
+              <a:t>Correlation Matrix</a:t>
+            </a:r>
+            <a:endParaRPr sz="1100"/>
+          </a:p>
+        </p:txBody>
+      </p:sp>
+      <p:pic>
+        <p:nvPicPr>
+          <p:cNvPr id="237" name="Google Shape;237;p36" title="CorrelationMatrix.png"/>
+          <p:cNvPicPr preferRelativeResize="0"/>
+          <p:nvPr/>
+        </p:nvPicPr>
+        <p:blipFill rotWithShape="1">
+          <a:blip r:embed="rId3">
+            <a:alphaModFix/>
+          </a:blip>
+          <a:srcRect b="0" l="-340" r="340" t="1970"/>
+          <a:stretch/>
+        </p:blipFill>
+        <p:spPr>
+          <a:xfrm>
+            <a:off x="1830462" y="790900"/>
+            <a:ext cx="5483075" cy="4352602"/>
+          </a:xfrm>
+          <a:prstGeom prst="rect">
+            <a:avLst/>
+          </a:prstGeom>
+          <a:noFill/>
+          <a:ln>
+            <a:noFill/>
+          </a:ln>
+        </p:spPr>
+      </p:pic>
+    </p:spTree>
+  </p:cSld>
+  <p:clrMapOvr>
+    <a:masterClrMapping/>
+  </p:clrMapOvr>
+</p:sld>
+</file>
+
+<file path=ppt/slides/slide9.xml><?xml version="1.0" encoding="utf-8"?>
+<p:sld xmlns:a="http://schemas.openxmlformats.org/drawingml/2006/main" xmlns:r="http://schemas.openxmlformats.org/officeDocument/2006/relationships" xmlns:mc="http://schemas.openxmlformats.org/markup-compatibility/2006" xmlns:mv="urn:schemas-microsoft-com:mac:vml" xmlns:p="http://schemas.openxmlformats.org/presentationml/2006/main" xmlns:c="http://schemas.openxmlformats.org/drawingml/2006/chart" xmlns:dgm="http://schemas.openxmlformats.org/drawingml/2006/diagram" xmlns:o="urn:schemas-microsoft-com:office:office" xmlns:v="urn:schemas-microsoft-com:vml" xmlns:pvml="urn:schemas-microsoft-com:office:powerpoint" xmlns:com="http://schemas.openxmlformats.org/drawingml/2006/compatibility" xmlns:p14="http://schemas.microsoft.com/office/powerpoint/2010/main" xmlns:p15="http://schemas.microsoft.com/office/powerpoint/2012/main" xmlns:ahyp="http://schemas.microsoft.com/office/drawing/2018/hyperlinkcolor">
+  <p:cSld>
+    <p:spTree>
+      <p:nvGrpSpPr>
+        <p:cNvPr id="242" name="Shape 242"/>
+        <p:cNvGrpSpPr/>
+        <p:nvPr/>
+      </p:nvGrpSpPr>
+      <p:grpSpPr>
+        <a:xfrm>
+          <a:off x="0" y="0"/>
+          <a:ext cx="0" cy="0"/>
+          <a:chOff x="0" y="0"/>
+          <a:chExt cx="0" cy="0"/>
+        </a:xfrm>
+      </p:grpSpPr>
+      <p:sp>
+        <p:nvSpPr>
+          <p:cNvPr id="243" name="Google Shape;243;p37"/>
           <p:cNvSpPr txBox="1"/>
           <p:nvPr>
             <p:ph type="ctrTitle"/>
@@ -33488,7 +35333,7 @@
       </p:sp>
       <p:sp>
         <p:nvSpPr>
-          <p:cNvPr id="236" name="Google Shape;236;p36"/>
+          <p:cNvPr id="244" name="Google Shape;244;p37"/>
           <p:cNvSpPr/>
           <p:nvPr/>
         </p:nvSpPr>
@@ -33545,7 +35390,7 @@
       </p:sp>
       <p:sp>
         <p:nvSpPr>
-          <p:cNvPr id="237" name="Google Shape;237;p36"/>
+          <p:cNvPr id="245" name="Google Shape;245;p37"/>
           <p:cNvSpPr txBox="1"/>
           <p:nvPr/>
         </p:nvSpPr>
@@ -33804,7 +35649,7 @@
       </p:sp>
       <p:sp>
         <p:nvSpPr>
-          <p:cNvPr id="238" name="Google Shape;238;p36"/>
+          <p:cNvPr id="246" name="Google Shape;246;p37"/>
           <p:cNvSpPr/>
           <p:nvPr/>
         </p:nvSpPr>
@@ -33863,7 +35708,7 @@
       </p:sp>
       <p:sp>
         <p:nvSpPr>
-          <p:cNvPr id="239" name="Google Shape;239;p36"/>
+          <p:cNvPr id="247" name="Google Shape;247;p37"/>
           <p:cNvSpPr txBox="1"/>
           <p:nvPr/>
         </p:nvSpPr>
@@ -33913,7 +35758,7 @@
       </p:sp>
       <p:sp>
         <p:nvSpPr>
-          <p:cNvPr id="240" name="Google Shape;240;p36"/>
+          <p:cNvPr id="248" name="Google Shape;248;p37"/>
           <p:cNvSpPr/>
           <p:nvPr/>
         </p:nvSpPr>
@@ -33970,7 +35815,7 @@
       </p:sp>
       <p:sp>
         <p:nvSpPr>
-          <p:cNvPr id="241" name="Google Shape;241;p36"/>
+          <p:cNvPr id="249" name="Google Shape;249;p37"/>
           <p:cNvSpPr txBox="1"/>
           <p:nvPr/>
         </p:nvSpPr>
@@ -34111,7 +35956,7 @@
       </p:sp>
       <p:sp>
         <p:nvSpPr>
-          <p:cNvPr id="242" name="Google Shape;242;p36"/>
+          <p:cNvPr id="250" name="Google Shape;250;p37"/>
           <p:cNvSpPr/>
           <p:nvPr/>
         </p:nvSpPr>
@@ -34170,7 +36015,7 @@
       </p:sp>
       <p:sp>
         <p:nvSpPr>
-          <p:cNvPr id="243" name="Google Shape;243;p36"/>
+          <p:cNvPr id="251" name="Google Shape;251;p37"/>
           <p:cNvSpPr/>
           <p:nvPr/>
         </p:nvSpPr>
@@ -34229,7 +36074,7 @@
       </p:sp>
       <p:sp>
         <p:nvSpPr>
-          <p:cNvPr id="244" name="Google Shape;244;p36"/>
+          <p:cNvPr id="252" name="Google Shape;252;p37"/>
           <p:cNvSpPr/>
           <p:nvPr/>
         </p:nvSpPr>
@@ -34286,7 +36131,7 @@
       </p:sp>
       <p:sp>
         <p:nvSpPr>
-          <p:cNvPr id="245" name="Google Shape;245;p36"/>
+          <p:cNvPr id="253" name="Google Shape;253;p37"/>
           <p:cNvSpPr/>
           <p:nvPr/>
         </p:nvSpPr>
@@ -34343,7 +36188,7 @@
       </p:sp>
       <p:sp>
         <p:nvSpPr>
-          <p:cNvPr id="246" name="Google Shape;246;p36"/>
+          <p:cNvPr id="254" name="Google Shape;254;p37"/>
           <p:cNvSpPr txBox="1"/>
           <p:nvPr/>
         </p:nvSpPr>
@@ -34416,7 +36261,7 @@
       </p:sp>
       <p:sp>
         <p:nvSpPr>
-          <p:cNvPr id="247" name="Google Shape;247;p36"/>
+          <p:cNvPr id="255" name="Google Shape;255;p37"/>
           <p:cNvSpPr txBox="1"/>
           <p:nvPr/>
         </p:nvSpPr>
@@ -34537,7 +36382,7 @@
       </p:sp>
       <p:sp>
         <p:nvSpPr>
-          <p:cNvPr id="248" name="Google Shape;248;p36"/>
+          <p:cNvPr id="256" name="Google Shape;256;p37"/>
           <p:cNvSpPr txBox="1"/>
           <p:nvPr/>
         </p:nvSpPr>
@@ -34610,7 +36455,7 @@
       </p:sp>
       <p:sp>
         <p:nvSpPr>
-          <p:cNvPr id="249" name="Google Shape;249;p36"/>
+          <p:cNvPr id="257" name="Google Shape;257;p37"/>
           <p:cNvSpPr txBox="1"/>
           <p:nvPr/>
         </p:nvSpPr>
@@ -34768,1534 +36613,45 @@
 </p:sld>
 </file>
 
-<file path=ppt/slides/slide9.xml><?xml version="1.0" encoding="utf-8"?>
-<p:sld xmlns:a="http://schemas.openxmlformats.org/drawingml/2006/main" xmlns:r="http://schemas.openxmlformats.org/officeDocument/2006/relationships" xmlns:mc="http://schemas.openxmlformats.org/markup-compatibility/2006" xmlns:mv="urn:schemas-microsoft-com:mac:vml" xmlns:p="http://schemas.openxmlformats.org/presentationml/2006/main" xmlns:c="http://schemas.openxmlformats.org/drawingml/2006/chart" xmlns:dgm="http://schemas.openxmlformats.org/drawingml/2006/diagram" xmlns:o="urn:schemas-microsoft-com:office:office" xmlns:v="urn:schemas-microsoft-com:vml" xmlns:pvml="urn:schemas-microsoft-com:office:powerpoint" xmlns:com="http://schemas.openxmlformats.org/drawingml/2006/compatibility" xmlns:p14="http://schemas.microsoft.com/office/powerpoint/2010/main" xmlns:p15="http://schemas.microsoft.com/office/powerpoint/2012/main" xmlns:ahyp="http://schemas.microsoft.com/office/drawing/2018/hyperlinkcolor">
-  <p:cSld>
-    <p:spTree>
-      <p:nvGrpSpPr>
-        <p:cNvPr id="254" name="Shape 254"/>
-        <p:cNvGrpSpPr/>
-        <p:nvPr/>
-      </p:nvGrpSpPr>
-      <p:grpSpPr>
-        <a:xfrm>
-          <a:off x="0" y="0"/>
-          <a:ext cx="0" cy="0"/>
-          <a:chOff x="0" y="0"/>
-          <a:chExt cx="0" cy="0"/>
-        </a:xfrm>
-      </p:grpSpPr>
-      <p:sp>
-        <p:nvSpPr>
-          <p:cNvPr id="255" name="Google Shape;255;p37"/>
-          <p:cNvSpPr txBox="1"/>
-          <p:nvPr>
-            <p:ph type="ctrTitle"/>
-          </p:nvPr>
-        </p:nvSpPr>
-        <p:spPr>
-          <a:xfrm flipH="1">
-            <a:off x="-4" y="146957"/>
-            <a:ext cx="9144001" cy="734785"/>
-          </a:xfrm>
-          <a:prstGeom prst="rect">
-            <a:avLst/>
-          </a:prstGeom>
-          <a:noFill/>
-          <a:ln>
-            <a:noFill/>
-          </a:ln>
-        </p:spPr>
-        <p:txBody>
-          <a:bodyPr anchorCtr="0" anchor="b" bIns="34275" lIns="68575" spcFirstLastPara="1" rIns="68575" wrap="square" tIns="34275">
-            <a:noAutofit/>
-          </a:bodyPr>
-          <a:lstStyle/>
-          <a:p>
-            <a:pPr indent="0" lvl="0" marL="0" rtl="0" algn="l">
-              <a:lnSpc>
-                <a:spcPct val="90000"/>
-              </a:lnSpc>
-              <a:spcBef>
-                <a:spcPts val="0"/>
-              </a:spcBef>
-              <a:spcAft>
-                <a:spcPts val="0"/>
-              </a:spcAft>
-              <a:buClr>
-                <a:schemeClr val="dk1"/>
-              </a:buClr>
-              <a:buSzPts val="2100"/>
-              <a:buFont typeface="Play"/>
-              <a:buNone/>
-            </a:pPr>
-            <a:r>
-              <a:rPr lang="en" sz="2100"/>
-              <a:t>                       </a:t>
-            </a:r>
-            <a:r>
-              <a:rPr b="1" lang="en" sz="3300">
-                <a:latin typeface="Arial"/>
-                <a:ea typeface="Arial"/>
-                <a:cs typeface="Arial"/>
-                <a:sym typeface="Arial"/>
-              </a:rPr>
-              <a:t>Linear Regression: Implementation</a:t>
-            </a:r>
-            <a:br>
-              <a:rPr lang="en" sz="2100"/>
-            </a:br>
-            <a:endParaRPr sz="2100"/>
-          </a:p>
-        </p:txBody>
-      </p:sp>
-      <p:sp>
-        <p:nvSpPr>
-          <p:cNvPr id="256" name="Google Shape;256;p37"/>
-          <p:cNvSpPr/>
-          <p:nvPr/>
-        </p:nvSpPr>
-        <p:spPr>
-          <a:xfrm>
-            <a:off x="155121" y="700496"/>
-            <a:ext cx="8752115" cy="34289"/>
-          </a:xfrm>
-          <a:prstGeom prst="rect">
-            <a:avLst/>
-          </a:prstGeom>
-          <a:solidFill>
-            <a:srgbClr val="BFBFBF"/>
-          </a:solidFill>
-          <a:ln cap="flat" cmpd="sng" w="19050">
-            <a:solidFill>
-              <a:srgbClr val="082836"/>
-            </a:solidFill>
-            <a:prstDash val="solid"/>
-            <a:miter lim="8000"/>
-            <a:headEnd len="sm" w="sm" type="none"/>
-            <a:tailEnd len="sm" w="sm" type="none"/>
-          </a:ln>
-        </p:spPr>
-        <p:txBody>
-          <a:bodyPr anchorCtr="0" anchor="ctr" bIns="34275" lIns="68575" spcFirstLastPara="1" rIns="68575" wrap="square" tIns="34275">
-            <a:noAutofit/>
-          </a:bodyPr>
-          <a:lstStyle/>
-          <a:p>
-            <a:pPr indent="0" lvl="0" marL="0" marR="0" rtl="0" algn="ctr">
-              <a:spcBef>
-                <a:spcPts val="0"/>
-              </a:spcBef>
-              <a:spcAft>
-                <a:spcPts val="0"/>
-              </a:spcAft>
-              <a:buNone/>
-            </a:pPr>
-            <a:r>
-              <a:t/>
-            </a:r>
-            <a:endParaRPr sz="1400">
-              <a:solidFill>
-                <a:schemeClr val="lt1"/>
-              </a:solidFill>
-              <a:latin typeface="Arial"/>
-              <a:ea typeface="Arial"/>
-              <a:cs typeface="Arial"/>
-              <a:sym typeface="Arial"/>
-            </a:endParaRPr>
-          </a:p>
-        </p:txBody>
-      </p:sp>
-      <p:sp>
-        <p:nvSpPr>
-          <p:cNvPr id="257" name="Google Shape;257;p37"/>
-          <p:cNvSpPr txBox="1"/>
-          <p:nvPr/>
-        </p:nvSpPr>
-        <p:spPr>
-          <a:xfrm>
-            <a:off x="1175657" y="2416628"/>
-            <a:ext cx="138548" cy="276999"/>
-          </a:xfrm>
-          <a:prstGeom prst="rect">
-            <a:avLst/>
-          </a:prstGeom>
-          <a:noFill/>
-          <a:ln>
-            <a:noFill/>
-          </a:ln>
-        </p:spPr>
-        <p:txBody>
-          <a:bodyPr anchorCtr="0" anchor="t" bIns="34275" lIns="68575" spcFirstLastPara="1" rIns="68575" wrap="square" tIns="34275">
-            <a:spAutoFit/>
-          </a:bodyPr>
-          <a:lstStyle/>
-          <a:p>
-            <a:pPr indent="0" lvl="0" marL="0" marR="0" rtl="0" algn="l">
-              <a:spcBef>
-                <a:spcPts val="0"/>
-              </a:spcBef>
-              <a:spcAft>
-                <a:spcPts val="0"/>
-              </a:spcAft>
-              <a:buNone/>
-            </a:pPr>
-            <a:r>
-              <a:t/>
-            </a:r>
-            <a:endParaRPr sz="1400">
-              <a:solidFill>
-                <a:schemeClr val="dk1"/>
-              </a:solidFill>
-              <a:latin typeface="Arial"/>
-              <a:ea typeface="Arial"/>
-              <a:cs typeface="Arial"/>
-              <a:sym typeface="Arial"/>
-            </a:endParaRPr>
-          </a:p>
-        </p:txBody>
-      </p:sp>
-      <p:sp>
-        <p:nvSpPr>
-          <p:cNvPr id="258" name="Google Shape;258;p37"/>
-          <p:cNvSpPr txBox="1"/>
-          <p:nvPr/>
-        </p:nvSpPr>
-        <p:spPr>
-          <a:xfrm>
-            <a:off x="215860" y="1036671"/>
-            <a:ext cx="2341048" cy="438581"/>
-          </a:xfrm>
-          <a:prstGeom prst="rect">
-            <a:avLst/>
-          </a:prstGeom>
-          <a:noFill/>
-          <a:ln>
-            <a:noFill/>
-          </a:ln>
-        </p:spPr>
-        <p:txBody>
-          <a:bodyPr anchorCtr="0" anchor="t" bIns="34275" lIns="68575" spcFirstLastPara="1" rIns="68575" wrap="square" tIns="34275">
-            <a:spAutoFit/>
-          </a:bodyPr>
-          <a:lstStyle/>
-          <a:p>
-            <a:pPr indent="0" lvl="0" marL="0" marR="0" rtl="0" algn="l">
-              <a:spcBef>
-                <a:spcPts val="0"/>
-              </a:spcBef>
-              <a:spcAft>
-                <a:spcPts val="0"/>
-              </a:spcAft>
-              <a:buNone/>
-            </a:pPr>
-            <a:r>
-              <a:rPr b="1" lang="en" sz="2400">
-                <a:solidFill>
-                  <a:schemeClr val="dk1"/>
-                </a:solidFill>
-                <a:latin typeface="Arial"/>
-                <a:ea typeface="Arial"/>
-                <a:cs typeface="Arial"/>
-                <a:sym typeface="Arial"/>
-              </a:rPr>
-              <a:t>Model Pipeline</a:t>
-            </a:r>
-            <a:endParaRPr b="1" sz="2400">
-              <a:solidFill>
-                <a:schemeClr val="dk1"/>
-              </a:solidFill>
-              <a:latin typeface="Arial"/>
-              <a:ea typeface="Arial"/>
-              <a:cs typeface="Arial"/>
-              <a:sym typeface="Arial"/>
-            </a:endParaRPr>
-          </a:p>
-        </p:txBody>
-      </p:sp>
-      <p:sp>
-        <p:nvSpPr>
-          <p:cNvPr id="259" name="Google Shape;259;p37"/>
-          <p:cNvSpPr/>
-          <p:nvPr/>
-        </p:nvSpPr>
-        <p:spPr>
-          <a:xfrm>
-            <a:off x="363927" y="1749631"/>
-            <a:ext cx="1600200" cy="648300"/>
-          </a:xfrm>
-          <a:prstGeom prst="roundRect">
-            <a:avLst>
-              <a:gd fmla="val 16667" name="adj"/>
-            </a:avLst>
-          </a:prstGeom>
-          <a:solidFill>
-            <a:srgbClr val="D9E5F8"/>
-          </a:solidFill>
-          <a:ln cap="flat" cmpd="sng" w="19050">
-            <a:solidFill>
-              <a:srgbClr val="F2F2F2"/>
-            </a:solidFill>
-            <a:prstDash val="solid"/>
-            <a:miter lim="8000"/>
-            <a:headEnd len="sm" w="sm" type="none"/>
-            <a:tailEnd len="sm" w="sm" type="none"/>
-          </a:ln>
-          <a:effectLst>
-            <a:outerShdw blurRad="50800" rotWithShape="0" algn="tl" dir="2700000" dist="38100">
-              <a:srgbClr val="000000">
-                <a:alpha val="40000"/>
-              </a:srgbClr>
-            </a:outerShdw>
-          </a:effectLst>
-        </p:spPr>
-        <p:txBody>
-          <a:bodyPr anchorCtr="0" anchor="ctr" bIns="34275" lIns="68575" spcFirstLastPara="1" rIns="68575" wrap="square" tIns="34275">
-            <a:noAutofit/>
-          </a:bodyPr>
-          <a:lstStyle/>
-          <a:p>
-            <a:pPr indent="0" lvl="0" marL="0" marR="0" rtl="0" algn="ctr">
-              <a:spcBef>
-                <a:spcPts val="0"/>
-              </a:spcBef>
-              <a:spcAft>
-                <a:spcPts val="0"/>
-              </a:spcAft>
-              <a:buNone/>
-            </a:pPr>
-            <a:r>
-              <a:rPr lang="en" sz="1400">
-                <a:solidFill>
-                  <a:schemeClr val="dk1"/>
-                </a:solidFill>
-                <a:latin typeface="Arial"/>
-                <a:ea typeface="Arial"/>
-                <a:cs typeface="Arial"/>
-                <a:sym typeface="Arial"/>
-              </a:rPr>
-              <a:t>Input Feature</a:t>
-            </a:r>
-            <a:endParaRPr sz="1400">
-              <a:solidFill>
-                <a:schemeClr val="lt1"/>
-              </a:solidFill>
-              <a:latin typeface="Arial"/>
-              <a:ea typeface="Arial"/>
-              <a:cs typeface="Arial"/>
-              <a:sym typeface="Arial"/>
-            </a:endParaRPr>
-          </a:p>
-        </p:txBody>
-      </p:sp>
-      <p:sp>
-        <p:nvSpPr>
-          <p:cNvPr id="260" name="Google Shape;260;p37"/>
-          <p:cNvSpPr txBox="1"/>
-          <p:nvPr/>
-        </p:nvSpPr>
-        <p:spPr>
-          <a:xfrm>
-            <a:off x="1964125" y="1852912"/>
-            <a:ext cx="819600" cy="700200"/>
-          </a:xfrm>
-          <a:prstGeom prst="rect">
-            <a:avLst/>
-          </a:prstGeom>
-          <a:noFill/>
-          <a:ln>
-            <a:noFill/>
-          </a:ln>
-        </p:spPr>
-        <p:txBody>
-          <a:bodyPr anchorCtr="0" anchor="t" bIns="34275" lIns="68575" spcFirstLastPara="1" rIns="68575" wrap="square" tIns="34275">
-            <a:spAutoFit/>
-          </a:bodyPr>
-          <a:lstStyle/>
-          <a:p>
-            <a:pPr indent="0" lvl="0" marL="0" marR="0" rtl="0" algn="l">
-              <a:spcBef>
-                <a:spcPts val="0"/>
-              </a:spcBef>
-              <a:spcAft>
-                <a:spcPts val="0"/>
-              </a:spcAft>
-              <a:buNone/>
-            </a:pPr>
-            <a:r>
-              <a:rPr b="1" lang="en" sz="2700">
-                <a:solidFill>
-                  <a:schemeClr val="dk1"/>
-                </a:solidFill>
-                <a:latin typeface="Arial"/>
-                <a:ea typeface="Arial"/>
-                <a:cs typeface="Arial"/>
-                <a:sym typeface="Arial"/>
-              </a:rPr>
-              <a:t>→</a:t>
-            </a:r>
-            <a:endParaRPr sz="1100"/>
-          </a:p>
-          <a:p>
-            <a:pPr indent="0" lvl="0" marL="0" marR="0" rtl="0" algn="l">
-              <a:spcBef>
-                <a:spcPts val="0"/>
-              </a:spcBef>
-              <a:spcAft>
-                <a:spcPts val="0"/>
-              </a:spcAft>
-              <a:buNone/>
-            </a:pPr>
-            <a:r>
-              <a:t/>
-            </a:r>
-            <a:endParaRPr sz="1400">
-              <a:solidFill>
-                <a:schemeClr val="dk1"/>
-              </a:solidFill>
-              <a:latin typeface="Arial"/>
-              <a:ea typeface="Arial"/>
-              <a:cs typeface="Arial"/>
-              <a:sym typeface="Arial"/>
-            </a:endParaRPr>
-          </a:p>
-        </p:txBody>
-      </p:sp>
-      <p:sp>
-        <p:nvSpPr>
-          <p:cNvPr id="261" name="Google Shape;261;p37"/>
-          <p:cNvSpPr/>
-          <p:nvPr/>
-        </p:nvSpPr>
-        <p:spPr>
-          <a:xfrm>
-            <a:off x="2388970" y="1790879"/>
-            <a:ext cx="1600200" cy="648300"/>
-          </a:xfrm>
-          <a:prstGeom prst="roundRect">
-            <a:avLst>
-              <a:gd fmla="val 16667" name="adj"/>
-            </a:avLst>
-          </a:prstGeom>
-          <a:solidFill>
-            <a:srgbClr val="F2CDED"/>
-          </a:solidFill>
-          <a:ln cap="flat" cmpd="sng" w="19050">
-            <a:solidFill>
-              <a:srgbClr val="082836"/>
-            </a:solidFill>
-            <a:prstDash val="solid"/>
-            <a:miter lim="8000"/>
-            <a:headEnd len="sm" w="sm" type="none"/>
-            <a:tailEnd len="sm" w="sm" type="none"/>
-          </a:ln>
-          <a:effectLst>
-            <a:outerShdw blurRad="50800" rotWithShape="0" algn="tl" dir="2700000" dist="38100">
-              <a:srgbClr val="000000">
-                <a:alpha val="40000"/>
-              </a:srgbClr>
-            </a:outerShdw>
-          </a:effectLst>
-        </p:spPr>
-        <p:txBody>
-          <a:bodyPr anchorCtr="0" anchor="ctr" bIns="34275" lIns="68575" spcFirstLastPara="1" rIns="68575" wrap="square" tIns="34275">
-            <a:noAutofit/>
-          </a:bodyPr>
-          <a:lstStyle/>
-          <a:p>
-            <a:pPr indent="0" lvl="0" marL="0" marR="0" rtl="0" algn="ctr">
-              <a:spcBef>
-                <a:spcPts val="0"/>
-              </a:spcBef>
-              <a:spcAft>
-                <a:spcPts val="0"/>
-              </a:spcAft>
-              <a:buNone/>
-            </a:pPr>
-            <a:r>
-              <a:rPr lang="en" sz="1400">
-                <a:solidFill>
-                  <a:schemeClr val="dk1"/>
-                </a:solidFill>
-                <a:latin typeface="Arial"/>
-                <a:ea typeface="Arial"/>
-                <a:cs typeface="Arial"/>
-                <a:sym typeface="Arial"/>
-              </a:rPr>
-              <a:t>Preprocessing</a:t>
-            </a:r>
-            <a:endParaRPr sz="1400">
-              <a:solidFill>
-                <a:schemeClr val="lt1"/>
-              </a:solidFill>
-              <a:latin typeface="Arial"/>
-              <a:ea typeface="Arial"/>
-              <a:cs typeface="Arial"/>
-              <a:sym typeface="Arial"/>
-            </a:endParaRPr>
-          </a:p>
-        </p:txBody>
-      </p:sp>
-      <p:sp>
-        <p:nvSpPr>
-          <p:cNvPr id="262" name="Google Shape;262;p37"/>
-          <p:cNvSpPr/>
-          <p:nvPr/>
-        </p:nvSpPr>
-        <p:spPr>
-          <a:xfrm>
-            <a:off x="4453425" y="1823055"/>
-            <a:ext cx="1681800" cy="648300"/>
-          </a:xfrm>
-          <a:prstGeom prst="roundRect">
-            <a:avLst>
-              <a:gd fmla="val 16667" name="adj"/>
-            </a:avLst>
-          </a:prstGeom>
-          <a:solidFill>
-            <a:srgbClr val="BFBFBF"/>
-          </a:solidFill>
-          <a:ln cap="flat" cmpd="sng" w="19050">
-            <a:solidFill>
-              <a:srgbClr val="082836"/>
-            </a:solidFill>
-            <a:prstDash val="solid"/>
-            <a:miter lim="8000"/>
-            <a:headEnd len="sm" w="sm" type="none"/>
-            <a:tailEnd len="sm" w="sm" type="none"/>
-          </a:ln>
-          <a:effectLst>
-            <a:outerShdw blurRad="50800" rotWithShape="0" algn="tl" dir="2700000" dist="38100">
-              <a:srgbClr val="000000">
-                <a:alpha val="40000"/>
-              </a:srgbClr>
-            </a:outerShdw>
-          </a:effectLst>
-        </p:spPr>
-        <p:txBody>
-          <a:bodyPr anchorCtr="0" anchor="ctr" bIns="34275" lIns="68575" spcFirstLastPara="1" rIns="68575" wrap="square" tIns="34275">
-            <a:noAutofit/>
-          </a:bodyPr>
-          <a:lstStyle/>
-          <a:p>
-            <a:pPr indent="0" lvl="0" marL="0" marR="0" rtl="0" algn="ctr">
-              <a:spcBef>
-                <a:spcPts val="0"/>
-              </a:spcBef>
-              <a:spcAft>
-                <a:spcPts val="0"/>
-              </a:spcAft>
-              <a:buNone/>
-            </a:pPr>
-            <a:r>
-              <a:rPr lang="en" sz="1400">
-                <a:solidFill>
-                  <a:schemeClr val="dk1"/>
-                </a:solidFill>
-                <a:latin typeface="Arial"/>
-                <a:ea typeface="Arial"/>
-                <a:cs typeface="Arial"/>
-                <a:sym typeface="Arial"/>
-              </a:rPr>
-              <a:t>Linear Regression</a:t>
-            </a:r>
-            <a:endParaRPr sz="1400">
-              <a:solidFill>
-                <a:schemeClr val="dk1"/>
-              </a:solidFill>
-              <a:latin typeface="Arial"/>
-              <a:ea typeface="Arial"/>
-              <a:cs typeface="Arial"/>
-              <a:sym typeface="Arial"/>
-            </a:endParaRPr>
-          </a:p>
-        </p:txBody>
-      </p:sp>
-      <p:sp>
-        <p:nvSpPr>
-          <p:cNvPr id="263" name="Google Shape;263;p37"/>
-          <p:cNvSpPr/>
-          <p:nvPr/>
-        </p:nvSpPr>
-        <p:spPr>
-          <a:xfrm>
-            <a:off x="6599470" y="1823053"/>
-            <a:ext cx="1681800" cy="648300"/>
-          </a:xfrm>
-          <a:prstGeom prst="roundRect">
-            <a:avLst>
-              <a:gd fmla="val 16667" name="adj"/>
-            </a:avLst>
-          </a:prstGeom>
-          <a:solidFill>
-            <a:srgbClr val="C1F0C7"/>
-          </a:solidFill>
-          <a:ln cap="flat" cmpd="sng" w="19050">
-            <a:solidFill>
-              <a:srgbClr val="082836"/>
-            </a:solidFill>
-            <a:prstDash val="solid"/>
-            <a:miter lim="8000"/>
-            <a:headEnd len="sm" w="sm" type="none"/>
-            <a:tailEnd len="sm" w="sm" type="none"/>
-          </a:ln>
-          <a:effectLst>
-            <a:outerShdw blurRad="50800" rotWithShape="0" algn="tl" dir="2700000" dist="38100">
-              <a:srgbClr val="000000">
-                <a:alpha val="40000"/>
-              </a:srgbClr>
-            </a:outerShdw>
-          </a:effectLst>
-        </p:spPr>
-        <p:txBody>
-          <a:bodyPr anchorCtr="0" anchor="ctr" bIns="34275" lIns="68575" spcFirstLastPara="1" rIns="68575" wrap="square" tIns="34275">
-            <a:noAutofit/>
-          </a:bodyPr>
-          <a:lstStyle/>
-          <a:p>
-            <a:pPr indent="0" lvl="0" marL="0" marR="0" rtl="0" algn="ctr">
-              <a:spcBef>
-                <a:spcPts val="0"/>
-              </a:spcBef>
-              <a:spcAft>
-                <a:spcPts val="0"/>
-              </a:spcAft>
-              <a:buNone/>
-            </a:pPr>
-            <a:r>
-              <a:rPr lang="en" sz="1400">
-                <a:solidFill>
-                  <a:schemeClr val="dk1"/>
-                </a:solidFill>
-                <a:latin typeface="Arial"/>
-                <a:ea typeface="Arial"/>
-                <a:cs typeface="Arial"/>
-                <a:sym typeface="Arial"/>
-              </a:rPr>
-              <a:t>Predicted </a:t>
-            </a:r>
-            <a:endParaRPr sz="1100"/>
-          </a:p>
-          <a:p>
-            <a:pPr indent="0" lvl="0" marL="0" marR="0" rtl="0" algn="ctr">
-              <a:spcBef>
-                <a:spcPts val="0"/>
-              </a:spcBef>
-              <a:spcAft>
-                <a:spcPts val="0"/>
-              </a:spcAft>
-              <a:buNone/>
-            </a:pPr>
-            <a:r>
-              <a:rPr lang="en" sz="1400">
-                <a:solidFill>
-                  <a:schemeClr val="dk1"/>
-                </a:solidFill>
-                <a:latin typeface="Arial"/>
-                <a:ea typeface="Arial"/>
-                <a:cs typeface="Arial"/>
-                <a:sym typeface="Arial"/>
-              </a:rPr>
-              <a:t>amount_inr</a:t>
-            </a:r>
-            <a:endParaRPr sz="1400">
-              <a:solidFill>
-                <a:schemeClr val="lt1"/>
-              </a:solidFill>
-              <a:latin typeface="Arial"/>
-              <a:ea typeface="Arial"/>
-              <a:cs typeface="Arial"/>
-              <a:sym typeface="Arial"/>
-            </a:endParaRPr>
-          </a:p>
-        </p:txBody>
-      </p:sp>
-      <p:sp>
-        <p:nvSpPr>
-          <p:cNvPr id="264" name="Google Shape;264;p37"/>
-          <p:cNvSpPr txBox="1"/>
-          <p:nvPr/>
-        </p:nvSpPr>
-        <p:spPr>
-          <a:xfrm>
-            <a:off x="4025047" y="1847115"/>
-            <a:ext cx="954900" cy="700200"/>
-          </a:xfrm>
-          <a:prstGeom prst="rect">
-            <a:avLst/>
-          </a:prstGeom>
-          <a:noFill/>
-          <a:ln>
-            <a:noFill/>
-          </a:ln>
-        </p:spPr>
-        <p:txBody>
-          <a:bodyPr anchorCtr="0" anchor="t" bIns="34275" lIns="68575" spcFirstLastPara="1" rIns="68575" wrap="square" tIns="34275">
-            <a:spAutoFit/>
-          </a:bodyPr>
-          <a:lstStyle/>
-          <a:p>
-            <a:pPr indent="0" lvl="0" marL="0" marR="0" rtl="0" algn="l">
-              <a:spcBef>
-                <a:spcPts val="0"/>
-              </a:spcBef>
-              <a:spcAft>
-                <a:spcPts val="0"/>
-              </a:spcAft>
-              <a:buNone/>
-            </a:pPr>
-            <a:r>
-              <a:rPr b="1" lang="en" sz="2700">
-                <a:solidFill>
-                  <a:schemeClr val="dk1"/>
-                </a:solidFill>
-                <a:latin typeface="Arial"/>
-                <a:ea typeface="Arial"/>
-                <a:cs typeface="Arial"/>
-                <a:sym typeface="Arial"/>
-              </a:rPr>
-              <a:t>→</a:t>
-            </a:r>
-            <a:endParaRPr sz="1100"/>
-          </a:p>
-          <a:p>
-            <a:pPr indent="0" lvl="0" marL="0" marR="0" rtl="0" algn="l">
-              <a:spcBef>
-                <a:spcPts val="0"/>
-              </a:spcBef>
-              <a:spcAft>
-                <a:spcPts val="0"/>
-              </a:spcAft>
-              <a:buNone/>
-            </a:pPr>
-            <a:r>
-              <a:t/>
-            </a:r>
-            <a:endParaRPr sz="1400">
-              <a:solidFill>
-                <a:schemeClr val="dk1"/>
-              </a:solidFill>
-              <a:latin typeface="Arial"/>
-              <a:ea typeface="Arial"/>
-              <a:cs typeface="Arial"/>
-              <a:sym typeface="Arial"/>
-            </a:endParaRPr>
-          </a:p>
-        </p:txBody>
-      </p:sp>
-      <p:sp>
-        <p:nvSpPr>
-          <p:cNvPr id="265" name="Google Shape;265;p37"/>
-          <p:cNvSpPr txBox="1"/>
-          <p:nvPr/>
-        </p:nvSpPr>
-        <p:spPr>
-          <a:xfrm>
-            <a:off x="6110514" y="1847113"/>
-            <a:ext cx="1075200" cy="700200"/>
-          </a:xfrm>
-          <a:prstGeom prst="rect">
-            <a:avLst/>
-          </a:prstGeom>
-          <a:noFill/>
-          <a:ln>
-            <a:noFill/>
-          </a:ln>
-        </p:spPr>
-        <p:txBody>
-          <a:bodyPr anchorCtr="0" anchor="t" bIns="34275" lIns="68575" spcFirstLastPara="1" rIns="68575" wrap="square" tIns="34275">
-            <a:spAutoFit/>
-          </a:bodyPr>
-          <a:lstStyle/>
-          <a:p>
-            <a:pPr indent="0" lvl="0" marL="0" marR="0" rtl="0" algn="l">
-              <a:spcBef>
-                <a:spcPts val="0"/>
-              </a:spcBef>
-              <a:spcAft>
-                <a:spcPts val="0"/>
-              </a:spcAft>
-              <a:buNone/>
-            </a:pPr>
-            <a:r>
-              <a:rPr b="1" lang="en" sz="2700">
-                <a:solidFill>
-                  <a:schemeClr val="dk1"/>
-                </a:solidFill>
-                <a:latin typeface="Arial"/>
-                <a:ea typeface="Arial"/>
-                <a:cs typeface="Arial"/>
-                <a:sym typeface="Arial"/>
-              </a:rPr>
-              <a:t>→</a:t>
-            </a:r>
-            <a:endParaRPr sz="1100"/>
-          </a:p>
-          <a:p>
-            <a:pPr indent="0" lvl="0" marL="0" marR="0" rtl="0" algn="l">
-              <a:spcBef>
-                <a:spcPts val="0"/>
-              </a:spcBef>
-              <a:spcAft>
-                <a:spcPts val="0"/>
-              </a:spcAft>
-              <a:buNone/>
-            </a:pPr>
-            <a:r>
-              <a:t/>
-            </a:r>
-            <a:endParaRPr sz="1400">
-              <a:solidFill>
-                <a:schemeClr val="dk1"/>
-              </a:solidFill>
-              <a:latin typeface="Arial"/>
-              <a:ea typeface="Arial"/>
-              <a:cs typeface="Arial"/>
-              <a:sym typeface="Arial"/>
-            </a:endParaRPr>
-          </a:p>
-        </p:txBody>
-      </p:sp>
-      <p:sp>
-        <p:nvSpPr>
-          <p:cNvPr id="266" name="Google Shape;266;p37"/>
-          <p:cNvSpPr txBox="1"/>
-          <p:nvPr/>
-        </p:nvSpPr>
-        <p:spPr>
-          <a:xfrm>
-            <a:off x="246726" y="2754800"/>
-            <a:ext cx="3787800" cy="408000"/>
-          </a:xfrm>
-          <a:prstGeom prst="rect">
-            <a:avLst/>
-          </a:prstGeom>
-          <a:noFill/>
-          <a:ln>
-            <a:noFill/>
-          </a:ln>
-        </p:spPr>
-        <p:txBody>
-          <a:bodyPr anchorCtr="0" anchor="t" bIns="34275" lIns="68575" spcFirstLastPara="1" rIns="68575" wrap="square" tIns="34275">
-            <a:spAutoFit/>
-          </a:bodyPr>
-          <a:lstStyle/>
-          <a:p>
-            <a:pPr indent="0" lvl="0" marL="0" marR="0" rtl="0" algn="l">
-              <a:spcBef>
-                <a:spcPts val="0"/>
-              </a:spcBef>
-              <a:spcAft>
-                <a:spcPts val="0"/>
-              </a:spcAft>
-              <a:buNone/>
-            </a:pPr>
-            <a:r>
-              <a:rPr b="1" lang="en" sz="2200">
-                <a:solidFill>
-                  <a:schemeClr val="dk1"/>
-                </a:solidFill>
-                <a:latin typeface="Arial"/>
-                <a:ea typeface="Arial"/>
-                <a:cs typeface="Arial"/>
-                <a:sym typeface="Arial"/>
-              </a:rPr>
-              <a:t>Evaluation matrices</a:t>
-            </a:r>
-            <a:endParaRPr b="1" sz="2200">
-              <a:solidFill>
-                <a:schemeClr val="dk1"/>
-              </a:solidFill>
-              <a:latin typeface="Arial"/>
-              <a:ea typeface="Arial"/>
-              <a:cs typeface="Arial"/>
-              <a:sym typeface="Arial"/>
-            </a:endParaRPr>
-          </a:p>
-        </p:txBody>
-      </p:sp>
-      <p:sp>
-        <p:nvSpPr>
-          <p:cNvPr id="267" name="Google Shape;267;p37"/>
-          <p:cNvSpPr/>
-          <p:nvPr/>
-        </p:nvSpPr>
-        <p:spPr>
-          <a:xfrm>
-            <a:off x="468628" y="3348293"/>
-            <a:ext cx="2315100" cy="1469700"/>
-          </a:xfrm>
-          <a:prstGeom prst="roundRect">
-            <a:avLst>
-              <a:gd fmla="val 16667" name="adj"/>
-            </a:avLst>
-          </a:prstGeom>
-          <a:solidFill>
-            <a:srgbClr val="D8D8D8"/>
-          </a:solidFill>
-          <a:ln cap="flat" cmpd="sng" w="19050">
-            <a:solidFill>
-              <a:srgbClr val="082836"/>
-            </a:solidFill>
-            <a:prstDash val="solid"/>
-            <a:miter lim="8000"/>
-            <a:headEnd len="sm" w="sm" type="none"/>
-            <a:tailEnd len="sm" w="sm" type="none"/>
-          </a:ln>
-          <a:effectLst>
-            <a:outerShdw blurRad="50800" rotWithShape="0" algn="tl" dir="2700000" dist="38100">
-              <a:srgbClr val="000000">
-                <a:alpha val="40000"/>
-              </a:srgbClr>
-            </a:outerShdw>
-          </a:effectLst>
-        </p:spPr>
-        <p:txBody>
-          <a:bodyPr anchorCtr="0" anchor="ctr" bIns="34275" lIns="68575" spcFirstLastPara="1" rIns="68575" wrap="square" tIns="34275">
-            <a:noAutofit/>
-          </a:bodyPr>
-          <a:lstStyle/>
-          <a:p>
-            <a:pPr indent="0" lvl="0" marL="0" marR="0" rtl="0" algn="ctr">
-              <a:spcBef>
-                <a:spcPts val="0"/>
-              </a:spcBef>
-              <a:spcAft>
-                <a:spcPts val="0"/>
-              </a:spcAft>
-              <a:buNone/>
-            </a:pPr>
-            <a:r>
-              <a:t/>
-            </a:r>
-            <a:endParaRPr sz="1400">
-              <a:solidFill>
-                <a:schemeClr val="lt1"/>
-              </a:solidFill>
-              <a:latin typeface="Arial"/>
-              <a:ea typeface="Arial"/>
-              <a:cs typeface="Arial"/>
-              <a:sym typeface="Arial"/>
-            </a:endParaRPr>
-          </a:p>
-        </p:txBody>
-      </p:sp>
-      <p:sp>
-        <p:nvSpPr>
-          <p:cNvPr id="268" name="Google Shape;268;p37"/>
-          <p:cNvSpPr/>
-          <p:nvPr/>
-        </p:nvSpPr>
-        <p:spPr>
-          <a:xfrm>
-            <a:off x="3137765" y="3316842"/>
-            <a:ext cx="2235300" cy="1469700"/>
-          </a:xfrm>
-          <a:prstGeom prst="roundRect">
-            <a:avLst>
-              <a:gd fmla="val 16667" name="adj"/>
-            </a:avLst>
-          </a:prstGeom>
-          <a:solidFill>
-            <a:srgbClr val="D8D8D8"/>
-          </a:solidFill>
-          <a:ln cap="flat" cmpd="sng" w="19050">
-            <a:solidFill>
-              <a:srgbClr val="082836"/>
-            </a:solidFill>
-            <a:prstDash val="solid"/>
-            <a:miter lim="8000"/>
-            <a:headEnd len="sm" w="sm" type="none"/>
-            <a:tailEnd len="sm" w="sm" type="none"/>
-          </a:ln>
-          <a:effectLst>
-            <a:outerShdw blurRad="50800" rotWithShape="0" algn="tl" dir="2700000" dist="38100">
-              <a:srgbClr val="000000">
-                <a:alpha val="40000"/>
-              </a:srgbClr>
-            </a:outerShdw>
-          </a:effectLst>
-        </p:spPr>
-        <p:txBody>
-          <a:bodyPr anchorCtr="0" anchor="ctr" bIns="34275" lIns="68575" spcFirstLastPara="1" rIns="68575" wrap="square" tIns="34275">
-            <a:noAutofit/>
-          </a:bodyPr>
-          <a:lstStyle/>
-          <a:p>
-            <a:pPr indent="0" lvl="0" marL="0" marR="0" rtl="0" algn="ctr">
-              <a:spcBef>
-                <a:spcPts val="0"/>
-              </a:spcBef>
-              <a:spcAft>
-                <a:spcPts val="0"/>
-              </a:spcAft>
-              <a:buNone/>
-            </a:pPr>
-            <a:r>
-              <a:t/>
-            </a:r>
-            <a:endParaRPr sz="1400">
-              <a:solidFill>
-                <a:schemeClr val="lt1"/>
-              </a:solidFill>
-              <a:latin typeface="Arial"/>
-              <a:ea typeface="Arial"/>
-              <a:cs typeface="Arial"/>
-              <a:sym typeface="Arial"/>
-            </a:endParaRPr>
-          </a:p>
-        </p:txBody>
-      </p:sp>
-      <p:sp>
-        <p:nvSpPr>
-          <p:cNvPr id="269" name="Google Shape;269;p37"/>
-          <p:cNvSpPr/>
-          <p:nvPr/>
-        </p:nvSpPr>
-        <p:spPr>
-          <a:xfrm>
-            <a:off x="5827858" y="3316906"/>
-            <a:ext cx="2235300" cy="1469700"/>
-          </a:xfrm>
-          <a:prstGeom prst="roundRect">
-            <a:avLst>
-              <a:gd fmla="val 16667" name="adj"/>
-            </a:avLst>
-          </a:prstGeom>
-          <a:solidFill>
-            <a:srgbClr val="D8D8D8"/>
-          </a:solidFill>
-          <a:ln cap="flat" cmpd="sng" w="19050">
-            <a:solidFill>
-              <a:srgbClr val="082836"/>
-            </a:solidFill>
-            <a:prstDash val="solid"/>
-            <a:miter lim="8000"/>
-            <a:headEnd len="sm" w="sm" type="none"/>
-            <a:tailEnd len="sm" w="sm" type="none"/>
-          </a:ln>
-          <a:effectLst>
-            <a:outerShdw blurRad="50800" rotWithShape="0" algn="tl" dir="2700000" dist="38100">
-              <a:srgbClr val="000000">
-                <a:alpha val="40000"/>
-              </a:srgbClr>
-            </a:outerShdw>
-          </a:effectLst>
-        </p:spPr>
-        <p:txBody>
-          <a:bodyPr anchorCtr="0" anchor="ctr" bIns="34275" lIns="68575" spcFirstLastPara="1" rIns="68575" wrap="square" tIns="34275">
-            <a:noAutofit/>
-          </a:bodyPr>
-          <a:lstStyle/>
-          <a:p>
-            <a:pPr indent="0" lvl="0" marL="0" marR="0" rtl="0" algn="ctr">
-              <a:spcBef>
-                <a:spcPts val="0"/>
-              </a:spcBef>
-              <a:spcAft>
-                <a:spcPts val="0"/>
-              </a:spcAft>
-              <a:buNone/>
-            </a:pPr>
-            <a:r>
-              <a:t/>
-            </a:r>
-            <a:endParaRPr sz="1400">
-              <a:solidFill>
-                <a:schemeClr val="lt1"/>
-              </a:solidFill>
-              <a:latin typeface="Arial"/>
-              <a:ea typeface="Arial"/>
-              <a:cs typeface="Arial"/>
-              <a:sym typeface="Arial"/>
-            </a:endParaRPr>
-          </a:p>
-        </p:txBody>
-      </p:sp>
-      <p:sp>
-        <p:nvSpPr>
-          <p:cNvPr id="270" name="Google Shape;270;p37"/>
-          <p:cNvSpPr txBox="1"/>
-          <p:nvPr/>
-        </p:nvSpPr>
-        <p:spPr>
-          <a:xfrm>
-            <a:off x="537006" y="3478427"/>
-            <a:ext cx="1871400" cy="284700"/>
-          </a:xfrm>
-          <a:prstGeom prst="rect">
-            <a:avLst/>
-          </a:prstGeom>
-          <a:noFill/>
-          <a:ln>
-            <a:noFill/>
-          </a:ln>
-        </p:spPr>
-        <p:txBody>
-          <a:bodyPr anchorCtr="0" anchor="t" bIns="34275" lIns="68575" spcFirstLastPara="1" rIns="68575" wrap="square" tIns="34275">
-            <a:spAutoFit/>
-          </a:bodyPr>
-          <a:lstStyle/>
-          <a:p>
-            <a:pPr indent="0" lvl="0" marL="0" marR="0" rtl="0" algn="l">
-              <a:spcBef>
-                <a:spcPts val="0"/>
-              </a:spcBef>
-              <a:spcAft>
-                <a:spcPts val="0"/>
-              </a:spcAft>
-              <a:buNone/>
-            </a:pPr>
-            <a:r>
-              <a:rPr b="1" lang="en" sz="1400">
-                <a:solidFill>
-                  <a:schemeClr val="dk1"/>
-                </a:solidFill>
-                <a:latin typeface="Arial"/>
-                <a:ea typeface="Arial"/>
-                <a:cs typeface="Arial"/>
-                <a:sym typeface="Arial"/>
-              </a:rPr>
-              <a:t>1. MAE</a:t>
-            </a:r>
-            <a:endParaRPr b="1" sz="1400">
-              <a:solidFill>
-                <a:schemeClr val="dk1"/>
-              </a:solidFill>
-              <a:latin typeface="Arial"/>
-              <a:ea typeface="Arial"/>
-              <a:cs typeface="Arial"/>
-              <a:sym typeface="Arial"/>
-            </a:endParaRPr>
-          </a:p>
-        </p:txBody>
-      </p:sp>
-      <p:sp>
-        <p:nvSpPr>
-          <p:cNvPr id="271" name="Google Shape;271;p37"/>
-          <p:cNvSpPr txBox="1"/>
-          <p:nvPr/>
-        </p:nvSpPr>
-        <p:spPr>
-          <a:xfrm>
-            <a:off x="591671" y="3782310"/>
-            <a:ext cx="2408400" cy="1023600"/>
-          </a:xfrm>
-          <a:prstGeom prst="rect">
-            <a:avLst/>
-          </a:prstGeom>
-          <a:noFill/>
-          <a:ln>
-            <a:noFill/>
-          </a:ln>
-        </p:spPr>
-        <p:txBody>
-          <a:bodyPr anchorCtr="0" anchor="t" bIns="34275" lIns="68575" spcFirstLastPara="1" rIns="68575" wrap="square" tIns="34275">
-            <a:spAutoFit/>
-          </a:bodyPr>
-          <a:lstStyle/>
-          <a:p>
-            <a:pPr indent="0" lvl="0" marL="0" marR="0" rtl="0" algn="l">
-              <a:spcBef>
-                <a:spcPts val="0"/>
-              </a:spcBef>
-              <a:spcAft>
-                <a:spcPts val="0"/>
-              </a:spcAft>
-              <a:buNone/>
-            </a:pPr>
-            <a:r>
-              <a:rPr lang="en" sz="1200">
-                <a:solidFill>
-                  <a:schemeClr val="dk1"/>
-                </a:solidFill>
-                <a:latin typeface="Arial"/>
-                <a:ea typeface="Arial"/>
-                <a:cs typeface="Arial"/>
-                <a:sym typeface="Arial"/>
-              </a:rPr>
-              <a:t>Average absolute difference between actual and predicted costs. Lower MAE indicates </a:t>
-            </a:r>
-            <a:endParaRPr sz="1100"/>
-          </a:p>
-          <a:p>
-            <a:pPr indent="0" lvl="0" marL="0" marR="0" rtl="0" algn="l">
-              <a:spcBef>
-                <a:spcPts val="0"/>
-              </a:spcBef>
-              <a:spcAft>
-                <a:spcPts val="0"/>
-              </a:spcAft>
-              <a:buNone/>
-            </a:pPr>
-            <a:r>
-              <a:rPr lang="en" sz="1200">
-                <a:solidFill>
-                  <a:schemeClr val="dk1"/>
-                </a:solidFill>
-                <a:latin typeface="Arial"/>
-                <a:ea typeface="Arial"/>
-                <a:cs typeface="Arial"/>
-                <a:sym typeface="Arial"/>
-              </a:rPr>
-              <a:t>better prediction</a:t>
-            </a:r>
-            <a:endParaRPr sz="1100"/>
-          </a:p>
-          <a:p>
-            <a:pPr indent="0" lvl="0" marL="0" marR="0" rtl="0" algn="l">
-              <a:spcBef>
-                <a:spcPts val="0"/>
-              </a:spcBef>
-              <a:spcAft>
-                <a:spcPts val="0"/>
-              </a:spcAft>
-              <a:buNone/>
-            </a:pPr>
-            <a:r>
-              <a:t/>
-            </a:r>
-            <a:endParaRPr sz="1400">
-              <a:solidFill>
-                <a:schemeClr val="dk1"/>
-              </a:solidFill>
-              <a:latin typeface="Arial"/>
-              <a:ea typeface="Arial"/>
-              <a:cs typeface="Arial"/>
-              <a:sym typeface="Arial"/>
-            </a:endParaRPr>
-          </a:p>
-        </p:txBody>
-      </p:sp>
-      <p:sp>
-        <p:nvSpPr>
-          <p:cNvPr id="272" name="Google Shape;272;p37"/>
-          <p:cNvSpPr txBox="1"/>
-          <p:nvPr/>
-        </p:nvSpPr>
-        <p:spPr>
-          <a:xfrm>
-            <a:off x="3181687" y="3412660"/>
-            <a:ext cx="1872900" cy="300000"/>
-          </a:xfrm>
-          <a:prstGeom prst="rect">
-            <a:avLst/>
-          </a:prstGeom>
-          <a:noFill/>
-          <a:ln>
-            <a:noFill/>
-          </a:ln>
-        </p:spPr>
-        <p:txBody>
-          <a:bodyPr anchorCtr="0" anchor="t" bIns="34275" lIns="68575" spcFirstLastPara="1" rIns="68575" wrap="square" tIns="34275">
-            <a:spAutoFit/>
-          </a:bodyPr>
-          <a:lstStyle/>
-          <a:p>
-            <a:pPr indent="0" lvl="0" marL="0" marR="0" rtl="0" algn="l">
-              <a:spcBef>
-                <a:spcPts val="0"/>
-              </a:spcBef>
-              <a:spcAft>
-                <a:spcPts val="0"/>
-              </a:spcAft>
-              <a:buNone/>
-            </a:pPr>
-            <a:r>
-              <a:rPr b="1" lang="en" sz="1500">
-                <a:solidFill>
-                  <a:schemeClr val="dk1"/>
-                </a:solidFill>
-                <a:latin typeface="Arial"/>
-                <a:ea typeface="Arial"/>
-                <a:cs typeface="Arial"/>
-                <a:sym typeface="Arial"/>
-              </a:rPr>
-              <a:t>2. RMSE</a:t>
-            </a:r>
-            <a:endParaRPr b="1" sz="1500">
-              <a:solidFill>
-                <a:schemeClr val="dk1"/>
-              </a:solidFill>
-              <a:latin typeface="Arial"/>
-              <a:ea typeface="Arial"/>
-              <a:cs typeface="Arial"/>
-              <a:sym typeface="Arial"/>
-            </a:endParaRPr>
-          </a:p>
-        </p:txBody>
-      </p:sp>
-      <p:sp>
-        <p:nvSpPr>
-          <p:cNvPr id="273" name="Google Shape;273;p37"/>
-          <p:cNvSpPr txBox="1"/>
-          <p:nvPr/>
-        </p:nvSpPr>
-        <p:spPr>
-          <a:xfrm>
-            <a:off x="3273554" y="3763116"/>
-            <a:ext cx="1963800" cy="992700"/>
-          </a:xfrm>
-          <a:prstGeom prst="rect">
-            <a:avLst/>
-          </a:prstGeom>
-          <a:noFill/>
-          <a:ln>
-            <a:noFill/>
-          </a:ln>
-        </p:spPr>
-        <p:txBody>
-          <a:bodyPr anchorCtr="0" anchor="t" bIns="34275" lIns="68575" spcFirstLastPara="1" rIns="68575" wrap="square" tIns="34275">
-            <a:spAutoFit/>
-          </a:bodyPr>
-          <a:lstStyle/>
-          <a:p>
-            <a:pPr indent="0" lvl="0" marL="0" marR="0" rtl="0" algn="l">
-              <a:spcBef>
-                <a:spcPts val="0"/>
-              </a:spcBef>
-              <a:spcAft>
-                <a:spcPts val="0"/>
-              </a:spcAft>
-              <a:buNone/>
-            </a:pPr>
-            <a:r>
-              <a:rPr lang="en" sz="1200">
-                <a:solidFill>
-                  <a:schemeClr val="dk1"/>
-                </a:solidFill>
-                <a:latin typeface="Arial"/>
-                <a:ea typeface="Arial"/>
-                <a:cs typeface="Arial"/>
-                <a:sym typeface="Arial"/>
-              </a:rPr>
-              <a:t>Measures the difference between actual and predicted values, giving more penalty to larger errors..</a:t>
-            </a:r>
-            <a:endParaRPr sz="1400">
-              <a:solidFill>
-                <a:schemeClr val="dk1"/>
-              </a:solidFill>
-              <a:latin typeface="Arial"/>
-              <a:ea typeface="Arial"/>
-              <a:cs typeface="Arial"/>
-              <a:sym typeface="Arial"/>
-            </a:endParaRPr>
-          </a:p>
-        </p:txBody>
-      </p:sp>
-      <p:sp>
-        <p:nvSpPr>
-          <p:cNvPr id="274" name="Google Shape;274;p37"/>
-          <p:cNvSpPr txBox="1"/>
-          <p:nvPr/>
-        </p:nvSpPr>
-        <p:spPr>
-          <a:xfrm>
-            <a:off x="5827850" y="3412654"/>
-            <a:ext cx="1963800" cy="515700"/>
-          </a:xfrm>
-          <a:prstGeom prst="rect">
-            <a:avLst/>
-          </a:prstGeom>
-          <a:noFill/>
-          <a:ln>
-            <a:noFill/>
-          </a:ln>
-        </p:spPr>
-        <p:txBody>
-          <a:bodyPr anchorCtr="0" anchor="t" bIns="34275" lIns="68575" spcFirstLastPara="1" rIns="68575" wrap="square" tIns="34275">
-            <a:spAutoFit/>
-          </a:bodyPr>
-          <a:lstStyle/>
-          <a:p>
-            <a:pPr indent="0" lvl="0" marL="0" marR="0" rtl="0" algn="l">
-              <a:spcBef>
-                <a:spcPts val="0"/>
-              </a:spcBef>
-              <a:spcAft>
-                <a:spcPts val="0"/>
-              </a:spcAft>
-              <a:buNone/>
-            </a:pPr>
-            <a:r>
-              <a:rPr b="1" lang="en" sz="1500">
-                <a:solidFill>
-                  <a:schemeClr val="dk1"/>
-                </a:solidFill>
-                <a:latin typeface="Arial"/>
-                <a:ea typeface="Arial"/>
-                <a:cs typeface="Arial"/>
-                <a:sym typeface="Arial"/>
-              </a:rPr>
-              <a:t>3. R² Score</a:t>
-            </a:r>
-            <a:endParaRPr sz="1500">
-              <a:solidFill>
-                <a:schemeClr val="dk1"/>
-              </a:solidFill>
-              <a:latin typeface="Arial"/>
-              <a:ea typeface="Arial"/>
-              <a:cs typeface="Arial"/>
-              <a:sym typeface="Arial"/>
-            </a:endParaRPr>
-          </a:p>
-          <a:p>
-            <a:pPr indent="0" lvl="0" marL="0" marR="0" rtl="0" algn="l">
-              <a:spcBef>
-                <a:spcPts val="0"/>
-              </a:spcBef>
-              <a:spcAft>
-                <a:spcPts val="0"/>
-              </a:spcAft>
-              <a:buNone/>
-            </a:pPr>
-            <a:r>
-              <a:t/>
-            </a:r>
-            <a:endParaRPr sz="1400">
-              <a:solidFill>
-                <a:schemeClr val="dk1"/>
-              </a:solidFill>
-              <a:latin typeface="Arial"/>
-              <a:ea typeface="Arial"/>
-              <a:cs typeface="Arial"/>
-              <a:sym typeface="Arial"/>
-            </a:endParaRPr>
-          </a:p>
-        </p:txBody>
-      </p:sp>
-      <p:sp>
-        <p:nvSpPr>
-          <p:cNvPr id="275" name="Google Shape;275;p37"/>
-          <p:cNvSpPr txBox="1"/>
-          <p:nvPr/>
-        </p:nvSpPr>
-        <p:spPr>
-          <a:xfrm>
-            <a:off x="5884150" y="3774722"/>
-            <a:ext cx="2122800" cy="1054200"/>
-          </a:xfrm>
-          <a:prstGeom prst="rect">
-            <a:avLst/>
-          </a:prstGeom>
-          <a:noFill/>
-          <a:ln>
-            <a:noFill/>
-          </a:ln>
-        </p:spPr>
-        <p:txBody>
-          <a:bodyPr anchorCtr="0" anchor="t" bIns="34275" lIns="68575" spcFirstLastPara="1" rIns="68575" wrap="square" tIns="34275">
-            <a:spAutoFit/>
-          </a:bodyPr>
-          <a:lstStyle/>
-          <a:p>
-            <a:pPr indent="0" lvl="0" marL="0" marR="0" rtl="0" algn="l">
-              <a:spcBef>
-                <a:spcPts val="0"/>
-              </a:spcBef>
-              <a:spcAft>
-                <a:spcPts val="0"/>
-              </a:spcAft>
-              <a:buNone/>
-            </a:pPr>
-            <a:r>
-              <a:rPr lang="en" sz="1200">
-                <a:solidFill>
-                  <a:schemeClr val="dk1"/>
-                </a:solidFill>
-                <a:latin typeface="Arial"/>
-                <a:ea typeface="Arial"/>
-                <a:cs typeface="Arial"/>
-                <a:sym typeface="Arial"/>
-              </a:rPr>
-              <a:t>Shows how well the model explains variations in the target cost. A value closer to 1 indicates a better fit</a:t>
-            </a:r>
-            <a:r>
-              <a:rPr lang="en" sz="1400">
-                <a:solidFill>
-                  <a:schemeClr val="dk1"/>
-                </a:solidFill>
-                <a:latin typeface="Arial"/>
-                <a:ea typeface="Arial"/>
-                <a:cs typeface="Arial"/>
-                <a:sym typeface="Arial"/>
-              </a:rPr>
-              <a:t>.</a:t>
-            </a:r>
-            <a:endParaRPr sz="1100"/>
-          </a:p>
-          <a:p>
-            <a:pPr indent="0" lvl="0" marL="0" marR="0" rtl="0" algn="l">
-              <a:spcBef>
-                <a:spcPts val="0"/>
-              </a:spcBef>
-              <a:spcAft>
-                <a:spcPts val="0"/>
-              </a:spcAft>
-              <a:buNone/>
-            </a:pPr>
-            <a:r>
-              <a:t/>
-            </a:r>
-            <a:endParaRPr sz="1400">
-              <a:solidFill>
-                <a:schemeClr val="dk1"/>
-              </a:solidFill>
-              <a:latin typeface="Arial"/>
-              <a:ea typeface="Arial"/>
-              <a:cs typeface="Arial"/>
-              <a:sym typeface="Arial"/>
-            </a:endParaRPr>
-          </a:p>
-        </p:txBody>
-      </p:sp>
-    </p:spTree>
-  </p:cSld>
-  <p:clrMapOvr>
-    <a:masterClrMapping/>
-  </p:clrMapOvr>
-</p:sld>
-</file>
-
 <file path=ppt/theme/theme1.xml><?xml version="1.0" encoding="utf-8"?>
-<a:theme xmlns:a="http://schemas.openxmlformats.org/drawingml/2006/main" xmlns:r="http://schemas.openxmlformats.org/officeDocument/2006/relationships">
+<a:theme xmlns:a="http://schemas.openxmlformats.org/drawingml/2006/main" xmlns:r="http://schemas.openxmlformats.org/officeDocument/2006/relationships" name="Decision Tree Model: Implementation &amp; Evaluation">
   <a:themeElements>
-    <a:clrScheme name="Default">
+    <a:clrScheme name="Decision Tree Model: Implementation &amp; Evaluation">
       <a:dk1>
-        <a:srgbClr val="000000"/>
+        <a:srgbClr val="1B2A3A"/>
       </a:dk1>
       <a:lt1>
         <a:srgbClr val="FFFFFF"/>
       </a:lt1>
       <a:dk2>
-        <a:srgbClr val="158158"/>
+        <a:srgbClr val="545F6B"/>
       </a:dk2>
       <a:lt2>
-        <a:srgbClr val="F3F3F3"/>
+        <a:srgbClr val="E8EAEB"/>
       </a:lt2>
       <a:accent1>
-        <a:srgbClr val="058DC7"/>
+        <a:srgbClr val="B85A14"/>
       </a:accent1>
       <a:accent2>
-        <a:srgbClr val="50B432"/>
+        <a:srgbClr val="5B6672"/>
       </a:accent2>
       <a:accent3>
-        <a:srgbClr val="ED561B"/>
+        <a:srgbClr val="9AA0A6"/>
       </a:accent3>
       <a:accent4>
-        <a:srgbClr val="EDEF00"/>
+        <a:srgbClr val="767F89"/>
       </a:accent4>
       <a:accent5>
-        <a:srgbClr val="24CBE5"/>
+        <a:srgbClr val="989FA6"/>
       </a:accent5>
       <a:accent6>
-        <a:srgbClr val="64E572"/>
+        <a:srgbClr val="BBBFC4"/>
       </a:accent6>
       <a:hlink>
-        <a:srgbClr val="2200CC"/>
+        <a:srgbClr val="0563C1"/>
       </a:hlink>
       <a:folHlink>
-        <a:srgbClr val="551A8B"/>
+        <a:srgbClr val="954F72"/>
       </a:folHlink>
     </a:clrScheme>
     <a:fontScheme name="Office">
@@ -36537,44 +36893,44 @@
 </file>
 
 <file path=ppt/theme/theme2.xml><?xml version="1.0" encoding="utf-8"?>
-<a:theme xmlns:a="http://schemas.openxmlformats.org/drawingml/2006/main" xmlns:r="http://schemas.openxmlformats.org/officeDocument/2006/relationships" name="Decision Tree Model: Implementation &amp; Evaluation">
+<a:theme xmlns:a="http://schemas.openxmlformats.org/drawingml/2006/main" xmlns:r="http://schemas.openxmlformats.org/officeDocument/2006/relationships">
   <a:themeElements>
-    <a:clrScheme name="Decision Tree Model: Implementation &amp; Evaluation">
+    <a:clrScheme name="Default">
       <a:dk1>
-        <a:srgbClr val="1B2A3A"/>
+        <a:srgbClr val="000000"/>
       </a:dk1>
       <a:lt1>
         <a:srgbClr val="FFFFFF"/>
       </a:lt1>
       <a:dk2>
-        <a:srgbClr val="545F6B"/>
+        <a:srgbClr val="158158"/>
       </a:dk2>
       <a:lt2>
-        <a:srgbClr val="E8EAEB"/>
+        <a:srgbClr val="F3F3F3"/>
       </a:lt2>
       <a:accent1>
-        <a:srgbClr val="B85A14"/>
+        <a:srgbClr val="058DC7"/>
       </a:accent1>
       <a:accent2>
-        <a:srgbClr val="5B6672"/>
+        <a:srgbClr val="50B432"/>
       </a:accent2>
       <a:accent3>
-        <a:srgbClr val="9AA0A6"/>
+        <a:srgbClr val="ED561B"/>
       </a:accent3>
       <a:accent4>
-        <a:srgbClr val="767F89"/>
+        <a:srgbClr val="EDEF00"/>
       </a:accent4>
       <a:accent5>
-        <a:srgbClr val="989FA6"/>
+        <a:srgbClr val="24CBE5"/>
       </a:accent5>
       <a:accent6>
-        <a:srgbClr val="BBBFC4"/>
+        <a:srgbClr val="64E572"/>
       </a:accent6>
       <a:hlink>
-        <a:srgbClr val="0563C1"/>
+        <a:srgbClr val="2200CC"/>
       </a:hlink>
       <a:folHlink>
-        <a:srgbClr val="954F72"/>
+        <a:srgbClr val="551A8B"/>
       </a:folHlink>
     </a:clrScheme>
     <a:fontScheme name="Office">

--- a/ML_Project_9_Group_3_Presentation.pptx
+++ b/ML_Project_9_Group_3_Presentation.pptx
@@ -21999,7 +21999,27 @@
                 <a:cs typeface="Arial"/>
                 <a:sym typeface="Arial"/>
               </a:rPr>
-              <a:t>Shows how well the model explains variations in the target cost. A value closer to 1 indicates a better fit</a:t>
+              <a:t>Shows how well the model explains variations in the target co</a:t>
+            </a:r>
+            <a:r>
+              <a:rPr lang="en" sz="1200">
+                <a:solidFill>
+                  <a:schemeClr val="dk1"/>
+                </a:solidFill>
+              </a:rPr>
+              <a:t>lumn</a:t>
+            </a:r>
+            <a:r>
+              <a:rPr lang="en" sz="1200">
+                <a:solidFill>
+                  <a:schemeClr val="dk1"/>
+                </a:solidFill>
+                <a:latin typeface="Arial"/>
+                <a:ea typeface="Arial"/>
+                <a:cs typeface="Arial"/>
+                <a:sym typeface="Arial"/>
+              </a:rPr>
+              <a:t>. A value closer to 1 indicates a better fit</a:t>
             </a:r>
             <a:r>
               <a:rPr lang="en" sz="1400">
@@ -22479,7 +22499,7 @@
             <a:tbl>
               <a:tblPr bandRow="1" firstRow="1">
                 <a:noFill/>
-                <a:tableStyleId>{3BC0AAAB-1D53-4040-A699-5D96CEA510C0}</a:tableStyleId>
+                <a:tableStyleId>{29DC7F4B-8063-4A96-8E9C-9EF12943423C}</a:tableStyleId>
               </a:tblPr>
               <a:tblGrid>
                 <a:gridCol w="3789000"/>
@@ -22589,7 +22609,7 @@
                           <a:cs typeface="Arial"/>
                           <a:sym typeface="Arial"/>
                         </a:rPr>
-                        <a:t>                  4,556,166</a:t>
+                        <a:t>                           3,253,582</a:t>
                       </a:r>
                       <a:endParaRPr b="1">
                         <a:solidFill>
@@ -22660,11 +22680,11 @@
                       </a:pPr>
                       <a:r>
                         <a:rPr lang="en"/>
-                        <a:t>                  </a:t>
+                        <a:t>                           </a:t>
                       </a:r>
                       <a:r>
                         <a:rPr b="1" lang="en"/>
-                        <a:t>7,446,062</a:t>
+                        <a:t>5,541,855 </a:t>
                       </a:r>
                       <a:endParaRPr b="1" sz="1400" u="none" cap="none" strike="noStrike"/>
                     </a:p>
@@ -22720,7 +22740,7 @@
                       </a:pPr>
                       <a:r>
                         <a:rPr b="1" lang="en"/>
-                        <a:t>                   0.9441</a:t>
+                        <a:t>                             0.9636</a:t>
                       </a:r>
                       <a:endParaRPr b="1" sz="1400" u="none" cap="none" strike="noStrike"/>
                     </a:p>
@@ -23598,7 +23618,7 @@
             <a:tbl>
               <a:tblPr>
                 <a:noFill/>
-                <a:tableStyleId>{CF0F31A1-41D4-4AAF-B530-283CD640ACAE}</a:tableStyleId>
+                <a:tableStyleId>{D40CF775-971E-4647-BF06-4388D5D44E86}</a:tableStyleId>
               </a:tblPr>
               <a:tblGrid>
                 <a:gridCol w="975350"/>
@@ -23973,7 +23993,15 @@
                           <a:cs typeface="Arial"/>
                           <a:sym typeface="Arial"/>
                         </a:rPr>
-                        <a:t>0.983</a:t>
+                        <a:t>0.9</a:t>
+                      </a:r>
+                      <a:r>
+                        <a:rPr lang="en" sz="1200">
+                          <a:solidFill>
+                            <a:srgbClr val="1B2A3A"/>
+                          </a:solidFill>
+                        </a:rPr>
+                        <a:t>136</a:t>
                       </a:r>
                       <a:endParaRPr sz="1200" u="none" cap="none" strike="noStrike">
                         <a:latin typeface="Arial"/>
@@ -24054,7 +24082,15 @@
                           <a:cs typeface="Arial"/>
                           <a:sym typeface="Arial"/>
                         </a:rPr>
-                        <a:t>0.918</a:t>
+                        <a:t>0.</a:t>
+                      </a:r>
+                      <a:r>
+                        <a:rPr lang="en" sz="1200">
+                          <a:solidFill>
+                            <a:srgbClr val="1B2A3A"/>
+                          </a:solidFill>
+                        </a:rPr>
+                        <a:t>8753</a:t>
                       </a:r>
                       <a:endParaRPr sz="1200" u="none" cap="none" strike="noStrike">
                         <a:latin typeface="Arial"/>
@@ -24218,7 +24254,47 @@
                           <a:cs typeface="Arial"/>
                           <a:sym typeface="Arial"/>
                         </a:rPr>
-                        <a:t>₹2.06M</a:t>
+                        <a:t>₹</a:t>
+                      </a:r>
+                      <a:r>
+                        <a:rPr lang="en" sz="1200">
+                          <a:solidFill>
+                            <a:srgbClr val="1B2A3A"/>
+                          </a:solidFill>
+                        </a:rPr>
+                        <a:t>4</a:t>
+                      </a:r>
+                      <a:r>
+                        <a:rPr lang="en" sz="1200" u="none" cap="none" strike="noStrike">
+                          <a:solidFill>
+                            <a:srgbClr val="1B2A3A"/>
+                          </a:solidFill>
+                          <a:latin typeface="Arial"/>
+                          <a:ea typeface="Arial"/>
+                          <a:cs typeface="Arial"/>
+                          <a:sym typeface="Arial"/>
+                        </a:rPr>
+                        <a:t>.</a:t>
+                      </a:r>
+                      <a:r>
+                        <a:rPr lang="en" sz="1200">
+                          <a:solidFill>
+                            <a:srgbClr val="1B2A3A"/>
+                          </a:solidFill>
+                        </a:rPr>
+                        <a:t>95</a:t>
+                      </a:r>
+                      <a:r>
+                        <a:rPr lang="en" sz="1200" u="none" cap="none" strike="noStrike">
+                          <a:solidFill>
+                            <a:srgbClr val="1B2A3A"/>
+                          </a:solidFill>
+                          <a:latin typeface="Arial"/>
+                          <a:ea typeface="Arial"/>
+                          <a:cs typeface="Arial"/>
+                          <a:sym typeface="Arial"/>
+                        </a:rPr>
+                        <a:t>M</a:t>
                       </a:r>
                       <a:endParaRPr sz="1200" u="none" cap="none" strike="noStrike">
                         <a:latin typeface="Arial"/>
@@ -24299,7 +24375,47 @@
                           <a:cs typeface="Arial"/>
                           <a:sym typeface="Arial"/>
                         </a:rPr>
-                        <a:t>₹4.69M</a:t>
+                        <a:t>₹</a:t>
+                      </a:r>
+                      <a:r>
+                        <a:rPr lang="en" sz="1200">
+                          <a:solidFill>
+                            <a:srgbClr val="1B2A3A"/>
+                          </a:solidFill>
+                        </a:rPr>
+                        <a:t>5</a:t>
+                      </a:r>
+                      <a:r>
+                        <a:rPr lang="en" sz="1200" u="none" cap="none" strike="noStrike">
+                          <a:solidFill>
+                            <a:srgbClr val="1B2A3A"/>
+                          </a:solidFill>
+                          <a:latin typeface="Arial"/>
+                          <a:ea typeface="Arial"/>
+                          <a:cs typeface="Arial"/>
+                          <a:sym typeface="Arial"/>
+                        </a:rPr>
+                        <a:t>.</a:t>
+                      </a:r>
+                      <a:r>
+                        <a:rPr lang="en" sz="1200">
+                          <a:solidFill>
+                            <a:srgbClr val="1B2A3A"/>
+                          </a:solidFill>
+                        </a:rPr>
+                        <a:t>22</a:t>
+                      </a:r>
+                      <a:r>
+                        <a:rPr lang="en" sz="1200" u="none" cap="none" strike="noStrike">
+                          <a:solidFill>
+                            <a:srgbClr val="1B2A3A"/>
+                          </a:solidFill>
+                          <a:latin typeface="Arial"/>
+                          <a:ea typeface="Arial"/>
+                          <a:cs typeface="Arial"/>
+                          <a:sym typeface="Arial"/>
+                        </a:rPr>
+                        <a:t>M</a:t>
                       </a:r>
                       <a:endParaRPr sz="1200" u="none" cap="none" strike="noStrike">
                         <a:latin typeface="Arial"/>
@@ -24463,7 +24579,47 @@
                           <a:cs typeface="Arial"/>
                           <a:sym typeface="Arial"/>
                         </a:rPr>
-                        <a:t>₹3.65M</a:t>
+                        <a:t>₹</a:t>
+                      </a:r>
+                      <a:r>
+                        <a:rPr lang="en" sz="1200">
+                          <a:solidFill>
+                            <a:srgbClr val="1B2A3A"/>
+                          </a:solidFill>
+                        </a:rPr>
+                        <a:t>8</a:t>
+                      </a:r>
+                      <a:r>
+                        <a:rPr lang="en" sz="1200" u="none" cap="none" strike="noStrike">
+                          <a:solidFill>
+                            <a:srgbClr val="1B2A3A"/>
+                          </a:solidFill>
+                          <a:latin typeface="Arial"/>
+                          <a:ea typeface="Arial"/>
+                          <a:cs typeface="Arial"/>
+                          <a:sym typeface="Arial"/>
+                        </a:rPr>
+                        <a:t>.</a:t>
+                      </a:r>
+                      <a:r>
+                        <a:rPr lang="en" sz="1200">
+                          <a:solidFill>
+                            <a:srgbClr val="1B2A3A"/>
+                          </a:solidFill>
+                        </a:rPr>
+                        <a:t>22</a:t>
+                      </a:r>
+                      <a:r>
+                        <a:rPr lang="en" sz="1200" u="none" cap="none" strike="noStrike">
+                          <a:solidFill>
+                            <a:srgbClr val="1B2A3A"/>
+                          </a:solidFill>
+                          <a:latin typeface="Arial"/>
+                          <a:ea typeface="Arial"/>
+                          <a:cs typeface="Arial"/>
+                          <a:sym typeface="Arial"/>
+                        </a:rPr>
+                        <a:t>M</a:t>
                       </a:r>
                       <a:endParaRPr sz="1200" u="none" cap="none" strike="noStrike">
                         <a:latin typeface="Arial"/>
@@ -24544,7 +24700,47 @@
                           <a:cs typeface="Arial"/>
                           <a:sym typeface="Arial"/>
                         </a:rPr>
-                        <a:t>₹8.33M</a:t>
+                        <a:t>₹</a:t>
+                      </a:r>
+                      <a:r>
+                        <a:rPr lang="en" sz="1200">
+                          <a:solidFill>
+                            <a:srgbClr val="1B2A3A"/>
+                          </a:solidFill>
+                        </a:rPr>
+                        <a:t>10</a:t>
+                      </a:r>
+                      <a:r>
+                        <a:rPr lang="en" sz="1200" u="none" cap="none" strike="noStrike">
+                          <a:solidFill>
+                            <a:srgbClr val="1B2A3A"/>
+                          </a:solidFill>
+                          <a:latin typeface="Arial"/>
+                          <a:ea typeface="Arial"/>
+                          <a:cs typeface="Arial"/>
+                          <a:sym typeface="Arial"/>
+                        </a:rPr>
+                        <a:t>.</a:t>
+                      </a:r>
+                      <a:r>
+                        <a:rPr lang="en" sz="1200">
+                          <a:solidFill>
+                            <a:srgbClr val="1B2A3A"/>
+                          </a:solidFill>
+                        </a:rPr>
+                        <a:t>25</a:t>
+                      </a:r>
+                      <a:r>
+                        <a:rPr lang="en" sz="1200" u="none" cap="none" strike="noStrike">
+                          <a:solidFill>
+                            <a:srgbClr val="1B2A3A"/>
+                          </a:solidFill>
+                          <a:latin typeface="Arial"/>
+                          <a:ea typeface="Arial"/>
+                          <a:cs typeface="Arial"/>
+                          <a:sym typeface="Arial"/>
+                        </a:rPr>
+                        <a:t>M</a:t>
                       </a:r>
                       <a:endParaRPr sz="1200" u="none" cap="none" strike="noStrike">
                         <a:latin typeface="Arial"/>
@@ -27013,7 +27209,7 @@
             <a:tbl>
               <a:tblPr bandRow="1" firstRow="1">
                 <a:noFill/>
-                <a:tableStyleId>{3BC0AAAB-1D53-4040-A699-5D96CEA510C0}</a:tableStyleId>
+                <a:tableStyleId>{29DC7F4B-8063-4A96-8E9C-9EF12943423C}</a:tableStyleId>
               </a:tblPr>
               <a:tblGrid>
                 <a:gridCol w="3789000"/>
@@ -27123,7 +27319,7 @@
                           <a:cs typeface="Arial"/>
                           <a:sym typeface="Arial"/>
                         </a:rPr>
-                        <a:t>                  3228138</a:t>
+                        <a:t>                           3228139</a:t>
                       </a:r>
                       <a:endParaRPr b="1">
                         <a:solidFill>
@@ -27194,11 +27390,11 @@
                       </a:pPr>
                       <a:r>
                         <a:rPr lang="en"/>
-                        <a:t>                  </a:t>
+                        <a:t>                           </a:t>
                       </a:r>
                       <a:r>
                         <a:rPr b="1" lang="en"/>
-                        <a:t>5511005</a:t>
+                        <a:t>5511006</a:t>
                       </a:r>
                       <a:endParaRPr b="1" sz="1400" u="none" cap="none" strike="noStrike"/>
                     </a:p>
@@ -27254,7 +27450,7 @@
                       </a:pPr>
                       <a:r>
                         <a:rPr b="1" lang="en"/>
-                        <a:t>                   0.9636</a:t>
+                        <a:t>                            0.9640</a:t>
                       </a:r>
                       <a:endParaRPr b="1" sz="1400" u="none" cap="none" strike="noStrike"/>
                     </a:p>
@@ -28436,7 +28632,7 @@
             <a:tbl>
               <a:tblPr>
                 <a:noFill/>
-                <a:tableStyleId>{B177CFA1-0BE8-4A10-A344-8AC451ACEC89}</a:tableStyleId>
+                <a:tableStyleId>{DEF2F348-C15B-4A91-8320-6C4DE4650724}</a:tableStyleId>
               </a:tblPr>
               <a:tblGrid>
                 <a:gridCol w="1964700"/>
@@ -36614,285 +36810,6 @@
 </file>
 
 <file path=ppt/theme/theme1.xml><?xml version="1.0" encoding="utf-8"?>
-<a:theme xmlns:a="http://schemas.openxmlformats.org/drawingml/2006/main" xmlns:r="http://schemas.openxmlformats.org/officeDocument/2006/relationships" name="Decision Tree Model: Implementation &amp; Evaluation">
-  <a:themeElements>
-    <a:clrScheme name="Decision Tree Model: Implementation &amp; Evaluation">
-      <a:dk1>
-        <a:srgbClr val="1B2A3A"/>
-      </a:dk1>
-      <a:lt1>
-        <a:srgbClr val="FFFFFF"/>
-      </a:lt1>
-      <a:dk2>
-        <a:srgbClr val="545F6B"/>
-      </a:dk2>
-      <a:lt2>
-        <a:srgbClr val="E8EAEB"/>
-      </a:lt2>
-      <a:accent1>
-        <a:srgbClr val="B85A14"/>
-      </a:accent1>
-      <a:accent2>
-        <a:srgbClr val="5B6672"/>
-      </a:accent2>
-      <a:accent3>
-        <a:srgbClr val="9AA0A6"/>
-      </a:accent3>
-      <a:accent4>
-        <a:srgbClr val="767F89"/>
-      </a:accent4>
-      <a:accent5>
-        <a:srgbClr val="989FA6"/>
-      </a:accent5>
-      <a:accent6>
-        <a:srgbClr val="BBBFC4"/>
-      </a:accent6>
-      <a:hlink>
-        <a:srgbClr val="0563C1"/>
-      </a:hlink>
-      <a:folHlink>
-        <a:srgbClr val="954F72"/>
-      </a:folHlink>
-    </a:clrScheme>
-    <a:fontScheme name="Office">
-      <a:majorFont>
-        <a:latin typeface="Arial"/>
-        <a:ea typeface=""/>
-        <a:cs typeface=""/>
-        <a:font script="Jpan" typeface="ＭＳ Ｐゴシック"/>
-        <a:font script="Hang" typeface="맑은 고딕"/>
-        <a:font script="Hans" typeface="宋体"/>
-        <a:font script="Hant" typeface="新細明體"/>
-        <a:font script="Arab" typeface="Times New Roman"/>
-        <a:font script="Hebr" typeface="Times New Roman"/>
-        <a:font script="Thai" typeface="Angsana New"/>
-        <a:font script="Ethi" typeface="Nyala"/>
-        <a:font script="Beng" typeface="Vrinda"/>
-        <a:font script="Gujr" typeface="Shruti"/>
-        <a:font script="Khmr" typeface="MoolBoran"/>
-        <a:font script="Knda" typeface="Tunga"/>
-        <a:font script="Guru" typeface="Raavi"/>
-        <a:font script="Cans" typeface="Euphemia"/>
-        <a:font script="Cher" typeface="Plantagenet Cherokee"/>
-        <a:font script="Yiii" typeface="Microsoft Yi Baiti"/>
-        <a:font script="Tibt" typeface="Microsoft Himalaya"/>
-        <a:font script="Thaa" typeface="MV Boli"/>
-        <a:font script="Deva" typeface="Mangal"/>
-        <a:font script="Telu" typeface="Gautami"/>
-        <a:font script="Taml" typeface="Latha"/>
-        <a:font script="Syrc" typeface="Estrangelo Edessa"/>
-        <a:font script="Orya" typeface="Kalinga"/>
-        <a:font script="Mlym" typeface="Kartika"/>
-        <a:font script="Laoo" typeface="DokChampa"/>
-        <a:font script="Sinh" typeface="Iskoola Pota"/>
-        <a:font script="Mong" typeface="Mongolian Baiti"/>
-        <a:font script="Viet" typeface="Times New Roman"/>
-        <a:font script="Uigh" typeface="Microsoft Uighur"/>
-        <a:font script="Geor" typeface="Sylfaen"/>
-      </a:majorFont>
-      <a:minorFont>
-        <a:latin typeface="Arial"/>
-        <a:ea typeface=""/>
-        <a:cs typeface=""/>
-        <a:font script="Jpan" typeface="ＭＳ Ｐゴシック"/>
-        <a:font script="Hang" typeface="맑은 고딕"/>
-        <a:font script="Hans" typeface="宋体"/>
-        <a:font script="Hant" typeface="新細明體"/>
-        <a:font script="Arab" typeface="Arial"/>
-        <a:font script="Hebr" typeface="Arial"/>
-        <a:font script="Thai" typeface="Cordia New"/>
-        <a:font script="Ethi" typeface="Nyala"/>
-        <a:font script="Beng" typeface="Vrinda"/>
-        <a:font script="Gujr" typeface="Shruti"/>
-        <a:font script="Khmr" typeface="DaunPenh"/>
-        <a:font script="Knda" typeface="Tunga"/>
-        <a:font script="Guru" typeface="Raavi"/>
-        <a:font script="Cans" typeface="Euphemia"/>
-        <a:font script="Cher" typeface="Plantagenet Cherokee"/>
-        <a:font script="Yiii" typeface="Microsoft Yi Baiti"/>
-        <a:font script="Tibt" typeface="Microsoft Himalaya"/>
-        <a:font script="Thaa" typeface="MV Boli"/>
-        <a:font script="Deva" typeface="Mangal"/>
-        <a:font script="Telu" typeface="Gautami"/>
-        <a:font script="Taml" typeface="Latha"/>
-        <a:font script="Syrc" typeface="Estrangelo Edessa"/>
-        <a:font script="Orya" typeface="Kalinga"/>
-        <a:font script="Mlym" typeface="Kartika"/>
-        <a:font script="Laoo" typeface="DokChampa"/>
-        <a:font script="Sinh" typeface="Iskoola Pota"/>
-        <a:font script="Mong" typeface="Mongolian Baiti"/>
-        <a:font script="Viet" typeface="Arial"/>
-        <a:font script="Uigh" typeface="Microsoft Uighur"/>
-        <a:font script="Geor" typeface="Sylfaen"/>
-      </a:minorFont>
-    </a:fontScheme>
-    <a:fmtScheme name="Office">
-      <a:fillStyleLst>
-        <a:solidFill>
-          <a:schemeClr val="phClr"/>
-        </a:solidFill>
-        <a:gradFill rotWithShape="1">
-          <a:gsLst>
-            <a:gs pos="0">
-              <a:schemeClr val="phClr">
-                <a:tint val="50000"/>
-                <a:satMod val="300000"/>
-              </a:schemeClr>
-            </a:gs>
-            <a:gs pos="35000">
-              <a:schemeClr val="phClr">
-                <a:tint val="37000"/>
-                <a:satMod val="300000"/>
-              </a:schemeClr>
-            </a:gs>
-            <a:gs pos="100000">
-              <a:schemeClr val="phClr">
-                <a:tint val="15000"/>
-                <a:satMod val="350000"/>
-              </a:schemeClr>
-            </a:gs>
-          </a:gsLst>
-          <a:lin ang="16200000" scaled="1"/>
-        </a:gradFill>
-        <a:gradFill rotWithShape="1">
-          <a:gsLst>
-            <a:gs pos="0">
-              <a:schemeClr val="phClr">
-                <a:tint val="100000"/>
-                <a:shade val="100000"/>
-                <a:satMod val="130000"/>
-              </a:schemeClr>
-            </a:gs>
-            <a:gs pos="100000">
-              <a:schemeClr val="phClr">
-                <a:tint val="50000"/>
-                <a:shade val="100000"/>
-                <a:satMod val="350000"/>
-              </a:schemeClr>
-            </a:gs>
-          </a:gsLst>
-          <a:lin ang="16200000" scaled="0"/>
-        </a:gradFill>
-      </a:fillStyleLst>
-      <a:lnStyleLst>
-        <a:ln w="9525" cap="flat" cmpd="sng" algn="ctr">
-          <a:solidFill>
-            <a:schemeClr val="phClr">
-              <a:shade val="95000"/>
-              <a:satMod val="105000"/>
-            </a:schemeClr>
-          </a:solidFill>
-          <a:prstDash val="solid"/>
-        </a:ln>
-        <a:ln w="25400" cap="flat" cmpd="sng" algn="ctr">
-          <a:solidFill>
-            <a:schemeClr val="phClr"/>
-          </a:solidFill>
-          <a:prstDash val="solid"/>
-        </a:ln>
-        <a:ln w="38100" cap="flat" cmpd="sng" algn="ctr">
-          <a:solidFill>
-            <a:schemeClr val="phClr"/>
-          </a:solidFill>
-          <a:prstDash val="solid"/>
-        </a:ln>
-      </a:lnStyleLst>
-      <a:effectStyleLst>
-        <a:effectStyle>
-          <a:effectLst>
-            <a:outerShdw blurRad="40000" dist="20000" dir="5400000" rotWithShape="0">
-              <a:srgbClr val="000000">
-                <a:alpha val="38000"/>
-              </a:srgbClr>
-            </a:outerShdw>
-          </a:effectLst>
-        </a:effectStyle>
-        <a:effectStyle>
-          <a:effectLst>
-            <a:outerShdw blurRad="40000" dist="23000" dir="5400000" rotWithShape="0">
-              <a:srgbClr val="000000">
-                <a:alpha val="35000"/>
-              </a:srgbClr>
-            </a:outerShdw>
-          </a:effectLst>
-        </a:effectStyle>
-        <a:effectStyle>
-          <a:effectLst>
-            <a:outerShdw blurRad="40000" dist="23000" dir="5400000" rotWithShape="0">
-              <a:srgbClr val="000000">
-                <a:alpha val="35000"/>
-              </a:srgbClr>
-            </a:outerShdw>
-          </a:effectLst>
-          <a:scene3d>
-            <a:camera prst="orthographicFront">
-              <a:rot lat="0" lon="0" rev="0"/>
-            </a:camera>
-            <a:lightRig rig="threePt" dir="t">
-              <a:rot lat="0" lon="0" rev="1200000"/>
-            </a:lightRig>
-          </a:scene3d>
-          <a:sp3d>
-            <a:bevelT w="63500" h="25400"/>
-          </a:sp3d>
-        </a:effectStyle>
-      </a:effectStyleLst>
-      <a:bgFillStyleLst>
-        <a:solidFill>
-          <a:schemeClr val="phClr"/>
-        </a:solidFill>
-        <a:gradFill rotWithShape="1">
-          <a:gsLst>
-            <a:gs pos="0">
-              <a:schemeClr val="phClr">
-                <a:tint val="40000"/>
-                <a:satMod val="350000"/>
-              </a:schemeClr>
-            </a:gs>
-            <a:gs pos="40000">
-              <a:schemeClr val="phClr">
-                <a:tint val="45000"/>
-                <a:shade val="99000"/>
-                <a:satMod val="350000"/>
-              </a:schemeClr>
-            </a:gs>
-            <a:gs pos="100000">
-              <a:schemeClr val="phClr">
-                <a:shade val="20000"/>
-                <a:satMod val="255000"/>
-              </a:schemeClr>
-            </a:gs>
-          </a:gsLst>
-          <a:path path="circle">
-            <a:fillToRect l="50000" t="-80000" r="50000" b="180000"/>
-          </a:path>
-        </a:gradFill>
-        <a:gradFill rotWithShape="1">
-          <a:gsLst>
-            <a:gs pos="0">
-              <a:schemeClr val="phClr">
-                <a:tint val="80000"/>
-                <a:satMod val="300000"/>
-              </a:schemeClr>
-            </a:gs>
-            <a:gs pos="100000">
-              <a:schemeClr val="phClr">
-                <a:shade val="30000"/>
-                <a:satMod val="200000"/>
-              </a:schemeClr>
-            </a:gs>
-          </a:gsLst>
-          <a:path path="circle">
-            <a:fillToRect l="50000" t="50000" r="50000" b="50000"/>
-          </a:path>
-        </a:gradFill>
-      </a:bgFillStyleLst>
-    </a:fmtScheme>
-  </a:themeElements>
-</a:theme>
-</file>
-
-<file path=ppt/theme/theme2.xml><?xml version="1.0" encoding="utf-8"?>
 <a:theme xmlns:a="http://schemas.openxmlformats.org/drawingml/2006/main" xmlns:r="http://schemas.openxmlformats.org/officeDocument/2006/relationships">
   <a:themeElements>
     <a:clrScheme name="Default">
@@ -37171,7 +37088,7 @@
 </a:theme>
 </file>
 
-<file path=ppt/theme/theme3.xml><?xml version="1.0" encoding="utf-8"?>
+<file path=ppt/theme/theme2.xml><?xml version="1.0" encoding="utf-8"?>
 <a:theme xmlns:a="http://schemas.openxmlformats.org/drawingml/2006/main" xmlns:r="http://schemas.openxmlformats.org/officeDocument/2006/relationships" name="Simple Light">
   <a:themeElements>
     <a:clrScheme name="Simple Light">
@@ -37210,6 +37127,285 @@
       </a:hlink>
       <a:folHlink>
         <a:srgbClr val="0097A7"/>
+      </a:folHlink>
+    </a:clrScheme>
+    <a:fontScheme name="Office">
+      <a:majorFont>
+        <a:latin typeface="Arial"/>
+        <a:ea typeface=""/>
+        <a:cs typeface=""/>
+        <a:font script="Jpan" typeface="ＭＳ Ｐゴシック"/>
+        <a:font script="Hang" typeface="맑은 고딕"/>
+        <a:font script="Hans" typeface="宋体"/>
+        <a:font script="Hant" typeface="新細明體"/>
+        <a:font script="Arab" typeface="Times New Roman"/>
+        <a:font script="Hebr" typeface="Times New Roman"/>
+        <a:font script="Thai" typeface="Angsana New"/>
+        <a:font script="Ethi" typeface="Nyala"/>
+        <a:font script="Beng" typeface="Vrinda"/>
+        <a:font script="Gujr" typeface="Shruti"/>
+        <a:font script="Khmr" typeface="MoolBoran"/>
+        <a:font script="Knda" typeface="Tunga"/>
+        <a:font script="Guru" typeface="Raavi"/>
+        <a:font script="Cans" typeface="Euphemia"/>
+        <a:font script="Cher" typeface="Plantagenet Cherokee"/>
+        <a:font script="Yiii" typeface="Microsoft Yi Baiti"/>
+        <a:font script="Tibt" typeface="Microsoft Himalaya"/>
+        <a:font script="Thaa" typeface="MV Boli"/>
+        <a:font script="Deva" typeface="Mangal"/>
+        <a:font script="Telu" typeface="Gautami"/>
+        <a:font script="Taml" typeface="Latha"/>
+        <a:font script="Syrc" typeface="Estrangelo Edessa"/>
+        <a:font script="Orya" typeface="Kalinga"/>
+        <a:font script="Mlym" typeface="Kartika"/>
+        <a:font script="Laoo" typeface="DokChampa"/>
+        <a:font script="Sinh" typeface="Iskoola Pota"/>
+        <a:font script="Mong" typeface="Mongolian Baiti"/>
+        <a:font script="Viet" typeface="Times New Roman"/>
+        <a:font script="Uigh" typeface="Microsoft Uighur"/>
+        <a:font script="Geor" typeface="Sylfaen"/>
+      </a:majorFont>
+      <a:minorFont>
+        <a:latin typeface="Arial"/>
+        <a:ea typeface=""/>
+        <a:cs typeface=""/>
+        <a:font script="Jpan" typeface="ＭＳ Ｐゴシック"/>
+        <a:font script="Hang" typeface="맑은 고딕"/>
+        <a:font script="Hans" typeface="宋体"/>
+        <a:font script="Hant" typeface="新細明體"/>
+        <a:font script="Arab" typeface="Arial"/>
+        <a:font script="Hebr" typeface="Arial"/>
+        <a:font script="Thai" typeface="Cordia New"/>
+        <a:font script="Ethi" typeface="Nyala"/>
+        <a:font script="Beng" typeface="Vrinda"/>
+        <a:font script="Gujr" typeface="Shruti"/>
+        <a:font script="Khmr" typeface="DaunPenh"/>
+        <a:font script="Knda" typeface="Tunga"/>
+        <a:font script="Guru" typeface="Raavi"/>
+        <a:font script="Cans" typeface="Euphemia"/>
+        <a:font script="Cher" typeface="Plantagenet Cherokee"/>
+        <a:font script="Yiii" typeface="Microsoft Yi Baiti"/>
+        <a:font script="Tibt" typeface="Microsoft Himalaya"/>
+        <a:font script="Thaa" typeface="MV Boli"/>
+        <a:font script="Deva" typeface="Mangal"/>
+        <a:font script="Telu" typeface="Gautami"/>
+        <a:font script="Taml" typeface="Latha"/>
+        <a:font script="Syrc" typeface="Estrangelo Edessa"/>
+        <a:font script="Orya" typeface="Kalinga"/>
+        <a:font script="Mlym" typeface="Kartika"/>
+        <a:font script="Laoo" typeface="DokChampa"/>
+        <a:font script="Sinh" typeface="Iskoola Pota"/>
+        <a:font script="Mong" typeface="Mongolian Baiti"/>
+        <a:font script="Viet" typeface="Arial"/>
+        <a:font script="Uigh" typeface="Microsoft Uighur"/>
+        <a:font script="Geor" typeface="Sylfaen"/>
+      </a:minorFont>
+    </a:fontScheme>
+    <a:fmtScheme name="Office">
+      <a:fillStyleLst>
+        <a:solidFill>
+          <a:schemeClr val="phClr"/>
+        </a:solidFill>
+        <a:gradFill rotWithShape="1">
+          <a:gsLst>
+            <a:gs pos="0">
+              <a:schemeClr val="phClr">
+                <a:tint val="50000"/>
+                <a:satMod val="300000"/>
+              </a:schemeClr>
+            </a:gs>
+            <a:gs pos="35000">
+              <a:schemeClr val="phClr">
+                <a:tint val="37000"/>
+                <a:satMod val="300000"/>
+              </a:schemeClr>
+            </a:gs>
+            <a:gs pos="100000">
+              <a:schemeClr val="phClr">
+                <a:tint val="15000"/>
+                <a:satMod val="350000"/>
+              </a:schemeClr>
+            </a:gs>
+          </a:gsLst>
+          <a:lin ang="16200000" scaled="1"/>
+        </a:gradFill>
+        <a:gradFill rotWithShape="1">
+          <a:gsLst>
+            <a:gs pos="0">
+              <a:schemeClr val="phClr">
+                <a:tint val="100000"/>
+                <a:shade val="100000"/>
+                <a:satMod val="130000"/>
+              </a:schemeClr>
+            </a:gs>
+            <a:gs pos="100000">
+              <a:schemeClr val="phClr">
+                <a:tint val="50000"/>
+                <a:shade val="100000"/>
+                <a:satMod val="350000"/>
+              </a:schemeClr>
+            </a:gs>
+          </a:gsLst>
+          <a:lin ang="16200000" scaled="0"/>
+        </a:gradFill>
+      </a:fillStyleLst>
+      <a:lnStyleLst>
+        <a:ln w="9525" cap="flat" cmpd="sng" algn="ctr">
+          <a:solidFill>
+            <a:schemeClr val="phClr">
+              <a:shade val="95000"/>
+              <a:satMod val="105000"/>
+            </a:schemeClr>
+          </a:solidFill>
+          <a:prstDash val="solid"/>
+        </a:ln>
+        <a:ln w="25400" cap="flat" cmpd="sng" algn="ctr">
+          <a:solidFill>
+            <a:schemeClr val="phClr"/>
+          </a:solidFill>
+          <a:prstDash val="solid"/>
+        </a:ln>
+        <a:ln w="38100" cap="flat" cmpd="sng" algn="ctr">
+          <a:solidFill>
+            <a:schemeClr val="phClr"/>
+          </a:solidFill>
+          <a:prstDash val="solid"/>
+        </a:ln>
+      </a:lnStyleLst>
+      <a:effectStyleLst>
+        <a:effectStyle>
+          <a:effectLst>
+            <a:outerShdw blurRad="40000" dist="20000" dir="5400000" rotWithShape="0">
+              <a:srgbClr val="000000">
+                <a:alpha val="38000"/>
+              </a:srgbClr>
+            </a:outerShdw>
+          </a:effectLst>
+        </a:effectStyle>
+        <a:effectStyle>
+          <a:effectLst>
+            <a:outerShdw blurRad="40000" dist="23000" dir="5400000" rotWithShape="0">
+              <a:srgbClr val="000000">
+                <a:alpha val="35000"/>
+              </a:srgbClr>
+            </a:outerShdw>
+          </a:effectLst>
+        </a:effectStyle>
+        <a:effectStyle>
+          <a:effectLst>
+            <a:outerShdw blurRad="40000" dist="23000" dir="5400000" rotWithShape="0">
+              <a:srgbClr val="000000">
+                <a:alpha val="35000"/>
+              </a:srgbClr>
+            </a:outerShdw>
+          </a:effectLst>
+          <a:scene3d>
+            <a:camera prst="orthographicFront">
+              <a:rot lat="0" lon="0" rev="0"/>
+            </a:camera>
+            <a:lightRig rig="threePt" dir="t">
+              <a:rot lat="0" lon="0" rev="1200000"/>
+            </a:lightRig>
+          </a:scene3d>
+          <a:sp3d>
+            <a:bevelT w="63500" h="25400"/>
+          </a:sp3d>
+        </a:effectStyle>
+      </a:effectStyleLst>
+      <a:bgFillStyleLst>
+        <a:solidFill>
+          <a:schemeClr val="phClr"/>
+        </a:solidFill>
+        <a:gradFill rotWithShape="1">
+          <a:gsLst>
+            <a:gs pos="0">
+              <a:schemeClr val="phClr">
+                <a:tint val="40000"/>
+                <a:satMod val="350000"/>
+              </a:schemeClr>
+            </a:gs>
+            <a:gs pos="40000">
+              <a:schemeClr val="phClr">
+                <a:tint val="45000"/>
+                <a:shade val="99000"/>
+                <a:satMod val="350000"/>
+              </a:schemeClr>
+            </a:gs>
+            <a:gs pos="100000">
+              <a:schemeClr val="phClr">
+                <a:shade val="20000"/>
+                <a:satMod val="255000"/>
+              </a:schemeClr>
+            </a:gs>
+          </a:gsLst>
+          <a:path path="circle">
+            <a:fillToRect l="50000" t="-80000" r="50000" b="180000"/>
+          </a:path>
+        </a:gradFill>
+        <a:gradFill rotWithShape="1">
+          <a:gsLst>
+            <a:gs pos="0">
+              <a:schemeClr val="phClr">
+                <a:tint val="80000"/>
+                <a:satMod val="300000"/>
+              </a:schemeClr>
+            </a:gs>
+            <a:gs pos="100000">
+              <a:schemeClr val="phClr">
+                <a:shade val="30000"/>
+                <a:satMod val="200000"/>
+              </a:schemeClr>
+            </a:gs>
+          </a:gsLst>
+          <a:path path="circle">
+            <a:fillToRect l="50000" t="50000" r="50000" b="50000"/>
+          </a:path>
+        </a:gradFill>
+      </a:bgFillStyleLst>
+    </a:fmtScheme>
+  </a:themeElements>
+</a:theme>
+</file>
+
+<file path=ppt/theme/theme3.xml><?xml version="1.0" encoding="utf-8"?>
+<a:theme xmlns:a="http://schemas.openxmlformats.org/drawingml/2006/main" xmlns:r="http://schemas.openxmlformats.org/officeDocument/2006/relationships" name="Decision Tree Model: Implementation &amp; Evaluation">
+  <a:themeElements>
+    <a:clrScheme name="Decision Tree Model: Implementation &amp; Evaluation">
+      <a:dk1>
+        <a:srgbClr val="1B2A3A"/>
+      </a:dk1>
+      <a:lt1>
+        <a:srgbClr val="FFFFFF"/>
+      </a:lt1>
+      <a:dk2>
+        <a:srgbClr val="545F6B"/>
+      </a:dk2>
+      <a:lt2>
+        <a:srgbClr val="E8EAEB"/>
+      </a:lt2>
+      <a:accent1>
+        <a:srgbClr val="B85A14"/>
+      </a:accent1>
+      <a:accent2>
+        <a:srgbClr val="5B6672"/>
+      </a:accent2>
+      <a:accent3>
+        <a:srgbClr val="9AA0A6"/>
+      </a:accent3>
+      <a:accent4>
+        <a:srgbClr val="767F89"/>
+      </a:accent4>
+      <a:accent5>
+        <a:srgbClr val="989FA6"/>
+      </a:accent5>
+      <a:accent6>
+        <a:srgbClr val="BBBFC4"/>
+      </a:accent6>
+      <a:hlink>
+        <a:srgbClr val="0563C1"/>
+      </a:hlink>
+      <a:folHlink>
+        <a:srgbClr val="954F72"/>
       </a:folHlink>
     </a:clrScheme>
     <a:fontScheme name="Office">

--- a/ML_Project_9_Group_3_Presentation.pptx
+++ b/ML_Project_9_Group_3_Presentation.pptx
@@ -32,29 +32,28 @@
     <p:sldId id="275" r:id="rId28"/>
     <p:sldId id="276" r:id="rId29"/>
     <p:sldId id="277" r:id="rId30"/>
-    <p:sldId id="278" r:id="rId31"/>
   </p:sldIdLst>
   <p:sldSz cy="5143500" cx="9144000"/>
   <p:notesSz cx="6858000" cy="9144000"/>
   <p:embeddedFontLst>
     <p:embeddedFont>
       <p:font typeface="IBM Plex Sans"/>
-      <p:regular r:id="rId32"/>
-      <p:bold r:id="rId33"/>
-      <p:italic r:id="rId34"/>
-      <p:boldItalic r:id="rId35"/>
+      <p:regular r:id="rId31"/>
+      <p:bold r:id="rId32"/>
+      <p:italic r:id="rId33"/>
+      <p:boldItalic r:id="rId34"/>
     </p:embeddedFont>
     <p:embeddedFont>
       <p:font typeface="Play"/>
-      <p:regular r:id="rId36"/>
-      <p:bold r:id="rId37"/>
+      <p:regular r:id="rId35"/>
+      <p:bold r:id="rId36"/>
     </p:embeddedFont>
     <p:embeddedFont>
       <p:font typeface="DM Sans"/>
-      <p:regular r:id="rId38"/>
-      <p:bold r:id="rId39"/>
-      <p:italic r:id="rId40"/>
-      <p:boldItalic r:id="rId41"/>
+      <p:regular r:id="rId37"/>
+      <p:bold r:id="rId38"/>
+      <p:italic r:id="rId39"/>
+      <p:boldItalic r:id="rId40"/>
     </p:embeddedFont>
   </p:embeddedFontLst>
   <p:defaultTextStyle>
@@ -835,7 +834,7 @@
   <p:cSld>
     <p:spTree>
       <p:nvGrpSpPr>
-        <p:cNvPr id="258" name="Shape 258"/>
+        <p:cNvPr id="276" name="Shape 276"/>
         <p:cNvGrpSpPr/>
         <p:nvPr/>
       </p:nvGrpSpPr>
@@ -849,7 +848,7 @@
       </p:grpSpPr>
       <p:sp>
         <p:nvSpPr>
-          <p:cNvPr id="259" name="Google Shape;259;h2c8f91d5f6982453_35_0:notes"/>
+          <p:cNvPr id="277" name="Google Shape;277;h2c8f91d5f6982453_18_45:notes"/>
           <p:cNvSpPr/>
           <p:nvPr>
             <p:ph idx="2" type="sldImg"/>
@@ -894,7 +893,7 @@
       </p:sp>
       <p:sp>
         <p:nvSpPr>
-          <p:cNvPr id="260" name="Google Shape;260;h2c8f91d5f6982453_35_0:notes"/>
+          <p:cNvPr id="278" name="Google Shape;278;h2c8f91d5f6982453_18_45:notes"/>
           <p:cNvSpPr txBox="1"/>
           <p:nvPr>
             <p:ph idx="1" type="body"/>
@@ -937,7 +936,7 @@
       </p:sp>
       <p:sp>
         <p:nvSpPr>
-          <p:cNvPr id="261" name="Google Shape;261;h2c8f91d5f6982453_35_0:notes"/>
+          <p:cNvPr id="279" name="Google Shape;279;h2c8f91d5f6982453_18_45:notes"/>
           <p:cNvSpPr txBox="1"/>
           <p:nvPr>
             <p:ph idx="12" type="sldNum"/>
@@ -992,7 +991,7 @@
   <p:cSld>
     <p:spTree>
       <p:nvGrpSpPr>
-        <p:cNvPr id="284" name="Shape 284"/>
+        <p:cNvPr id="289" name="Shape 289"/>
         <p:cNvGrpSpPr/>
         <p:nvPr/>
       </p:nvGrpSpPr>
@@ -1006,164 +1005,7 @@
       </p:grpSpPr>
       <p:sp>
         <p:nvSpPr>
-          <p:cNvPr id="285" name="Google Shape;285;h2c8f91d5f6982453_18_45:notes"/>
-          <p:cNvSpPr/>
-          <p:nvPr>
-            <p:ph idx="2" type="sldImg"/>
-          </p:nvPr>
-        </p:nvSpPr>
-        <p:spPr>
-          <a:xfrm>
-            <a:off x="685800" y="1143000"/>
-            <a:ext cx="5486400" cy="3086100"/>
-          </a:xfrm>
-          <a:custGeom>
-            <a:rect b="b" l="l" r="r" t="t"/>
-            <a:pathLst>
-              <a:path extrusionOk="0" h="120000" w="120000">
-                <a:moveTo>
-                  <a:pt x="0" y="0"/>
-                </a:moveTo>
-                <a:lnTo>
-                  <a:pt x="120000" y="0"/>
-                </a:lnTo>
-                <a:lnTo>
-                  <a:pt x="120000" y="120000"/>
-                </a:lnTo>
-                <a:lnTo>
-                  <a:pt x="0" y="120000"/>
-                </a:lnTo>
-                <a:close/>
-              </a:path>
-            </a:pathLst>
-          </a:custGeom>
-          <a:noFill/>
-          <a:ln cap="flat" cmpd="sng" w="12700">
-            <a:solidFill>
-              <a:srgbClr val="000000"/>
-            </a:solidFill>
-            <a:prstDash val="solid"/>
-            <a:round/>
-            <a:headEnd len="sm" w="sm" type="none"/>
-            <a:tailEnd len="sm" w="sm" type="none"/>
-          </a:ln>
-        </p:spPr>
-      </p:sp>
-      <p:sp>
-        <p:nvSpPr>
-          <p:cNvPr id="286" name="Google Shape;286;h2c8f91d5f6982453_18_45:notes"/>
-          <p:cNvSpPr txBox="1"/>
-          <p:nvPr>
-            <p:ph idx="1" type="body"/>
-          </p:nvPr>
-        </p:nvSpPr>
-        <p:spPr>
-          <a:xfrm>
-            <a:off x="685800" y="4400550"/>
-            <a:ext cx="5486400" cy="3600450"/>
-          </a:xfrm>
-          <a:prstGeom prst="rect">
-            <a:avLst/>
-          </a:prstGeom>
-          <a:noFill/>
-          <a:ln>
-            <a:noFill/>
-          </a:ln>
-        </p:spPr>
-        <p:txBody>
-          <a:bodyPr anchorCtr="0" anchor="t" bIns="45700" lIns="91425" spcFirstLastPara="1" rIns="91425" wrap="square" tIns="45700">
-            <a:noAutofit/>
-          </a:bodyPr>
-          <a:lstStyle/>
-          <a:p>
-            <a:pPr indent="0" lvl="0" marL="0" rtl="0" algn="l">
-              <a:spcBef>
-                <a:spcPts val="0"/>
-              </a:spcBef>
-              <a:spcAft>
-                <a:spcPts val="0"/>
-              </a:spcAft>
-              <a:buNone/>
-            </a:pPr>
-            <a:r>
-              <a:t/>
-            </a:r>
-            <a:endParaRPr/>
-          </a:p>
-        </p:txBody>
-      </p:sp>
-      <p:sp>
-        <p:nvSpPr>
-          <p:cNvPr id="287" name="Google Shape;287;h2c8f91d5f6982453_18_45:notes"/>
-          <p:cNvSpPr txBox="1"/>
-          <p:nvPr>
-            <p:ph idx="12" type="sldNum"/>
-          </p:nvPr>
-        </p:nvSpPr>
-        <p:spPr>
-          <a:xfrm>
-            <a:off x="3884613" y="8685213"/>
-            <a:ext cx="2971800" cy="458787"/>
-          </a:xfrm>
-          <a:prstGeom prst="rect">
-            <a:avLst/>
-          </a:prstGeom>
-          <a:noFill/>
-          <a:ln>
-            <a:noFill/>
-          </a:ln>
-        </p:spPr>
-        <p:txBody>
-          <a:bodyPr anchorCtr="0" anchor="b" bIns="45700" lIns="91425" spcFirstLastPara="1" rIns="91425" wrap="square" tIns="45700">
-            <a:noAutofit/>
-          </a:bodyPr>
-          <a:lstStyle/>
-          <a:p>
-            <a:pPr indent="0" lvl="0" marL="0" rtl="0" algn="r">
-              <a:spcBef>
-                <a:spcPts val="0"/>
-              </a:spcBef>
-              <a:spcAft>
-                <a:spcPts val="0"/>
-              </a:spcAft>
-              <a:buNone/>
-            </a:pPr>
-            <a:fld id="{00000000-1234-1234-1234-123412341234}" type="slidenum">
-              <a:rPr lang="en"/>
-              <a:t>‹#›</a:t>
-            </a:fld>
-            <a:endParaRPr/>
-          </a:p>
-        </p:txBody>
-      </p:sp>
-    </p:spTree>
-  </p:cSld>
-  <p:clrMapOvr>
-    <a:masterClrMapping/>
-  </p:clrMapOvr>
-</p:notes>
-</file>
-
-<file path=ppt/notesSlides/notesSlide12.xml><?xml version="1.0" encoding="utf-8"?>
-<p:notes xmlns:a="http://schemas.openxmlformats.org/drawingml/2006/main" xmlns:r="http://schemas.openxmlformats.org/officeDocument/2006/relationships" xmlns:mc="http://schemas.openxmlformats.org/markup-compatibility/2006" xmlns:mv="urn:schemas-microsoft-com:mac:vml" xmlns:p="http://schemas.openxmlformats.org/presentationml/2006/main" xmlns:c="http://schemas.openxmlformats.org/drawingml/2006/chart" xmlns:dgm="http://schemas.openxmlformats.org/drawingml/2006/diagram" xmlns:o="urn:schemas-microsoft-com:office:office" xmlns:v="urn:schemas-microsoft-com:vml" xmlns:pvml="urn:schemas-microsoft-com:office:powerpoint" xmlns:com="http://schemas.openxmlformats.org/drawingml/2006/compatibility" xmlns:p14="http://schemas.microsoft.com/office/powerpoint/2010/main" xmlns:p15="http://schemas.microsoft.com/office/powerpoint/2012/main" xmlns:ahyp="http://schemas.microsoft.com/office/drawing/2018/hyperlinkcolor" showMasterPhAnim="0" showMasterSp="0">
-  <p:cSld>
-    <p:spTree>
-      <p:nvGrpSpPr>
-        <p:cNvPr id="297" name="Shape 297"/>
-        <p:cNvGrpSpPr/>
-        <p:nvPr/>
-      </p:nvGrpSpPr>
-      <p:grpSpPr>
-        <a:xfrm>
-          <a:off x="0" y="0"/>
-          <a:ext cx="0" cy="0"/>
-          <a:chOff x="0" y="0"/>
-          <a:chExt cx="0" cy="0"/>
-        </a:xfrm>
-      </p:grpSpPr>
-      <p:sp>
-        <p:nvSpPr>
-          <p:cNvPr id="298" name="Google Shape;298;h1eb388ce2fcb6e8_16_7:notes"/>
+          <p:cNvPr id="290" name="Google Shape;290;h1eb388ce2fcb6e8_16_7:notes"/>
           <p:cNvSpPr/>
           <p:nvPr>
             <p:ph idx="2" type="sldImg"/>
@@ -1208,7 +1050,7 @@
       </p:sp>
       <p:sp>
         <p:nvSpPr>
-          <p:cNvPr id="299" name="Google Shape;299;h1eb388ce2fcb6e8_16_7:notes"/>
+          <p:cNvPr id="291" name="Google Shape;291;h1eb388ce2fcb6e8_16_7:notes"/>
           <p:cNvSpPr txBox="1"/>
           <p:nvPr>
             <p:ph idx="1" type="body"/>
@@ -1252,7 +1094,7 @@
       </p:sp>
       <p:sp>
         <p:nvSpPr>
-          <p:cNvPr id="300" name="Google Shape;300;h1eb388ce2fcb6e8_16_7:notes"/>
+          <p:cNvPr id="292" name="Google Shape;292;h1eb388ce2fcb6e8_16_7:notes"/>
           <p:cNvSpPr txBox="1"/>
           <p:nvPr>
             <p:ph idx="12" type="sldNum"/>
@@ -1302,12 +1144,12 @@
 </p:notes>
 </file>
 
-<file path=ppt/notesSlides/notesSlide13.xml><?xml version="1.0" encoding="utf-8"?>
+<file path=ppt/notesSlides/notesSlide12.xml><?xml version="1.0" encoding="utf-8"?>
 <p:notes xmlns:a="http://schemas.openxmlformats.org/drawingml/2006/main" xmlns:r="http://schemas.openxmlformats.org/officeDocument/2006/relationships" xmlns:mc="http://schemas.openxmlformats.org/markup-compatibility/2006" xmlns:mv="urn:schemas-microsoft-com:mac:vml" xmlns:p="http://schemas.openxmlformats.org/presentationml/2006/main" xmlns:c="http://schemas.openxmlformats.org/drawingml/2006/chart" xmlns:dgm="http://schemas.openxmlformats.org/drawingml/2006/diagram" xmlns:o="urn:schemas-microsoft-com:office:office" xmlns:v="urn:schemas-microsoft-com:vml" xmlns:pvml="urn:schemas-microsoft-com:office:powerpoint" xmlns:com="http://schemas.openxmlformats.org/drawingml/2006/compatibility" xmlns:p14="http://schemas.microsoft.com/office/powerpoint/2010/main" xmlns:p15="http://schemas.microsoft.com/office/powerpoint/2012/main" xmlns:ahyp="http://schemas.microsoft.com/office/drawing/2018/hyperlinkcolor" showMasterPhAnim="0" showMasterSp="0">
   <p:cSld>
     <p:spTree>
       <p:nvGrpSpPr>
-        <p:cNvPr id="305" name="Shape 305"/>
+        <p:cNvPr id="297" name="Shape 297"/>
         <p:cNvGrpSpPr/>
         <p:nvPr/>
       </p:nvGrpSpPr>
@@ -1321,7 +1163,7 @@
       </p:grpSpPr>
       <p:sp>
         <p:nvSpPr>
-          <p:cNvPr id="306" name="Google Shape;306;h1eb388ce2fcb6e8_16_77:notes"/>
+          <p:cNvPr id="298" name="Google Shape;298;h1eb388ce2fcb6e8_16_77:notes"/>
           <p:cNvSpPr/>
           <p:nvPr>
             <p:ph idx="2" type="sldImg"/>
@@ -1366,7 +1208,7 @@
       </p:sp>
       <p:sp>
         <p:nvSpPr>
-          <p:cNvPr id="307" name="Google Shape;307;h1eb388ce2fcb6e8_16_77:notes"/>
+          <p:cNvPr id="299" name="Google Shape;299;h1eb388ce2fcb6e8_16_77:notes"/>
           <p:cNvSpPr txBox="1"/>
           <p:nvPr>
             <p:ph idx="1" type="body"/>
@@ -1410,7 +1252,7 @@
       </p:sp>
       <p:sp>
         <p:nvSpPr>
-          <p:cNvPr id="308" name="Google Shape;308;h1eb388ce2fcb6e8_16_77:notes"/>
+          <p:cNvPr id="300" name="Google Shape;300;h1eb388ce2fcb6e8_16_77:notes"/>
           <p:cNvSpPr txBox="1"/>
           <p:nvPr>
             <p:ph idx="12" type="sldNum"/>
@@ -1460,12 +1302,12 @@
 </p:notes>
 </file>
 
-<file path=ppt/notesSlides/notesSlide14.xml><?xml version="1.0" encoding="utf-8"?>
+<file path=ppt/notesSlides/notesSlide13.xml><?xml version="1.0" encoding="utf-8"?>
 <p:notes xmlns:a="http://schemas.openxmlformats.org/drawingml/2006/main" xmlns:r="http://schemas.openxmlformats.org/officeDocument/2006/relationships" xmlns:mc="http://schemas.openxmlformats.org/markup-compatibility/2006" xmlns:mv="urn:schemas-microsoft-com:mac:vml" xmlns:p="http://schemas.openxmlformats.org/presentationml/2006/main" xmlns:c="http://schemas.openxmlformats.org/drawingml/2006/chart" xmlns:dgm="http://schemas.openxmlformats.org/drawingml/2006/diagram" xmlns:o="urn:schemas-microsoft-com:office:office" xmlns:v="urn:schemas-microsoft-com:vml" xmlns:pvml="urn:schemas-microsoft-com:office:powerpoint" xmlns:com="http://schemas.openxmlformats.org/drawingml/2006/compatibility" xmlns:p14="http://schemas.microsoft.com/office/powerpoint/2010/main" xmlns:p15="http://schemas.microsoft.com/office/powerpoint/2012/main" xmlns:ahyp="http://schemas.microsoft.com/office/drawing/2018/hyperlinkcolor" showMasterPhAnim="0" showMasterSp="0">
   <p:cSld>
     <p:spTree>
       <p:nvGrpSpPr>
-        <p:cNvPr id="317" name="Shape 317"/>
+        <p:cNvPr id="309" name="Shape 309"/>
         <p:cNvGrpSpPr/>
         <p:nvPr/>
       </p:nvGrpSpPr>
@@ -1479,7 +1321,7 @@
       </p:grpSpPr>
       <p:sp>
         <p:nvSpPr>
-          <p:cNvPr id="318" name="Google Shape;318;h1eb388ce2fcb6e8_16_89:notes"/>
+          <p:cNvPr id="310" name="Google Shape;310;h1eb388ce2fcb6e8_16_89:notes"/>
           <p:cNvSpPr/>
           <p:nvPr>
             <p:ph idx="2" type="sldImg"/>
@@ -1524,7 +1366,7 @@
       </p:sp>
       <p:sp>
         <p:nvSpPr>
-          <p:cNvPr id="319" name="Google Shape;319;h1eb388ce2fcb6e8_16_89:notes"/>
+          <p:cNvPr id="311" name="Google Shape;311;h1eb388ce2fcb6e8_16_89:notes"/>
           <p:cNvSpPr txBox="1"/>
           <p:nvPr>
             <p:ph idx="1" type="body"/>
@@ -1568,7 +1410,7 @@
       </p:sp>
       <p:sp>
         <p:nvSpPr>
-          <p:cNvPr id="320" name="Google Shape;320;h1eb388ce2fcb6e8_16_89:notes"/>
+          <p:cNvPr id="312" name="Google Shape;312;h1eb388ce2fcb6e8_16_89:notes"/>
           <p:cNvSpPr txBox="1"/>
           <p:nvPr>
             <p:ph idx="12" type="sldNum"/>
@@ -1618,12 +1460,12 @@
 </p:notes>
 </file>
 
-<file path=ppt/notesSlides/notesSlide15.xml><?xml version="1.0" encoding="utf-8"?>
+<file path=ppt/notesSlides/notesSlide14.xml><?xml version="1.0" encoding="utf-8"?>
 <p:notes xmlns:a="http://schemas.openxmlformats.org/drawingml/2006/main" xmlns:r="http://schemas.openxmlformats.org/officeDocument/2006/relationships" xmlns:mc="http://schemas.openxmlformats.org/markup-compatibility/2006" xmlns:mv="urn:schemas-microsoft-com:mac:vml" xmlns:p="http://schemas.openxmlformats.org/presentationml/2006/main" xmlns:c="http://schemas.openxmlformats.org/drawingml/2006/chart" xmlns:dgm="http://schemas.openxmlformats.org/drawingml/2006/diagram" xmlns:o="urn:schemas-microsoft-com:office:office" xmlns:v="urn:schemas-microsoft-com:vml" xmlns:pvml="urn:schemas-microsoft-com:office:powerpoint" xmlns:com="http://schemas.openxmlformats.org/drawingml/2006/compatibility" xmlns:p14="http://schemas.microsoft.com/office/powerpoint/2010/main" xmlns:p15="http://schemas.microsoft.com/office/powerpoint/2012/main" xmlns:ahyp="http://schemas.microsoft.com/office/drawing/2018/hyperlinkcolor" showMasterPhAnim="0" showMasterSp="0">
   <p:cSld>
     <p:spTree>
       <p:nvGrpSpPr>
-        <p:cNvPr id="329" name="Shape 329"/>
+        <p:cNvPr id="321" name="Shape 321"/>
         <p:cNvGrpSpPr/>
         <p:nvPr/>
       </p:nvGrpSpPr>
@@ -1637,7 +1479,7 @@
       </p:grpSpPr>
       <p:sp>
         <p:nvSpPr>
-          <p:cNvPr id="330" name="Google Shape;330;h1eb388ce2fcb6e8_16_101:notes"/>
+          <p:cNvPr id="322" name="Google Shape;322;h1eb388ce2fcb6e8_16_101:notes"/>
           <p:cNvSpPr/>
           <p:nvPr>
             <p:ph idx="2" type="sldImg"/>
@@ -1682,7 +1524,7 @@
       </p:sp>
       <p:sp>
         <p:nvSpPr>
-          <p:cNvPr id="331" name="Google Shape;331;h1eb388ce2fcb6e8_16_101:notes"/>
+          <p:cNvPr id="323" name="Google Shape;323;h1eb388ce2fcb6e8_16_101:notes"/>
           <p:cNvSpPr txBox="1"/>
           <p:nvPr>
             <p:ph idx="1" type="body"/>
@@ -1726,7 +1568,7 @@
       </p:sp>
       <p:sp>
         <p:nvSpPr>
-          <p:cNvPr id="332" name="Google Shape;332;h1eb388ce2fcb6e8_16_101:notes"/>
+          <p:cNvPr id="324" name="Google Shape;324;h1eb388ce2fcb6e8_16_101:notes"/>
           <p:cNvSpPr txBox="1"/>
           <p:nvPr>
             <p:ph idx="12" type="sldNum"/>
@@ -1776,12 +1618,12 @@
 </p:notes>
 </file>
 
-<file path=ppt/notesSlides/notesSlide16.xml><?xml version="1.0" encoding="utf-8"?>
+<file path=ppt/notesSlides/notesSlide15.xml><?xml version="1.0" encoding="utf-8"?>
 <p:notes xmlns:a="http://schemas.openxmlformats.org/drawingml/2006/main" xmlns:r="http://schemas.openxmlformats.org/officeDocument/2006/relationships" xmlns:mc="http://schemas.openxmlformats.org/markup-compatibility/2006" xmlns:mv="urn:schemas-microsoft-com:mac:vml" xmlns:p="http://schemas.openxmlformats.org/presentationml/2006/main" xmlns:c="http://schemas.openxmlformats.org/drawingml/2006/chart" xmlns:dgm="http://schemas.openxmlformats.org/drawingml/2006/diagram" xmlns:o="urn:schemas-microsoft-com:office:office" xmlns:v="urn:schemas-microsoft-com:vml" xmlns:pvml="urn:schemas-microsoft-com:office:powerpoint" xmlns:com="http://schemas.openxmlformats.org/drawingml/2006/compatibility" xmlns:p14="http://schemas.microsoft.com/office/powerpoint/2010/main" xmlns:p15="http://schemas.microsoft.com/office/powerpoint/2012/main" xmlns:ahyp="http://schemas.microsoft.com/office/drawing/2018/hyperlinkcolor" showMasterPhAnim="0" showMasterSp="0">
   <p:cSld>
     <p:spTree>
       <p:nvGrpSpPr>
-        <p:cNvPr id="342" name="Shape 342"/>
+        <p:cNvPr id="334" name="Shape 334"/>
         <p:cNvGrpSpPr/>
         <p:nvPr/>
       </p:nvGrpSpPr>
@@ -1795,7 +1637,7 @@
       </p:grpSpPr>
       <p:sp>
         <p:nvSpPr>
-          <p:cNvPr id="343" name="Google Shape;343;h55f610596eb4887f_0_15:notes"/>
+          <p:cNvPr id="335" name="Google Shape;335;h55f610596eb4887f_0_15:notes"/>
           <p:cNvSpPr/>
           <p:nvPr>
             <p:ph idx="2" type="sldImg"/>
@@ -1830,7 +1672,7 @@
       </p:sp>
       <p:sp>
         <p:nvSpPr>
-          <p:cNvPr id="344" name="Google Shape;344;h55f610596eb4887f_0_15:notes"/>
+          <p:cNvPr id="336" name="Google Shape;336;h55f610596eb4887f_0_15:notes"/>
           <p:cNvSpPr txBox="1"/>
           <p:nvPr>
             <p:ph idx="1" type="body"/>
@@ -1875,12 +1717,12 @@
 </p:notes>
 </file>
 
-<file path=ppt/notesSlides/notesSlide17.xml><?xml version="1.0" encoding="utf-8"?>
+<file path=ppt/notesSlides/notesSlide16.xml><?xml version="1.0" encoding="utf-8"?>
 <p:notes xmlns:a="http://schemas.openxmlformats.org/drawingml/2006/main" xmlns:r="http://schemas.openxmlformats.org/officeDocument/2006/relationships" xmlns:mc="http://schemas.openxmlformats.org/markup-compatibility/2006" xmlns:mv="urn:schemas-microsoft-com:mac:vml" xmlns:p="http://schemas.openxmlformats.org/presentationml/2006/main" xmlns:c="http://schemas.openxmlformats.org/drawingml/2006/chart" xmlns:dgm="http://schemas.openxmlformats.org/drawingml/2006/diagram" xmlns:o="urn:schemas-microsoft-com:office:office" xmlns:v="urn:schemas-microsoft-com:vml" xmlns:pvml="urn:schemas-microsoft-com:office:powerpoint" xmlns:com="http://schemas.openxmlformats.org/drawingml/2006/compatibility" xmlns:p14="http://schemas.microsoft.com/office/powerpoint/2010/main" xmlns:p15="http://schemas.microsoft.com/office/powerpoint/2012/main" xmlns:ahyp="http://schemas.microsoft.com/office/drawing/2018/hyperlinkcolor" showMasterPhAnim="0" showMasterSp="0">
   <p:cSld>
     <p:spTree>
       <p:nvGrpSpPr>
-        <p:cNvPr id="361" name="Shape 361"/>
+        <p:cNvPr id="353" name="Shape 353"/>
         <p:cNvGrpSpPr/>
         <p:nvPr/>
       </p:nvGrpSpPr>
@@ -1894,7 +1736,7 @@
       </p:grpSpPr>
       <p:sp>
         <p:nvSpPr>
-          <p:cNvPr id="362" name="Google Shape;362;h55f610596eb4887f_0_20:notes"/>
+          <p:cNvPr id="354" name="Google Shape;354;h55f610596eb4887f_0_20:notes"/>
           <p:cNvSpPr/>
           <p:nvPr>
             <p:ph idx="2" type="sldImg"/>
@@ -1929,7 +1771,7 @@
       </p:sp>
       <p:sp>
         <p:nvSpPr>
-          <p:cNvPr id="363" name="Google Shape;363;h55f610596eb4887f_0_20:notes"/>
+          <p:cNvPr id="355" name="Google Shape;355;h55f610596eb4887f_0_20:notes"/>
           <p:cNvSpPr txBox="1"/>
           <p:nvPr>
             <p:ph idx="1" type="body"/>
@@ -1974,12 +1816,12 @@
 </p:notes>
 </file>
 
-<file path=ppt/notesSlides/notesSlide18.xml><?xml version="1.0" encoding="utf-8"?>
+<file path=ppt/notesSlides/notesSlide17.xml><?xml version="1.0" encoding="utf-8"?>
 <p:notes xmlns:a="http://schemas.openxmlformats.org/drawingml/2006/main" xmlns:r="http://schemas.openxmlformats.org/officeDocument/2006/relationships" xmlns:mc="http://schemas.openxmlformats.org/markup-compatibility/2006" xmlns:mv="urn:schemas-microsoft-com:mac:vml" xmlns:p="http://schemas.openxmlformats.org/presentationml/2006/main" xmlns:c="http://schemas.openxmlformats.org/drawingml/2006/chart" xmlns:dgm="http://schemas.openxmlformats.org/drawingml/2006/diagram" xmlns:o="urn:schemas-microsoft-com:office:office" xmlns:v="urn:schemas-microsoft-com:vml" xmlns:pvml="urn:schemas-microsoft-com:office:powerpoint" xmlns:com="http://schemas.openxmlformats.org/drawingml/2006/compatibility" xmlns:p14="http://schemas.microsoft.com/office/powerpoint/2010/main" xmlns:p15="http://schemas.microsoft.com/office/powerpoint/2012/main" xmlns:ahyp="http://schemas.microsoft.com/office/drawing/2018/hyperlinkcolor" showMasterPhAnim="0" showMasterSp="0">
   <p:cSld>
     <p:spTree>
       <p:nvGrpSpPr>
-        <p:cNvPr id="373" name="Shape 373"/>
+        <p:cNvPr id="365" name="Shape 365"/>
         <p:cNvGrpSpPr/>
         <p:nvPr/>
       </p:nvGrpSpPr>
@@ -1993,7 +1835,7 @@
       </p:grpSpPr>
       <p:sp>
         <p:nvSpPr>
-          <p:cNvPr id="374" name="Google Shape;374;p:notes"/>
+          <p:cNvPr id="366" name="Google Shape;366;p:notes"/>
           <p:cNvSpPr/>
           <p:nvPr>
             <p:ph idx="2" type="sldImg"/>
@@ -2028,7 +1870,7 @@
       </p:sp>
       <p:sp>
         <p:nvSpPr>
-          <p:cNvPr id="375" name="Google Shape;375;p:notes"/>
+          <p:cNvPr id="367" name="Google Shape;367;p:notes"/>
           <p:cNvSpPr txBox="1"/>
           <p:nvPr>
             <p:ph idx="1" type="body"/>
@@ -2073,12 +1915,12 @@
 </p:notes>
 </file>
 
-<file path=ppt/notesSlides/notesSlide19.xml><?xml version="1.0" encoding="utf-8"?>
+<file path=ppt/notesSlides/notesSlide18.xml><?xml version="1.0" encoding="utf-8"?>
 <p:notes xmlns:a="http://schemas.openxmlformats.org/drawingml/2006/main" xmlns:r="http://schemas.openxmlformats.org/officeDocument/2006/relationships" xmlns:mc="http://schemas.openxmlformats.org/markup-compatibility/2006" xmlns:mv="urn:schemas-microsoft-com:mac:vml" xmlns:p="http://schemas.openxmlformats.org/presentationml/2006/main" xmlns:c="http://schemas.openxmlformats.org/drawingml/2006/chart" xmlns:dgm="http://schemas.openxmlformats.org/drawingml/2006/diagram" xmlns:o="urn:schemas-microsoft-com:office:office" xmlns:v="urn:schemas-microsoft-com:vml" xmlns:pvml="urn:schemas-microsoft-com:office:powerpoint" xmlns:com="http://schemas.openxmlformats.org/drawingml/2006/compatibility" xmlns:p14="http://schemas.microsoft.com/office/powerpoint/2010/main" xmlns:p15="http://schemas.microsoft.com/office/powerpoint/2012/main" xmlns:ahyp="http://schemas.microsoft.com/office/drawing/2018/hyperlinkcolor" showMasterPhAnim="0" showMasterSp="0">
   <p:cSld>
     <p:spTree>
       <p:nvGrpSpPr>
-        <p:cNvPr id="384" name="Shape 384"/>
+        <p:cNvPr id="376" name="Shape 376"/>
         <p:cNvGrpSpPr/>
         <p:nvPr/>
       </p:nvGrpSpPr>
@@ -2092,7 +1934,7 @@
       </p:grpSpPr>
       <p:sp>
         <p:nvSpPr>
-          <p:cNvPr id="385" name="Google Shape;385;h55f610596eb4887f_0_0:notes"/>
+          <p:cNvPr id="377" name="Google Shape;377;h55f610596eb4887f_0_0:notes"/>
           <p:cNvSpPr/>
           <p:nvPr>
             <p:ph idx="2" type="sldImg"/>
@@ -2127,7 +1969,106 @@
       </p:sp>
       <p:sp>
         <p:nvSpPr>
-          <p:cNvPr id="386" name="Google Shape;386;h55f610596eb4887f_0_0:notes"/>
+          <p:cNvPr id="378" name="Google Shape;378;h55f610596eb4887f_0_0:notes"/>
+          <p:cNvSpPr txBox="1"/>
+          <p:nvPr>
+            <p:ph idx="1" type="body"/>
+          </p:nvPr>
+        </p:nvSpPr>
+        <p:spPr>
+          <a:xfrm>
+            <a:off x="685800" y="4343400"/>
+            <a:ext cx="5486400" cy="4114800"/>
+          </a:xfrm>
+          <a:prstGeom prst="rect">
+            <a:avLst/>
+          </a:prstGeom>
+        </p:spPr>
+        <p:txBody>
+          <a:bodyPr anchorCtr="0" anchor="t" bIns="91425" lIns="91425" spcFirstLastPara="1" rIns="91425" wrap="square" tIns="91425">
+            <a:noAutofit/>
+          </a:bodyPr>
+          <a:lstStyle/>
+          <a:p>
+            <a:pPr indent="0" lvl="0" marL="0" rtl="0" algn="l">
+              <a:spcBef>
+                <a:spcPts val="0"/>
+              </a:spcBef>
+              <a:spcAft>
+                <a:spcPts val="0"/>
+              </a:spcAft>
+              <a:buNone/>
+            </a:pPr>
+            <a:r>
+              <a:t/>
+            </a:r>
+            <a:endParaRPr/>
+          </a:p>
+        </p:txBody>
+      </p:sp>
+    </p:spTree>
+  </p:cSld>
+  <p:clrMapOvr>
+    <a:masterClrMapping/>
+  </p:clrMapOvr>
+</p:notes>
+</file>
+
+<file path=ppt/notesSlides/notesSlide19.xml><?xml version="1.0" encoding="utf-8"?>
+<p:notes xmlns:a="http://schemas.openxmlformats.org/drawingml/2006/main" xmlns:r="http://schemas.openxmlformats.org/officeDocument/2006/relationships" xmlns:mc="http://schemas.openxmlformats.org/markup-compatibility/2006" xmlns:mv="urn:schemas-microsoft-com:mac:vml" xmlns:p="http://schemas.openxmlformats.org/presentationml/2006/main" xmlns:c="http://schemas.openxmlformats.org/drawingml/2006/chart" xmlns:dgm="http://schemas.openxmlformats.org/drawingml/2006/diagram" xmlns:o="urn:schemas-microsoft-com:office:office" xmlns:v="urn:schemas-microsoft-com:vml" xmlns:pvml="urn:schemas-microsoft-com:office:powerpoint" xmlns:com="http://schemas.openxmlformats.org/drawingml/2006/compatibility" xmlns:p14="http://schemas.microsoft.com/office/powerpoint/2010/main" xmlns:p15="http://schemas.microsoft.com/office/powerpoint/2012/main" xmlns:ahyp="http://schemas.microsoft.com/office/drawing/2018/hyperlinkcolor" showMasterPhAnim="0" showMasterSp="0">
+  <p:cSld>
+    <p:spTree>
+      <p:nvGrpSpPr>
+        <p:cNvPr id="383" name="Shape 383"/>
+        <p:cNvGrpSpPr/>
+        <p:nvPr/>
+      </p:nvGrpSpPr>
+      <p:grpSpPr>
+        <a:xfrm>
+          <a:off x="0" y="0"/>
+          <a:ext cx="0" cy="0"/>
+          <a:chOff x="0" y="0"/>
+          <a:chExt cx="0" cy="0"/>
+        </a:xfrm>
+      </p:grpSpPr>
+      <p:sp>
+        <p:nvSpPr>
+          <p:cNvPr id="384" name="Google Shape;384;h55f610596eb4887f_0_5:notes"/>
+          <p:cNvSpPr/>
+          <p:nvPr>
+            <p:ph idx="2" type="sldImg"/>
+          </p:nvPr>
+        </p:nvSpPr>
+        <p:spPr>
+          <a:xfrm>
+            <a:off x="381300" y="685800"/>
+            <a:ext cx="6096000" cy="3429000"/>
+          </a:xfrm>
+          <a:custGeom>
+            <a:rect b="b" l="l" r="r" t="t"/>
+            <a:pathLst>
+              <a:path extrusionOk="0" h="120000" w="120000">
+                <a:moveTo>
+                  <a:pt x="0" y="0"/>
+                </a:moveTo>
+                <a:lnTo>
+                  <a:pt x="120000" y="0"/>
+                </a:lnTo>
+                <a:lnTo>
+                  <a:pt x="120000" y="120000"/>
+                </a:lnTo>
+                <a:lnTo>
+                  <a:pt x="0" y="120000"/>
+                </a:lnTo>
+                <a:close/>
+              </a:path>
+            </a:pathLst>
+          </a:custGeom>
+        </p:spPr>
+      </p:sp>
+      <p:sp>
+        <p:nvSpPr>
+          <p:cNvPr id="385" name="Google Shape;385;h55f610596eb4887f_0_5:notes"/>
           <p:cNvSpPr txBox="1"/>
           <p:nvPr>
             <p:ph idx="1" type="body"/>
@@ -2334,7 +2275,7 @@
   <p:cSld>
     <p:spTree>
       <p:nvGrpSpPr>
-        <p:cNvPr id="391" name="Shape 391"/>
+        <p:cNvPr id="390" name="Shape 390"/>
         <p:cNvGrpSpPr/>
         <p:nvPr/>
       </p:nvGrpSpPr>
@@ -2348,7 +2289,7 @@
       </p:grpSpPr>
       <p:sp>
         <p:nvSpPr>
-          <p:cNvPr id="392" name="Google Shape;392;h55f610596eb4887f_0_5:notes"/>
+          <p:cNvPr id="391" name="Google Shape;391;h55f610596eb4887f_0_10:notes"/>
           <p:cNvSpPr/>
           <p:nvPr>
             <p:ph idx="2" type="sldImg"/>
@@ -2383,7 +2324,7 @@
       </p:sp>
       <p:sp>
         <p:nvSpPr>
-          <p:cNvPr id="393" name="Google Shape;393;h55f610596eb4887f_0_5:notes"/>
+          <p:cNvPr id="392" name="Google Shape;392;h55f610596eb4887f_0_10:notes"/>
           <p:cNvSpPr txBox="1"/>
           <p:nvPr>
             <p:ph idx="1" type="body"/>
@@ -2433,7 +2374,7 @@
   <p:cSld>
     <p:spTree>
       <p:nvGrpSpPr>
-        <p:cNvPr id="398" name="Shape 398"/>
+        <p:cNvPr id="397" name="Shape 397"/>
         <p:cNvGrpSpPr/>
         <p:nvPr/>
       </p:nvGrpSpPr>
@@ -2447,7 +2388,7 @@
       </p:grpSpPr>
       <p:sp>
         <p:nvSpPr>
-          <p:cNvPr id="399" name="Google Shape;399;h55f610596eb4887f_0_10:notes"/>
+          <p:cNvPr id="398" name="Google Shape;398;h1eb388ce2fcb6e8_2_0:notes"/>
           <p:cNvSpPr/>
           <p:nvPr>
             <p:ph idx="2" type="sldImg"/>
@@ -2482,7 +2423,7 @@
       </p:sp>
       <p:sp>
         <p:nvSpPr>
-          <p:cNvPr id="400" name="Google Shape;400;h55f610596eb4887f_0_10:notes"/>
+          <p:cNvPr id="399" name="Google Shape;399;h1eb388ce2fcb6e8_2_0:notes"/>
           <p:cNvSpPr txBox="1"/>
           <p:nvPr>
             <p:ph idx="1" type="body"/>
@@ -2532,7 +2473,7 @@
   <p:cSld>
     <p:spTree>
       <p:nvGrpSpPr>
-        <p:cNvPr id="405" name="Shape 405"/>
+        <p:cNvPr id="404" name="Shape 404"/>
         <p:cNvGrpSpPr/>
         <p:nvPr/>
       </p:nvGrpSpPr>
@@ -2546,106 +2487,7 @@
       </p:grpSpPr>
       <p:sp>
         <p:nvSpPr>
-          <p:cNvPr id="406" name="Google Shape;406;h1eb388ce2fcb6e8_2_0:notes"/>
-          <p:cNvSpPr/>
-          <p:nvPr>
-            <p:ph idx="2" type="sldImg"/>
-          </p:nvPr>
-        </p:nvSpPr>
-        <p:spPr>
-          <a:xfrm>
-            <a:off x="381300" y="685800"/>
-            <a:ext cx="6096000" cy="3429000"/>
-          </a:xfrm>
-          <a:custGeom>
-            <a:rect b="b" l="l" r="r" t="t"/>
-            <a:pathLst>
-              <a:path extrusionOk="0" h="120000" w="120000">
-                <a:moveTo>
-                  <a:pt x="0" y="0"/>
-                </a:moveTo>
-                <a:lnTo>
-                  <a:pt x="120000" y="0"/>
-                </a:lnTo>
-                <a:lnTo>
-                  <a:pt x="120000" y="120000"/>
-                </a:lnTo>
-                <a:lnTo>
-                  <a:pt x="0" y="120000"/>
-                </a:lnTo>
-                <a:close/>
-              </a:path>
-            </a:pathLst>
-          </a:custGeom>
-        </p:spPr>
-      </p:sp>
-      <p:sp>
-        <p:nvSpPr>
-          <p:cNvPr id="407" name="Google Shape;407;h1eb388ce2fcb6e8_2_0:notes"/>
-          <p:cNvSpPr txBox="1"/>
-          <p:nvPr>
-            <p:ph idx="1" type="body"/>
-          </p:nvPr>
-        </p:nvSpPr>
-        <p:spPr>
-          <a:xfrm>
-            <a:off x="685800" y="4343400"/>
-            <a:ext cx="5486400" cy="4114800"/>
-          </a:xfrm>
-          <a:prstGeom prst="rect">
-            <a:avLst/>
-          </a:prstGeom>
-        </p:spPr>
-        <p:txBody>
-          <a:bodyPr anchorCtr="0" anchor="t" bIns="91425" lIns="91425" spcFirstLastPara="1" rIns="91425" wrap="square" tIns="91425">
-            <a:noAutofit/>
-          </a:bodyPr>
-          <a:lstStyle/>
-          <a:p>
-            <a:pPr indent="0" lvl="0" marL="0" rtl="0" algn="l">
-              <a:spcBef>
-                <a:spcPts val="0"/>
-              </a:spcBef>
-              <a:spcAft>
-                <a:spcPts val="0"/>
-              </a:spcAft>
-              <a:buNone/>
-            </a:pPr>
-            <a:r>
-              <a:t/>
-            </a:r>
-            <a:endParaRPr/>
-          </a:p>
-        </p:txBody>
-      </p:sp>
-    </p:spTree>
-  </p:cSld>
-  <p:clrMapOvr>
-    <a:masterClrMapping/>
-  </p:clrMapOvr>
-</p:notes>
-</file>
-
-<file path=ppt/notesSlides/notesSlide23.xml><?xml version="1.0" encoding="utf-8"?>
-<p:notes xmlns:a="http://schemas.openxmlformats.org/drawingml/2006/main" xmlns:r="http://schemas.openxmlformats.org/officeDocument/2006/relationships" xmlns:mc="http://schemas.openxmlformats.org/markup-compatibility/2006" xmlns:mv="urn:schemas-microsoft-com:mac:vml" xmlns:p="http://schemas.openxmlformats.org/presentationml/2006/main" xmlns:c="http://schemas.openxmlformats.org/drawingml/2006/chart" xmlns:dgm="http://schemas.openxmlformats.org/drawingml/2006/diagram" xmlns:o="urn:schemas-microsoft-com:office:office" xmlns:v="urn:schemas-microsoft-com:vml" xmlns:pvml="urn:schemas-microsoft-com:office:powerpoint" xmlns:com="http://schemas.openxmlformats.org/drawingml/2006/compatibility" xmlns:p14="http://schemas.microsoft.com/office/powerpoint/2010/main" xmlns:p15="http://schemas.microsoft.com/office/powerpoint/2012/main" xmlns:ahyp="http://schemas.microsoft.com/office/drawing/2018/hyperlinkcolor" showMasterPhAnim="0" showMasterSp="0">
-  <p:cSld>
-    <p:spTree>
-      <p:nvGrpSpPr>
-        <p:cNvPr id="412" name="Shape 412"/>
-        <p:cNvGrpSpPr/>
-        <p:nvPr/>
-      </p:nvGrpSpPr>
-      <p:grpSpPr>
-        <a:xfrm>
-          <a:off x="0" y="0"/>
-          <a:ext cx="0" cy="0"/>
-          <a:chOff x="0" y="0"/>
-          <a:chExt cx="0" cy="0"/>
-        </a:xfrm>
-      </p:grpSpPr>
-      <p:sp>
-        <p:nvSpPr>
-          <p:cNvPr id="413" name="Google Shape;413;h2c8f91d5f6982453_13_0:notes"/>
+          <p:cNvPr id="405" name="Google Shape;405;h2c8f91d5f6982453_13_0:notes"/>
           <p:cNvSpPr/>
           <p:nvPr>
             <p:ph idx="2" type="sldImg"/>
@@ -2690,7 +2532,7 @@
       </p:sp>
       <p:sp>
         <p:nvSpPr>
-          <p:cNvPr id="414" name="Google Shape;414;h2c8f91d5f6982453_13_0:notes"/>
+          <p:cNvPr id="406" name="Google Shape;406;h2c8f91d5f6982453_13_0:notes"/>
           <p:cNvSpPr txBox="1"/>
           <p:nvPr>
             <p:ph idx="1" type="body"/>
@@ -2733,7 +2575,7 @@
       </p:sp>
       <p:sp>
         <p:nvSpPr>
-          <p:cNvPr id="415" name="Google Shape;415;h2c8f91d5f6982453_13_0:notes"/>
+          <p:cNvPr id="407" name="Google Shape;407;h2c8f91d5f6982453_13_0:notes"/>
           <p:cNvSpPr txBox="1"/>
           <p:nvPr>
             <p:ph idx="12" type="sldNum"/>
@@ -3586,7 +3428,7 @@
       </p:grpSpPr>
       <p:sp>
         <p:nvSpPr>
-          <p:cNvPr id="231" name="Google Shape;231;h311e2f078bc59eea_0_0:notes"/>
+          <p:cNvPr id="231" name="Google Shape;231;h2c8f91d5f6982453_18_0:notes"/>
           <p:cNvSpPr/>
           <p:nvPr>
             <p:ph idx="2" type="sldImg"/>
@@ -3631,7 +3473,7 @@
       </p:sp>
       <p:sp>
         <p:nvSpPr>
-          <p:cNvPr id="232" name="Google Shape;232;h311e2f078bc59eea_0_0:notes"/>
+          <p:cNvPr id="232" name="Google Shape;232;h2c8f91d5f6982453_18_0:notes"/>
           <p:cNvSpPr txBox="1"/>
           <p:nvPr>
             <p:ph idx="1" type="body"/>
@@ -3640,7 +3482,7 @@
         <p:spPr>
           <a:xfrm>
             <a:off x="685800" y="4400550"/>
-            <a:ext cx="5486400" cy="3600600"/>
+            <a:ext cx="5486400" cy="3600450"/>
           </a:xfrm>
           <a:prstGeom prst="rect">
             <a:avLst/>
@@ -3674,7 +3516,7 @@
       </p:sp>
       <p:sp>
         <p:nvSpPr>
-          <p:cNvPr id="233" name="Google Shape;233;h311e2f078bc59eea_0_0:notes"/>
+          <p:cNvPr id="233" name="Google Shape;233;h2c8f91d5f6982453_18_0:notes"/>
           <p:cNvSpPr txBox="1"/>
           <p:nvPr>
             <p:ph idx="12" type="sldNum"/>
@@ -3683,7 +3525,7 @@
         <p:spPr>
           <a:xfrm>
             <a:off x="3884613" y="8685213"/>
-            <a:ext cx="2971800" cy="458700"/>
+            <a:ext cx="2971800" cy="458787"/>
           </a:xfrm>
           <a:prstGeom prst="rect">
             <a:avLst/>
@@ -3729,7 +3571,7 @@
   <p:cSld>
     <p:spTree>
       <p:nvGrpSpPr>
-        <p:cNvPr id="238" name="Shape 238"/>
+        <p:cNvPr id="250" name="Shape 250"/>
         <p:cNvGrpSpPr/>
         <p:nvPr/>
       </p:nvGrpSpPr>
@@ -3743,7 +3585,7 @@
       </p:grpSpPr>
       <p:sp>
         <p:nvSpPr>
-          <p:cNvPr id="239" name="Google Shape;239;h2c8f91d5f6982453_18_0:notes"/>
+          <p:cNvPr id="251" name="Google Shape;251;h2c8f91d5f6982453_35_0:notes"/>
           <p:cNvSpPr/>
           <p:nvPr>
             <p:ph idx="2" type="sldImg"/>
@@ -3788,7 +3630,7 @@
       </p:sp>
       <p:sp>
         <p:nvSpPr>
-          <p:cNvPr id="240" name="Google Shape;240;h2c8f91d5f6982453_18_0:notes"/>
+          <p:cNvPr id="252" name="Google Shape;252;h2c8f91d5f6982453_35_0:notes"/>
           <p:cNvSpPr txBox="1"/>
           <p:nvPr>
             <p:ph idx="1" type="body"/>
@@ -3831,7 +3673,7 @@
       </p:sp>
       <p:sp>
         <p:nvSpPr>
-          <p:cNvPr id="241" name="Google Shape;241;h2c8f91d5f6982453_18_0:notes"/>
+          <p:cNvPr id="253" name="Google Shape;253;h2c8f91d5f6982453_35_0:notes"/>
           <p:cNvSpPr txBox="1"/>
           <p:nvPr>
             <p:ph idx="12" type="sldNum"/>
@@ -20564,7 +20406,7 @@
   <p:cSld>
     <p:spTree>
       <p:nvGrpSpPr>
-        <p:cNvPr id="262" name="Shape 262"/>
+        <p:cNvPr id="280" name="Shape 280"/>
         <p:cNvGrpSpPr/>
         <p:nvPr/>
       </p:nvGrpSpPr>
@@ -20578,1516 +20420,7 @@
       </p:grpSpPr>
       <p:sp>
         <p:nvSpPr>
-          <p:cNvPr id="263" name="Google Shape;263;p38"/>
-          <p:cNvSpPr txBox="1"/>
-          <p:nvPr>
-            <p:ph type="ctrTitle"/>
-          </p:nvPr>
-        </p:nvSpPr>
-        <p:spPr>
-          <a:xfrm flipH="1">
-            <a:off x="-4" y="146957"/>
-            <a:ext cx="9144001" cy="734785"/>
-          </a:xfrm>
-          <a:prstGeom prst="rect">
-            <a:avLst/>
-          </a:prstGeom>
-          <a:noFill/>
-          <a:ln>
-            <a:noFill/>
-          </a:ln>
-        </p:spPr>
-        <p:txBody>
-          <a:bodyPr anchorCtr="0" anchor="b" bIns="34275" lIns="68575" spcFirstLastPara="1" rIns="68575" wrap="square" tIns="34275">
-            <a:noAutofit/>
-          </a:bodyPr>
-          <a:lstStyle/>
-          <a:p>
-            <a:pPr indent="0" lvl="0" marL="0" rtl="0" algn="l">
-              <a:lnSpc>
-                <a:spcPct val="90000"/>
-              </a:lnSpc>
-              <a:spcBef>
-                <a:spcPts val="0"/>
-              </a:spcBef>
-              <a:spcAft>
-                <a:spcPts val="0"/>
-              </a:spcAft>
-              <a:buClr>
-                <a:schemeClr val="dk1"/>
-              </a:buClr>
-              <a:buSzPts val="2100"/>
-              <a:buFont typeface="Play"/>
-              <a:buNone/>
-            </a:pPr>
-            <a:r>
-              <a:rPr lang="en" sz="2100"/>
-              <a:t>                       </a:t>
-            </a:r>
-            <a:r>
-              <a:rPr b="1" lang="en" sz="3300">
-                <a:latin typeface="Arial"/>
-                <a:ea typeface="Arial"/>
-                <a:cs typeface="Arial"/>
-                <a:sym typeface="Arial"/>
-              </a:rPr>
-              <a:t>Linear Regression: Implementation</a:t>
-            </a:r>
-            <a:br>
-              <a:rPr lang="en" sz="2100"/>
-            </a:br>
-            <a:endParaRPr sz="2100"/>
-          </a:p>
-        </p:txBody>
-      </p:sp>
-      <p:sp>
-        <p:nvSpPr>
-          <p:cNvPr id="264" name="Google Shape;264;p38"/>
-          <p:cNvSpPr/>
-          <p:nvPr/>
-        </p:nvSpPr>
-        <p:spPr>
-          <a:xfrm>
-            <a:off x="155121" y="700496"/>
-            <a:ext cx="8752115" cy="34289"/>
-          </a:xfrm>
-          <a:prstGeom prst="rect">
-            <a:avLst/>
-          </a:prstGeom>
-          <a:solidFill>
-            <a:srgbClr val="BFBFBF"/>
-          </a:solidFill>
-          <a:ln cap="flat" cmpd="sng" w="19050">
-            <a:solidFill>
-              <a:srgbClr val="082836"/>
-            </a:solidFill>
-            <a:prstDash val="solid"/>
-            <a:miter lim="8000"/>
-            <a:headEnd len="sm" w="sm" type="none"/>
-            <a:tailEnd len="sm" w="sm" type="none"/>
-          </a:ln>
-        </p:spPr>
-        <p:txBody>
-          <a:bodyPr anchorCtr="0" anchor="ctr" bIns="34275" lIns="68575" spcFirstLastPara="1" rIns="68575" wrap="square" tIns="34275">
-            <a:noAutofit/>
-          </a:bodyPr>
-          <a:lstStyle/>
-          <a:p>
-            <a:pPr indent="0" lvl="0" marL="0" marR="0" rtl="0" algn="ctr">
-              <a:spcBef>
-                <a:spcPts val="0"/>
-              </a:spcBef>
-              <a:spcAft>
-                <a:spcPts val="0"/>
-              </a:spcAft>
-              <a:buNone/>
-            </a:pPr>
-            <a:r>
-              <a:t/>
-            </a:r>
-            <a:endParaRPr sz="1400">
-              <a:solidFill>
-                <a:schemeClr val="lt1"/>
-              </a:solidFill>
-              <a:latin typeface="Arial"/>
-              <a:ea typeface="Arial"/>
-              <a:cs typeface="Arial"/>
-              <a:sym typeface="Arial"/>
-            </a:endParaRPr>
-          </a:p>
-        </p:txBody>
-      </p:sp>
-      <p:sp>
-        <p:nvSpPr>
-          <p:cNvPr id="265" name="Google Shape;265;p38"/>
-          <p:cNvSpPr txBox="1"/>
-          <p:nvPr/>
-        </p:nvSpPr>
-        <p:spPr>
-          <a:xfrm>
-            <a:off x="1175657" y="2416628"/>
-            <a:ext cx="138548" cy="276999"/>
-          </a:xfrm>
-          <a:prstGeom prst="rect">
-            <a:avLst/>
-          </a:prstGeom>
-          <a:noFill/>
-          <a:ln>
-            <a:noFill/>
-          </a:ln>
-        </p:spPr>
-        <p:txBody>
-          <a:bodyPr anchorCtr="0" anchor="t" bIns="34275" lIns="68575" spcFirstLastPara="1" rIns="68575" wrap="square" tIns="34275">
-            <a:spAutoFit/>
-          </a:bodyPr>
-          <a:lstStyle/>
-          <a:p>
-            <a:pPr indent="0" lvl="0" marL="0" marR="0" rtl="0" algn="l">
-              <a:spcBef>
-                <a:spcPts val="0"/>
-              </a:spcBef>
-              <a:spcAft>
-                <a:spcPts val="0"/>
-              </a:spcAft>
-              <a:buNone/>
-            </a:pPr>
-            <a:r>
-              <a:t/>
-            </a:r>
-            <a:endParaRPr sz="1400">
-              <a:solidFill>
-                <a:schemeClr val="dk1"/>
-              </a:solidFill>
-              <a:latin typeface="Arial"/>
-              <a:ea typeface="Arial"/>
-              <a:cs typeface="Arial"/>
-              <a:sym typeface="Arial"/>
-            </a:endParaRPr>
-          </a:p>
-        </p:txBody>
-      </p:sp>
-      <p:sp>
-        <p:nvSpPr>
-          <p:cNvPr id="266" name="Google Shape;266;p38"/>
-          <p:cNvSpPr txBox="1"/>
-          <p:nvPr/>
-        </p:nvSpPr>
-        <p:spPr>
-          <a:xfrm>
-            <a:off x="215860" y="1036671"/>
-            <a:ext cx="2341048" cy="438581"/>
-          </a:xfrm>
-          <a:prstGeom prst="rect">
-            <a:avLst/>
-          </a:prstGeom>
-          <a:noFill/>
-          <a:ln>
-            <a:noFill/>
-          </a:ln>
-        </p:spPr>
-        <p:txBody>
-          <a:bodyPr anchorCtr="0" anchor="t" bIns="34275" lIns="68575" spcFirstLastPara="1" rIns="68575" wrap="square" tIns="34275">
-            <a:spAutoFit/>
-          </a:bodyPr>
-          <a:lstStyle/>
-          <a:p>
-            <a:pPr indent="0" lvl="0" marL="0" marR="0" rtl="0" algn="l">
-              <a:spcBef>
-                <a:spcPts val="0"/>
-              </a:spcBef>
-              <a:spcAft>
-                <a:spcPts val="0"/>
-              </a:spcAft>
-              <a:buNone/>
-            </a:pPr>
-            <a:r>
-              <a:rPr b="1" lang="en" sz="2400">
-                <a:solidFill>
-                  <a:schemeClr val="dk1"/>
-                </a:solidFill>
-                <a:latin typeface="Arial"/>
-                <a:ea typeface="Arial"/>
-                <a:cs typeface="Arial"/>
-                <a:sym typeface="Arial"/>
-              </a:rPr>
-              <a:t>Model Pipeline</a:t>
-            </a:r>
-            <a:endParaRPr b="1" sz="2400">
-              <a:solidFill>
-                <a:schemeClr val="dk1"/>
-              </a:solidFill>
-              <a:latin typeface="Arial"/>
-              <a:ea typeface="Arial"/>
-              <a:cs typeface="Arial"/>
-              <a:sym typeface="Arial"/>
-            </a:endParaRPr>
-          </a:p>
-        </p:txBody>
-      </p:sp>
-      <p:sp>
-        <p:nvSpPr>
-          <p:cNvPr id="267" name="Google Shape;267;p38"/>
-          <p:cNvSpPr/>
-          <p:nvPr/>
-        </p:nvSpPr>
-        <p:spPr>
-          <a:xfrm>
-            <a:off x="363927" y="1749631"/>
-            <a:ext cx="1600200" cy="648300"/>
-          </a:xfrm>
-          <a:prstGeom prst="roundRect">
-            <a:avLst>
-              <a:gd fmla="val 16667" name="adj"/>
-            </a:avLst>
-          </a:prstGeom>
-          <a:solidFill>
-            <a:srgbClr val="D9E5F8"/>
-          </a:solidFill>
-          <a:ln cap="flat" cmpd="sng" w="19050">
-            <a:solidFill>
-              <a:srgbClr val="F2F2F2"/>
-            </a:solidFill>
-            <a:prstDash val="solid"/>
-            <a:miter lim="8000"/>
-            <a:headEnd len="sm" w="sm" type="none"/>
-            <a:tailEnd len="sm" w="sm" type="none"/>
-          </a:ln>
-          <a:effectLst>
-            <a:outerShdw blurRad="50800" rotWithShape="0" algn="tl" dir="2700000" dist="38100">
-              <a:srgbClr val="000000">
-                <a:alpha val="40000"/>
-              </a:srgbClr>
-            </a:outerShdw>
-          </a:effectLst>
-        </p:spPr>
-        <p:txBody>
-          <a:bodyPr anchorCtr="0" anchor="ctr" bIns="34275" lIns="68575" spcFirstLastPara="1" rIns="68575" wrap="square" tIns="34275">
-            <a:noAutofit/>
-          </a:bodyPr>
-          <a:lstStyle/>
-          <a:p>
-            <a:pPr indent="0" lvl="0" marL="0" marR="0" rtl="0" algn="ctr">
-              <a:spcBef>
-                <a:spcPts val="0"/>
-              </a:spcBef>
-              <a:spcAft>
-                <a:spcPts val="0"/>
-              </a:spcAft>
-              <a:buNone/>
-            </a:pPr>
-            <a:r>
-              <a:rPr lang="en" sz="1400">
-                <a:solidFill>
-                  <a:schemeClr val="dk1"/>
-                </a:solidFill>
-                <a:latin typeface="Arial"/>
-                <a:ea typeface="Arial"/>
-                <a:cs typeface="Arial"/>
-                <a:sym typeface="Arial"/>
-              </a:rPr>
-              <a:t>Input Feature</a:t>
-            </a:r>
-            <a:endParaRPr sz="1400">
-              <a:solidFill>
-                <a:schemeClr val="lt1"/>
-              </a:solidFill>
-              <a:latin typeface="Arial"/>
-              <a:ea typeface="Arial"/>
-              <a:cs typeface="Arial"/>
-              <a:sym typeface="Arial"/>
-            </a:endParaRPr>
-          </a:p>
-        </p:txBody>
-      </p:sp>
-      <p:sp>
-        <p:nvSpPr>
-          <p:cNvPr id="268" name="Google Shape;268;p38"/>
-          <p:cNvSpPr txBox="1"/>
-          <p:nvPr/>
-        </p:nvSpPr>
-        <p:spPr>
-          <a:xfrm>
-            <a:off x="1964125" y="1852912"/>
-            <a:ext cx="819600" cy="700200"/>
-          </a:xfrm>
-          <a:prstGeom prst="rect">
-            <a:avLst/>
-          </a:prstGeom>
-          <a:noFill/>
-          <a:ln>
-            <a:noFill/>
-          </a:ln>
-        </p:spPr>
-        <p:txBody>
-          <a:bodyPr anchorCtr="0" anchor="t" bIns="34275" lIns="68575" spcFirstLastPara="1" rIns="68575" wrap="square" tIns="34275">
-            <a:spAutoFit/>
-          </a:bodyPr>
-          <a:lstStyle/>
-          <a:p>
-            <a:pPr indent="0" lvl="0" marL="0" marR="0" rtl="0" algn="l">
-              <a:spcBef>
-                <a:spcPts val="0"/>
-              </a:spcBef>
-              <a:spcAft>
-                <a:spcPts val="0"/>
-              </a:spcAft>
-              <a:buNone/>
-            </a:pPr>
-            <a:r>
-              <a:rPr b="1" lang="en" sz="2700">
-                <a:solidFill>
-                  <a:schemeClr val="dk1"/>
-                </a:solidFill>
-                <a:latin typeface="Arial"/>
-                <a:ea typeface="Arial"/>
-                <a:cs typeface="Arial"/>
-                <a:sym typeface="Arial"/>
-              </a:rPr>
-              <a:t>→</a:t>
-            </a:r>
-            <a:endParaRPr sz="1100"/>
-          </a:p>
-          <a:p>
-            <a:pPr indent="0" lvl="0" marL="0" marR="0" rtl="0" algn="l">
-              <a:spcBef>
-                <a:spcPts val="0"/>
-              </a:spcBef>
-              <a:spcAft>
-                <a:spcPts val="0"/>
-              </a:spcAft>
-              <a:buNone/>
-            </a:pPr>
-            <a:r>
-              <a:t/>
-            </a:r>
-            <a:endParaRPr sz="1400">
-              <a:solidFill>
-                <a:schemeClr val="dk1"/>
-              </a:solidFill>
-              <a:latin typeface="Arial"/>
-              <a:ea typeface="Arial"/>
-              <a:cs typeface="Arial"/>
-              <a:sym typeface="Arial"/>
-            </a:endParaRPr>
-          </a:p>
-        </p:txBody>
-      </p:sp>
-      <p:sp>
-        <p:nvSpPr>
-          <p:cNvPr id="269" name="Google Shape;269;p38"/>
-          <p:cNvSpPr/>
-          <p:nvPr/>
-        </p:nvSpPr>
-        <p:spPr>
-          <a:xfrm>
-            <a:off x="2388970" y="1790879"/>
-            <a:ext cx="1600200" cy="648300"/>
-          </a:xfrm>
-          <a:prstGeom prst="roundRect">
-            <a:avLst>
-              <a:gd fmla="val 16667" name="adj"/>
-            </a:avLst>
-          </a:prstGeom>
-          <a:solidFill>
-            <a:srgbClr val="F2CDED"/>
-          </a:solidFill>
-          <a:ln cap="flat" cmpd="sng" w="19050">
-            <a:solidFill>
-              <a:srgbClr val="082836"/>
-            </a:solidFill>
-            <a:prstDash val="solid"/>
-            <a:miter lim="8000"/>
-            <a:headEnd len="sm" w="sm" type="none"/>
-            <a:tailEnd len="sm" w="sm" type="none"/>
-          </a:ln>
-          <a:effectLst>
-            <a:outerShdw blurRad="50800" rotWithShape="0" algn="tl" dir="2700000" dist="38100">
-              <a:srgbClr val="000000">
-                <a:alpha val="40000"/>
-              </a:srgbClr>
-            </a:outerShdw>
-          </a:effectLst>
-        </p:spPr>
-        <p:txBody>
-          <a:bodyPr anchorCtr="0" anchor="ctr" bIns="34275" lIns="68575" spcFirstLastPara="1" rIns="68575" wrap="square" tIns="34275">
-            <a:noAutofit/>
-          </a:bodyPr>
-          <a:lstStyle/>
-          <a:p>
-            <a:pPr indent="0" lvl="0" marL="0" marR="0" rtl="0" algn="ctr">
-              <a:spcBef>
-                <a:spcPts val="0"/>
-              </a:spcBef>
-              <a:spcAft>
-                <a:spcPts val="0"/>
-              </a:spcAft>
-              <a:buNone/>
-            </a:pPr>
-            <a:r>
-              <a:rPr lang="en" sz="1400">
-                <a:solidFill>
-                  <a:schemeClr val="dk1"/>
-                </a:solidFill>
-                <a:latin typeface="Arial"/>
-                <a:ea typeface="Arial"/>
-                <a:cs typeface="Arial"/>
-                <a:sym typeface="Arial"/>
-              </a:rPr>
-              <a:t>Preprocessing</a:t>
-            </a:r>
-            <a:endParaRPr sz="1400">
-              <a:solidFill>
-                <a:schemeClr val="lt1"/>
-              </a:solidFill>
-              <a:latin typeface="Arial"/>
-              <a:ea typeface="Arial"/>
-              <a:cs typeface="Arial"/>
-              <a:sym typeface="Arial"/>
-            </a:endParaRPr>
-          </a:p>
-        </p:txBody>
-      </p:sp>
-      <p:sp>
-        <p:nvSpPr>
-          <p:cNvPr id="270" name="Google Shape;270;p38"/>
-          <p:cNvSpPr/>
-          <p:nvPr/>
-        </p:nvSpPr>
-        <p:spPr>
-          <a:xfrm>
-            <a:off x="4453425" y="1823055"/>
-            <a:ext cx="1681800" cy="648300"/>
-          </a:xfrm>
-          <a:prstGeom prst="roundRect">
-            <a:avLst>
-              <a:gd fmla="val 16667" name="adj"/>
-            </a:avLst>
-          </a:prstGeom>
-          <a:solidFill>
-            <a:srgbClr val="BFBFBF"/>
-          </a:solidFill>
-          <a:ln cap="flat" cmpd="sng" w="19050">
-            <a:solidFill>
-              <a:srgbClr val="082836"/>
-            </a:solidFill>
-            <a:prstDash val="solid"/>
-            <a:miter lim="8000"/>
-            <a:headEnd len="sm" w="sm" type="none"/>
-            <a:tailEnd len="sm" w="sm" type="none"/>
-          </a:ln>
-          <a:effectLst>
-            <a:outerShdw blurRad="50800" rotWithShape="0" algn="tl" dir="2700000" dist="38100">
-              <a:srgbClr val="000000">
-                <a:alpha val="40000"/>
-              </a:srgbClr>
-            </a:outerShdw>
-          </a:effectLst>
-        </p:spPr>
-        <p:txBody>
-          <a:bodyPr anchorCtr="0" anchor="ctr" bIns="34275" lIns="68575" spcFirstLastPara="1" rIns="68575" wrap="square" tIns="34275">
-            <a:noAutofit/>
-          </a:bodyPr>
-          <a:lstStyle/>
-          <a:p>
-            <a:pPr indent="0" lvl="0" marL="0" marR="0" rtl="0" algn="ctr">
-              <a:spcBef>
-                <a:spcPts val="0"/>
-              </a:spcBef>
-              <a:spcAft>
-                <a:spcPts val="0"/>
-              </a:spcAft>
-              <a:buNone/>
-            </a:pPr>
-            <a:r>
-              <a:rPr lang="en" sz="1400">
-                <a:solidFill>
-                  <a:schemeClr val="dk1"/>
-                </a:solidFill>
-                <a:latin typeface="Arial"/>
-                <a:ea typeface="Arial"/>
-                <a:cs typeface="Arial"/>
-                <a:sym typeface="Arial"/>
-              </a:rPr>
-              <a:t>Linear Regression</a:t>
-            </a:r>
-            <a:endParaRPr sz="1400">
-              <a:solidFill>
-                <a:schemeClr val="dk1"/>
-              </a:solidFill>
-              <a:latin typeface="Arial"/>
-              <a:ea typeface="Arial"/>
-              <a:cs typeface="Arial"/>
-              <a:sym typeface="Arial"/>
-            </a:endParaRPr>
-          </a:p>
-        </p:txBody>
-      </p:sp>
-      <p:sp>
-        <p:nvSpPr>
-          <p:cNvPr id="271" name="Google Shape;271;p38"/>
-          <p:cNvSpPr/>
-          <p:nvPr/>
-        </p:nvSpPr>
-        <p:spPr>
-          <a:xfrm>
-            <a:off x="6599470" y="1823053"/>
-            <a:ext cx="1681800" cy="648300"/>
-          </a:xfrm>
-          <a:prstGeom prst="roundRect">
-            <a:avLst>
-              <a:gd fmla="val 16667" name="adj"/>
-            </a:avLst>
-          </a:prstGeom>
-          <a:solidFill>
-            <a:srgbClr val="C1F0C7"/>
-          </a:solidFill>
-          <a:ln cap="flat" cmpd="sng" w="19050">
-            <a:solidFill>
-              <a:srgbClr val="082836"/>
-            </a:solidFill>
-            <a:prstDash val="solid"/>
-            <a:miter lim="8000"/>
-            <a:headEnd len="sm" w="sm" type="none"/>
-            <a:tailEnd len="sm" w="sm" type="none"/>
-          </a:ln>
-          <a:effectLst>
-            <a:outerShdw blurRad="50800" rotWithShape="0" algn="tl" dir="2700000" dist="38100">
-              <a:srgbClr val="000000">
-                <a:alpha val="40000"/>
-              </a:srgbClr>
-            </a:outerShdw>
-          </a:effectLst>
-        </p:spPr>
-        <p:txBody>
-          <a:bodyPr anchorCtr="0" anchor="ctr" bIns="34275" lIns="68575" spcFirstLastPara="1" rIns="68575" wrap="square" tIns="34275">
-            <a:noAutofit/>
-          </a:bodyPr>
-          <a:lstStyle/>
-          <a:p>
-            <a:pPr indent="0" lvl="0" marL="0" marR="0" rtl="0" algn="ctr">
-              <a:spcBef>
-                <a:spcPts val="0"/>
-              </a:spcBef>
-              <a:spcAft>
-                <a:spcPts val="0"/>
-              </a:spcAft>
-              <a:buNone/>
-            </a:pPr>
-            <a:r>
-              <a:rPr lang="en" sz="1400">
-                <a:solidFill>
-                  <a:schemeClr val="dk1"/>
-                </a:solidFill>
-                <a:latin typeface="Arial"/>
-                <a:ea typeface="Arial"/>
-                <a:cs typeface="Arial"/>
-                <a:sym typeface="Arial"/>
-              </a:rPr>
-              <a:t>Predicted </a:t>
-            </a:r>
-            <a:endParaRPr sz="1100"/>
-          </a:p>
-          <a:p>
-            <a:pPr indent="0" lvl="0" marL="0" marR="0" rtl="0" algn="ctr">
-              <a:spcBef>
-                <a:spcPts val="0"/>
-              </a:spcBef>
-              <a:spcAft>
-                <a:spcPts val="0"/>
-              </a:spcAft>
-              <a:buNone/>
-            </a:pPr>
-            <a:r>
-              <a:rPr lang="en" sz="1400">
-                <a:solidFill>
-                  <a:schemeClr val="dk1"/>
-                </a:solidFill>
-                <a:latin typeface="Arial"/>
-                <a:ea typeface="Arial"/>
-                <a:cs typeface="Arial"/>
-                <a:sym typeface="Arial"/>
-              </a:rPr>
-              <a:t>amount_inr</a:t>
-            </a:r>
-            <a:endParaRPr sz="1400">
-              <a:solidFill>
-                <a:schemeClr val="lt1"/>
-              </a:solidFill>
-              <a:latin typeface="Arial"/>
-              <a:ea typeface="Arial"/>
-              <a:cs typeface="Arial"/>
-              <a:sym typeface="Arial"/>
-            </a:endParaRPr>
-          </a:p>
-        </p:txBody>
-      </p:sp>
-      <p:sp>
-        <p:nvSpPr>
-          <p:cNvPr id="272" name="Google Shape;272;p38"/>
-          <p:cNvSpPr txBox="1"/>
-          <p:nvPr/>
-        </p:nvSpPr>
-        <p:spPr>
-          <a:xfrm>
-            <a:off x="4025047" y="1847115"/>
-            <a:ext cx="954900" cy="700200"/>
-          </a:xfrm>
-          <a:prstGeom prst="rect">
-            <a:avLst/>
-          </a:prstGeom>
-          <a:noFill/>
-          <a:ln>
-            <a:noFill/>
-          </a:ln>
-        </p:spPr>
-        <p:txBody>
-          <a:bodyPr anchorCtr="0" anchor="t" bIns="34275" lIns="68575" spcFirstLastPara="1" rIns="68575" wrap="square" tIns="34275">
-            <a:spAutoFit/>
-          </a:bodyPr>
-          <a:lstStyle/>
-          <a:p>
-            <a:pPr indent="0" lvl="0" marL="0" marR="0" rtl="0" algn="l">
-              <a:spcBef>
-                <a:spcPts val="0"/>
-              </a:spcBef>
-              <a:spcAft>
-                <a:spcPts val="0"/>
-              </a:spcAft>
-              <a:buNone/>
-            </a:pPr>
-            <a:r>
-              <a:rPr b="1" lang="en" sz="2700">
-                <a:solidFill>
-                  <a:schemeClr val="dk1"/>
-                </a:solidFill>
-                <a:latin typeface="Arial"/>
-                <a:ea typeface="Arial"/>
-                <a:cs typeface="Arial"/>
-                <a:sym typeface="Arial"/>
-              </a:rPr>
-              <a:t>→</a:t>
-            </a:r>
-            <a:endParaRPr sz="1100"/>
-          </a:p>
-          <a:p>
-            <a:pPr indent="0" lvl="0" marL="0" marR="0" rtl="0" algn="l">
-              <a:spcBef>
-                <a:spcPts val="0"/>
-              </a:spcBef>
-              <a:spcAft>
-                <a:spcPts val="0"/>
-              </a:spcAft>
-              <a:buNone/>
-            </a:pPr>
-            <a:r>
-              <a:t/>
-            </a:r>
-            <a:endParaRPr sz="1400">
-              <a:solidFill>
-                <a:schemeClr val="dk1"/>
-              </a:solidFill>
-              <a:latin typeface="Arial"/>
-              <a:ea typeface="Arial"/>
-              <a:cs typeface="Arial"/>
-              <a:sym typeface="Arial"/>
-            </a:endParaRPr>
-          </a:p>
-        </p:txBody>
-      </p:sp>
-      <p:sp>
-        <p:nvSpPr>
-          <p:cNvPr id="273" name="Google Shape;273;p38"/>
-          <p:cNvSpPr txBox="1"/>
-          <p:nvPr/>
-        </p:nvSpPr>
-        <p:spPr>
-          <a:xfrm>
-            <a:off x="6110514" y="1847113"/>
-            <a:ext cx="1075200" cy="700200"/>
-          </a:xfrm>
-          <a:prstGeom prst="rect">
-            <a:avLst/>
-          </a:prstGeom>
-          <a:noFill/>
-          <a:ln>
-            <a:noFill/>
-          </a:ln>
-        </p:spPr>
-        <p:txBody>
-          <a:bodyPr anchorCtr="0" anchor="t" bIns="34275" lIns="68575" spcFirstLastPara="1" rIns="68575" wrap="square" tIns="34275">
-            <a:spAutoFit/>
-          </a:bodyPr>
-          <a:lstStyle/>
-          <a:p>
-            <a:pPr indent="0" lvl="0" marL="0" marR="0" rtl="0" algn="l">
-              <a:spcBef>
-                <a:spcPts val="0"/>
-              </a:spcBef>
-              <a:spcAft>
-                <a:spcPts val="0"/>
-              </a:spcAft>
-              <a:buNone/>
-            </a:pPr>
-            <a:r>
-              <a:rPr b="1" lang="en" sz="2700">
-                <a:solidFill>
-                  <a:schemeClr val="dk1"/>
-                </a:solidFill>
-                <a:latin typeface="Arial"/>
-                <a:ea typeface="Arial"/>
-                <a:cs typeface="Arial"/>
-                <a:sym typeface="Arial"/>
-              </a:rPr>
-              <a:t>→</a:t>
-            </a:r>
-            <a:endParaRPr sz="1100"/>
-          </a:p>
-          <a:p>
-            <a:pPr indent="0" lvl="0" marL="0" marR="0" rtl="0" algn="l">
-              <a:spcBef>
-                <a:spcPts val="0"/>
-              </a:spcBef>
-              <a:spcAft>
-                <a:spcPts val="0"/>
-              </a:spcAft>
-              <a:buNone/>
-            </a:pPr>
-            <a:r>
-              <a:t/>
-            </a:r>
-            <a:endParaRPr sz="1400">
-              <a:solidFill>
-                <a:schemeClr val="dk1"/>
-              </a:solidFill>
-              <a:latin typeface="Arial"/>
-              <a:ea typeface="Arial"/>
-              <a:cs typeface="Arial"/>
-              <a:sym typeface="Arial"/>
-            </a:endParaRPr>
-          </a:p>
-        </p:txBody>
-      </p:sp>
-      <p:sp>
-        <p:nvSpPr>
-          <p:cNvPr id="274" name="Google Shape;274;p38"/>
-          <p:cNvSpPr txBox="1"/>
-          <p:nvPr/>
-        </p:nvSpPr>
-        <p:spPr>
-          <a:xfrm>
-            <a:off x="246726" y="2754800"/>
-            <a:ext cx="3787800" cy="408000"/>
-          </a:xfrm>
-          <a:prstGeom prst="rect">
-            <a:avLst/>
-          </a:prstGeom>
-          <a:noFill/>
-          <a:ln>
-            <a:noFill/>
-          </a:ln>
-        </p:spPr>
-        <p:txBody>
-          <a:bodyPr anchorCtr="0" anchor="t" bIns="34275" lIns="68575" spcFirstLastPara="1" rIns="68575" wrap="square" tIns="34275">
-            <a:spAutoFit/>
-          </a:bodyPr>
-          <a:lstStyle/>
-          <a:p>
-            <a:pPr indent="0" lvl="0" marL="0" marR="0" rtl="0" algn="l">
-              <a:spcBef>
-                <a:spcPts val="0"/>
-              </a:spcBef>
-              <a:spcAft>
-                <a:spcPts val="0"/>
-              </a:spcAft>
-              <a:buNone/>
-            </a:pPr>
-            <a:r>
-              <a:rPr b="1" lang="en" sz="2200">
-                <a:solidFill>
-                  <a:schemeClr val="dk1"/>
-                </a:solidFill>
-                <a:latin typeface="Arial"/>
-                <a:ea typeface="Arial"/>
-                <a:cs typeface="Arial"/>
-                <a:sym typeface="Arial"/>
-              </a:rPr>
-              <a:t>Evaluation matrices</a:t>
-            </a:r>
-            <a:endParaRPr b="1" sz="2200">
-              <a:solidFill>
-                <a:schemeClr val="dk1"/>
-              </a:solidFill>
-              <a:latin typeface="Arial"/>
-              <a:ea typeface="Arial"/>
-              <a:cs typeface="Arial"/>
-              <a:sym typeface="Arial"/>
-            </a:endParaRPr>
-          </a:p>
-        </p:txBody>
-      </p:sp>
-      <p:sp>
-        <p:nvSpPr>
-          <p:cNvPr id="275" name="Google Shape;275;p38"/>
-          <p:cNvSpPr/>
-          <p:nvPr/>
-        </p:nvSpPr>
-        <p:spPr>
-          <a:xfrm>
-            <a:off x="468628" y="3348293"/>
-            <a:ext cx="2315100" cy="1469700"/>
-          </a:xfrm>
-          <a:prstGeom prst="roundRect">
-            <a:avLst>
-              <a:gd fmla="val 16667" name="adj"/>
-            </a:avLst>
-          </a:prstGeom>
-          <a:solidFill>
-            <a:srgbClr val="D8D8D8"/>
-          </a:solidFill>
-          <a:ln cap="flat" cmpd="sng" w="19050">
-            <a:solidFill>
-              <a:srgbClr val="082836"/>
-            </a:solidFill>
-            <a:prstDash val="solid"/>
-            <a:miter lim="8000"/>
-            <a:headEnd len="sm" w="sm" type="none"/>
-            <a:tailEnd len="sm" w="sm" type="none"/>
-          </a:ln>
-          <a:effectLst>
-            <a:outerShdw blurRad="50800" rotWithShape="0" algn="tl" dir="2700000" dist="38100">
-              <a:srgbClr val="000000">
-                <a:alpha val="40000"/>
-              </a:srgbClr>
-            </a:outerShdw>
-          </a:effectLst>
-        </p:spPr>
-        <p:txBody>
-          <a:bodyPr anchorCtr="0" anchor="ctr" bIns="34275" lIns="68575" spcFirstLastPara="1" rIns="68575" wrap="square" tIns="34275">
-            <a:noAutofit/>
-          </a:bodyPr>
-          <a:lstStyle/>
-          <a:p>
-            <a:pPr indent="0" lvl="0" marL="0" marR="0" rtl="0" algn="ctr">
-              <a:spcBef>
-                <a:spcPts val="0"/>
-              </a:spcBef>
-              <a:spcAft>
-                <a:spcPts val="0"/>
-              </a:spcAft>
-              <a:buNone/>
-            </a:pPr>
-            <a:r>
-              <a:t/>
-            </a:r>
-            <a:endParaRPr sz="1400">
-              <a:solidFill>
-                <a:schemeClr val="lt1"/>
-              </a:solidFill>
-              <a:latin typeface="Arial"/>
-              <a:ea typeface="Arial"/>
-              <a:cs typeface="Arial"/>
-              <a:sym typeface="Arial"/>
-            </a:endParaRPr>
-          </a:p>
-        </p:txBody>
-      </p:sp>
-      <p:sp>
-        <p:nvSpPr>
-          <p:cNvPr id="276" name="Google Shape;276;p38"/>
-          <p:cNvSpPr/>
-          <p:nvPr/>
-        </p:nvSpPr>
-        <p:spPr>
-          <a:xfrm>
-            <a:off x="3137765" y="3316842"/>
-            <a:ext cx="2235300" cy="1469700"/>
-          </a:xfrm>
-          <a:prstGeom prst="roundRect">
-            <a:avLst>
-              <a:gd fmla="val 16667" name="adj"/>
-            </a:avLst>
-          </a:prstGeom>
-          <a:solidFill>
-            <a:srgbClr val="D8D8D8"/>
-          </a:solidFill>
-          <a:ln cap="flat" cmpd="sng" w="19050">
-            <a:solidFill>
-              <a:srgbClr val="082836"/>
-            </a:solidFill>
-            <a:prstDash val="solid"/>
-            <a:miter lim="8000"/>
-            <a:headEnd len="sm" w="sm" type="none"/>
-            <a:tailEnd len="sm" w="sm" type="none"/>
-          </a:ln>
-          <a:effectLst>
-            <a:outerShdw blurRad="50800" rotWithShape="0" algn="tl" dir="2700000" dist="38100">
-              <a:srgbClr val="000000">
-                <a:alpha val="40000"/>
-              </a:srgbClr>
-            </a:outerShdw>
-          </a:effectLst>
-        </p:spPr>
-        <p:txBody>
-          <a:bodyPr anchorCtr="0" anchor="ctr" bIns="34275" lIns="68575" spcFirstLastPara="1" rIns="68575" wrap="square" tIns="34275">
-            <a:noAutofit/>
-          </a:bodyPr>
-          <a:lstStyle/>
-          <a:p>
-            <a:pPr indent="0" lvl="0" marL="0" marR="0" rtl="0" algn="ctr">
-              <a:spcBef>
-                <a:spcPts val="0"/>
-              </a:spcBef>
-              <a:spcAft>
-                <a:spcPts val="0"/>
-              </a:spcAft>
-              <a:buNone/>
-            </a:pPr>
-            <a:r>
-              <a:t/>
-            </a:r>
-            <a:endParaRPr sz="1400">
-              <a:solidFill>
-                <a:schemeClr val="lt1"/>
-              </a:solidFill>
-              <a:latin typeface="Arial"/>
-              <a:ea typeface="Arial"/>
-              <a:cs typeface="Arial"/>
-              <a:sym typeface="Arial"/>
-            </a:endParaRPr>
-          </a:p>
-        </p:txBody>
-      </p:sp>
-      <p:sp>
-        <p:nvSpPr>
-          <p:cNvPr id="277" name="Google Shape;277;p38"/>
-          <p:cNvSpPr/>
-          <p:nvPr/>
-        </p:nvSpPr>
-        <p:spPr>
-          <a:xfrm>
-            <a:off x="5827858" y="3316906"/>
-            <a:ext cx="2235300" cy="1469700"/>
-          </a:xfrm>
-          <a:prstGeom prst="roundRect">
-            <a:avLst>
-              <a:gd fmla="val 16667" name="adj"/>
-            </a:avLst>
-          </a:prstGeom>
-          <a:solidFill>
-            <a:srgbClr val="D8D8D8"/>
-          </a:solidFill>
-          <a:ln cap="flat" cmpd="sng" w="19050">
-            <a:solidFill>
-              <a:srgbClr val="082836"/>
-            </a:solidFill>
-            <a:prstDash val="solid"/>
-            <a:miter lim="8000"/>
-            <a:headEnd len="sm" w="sm" type="none"/>
-            <a:tailEnd len="sm" w="sm" type="none"/>
-          </a:ln>
-          <a:effectLst>
-            <a:outerShdw blurRad="50800" rotWithShape="0" algn="tl" dir="2700000" dist="38100">
-              <a:srgbClr val="000000">
-                <a:alpha val="40000"/>
-              </a:srgbClr>
-            </a:outerShdw>
-          </a:effectLst>
-        </p:spPr>
-        <p:txBody>
-          <a:bodyPr anchorCtr="0" anchor="ctr" bIns="34275" lIns="68575" spcFirstLastPara="1" rIns="68575" wrap="square" tIns="34275">
-            <a:noAutofit/>
-          </a:bodyPr>
-          <a:lstStyle/>
-          <a:p>
-            <a:pPr indent="0" lvl="0" marL="0" marR="0" rtl="0" algn="ctr">
-              <a:spcBef>
-                <a:spcPts val="0"/>
-              </a:spcBef>
-              <a:spcAft>
-                <a:spcPts val="0"/>
-              </a:spcAft>
-              <a:buNone/>
-            </a:pPr>
-            <a:r>
-              <a:t/>
-            </a:r>
-            <a:endParaRPr sz="1400">
-              <a:solidFill>
-                <a:schemeClr val="lt1"/>
-              </a:solidFill>
-              <a:latin typeface="Arial"/>
-              <a:ea typeface="Arial"/>
-              <a:cs typeface="Arial"/>
-              <a:sym typeface="Arial"/>
-            </a:endParaRPr>
-          </a:p>
-        </p:txBody>
-      </p:sp>
-      <p:sp>
-        <p:nvSpPr>
-          <p:cNvPr id="278" name="Google Shape;278;p38"/>
-          <p:cNvSpPr txBox="1"/>
-          <p:nvPr/>
-        </p:nvSpPr>
-        <p:spPr>
-          <a:xfrm>
-            <a:off x="537006" y="3478427"/>
-            <a:ext cx="1871400" cy="284700"/>
-          </a:xfrm>
-          <a:prstGeom prst="rect">
-            <a:avLst/>
-          </a:prstGeom>
-          <a:noFill/>
-          <a:ln>
-            <a:noFill/>
-          </a:ln>
-        </p:spPr>
-        <p:txBody>
-          <a:bodyPr anchorCtr="0" anchor="t" bIns="34275" lIns="68575" spcFirstLastPara="1" rIns="68575" wrap="square" tIns="34275">
-            <a:spAutoFit/>
-          </a:bodyPr>
-          <a:lstStyle/>
-          <a:p>
-            <a:pPr indent="0" lvl="0" marL="0" marR="0" rtl="0" algn="l">
-              <a:spcBef>
-                <a:spcPts val="0"/>
-              </a:spcBef>
-              <a:spcAft>
-                <a:spcPts val="0"/>
-              </a:spcAft>
-              <a:buNone/>
-            </a:pPr>
-            <a:r>
-              <a:rPr b="1" lang="en" sz="1400">
-                <a:solidFill>
-                  <a:schemeClr val="dk1"/>
-                </a:solidFill>
-                <a:latin typeface="Arial"/>
-                <a:ea typeface="Arial"/>
-                <a:cs typeface="Arial"/>
-                <a:sym typeface="Arial"/>
-              </a:rPr>
-              <a:t>1. MAE</a:t>
-            </a:r>
-            <a:endParaRPr b="1" sz="1400">
-              <a:solidFill>
-                <a:schemeClr val="dk1"/>
-              </a:solidFill>
-              <a:latin typeface="Arial"/>
-              <a:ea typeface="Arial"/>
-              <a:cs typeface="Arial"/>
-              <a:sym typeface="Arial"/>
-            </a:endParaRPr>
-          </a:p>
-        </p:txBody>
-      </p:sp>
-      <p:sp>
-        <p:nvSpPr>
-          <p:cNvPr id="279" name="Google Shape;279;p38"/>
-          <p:cNvSpPr txBox="1"/>
-          <p:nvPr/>
-        </p:nvSpPr>
-        <p:spPr>
-          <a:xfrm>
-            <a:off x="591671" y="3782310"/>
-            <a:ext cx="2408400" cy="1023600"/>
-          </a:xfrm>
-          <a:prstGeom prst="rect">
-            <a:avLst/>
-          </a:prstGeom>
-          <a:noFill/>
-          <a:ln>
-            <a:noFill/>
-          </a:ln>
-        </p:spPr>
-        <p:txBody>
-          <a:bodyPr anchorCtr="0" anchor="t" bIns="34275" lIns="68575" spcFirstLastPara="1" rIns="68575" wrap="square" tIns="34275">
-            <a:spAutoFit/>
-          </a:bodyPr>
-          <a:lstStyle/>
-          <a:p>
-            <a:pPr indent="0" lvl="0" marL="0" marR="0" rtl="0" algn="l">
-              <a:spcBef>
-                <a:spcPts val="0"/>
-              </a:spcBef>
-              <a:spcAft>
-                <a:spcPts val="0"/>
-              </a:spcAft>
-              <a:buNone/>
-            </a:pPr>
-            <a:r>
-              <a:rPr lang="en" sz="1200">
-                <a:solidFill>
-                  <a:schemeClr val="dk1"/>
-                </a:solidFill>
-                <a:latin typeface="Arial"/>
-                <a:ea typeface="Arial"/>
-                <a:cs typeface="Arial"/>
-                <a:sym typeface="Arial"/>
-              </a:rPr>
-              <a:t>Average absolute difference between actual and predicted costs. Lower MAE indicates </a:t>
-            </a:r>
-            <a:endParaRPr sz="1100"/>
-          </a:p>
-          <a:p>
-            <a:pPr indent="0" lvl="0" marL="0" marR="0" rtl="0" algn="l">
-              <a:spcBef>
-                <a:spcPts val="0"/>
-              </a:spcBef>
-              <a:spcAft>
-                <a:spcPts val="0"/>
-              </a:spcAft>
-              <a:buNone/>
-            </a:pPr>
-            <a:r>
-              <a:rPr lang="en" sz="1200">
-                <a:solidFill>
-                  <a:schemeClr val="dk1"/>
-                </a:solidFill>
-                <a:latin typeface="Arial"/>
-                <a:ea typeface="Arial"/>
-                <a:cs typeface="Arial"/>
-                <a:sym typeface="Arial"/>
-              </a:rPr>
-              <a:t>better prediction</a:t>
-            </a:r>
-            <a:endParaRPr sz="1100"/>
-          </a:p>
-          <a:p>
-            <a:pPr indent="0" lvl="0" marL="0" marR="0" rtl="0" algn="l">
-              <a:spcBef>
-                <a:spcPts val="0"/>
-              </a:spcBef>
-              <a:spcAft>
-                <a:spcPts val="0"/>
-              </a:spcAft>
-              <a:buNone/>
-            </a:pPr>
-            <a:r>
-              <a:t/>
-            </a:r>
-            <a:endParaRPr sz="1400">
-              <a:solidFill>
-                <a:schemeClr val="dk1"/>
-              </a:solidFill>
-              <a:latin typeface="Arial"/>
-              <a:ea typeface="Arial"/>
-              <a:cs typeface="Arial"/>
-              <a:sym typeface="Arial"/>
-            </a:endParaRPr>
-          </a:p>
-        </p:txBody>
-      </p:sp>
-      <p:sp>
-        <p:nvSpPr>
-          <p:cNvPr id="280" name="Google Shape;280;p38"/>
-          <p:cNvSpPr txBox="1"/>
-          <p:nvPr/>
-        </p:nvSpPr>
-        <p:spPr>
-          <a:xfrm>
-            <a:off x="3181687" y="3412660"/>
-            <a:ext cx="1872900" cy="300000"/>
-          </a:xfrm>
-          <a:prstGeom prst="rect">
-            <a:avLst/>
-          </a:prstGeom>
-          <a:noFill/>
-          <a:ln>
-            <a:noFill/>
-          </a:ln>
-        </p:spPr>
-        <p:txBody>
-          <a:bodyPr anchorCtr="0" anchor="t" bIns="34275" lIns="68575" spcFirstLastPara="1" rIns="68575" wrap="square" tIns="34275">
-            <a:spAutoFit/>
-          </a:bodyPr>
-          <a:lstStyle/>
-          <a:p>
-            <a:pPr indent="0" lvl="0" marL="0" marR="0" rtl="0" algn="l">
-              <a:spcBef>
-                <a:spcPts val="0"/>
-              </a:spcBef>
-              <a:spcAft>
-                <a:spcPts val="0"/>
-              </a:spcAft>
-              <a:buNone/>
-            </a:pPr>
-            <a:r>
-              <a:rPr b="1" lang="en" sz="1500">
-                <a:solidFill>
-                  <a:schemeClr val="dk1"/>
-                </a:solidFill>
-                <a:latin typeface="Arial"/>
-                <a:ea typeface="Arial"/>
-                <a:cs typeface="Arial"/>
-                <a:sym typeface="Arial"/>
-              </a:rPr>
-              <a:t>2. RMSE</a:t>
-            </a:r>
-            <a:endParaRPr b="1" sz="1500">
-              <a:solidFill>
-                <a:schemeClr val="dk1"/>
-              </a:solidFill>
-              <a:latin typeface="Arial"/>
-              <a:ea typeface="Arial"/>
-              <a:cs typeface="Arial"/>
-              <a:sym typeface="Arial"/>
-            </a:endParaRPr>
-          </a:p>
-        </p:txBody>
-      </p:sp>
-      <p:sp>
-        <p:nvSpPr>
           <p:cNvPr id="281" name="Google Shape;281;p38"/>
-          <p:cNvSpPr txBox="1"/>
-          <p:nvPr/>
-        </p:nvSpPr>
-        <p:spPr>
-          <a:xfrm>
-            <a:off x="3273554" y="3763116"/>
-            <a:ext cx="1963800" cy="992700"/>
-          </a:xfrm>
-          <a:prstGeom prst="rect">
-            <a:avLst/>
-          </a:prstGeom>
-          <a:noFill/>
-          <a:ln>
-            <a:noFill/>
-          </a:ln>
-        </p:spPr>
-        <p:txBody>
-          <a:bodyPr anchorCtr="0" anchor="t" bIns="34275" lIns="68575" spcFirstLastPara="1" rIns="68575" wrap="square" tIns="34275">
-            <a:spAutoFit/>
-          </a:bodyPr>
-          <a:lstStyle/>
-          <a:p>
-            <a:pPr indent="0" lvl="0" marL="0" marR="0" rtl="0" algn="l">
-              <a:spcBef>
-                <a:spcPts val="0"/>
-              </a:spcBef>
-              <a:spcAft>
-                <a:spcPts val="0"/>
-              </a:spcAft>
-              <a:buNone/>
-            </a:pPr>
-            <a:r>
-              <a:rPr lang="en" sz="1200">
-                <a:solidFill>
-                  <a:schemeClr val="dk1"/>
-                </a:solidFill>
-                <a:latin typeface="Arial"/>
-                <a:ea typeface="Arial"/>
-                <a:cs typeface="Arial"/>
-                <a:sym typeface="Arial"/>
-              </a:rPr>
-              <a:t>Measures the difference between actual and predicted values, giving more penalty to larger errors..</a:t>
-            </a:r>
-            <a:endParaRPr sz="1400">
-              <a:solidFill>
-                <a:schemeClr val="dk1"/>
-              </a:solidFill>
-              <a:latin typeface="Arial"/>
-              <a:ea typeface="Arial"/>
-              <a:cs typeface="Arial"/>
-              <a:sym typeface="Arial"/>
-            </a:endParaRPr>
-          </a:p>
-        </p:txBody>
-      </p:sp>
-      <p:sp>
-        <p:nvSpPr>
-          <p:cNvPr id="282" name="Google Shape;282;p38"/>
-          <p:cNvSpPr txBox="1"/>
-          <p:nvPr/>
-        </p:nvSpPr>
-        <p:spPr>
-          <a:xfrm>
-            <a:off x="5827850" y="3412654"/>
-            <a:ext cx="1963800" cy="515700"/>
-          </a:xfrm>
-          <a:prstGeom prst="rect">
-            <a:avLst/>
-          </a:prstGeom>
-          <a:noFill/>
-          <a:ln>
-            <a:noFill/>
-          </a:ln>
-        </p:spPr>
-        <p:txBody>
-          <a:bodyPr anchorCtr="0" anchor="t" bIns="34275" lIns="68575" spcFirstLastPara="1" rIns="68575" wrap="square" tIns="34275">
-            <a:spAutoFit/>
-          </a:bodyPr>
-          <a:lstStyle/>
-          <a:p>
-            <a:pPr indent="0" lvl="0" marL="0" marR="0" rtl="0" algn="l">
-              <a:spcBef>
-                <a:spcPts val="0"/>
-              </a:spcBef>
-              <a:spcAft>
-                <a:spcPts val="0"/>
-              </a:spcAft>
-              <a:buNone/>
-            </a:pPr>
-            <a:r>
-              <a:rPr b="1" lang="en" sz="1500">
-                <a:solidFill>
-                  <a:schemeClr val="dk1"/>
-                </a:solidFill>
-                <a:latin typeface="Arial"/>
-                <a:ea typeface="Arial"/>
-                <a:cs typeface="Arial"/>
-                <a:sym typeface="Arial"/>
-              </a:rPr>
-              <a:t>3. R² Score</a:t>
-            </a:r>
-            <a:endParaRPr sz="1500">
-              <a:solidFill>
-                <a:schemeClr val="dk1"/>
-              </a:solidFill>
-              <a:latin typeface="Arial"/>
-              <a:ea typeface="Arial"/>
-              <a:cs typeface="Arial"/>
-              <a:sym typeface="Arial"/>
-            </a:endParaRPr>
-          </a:p>
-          <a:p>
-            <a:pPr indent="0" lvl="0" marL="0" marR="0" rtl="0" algn="l">
-              <a:spcBef>
-                <a:spcPts val="0"/>
-              </a:spcBef>
-              <a:spcAft>
-                <a:spcPts val="0"/>
-              </a:spcAft>
-              <a:buNone/>
-            </a:pPr>
-            <a:r>
-              <a:t/>
-            </a:r>
-            <a:endParaRPr sz="1400">
-              <a:solidFill>
-                <a:schemeClr val="dk1"/>
-              </a:solidFill>
-              <a:latin typeface="Arial"/>
-              <a:ea typeface="Arial"/>
-              <a:cs typeface="Arial"/>
-              <a:sym typeface="Arial"/>
-            </a:endParaRPr>
-          </a:p>
-        </p:txBody>
-      </p:sp>
-      <p:sp>
-        <p:nvSpPr>
-          <p:cNvPr id="283" name="Google Shape;283;p38"/>
-          <p:cNvSpPr txBox="1"/>
-          <p:nvPr/>
-        </p:nvSpPr>
-        <p:spPr>
-          <a:xfrm>
-            <a:off x="5884150" y="3774722"/>
-            <a:ext cx="2122800" cy="1054200"/>
-          </a:xfrm>
-          <a:prstGeom prst="rect">
-            <a:avLst/>
-          </a:prstGeom>
-          <a:noFill/>
-          <a:ln>
-            <a:noFill/>
-          </a:ln>
-        </p:spPr>
-        <p:txBody>
-          <a:bodyPr anchorCtr="0" anchor="t" bIns="34275" lIns="68575" spcFirstLastPara="1" rIns="68575" wrap="square" tIns="34275">
-            <a:spAutoFit/>
-          </a:bodyPr>
-          <a:lstStyle/>
-          <a:p>
-            <a:pPr indent="0" lvl="0" marL="0" marR="0" rtl="0" algn="l">
-              <a:spcBef>
-                <a:spcPts val="0"/>
-              </a:spcBef>
-              <a:spcAft>
-                <a:spcPts val="0"/>
-              </a:spcAft>
-              <a:buNone/>
-            </a:pPr>
-            <a:r>
-              <a:rPr lang="en" sz="1200">
-                <a:solidFill>
-                  <a:schemeClr val="dk1"/>
-                </a:solidFill>
-                <a:latin typeface="Arial"/>
-                <a:ea typeface="Arial"/>
-                <a:cs typeface="Arial"/>
-                <a:sym typeface="Arial"/>
-              </a:rPr>
-              <a:t>Shows how well the model explains variations in the target co</a:t>
-            </a:r>
-            <a:r>
-              <a:rPr lang="en" sz="1200">
-                <a:solidFill>
-                  <a:schemeClr val="dk1"/>
-                </a:solidFill>
-              </a:rPr>
-              <a:t>lumn</a:t>
-            </a:r>
-            <a:r>
-              <a:rPr lang="en" sz="1200">
-                <a:solidFill>
-                  <a:schemeClr val="dk1"/>
-                </a:solidFill>
-                <a:latin typeface="Arial"/>
-                <a:ea typeface="Arial"/>
-                <a:cs typeface="Arial"/>
-                <a:sym typeface="Arial"/>
-              </a:rPr>
-              <a:t>. A value closer to 1 indicates a better fit</a:t>
-            </a:r>
-            <a:r>
-              <a:rPr lang="en" sz="1400">
-                <a:solidFill>
-                  <a:schemeClr val="dk1"/>
-                </a:solidFill>
-                <a:latin typeface="Arial"/>
-                <a:ea typeface="Arial"/>
-                <a:cs typeface="Arial"/>
-                <a:sym typeface="Arial"/>
-              </a:rPr>
-              <a:t>.</a:t>
-            </a:r>
-            <a:endParaRPr sz="1100"/>
-          </a:p>
-          <a:p>
-            <a:pPr indent="0" lvl="0" marL="0" marR="0" rtl="0" algn="l">
-              <a:spcBef>
-                <a:spcPts val="0"/>
-              </a:spcBef>
-              <a:spcAft>
-                <a:spcPts val="0"/>
-              </a:spcAft>
-              <a:buNone/>
-            </a:pPr>
-            <a:r>
-              <a:t/>
-            </a:r>
-            <a:endParaRPr sz="1400">
-              <a:solidFill>
-                <a:schemeClr val="dk1"/>
-              </a:solidFill>
-              <a:latin typeface="Arial"/>
-              <a:ea typeface="Arial"/>
-              <a:cs typeface="Arial"/>
-              <a:sym typeface="Arial"/>
-            </a:endParaRPr>
-          </a:p>
-        </p:txBody>
-      </p:sp>
-    </p:spTree>
-  </p:cSld>
-  <p:clrMapOvr>
-    <a:masterClrMapping/>
-  </p:clrMapOvr>
-</p:sld>
-</file>
-
-<file path=ppt/slides/slide11.xml><?xml version="1.0" encoding="utf-8"?>
-<p:sld xmlns:a="http://schemas.openxmlformats.org/drawingml/2006/main" xmlns:r="http://schemas.openxmlformats.org/officeDocument/2006/relationships" xmlns:mc="http://schemas.openxmlformats.org/markup-compatibility/2006" xmlns:mv="urn:schemas-microsoft-com:mac:vml" xmlns:p="http://schemas.openxmlformats.org/presentationml/2006/main" xmlns:c="http://schemas.openxmlformats.org/drawingml/2006/chart" xmlns:dgm="http://schemas.openxmlformats.org/drawingml/2006/diagram" xmlns:o="urn:schemas-microsoft-com:office:office" xmlns:v="urn:schemas-microsoft-com:vml" xmlns:pvml="urn:schemas-microsoft-com:office:powerpoint" xmlns:com="http://schemas.openxmlformats.org/drawingml/2006/compatibility" xmlns:p14="http://schemas.microsoft.com/office/powerpoint/2010/main" xmlns:p15="http://schemas.microsoft.com/office/powerpoint/2012/main" xmlns:ahyp="http://schemas.microsoft.com/office/drawing/2018/hyperlinkcolor">
-  <p:cSld>
-    <p:spTree>
-      <p:nvGrpSpPr>
-        <p:cNvPr id="288" name="Shape 288"/>
-        <p:cNvGrpSpPr/>
-        <p:nvPr/>
-      </p:nvGrpSpPr>
-      <p:grpSpPr>
-        <a:xfrm>
-          <a:off x="0" y="0"/>
-          <a:ext cx="0" cy="0"/>
-          <a:chOff x="0" y="0"/>
-          <a:chExt cx="0" cy="0"/>
-        </a:xfrm>
-      </p:grpSpPr>
-      <p:sp>
-        <p:nvSpPr>
-          <p:cNvPr id="289" name="Google Shape;289;p39"/>
           <p:cNvSpPr txBox="1"/>
           <p:nvPr>
             <p:ph type="ctrTitle"/>
@@ -22164,7 +20497,7 @@
       </p:sp>
       <p:sp>
         <p:nvSpPr>
-          <p:cNvPr id="290" name="Google Shape;290;p39"/>
+          <p:cNvPr id="282" name="Google Shape;282;p38"/>
           <p:cNvSpPr/>
           <p:nvPr/>
         </p:nvSpPr>
@@ -22221,7 +20554,7 @@
       </p:sp>
       <p:sp>
         <p:nvSpPr>
-          <p:cNvPr id="291" name="Google Shape;291;p39"/>
+          <p:cNvPr id="283" name="Google Shape;283;p38"/>
           <p:cNvSpPr txBox="1"/>
           <p:nvPr/>
         </p:nvSpPr>
@@ -22270,7 +20603,7 @@
       </p:sp>
       <p:sp>
         <p:nvSpPr>
-          <p:cNvPr id="292" name="Google Shape;292;p39"/>
+          <p:cNvPr id="284" name="Google Shape;284;p38"/>
           <p:cNvSpPr txBox="1"/>
           <p:nvPr/>
         </p:nvSpPr>
@@ -22342,7 +20675,7 @@
       </p:sp>
       <p:sp>
         <p:nvSpPr>
-          <p:cNvPr id="293" name="Google Shape;293;p39"/>
+          <p:cNvPr id="285" name="Google Shape;285;p38"/>
           <p:cNvSpPr txBox="1"/>
           <p:nvPr/>
         </p:nvSpPr>
@@ -22414,7 +20747,7 @@
       </p:sp>
       <p:sp>
         <p:nvSpPr>
-          <p:cNvPr id="294" name="Google Shape;294;p39"/>
+          <p:cNvPr id="286" name="Google Shape;286;p38"/>
           <p:cNvSpPr txBox="1"/>
           <p:nvPr/>
         </p:nvSpPr>
@@ -22486,7 +20819,7 @@
       </p:sp>
       <p:graphicFrame>
         <p:nvGraphicFramePr>
-          <p:cNvPr id="295" name="Google Shape;295;p39"/>
+          <p:cNvPr id="287" name="Google Shape;287;p38"/>
           <p:cNvGraphicFramePr/>
           <p:nvPr/>
         </p:nvGraphicFramePr>
@@ -22499,7 +20832,7 @@
             <a:tbl>
               <a:tblPr bandRow="1" firstRow="1">
                 <a:noFill/>
-                <a:tableStyleId>{29DC7F4B-8063-4A96-8E9C-9EF12943423C}</a:tableStyleId>
+                <a:tableStyleId>{49EA4D2D-3105-4BA8-8EEB-5E88ECBEB799}</a:tableStyleId>
               </a:tblPr>
               <a:tblGrid>
                 <a:gridCol w="3789000"/>
@@ -22609,7 +20942,7 @@
                           <a:cs typeface="Arial"/>
                           <a:sym typeface="Arial"/>
                         </a:rPr>
-                        <a:t>                           3,253,582</a:t>
+                        <a:t>                           4,553,166</a:t>
                       </a:r>
                       <a:endParaRPr b="1">
                         <a:solidFill>
@@ -22684,7 +21017,7 @@
                       </a:r>
                       <a:r>
                         <a:rPr b="1" lang="en"/>
-                        <a:t>5,541,855 </a:t>
+                        <a:t>7,441,855 </a:t>
                       </a:r>
                       <a:endParaRPr b="1" sz="1400" u="none" cap="none" strike="noStrike"/>
                     </a:p>
@@ -22740,7 +21073,7 @@
                       </a:pPr>
                       <a:r>
                         <a:rPr b="1" lang="en"/>
-                        <a:t>                             0.9636</a:t>
+                        <a:t>                             0.9436</a:t>
                       </a:r>
                       <a:endParaRPr b="1" sz="1400" u="none" cap="none" strike="noStrike"/>
                     </a:p>
@@ -22754,7 +21087,7 @@
       </p:graphicFrame>
       <p:sp>
         <p:nvSpPr>
-          <p:cNvPr id="296" name="Google Shape;296;p39"/>
+          <p:cNvPr id="288" name="Google Shape;288;p38"/>
           <p:cNvSpPr txBox="1"/>
           <p:nvPr/>
         </p:nvSpPr>
@@ -22799,6 +21132,235 @@
               <a:t>Model performance</a:t>
             </a:r>
             <a:endParaRPr sz="1100"/>
+          </a:p>
+        </p:txBody>
+      </p:sp>
+    </p:spTree>
+  </p:cSld>
+  <p:clrMapOvr>
+    <a:masterClrMapping/>
+  </p:clrMapOvr>
+</p:sld>
+</file>
+
+<file path=ppt/slides/slide11.xml><?xml version="1.0" encoding="utf-8"?>
+<p:sld xmlns:a="http://schemas.openxmlformats.org/drawingml/2006/main" xmlns:r="http://schemas.openxmlformats.org/officeDocument/2006/relationships" xmlns:mc="http://schemas.openxmlformats.org/markup-compatibility/2006" xmlns:mv="urn:schemas-microsoft-com:mac:vml" xmlns:p="http://schemas.openxmlformats.org/presentationml/2006/main" xmlns:c="http://schemas.openxmlformats.org/drawingml/2006/chart" xmlns:dgm="http://schemas.openxmlformats.org/drawingml/2006/diagram" xmlns:o="urn:schemas-microsoft-com:office:office" xmlns:v="urn:schemas-microsoft-com:vml" xmlns:pvml="urn:schemas-microsoft-com:office:powerpoint" xmlns:com="http://schemas.openxmlformats.org/drawingml/2006/compatibility" xmlns:p14="http://schemas.microsoft.com/office/powerpoint/2010/main" xmlns:p15="http://schemas.microsoft.com/office/powerpoint/2012/main" xmlns:ahyp="http://schemas.microsoft.com/office/drawing/2018/hyperlinkcolor">
+  <p:cSld>
+    <p:bg>
+      <p:bgPr>
+        <a:solidFill>
+          <a:srgbClr val="FFFFFF"/>
+        </a:solidFill>
+      </p:bgPr>
+    </p:bg>
+    <p:spTree>
+      <p:nvGrpSpPr>
+        <p:cNvPr id="293" name="Shape 293"/>
+        <p:cNvGrpSpPr/>
+        <p:nvPr/>
+      </p:nvGrpSpPr>
+      <p:grpSpPr>
+        <a:xfrm>
+          <a:off x="0" y="0"/>
+          <a:ext cx="0" cy="0"/>
+          <a:chOff x="0" y="0"/>
+          <a:chExt cx="0" cy="0"/>
+        </a:xfrm>
+      </p:grpSpPr>
+      <p:sp>
+        <p:nvSpPr>
+          <p:cNvPr id="294" name="Google Shape;294;p39"/>
+          <p:cNvSpPr/>
+          <p:nvPr/>
+        </p:nvSpPr>
+        <p:spPr>
+          <a:xfrm>
+            <a:off x="609600" y="1697355"/>
+            <a:ext cx="8162544" cy="205740"/>
+          </a:xfrm>
+          <a:prstGeom prst="rect">
+            <a:avLst/>
+          </a:prstGeom>
+          <a:noFill/>
+          <a:ln>
+            <a:noFill/>
+          </a:ln>
+        </p:spPr>
+        <p:txBody>
+          <a:bodyPr anchorCtr="0" anchor="t" bIns="0" lIns="0" spcFirstLastPara="1" rIns="0" wrap="square" tIns="0">
+            <a:noAutofit/>
+          </a:bodyPr>
+          <a:lstStyle/>
+          <a:p>
+            <a:pPr indent="0" lvl="0" marL="0" marR="0" rtl="0" algn="l">
+              <a:lnSpc>
+                <a:spcPct val="140000"/>
+              </a:lnSpc>
+              <a:spcBef>
+                <a:spcPts val="0"/>
+              </a:spcBef>
+              <a:spcAft>
+                <a:spcPts val="0"/>
+              </a:spcAft>
+              <a:buClr>
+                <a:srgbClr val="B85A14"/>
+              </a:buClr>
+              <a:buSzPts val="1100"/>
+              <a:buFont typeface="Arial"/>
+              <a:buNone/>
+            </a:pPr>
+            <a:r>
+              <a:rPr b="0" i="0" lang="en" sz="1100" u="none" cap="none" strike="noStrike">
+                <a:solidFill>
+                  <a:srgbClr val="B85A14"/>
+                </a:solidFill>
+                <a:latin typeface="Arial"/>
+                <a:ea typeface="Arial"/>
+                <a:cs typeface="Arial"/>
+                <a:sym typeface="Arial"/>
+              </a:rPr>
+              <a:t>MACHINE LEARNING PROJECT · MODEL EVALUATION</a:t>
+            </a:r>
+            <a:endParaRPr b="0" i="0" sz="1100" u="none" cap="none" strike="noStrike">
+              <a:solidFill>
+                <a:schemeClr val="dk1"/>
+              </a:solidFill>
+              <a:latin typeface="Arial"/>
+              <a:ea typeface="Arial"/>
+              <a:cs typeface="Arial"/>
+              <a:sym typeface="Arial"/>
+            </a:endParaRPr>
+          </a:p>
+        </p:txBody>
+      </p:sp>
+      <p:sp>
+        <p:nvSpPr>
+          <p:cNvPr id="295" name="Google Shape;295;p39"/>
+          <p:cNvSpPr txBox="1"/>
+          <p:nvPr>
+            <p:ph type="title"/>
+          </p:nvPr>
+        </p:nvSpPr>
+        <p:spPr>
+          <a:xfrm>
+            <a:off x="609600" y="2112645"/>
+            <a:ext cx="8162544" cy="579120"/>
+          </a:xfrm>
+          <a:prstGeom prst="rect">
+            <a:avLst/>
+          </a:prstGeom>
+          <a:noFill/>
+          <a:ln>
+            <a:noFill/>
+          </a:ln>
+        </p:spPr>
+        <p:txBody>
+          <a:bodyPr anchorCtr="0" anchor="t" bIns="0" lIns="0" spcFirstLastPara="1" rIns="0" wrap="square" tIns="0">
+            <a:normAutofit fontScale="90000"/>
+          </a:bodyPr>
+          <a:lstStyle/>
+          <a:p>
+            <a:pPr indent="0" lvl="0" marL="0" rtl="0" algn="l">
+              <a:lnSpc>
+                <a:spcPct val="104999"/>
+              </a:lnSpc>
+              <a:spcBef>
+                <a:spcPts val="0"/>
+              </a:spcBef>
+              <a:spcAft>
+                <a:spcPts val="0"/>
+              </a:spcAft>
+              <a:buClr>
+                <a:srgbClr val="1B2A3A"/>
+              </a:buClr>
+              <a:buSzPct val="100000"/>
+              <a:buFont typeface="Georgia"/>
+              <a:buNone/>
+            </a:pPr>
+            <a:r>
+              <a:rPr b="1" i="0" lang="en" sz="4200">
+                <a:solidFill>
+                  <a:srgbClr val="1B2A3A"/>
+                </a:solidFill>
+                <a:latin typeface="Arial"/>
+                <a:ea typeface="Arial"/>
+                <a:cs typeface="Arial"/>
+                <a:sym typeface="Arial"/>
+              </a:rPr>
+              <a:t>Decision Tree Regressor</a:t>
+            </a:r>
+            <a:endParaRPr b="1" sz="4200">
+              <a:latin typeface="Arial"/>
+              <a:ea typeface="Arial"/>
+              <a:cs typeface="Arial"/>
+              <a:sym typeface="Arial"/>
+            </a:endParaRPr>
+          </a:p>
+        </p:txBody>
+      </p:sp>
+      <p:sp>
+        <p:nvSpPr>
+          <p:cNvPr id="296" name="Google Shape;296;p39"/>
+          <p:cNvSpPr/>
+          <p:nvPr/>
+        </p:nvSpPr>
+        <p:spPr>
+          <a:xfrm>
+            <a:off x="609600" y="2901315"/>
+            <a:ext cx="6376988" cy="563880"/>
+          </a:xfrm>
+          <a:prstGeom prst="rect">
+            <a:avLst/>
+          </a:prstGeom>
+          <a:noFill/>
+          <a:ln>
+            <a:noFill/>
+          </a:ln>
+        </p:spPr>
+        <p:txBody>
+          <a:bodyPr anchorCtr="0" anchor="t" bIns="0" lIns="0" spcFirstLastPara="1" rIns="0" wrap="square" tIns="0">
+            <a:noAutofit/>
+          </a:bodyPr>
+          <a:lstStyle/>
+          <a:p>
+            <a:pPr indent="0" lvl="0" marL="0" marR="0" rtl="0" algn="l">
+              <a:lnSpc>
+                <a:spcPct val="130000"/>
+              </a:lnSpc>
+              <a:spcBef>
+                <a:spcPts val="0"/>
+              </a:spcBef>
+              <a:spcAft>
+                <a:spcPts val="0"/>
+              </a:spcAft>
+              <a:buClr>
+                <a:srgbClr val="5B6672"/>
+              </a:buClr>
+              <a:buSzPts val="1700"/>
+              <a:buFont typeface="Arial"/>
+              <a:buNone/>
+            </a:pPr>
+            <a:r>
+              <a:rPr b="0" i="0" lang="en" sz="1700" u="none" cap="none" strike="noStrike">
+                <a:solidFill>
+                  <a:srgbClr val="5B6672"/>
+                </a:solidFill>
+                <a:latin typeface="Arial"/>
+                <a:ea typeface="Arial"/>
+                <a:cs typeface="Arial"/>
+                <a:sym typeface="Arial"/>
+              </a:rPr>
+              <a:t>Implementation and evaluation for painting cost (amount in INR) prediction</a:t>
+            </a:r>
+            <a:endParaRPr b="0" i="0" sz="1700" u="none" cap="none" strike="noStrike">
+              <a:solidFill>
+                <a:schemeClr val="dk1"/>
+              </a:solidFill>
+              <a:latin typeface="Arial"/>
+              <a:ea typeface="Arial"/>
+              <a:cs typeface="Arial"/>
+              <a:sym typeface="Arial"/>
+            </a:endParaRPr>
           </a:p>
         </p:txBody>
       </p:sp>
@@ -22837,235 +21399,6 @@
       <p:sp>
         <p:nvSpPr>
           <p:cNvPr id="302" name="Google Shape;302;p40"/>
-          <p:cNvSpPr/>
-          <p:nvPr/>
-        </p:nvSpPr>
-        <p:spPr>
-          <a:xfrm>
-            <a:off x="609600" y="1697355"/>
-            <a:ext cx="8162544" cy="205740"/>
-          </a:xfrm>
-          <a:prstGeom prst="rect">
-            <a:avLst/>
-          </a:prstGeom>
-          <a:noFill/>
-          <a:ln>
-            <a:noFill/>
-          </a:ln>
-        </p:spPr>
-        <p:txBody>
-          <a:bodyPr anchorCtr="0" anchor="t" bIns="0" lIns="0" spcFirstLastPara="1" rIns="0" wrap="square" tIns="0">
-            <a:noAutofit/>
-          </a:bodyPr>
-          <a:lstStyle/>
-          <a:p>
-            <a:pPr indent="0" lvl="0" marL="0" marR="0" rtl="0" algn="l">
-              <a:lnSpc>
-                <a:spcPct val="140000"/>
-              </a:lnSpc>
-              <a:spcBef>
-                <a:spcPts val="0"/>
-              </a:spcBef>
-              <a:spcAft>
-                <a:spcPts val="0"/>
-              </a:spcAft>
-              <a:buClr>
-                <a:srgbClr val="B85A14"/>
-              </a:buClr>
-              <a:buSzPts val="1100"/>
-              <a:buFont typeface="Arial"/>
-              <a:buNone/>
-            </a:pPr>
-            <a:r>
-              <a:rPr b="0" i="0" lang="en" sz="1100" u="none" cap="none" strike="noStrike">
-                <a:solidFill>
-                  <a:srgbClr val="B85A14"/>
-                </a:solidFill>
-                <a:latin typeface="Arial"/>
-                <a:ea typeface="Arial"/>
-                <a:cs typeface="Arial"/>
-                <a:sym typeface="Arial"/>
-              </a:rPr>
-              <a:t>MACHINE LEARNING PROJECT · MODEL EVALUATION</a:t>
-            </a:r>
-            <a:endParaRPr b="0" i="0" sz="1100" u="none" cap="none" strike="noStrike">
-              <a:solidFill>
-                <a:schemeClr val="dk1"/>
-              </a:solidFill>
-              <a:latin typeface="Arial"/>
-              <a:ea typeface="Arial"/>
-              <a:cs typeface="Arial"/>
-              <a:sym typeface="Arial"/>
-            </a:endParaRPr>
-          </a:p>
-        </p:txBody>
-      </p:sp>
-      <p:sp>
-        <p:nvSpPr>
-          <p:cNvPr id="303" name="Google Shape;303;p40"/>
-          <p:cNvSpPr txBox="1"/>
-          <p:nvPr>
-            <p:ph type="title"/>
-          </p:nvPr>
-        </p:nvSpPr>
-        <p:spPr>
-          <a:xfrm>
-            <a:off x="609600" y="2112645"/>
-            <a:ext cx="8162544" cy="579120"/>
-          </a:xfrm>
-          <a:prstGeom prst="rect">
-            <a:avLst/>
-          </a:prstGeom>
-          <a:noFill/>
-          <a:ln>
-            <a:noFill/>
-          </a:ln>
-        </p:spPr>
-        <p:txBody>
-          <a:bodyPr anchorCtr="0" anchor="t" bIns="0" lIns="0" spcFirstLastPara="1" rIns="0" wrap="square" tIns="0">
-            <a:normAutofit fontScale="90000"/>
-          </a:bodyPr>
-          <a:lstStyle/>
-          <a:p>
-            <a:pPr indent="0" lvl="0" marL="0" rtl="0" algn="l">
-              <a:lnSpc>
-                <a:spcPct val="104999"/>
-              </a:lnSpc>
-              <a:spcBef>
-                <a:spcPts val="0"/>
-              </a:spcBef>
-              <a:spcAft>
-                <a:spcPts val="0"/>
-              </a:spcAft>
-              <a:buClr>
-                <a:srgbClr val="1B2A3A"/>
-              </a:buClr>
-              <a:buSzPct val="100000"/>
-              <a:buFont typeface="Georgia"/>
-              <a:buNone/>
-            </a:pPr>
-            <a:r>
-              <a:rPr b="1" i="0" lang="en" sz="4200">
-                <a:solidFill>
-                  <a:srgbClr val="1B2A3A"/>
-                </a:solidFill>
-                <a:latin typeface="Arial"/>
-                <a:ea typeface="Arial"/>
-                <a:cs typeface="Arial"/>
-                <a:sym typeface="Arial"/>
-              </a:rPr>
-              <a:t>Decision Tree Regressor</a:t>
-            </a:r>
-            <a:endParaRPr b="1" sz="4200">
-              <a:latin typeface="Arial"/>
-              <a:ea typeface="Arial"/>
-              <a:cs typeface="Arial"/>
-              <a:sym typeface="Arial"/>
-            </a:endParaRPr>
-          </a:p>
-        </p:txBody>
-      </p:sp>
-      <p:sp>
-        <p:nvSpPr>
-          <p:cNvPr id="304" name="Google Shape;304;p40"/>
-          <p:cNvSpPr/>
-          <p:nvPr/>
-        </p:nvSpPr>
-        <p:spPr>
-          <a:xfrm>
-            <a:off x="609600" y="2901315"/>
-            <a:ext cx="6376988" cy="563880"/>
-          </a:xfrm>
-          <a:prstGeom prst="rect">
-            <a:avLst/>
-          </a:prstGeom>
-          <a:noFill/>
-          <a:ln>
-            <a:noFill/>
-          </a:ln>
-        </p:spPr>
-        <p:txBody>
-          <a:bodyPr anchorCtr="0" anchor="t" bIns="0" lIns="0" spcFirstLastPara="1" rIns="0" wrap="square" tIns="0">
-            <a:noAutofit/>
-          </a:bodyPr>
-          <a:lstStyle/>
-          <a:p>
-            <a:pPr indent="0" lvl="0" marL="0" marR="0" rtl="0" algn="l">
-              <a:lnSpc>
-                <a:spcPct val="130000"/>
-              </a:lnSpc>
-              <a:spcBef>
-                <a:spcPts val="0"/>
-              </a:spcBef>
-              <a:spcAft>
-                <a:spcPts val="0"/>
-              </a:spcAft>
-              <a:buClr>
-                <a:srgbClr val="5B6672"/>
-              </a:buClr>
-              <a:buSzPts val="1700"/>
-              <a:buFont typeface="Arial"/>
-              <a:buNone/>
-            </a:pPr>
-            <a:r>
-              <a:rPr b="0" i="0" lang="en" sz="1700" u="none" cap="none" strike="noStrike">
-                <a:solidFill>
-                  <a:srgbClr val="5B6672"/>
-                </a:solidFill>
-                <a:latin typeface="Arial"/>
-                <a:ea typeface="Arial"/>
-                <a:cs typeface="Arial"/>
-                <a:sym typeface="Arial"/>
-              </a:rPr>
-              <a:t>Implementation and evaluation for painting cost (amount in INR) prediction</a:t>
-            </a:r>
-            <a:endParaRPr b="0" i="0" sz="1700" u="none" cap="none" strike="noStrike">
-              <a:solidFill>
-                <a:schemeClr val="dk1"/>
-              </a:solidFill>
-              <a:latin typeface="Arial"/>
-              <a:ea typeface="Arial"/>
-              <a:cs typeface="Arial"/>
-              <a:sym typeface="Arial"/>
-            </a:endParaRPr>
-          </a:p>
-        </p:txBody>
-      </p:sp>
-    </p:spTree>
-  </p:cSld>
-  <p:clrMapOvr>
-    <a:masterClrMapping/>
-  </p:clrMapOvr>
-</p:sld>
-</file>
-
-<file path=ppt/slides/slide13.xml><?xml version="1.0" encoding="utf-8"?>
-<p:sld xmlns:a="http://schemas.openxmlformats.org/drawingml/2006/main" xmlns:r="http://schemas.openxmlformats.org/officeDocument/2006/relationships" xmlns:mc="http://schemas.openxmlformats.org/markup-compatibility/2006" xmlns:mv="urn:schemas-microsoft-com:mac:vml" xmlns:p="http://schemas.openxmlformats.org/presentationml/2006/main" xmlns:c="http://schemas.openxmlformats.org/drawingml/2006/chart" xmlns:dgm="http://schemas.openxmlformats.org/drawingml/2006/diagram" xmlns:o="urn:schemas-microsoft-com:office:office" xmlns:v="urn:schemas-microsoft-com:vml" xmlns:pvml="urn:schemas-microsoft-com:office:powerpoint" xmlns:com="http://schemas.openxmlformats.org/drawingml/2006/compatibility" xmlns:p14="http://schemas.microsoft.com/office/powerpoint/2010/main" xmlns:p15="http://schemas.microsoft.com/office/powerpoint/2012/main" xmlns:ahyp="http://schemas.microsoft.com/office/drawing/2018/hyperlinkcolor">
-  <p:cSld>
-    <p:bg>
-      <p:bgPr>
-        <a:solidFill>
-          <a:srgbClr val="FFFFFF"/>
-        </a:solidFill>
-      </p:bgPr>
-    </p:bg>
-    <p:spTree>
-      <p:nvGrpSpPr>
-        <p:cNvPr id="309" name="Shape 309"/>
-        <p:cNvGrpSpPr/>
-        <p:nvPr/>
-      </p:nvGrpSpPr>
-      <p:grpSpPr>
-        <a:xfrm>
-          <a:off x="0" y="0"/>
-          <a:ext cx="0" cy="0"/>
-          <a:chOff x="0" y="0"/>
-          <a:chExt cx="0" cy="0"/>
-        </a:xfrm>
-      </p:grpSpPr>
-      <p:sp>
-        <p:nvSpPr>
-          <p:cNvPr id="310" name="Google Shape;310;p41"/>
           <p:cNvSpPr txBox="1"/>
           <p:nvPr>
             <p:ph type="title"/>
@@ -23139,7 +21472,7 @@
       </p:sp>
       <p:pic>
         <p:nvPicPr>
-          <p:cNvPr descr="depth plot" id="311" name="Google Shape;311;p41"/>
+          <p:cNvPr descr="depth plot" id="303" name="Google Shape;303;p40"/>
           <p:cNvPicPr preferRelativeResize="0"/>
           <p:nvPr/>
         </p:nvPicPr>
@@ -23166,7 +21499,7 @@
       </p:pic>
       <p:sp>
         <p:nvSpPr>
-          <p:cNvPr id="312" name="Google Shape;312;p41"/>
+          <p:cNvPr id="304" name="Google Shape;304;p40"/>
           <p:cNvSpPr/>
           <p:nvPr/>
         </p:nvSpPr>
@@ -23217,7 +21550,7 @@
       </p:sp>
       <p:sp>
         <p:nvSpPr>
-          <p:cNvPr id="313" name="Google Shape;313;p41"/>
+          <p:cNvPr id="305" name="Google Shape;305;p40"/>
           <p:cNvSpPr/>
           <p:nvPr/>
         </p:nvSpPr>
@@ -23283,7 +21616,7 @@
       </p:sp>
       <p:sp>
         <p:nvSpPr>
-          <p:cNvPr id="314" name="Google Shape;314;p41"/>
+          <p:cNvPr id="306" name="Google Shape;306;p40"/>
           <p:cNvSpPr/>
           <p:nvPr/>
         </p:nvSpPr>
@@ -23349,7 +21682,7 @@
       </p:sp>
       <p:sp>
         <p:nvSpPr>
-          <p:cNvPr id="315" name="Google Shape;315;p41"/>
+          <p:cNvPr id="307" name="Google Shape;307;p40"/>
           <p:cNvSpPr/>
           <p:nvPr/>
         </p:nvSpPr>
@@ -23415,7 +21748,7 @@
       </p:sp>
       <p:sp>
         <p:nvSpPr>
-          <p:cNvPr id="316" name="Google Shape;316;p41"/>
+          <p:cNvPr id="308" name="Google Shape;308;p40"/>
           <p:cNvSpPr/>
           <p:nvPr/>
         </p:nvSpPr>
@@ -23487,7 +21820,7 @@
 </p:sld>
 </file>
 
-<file path=ppt/slides/slide14.xml><?xml version="1.0" encoding="utf-8"?>
+<file path=ppt/slides/slide13.xml><?xml version="1.0" encoding="utf-8"?>
 <p:sld xmlns:a="http://schemas.openxmlformats.org/drawingml/2006/main" xmlns:r="http://schemas.openxmlformats.org/officeDocument/2006/relationships" xmlns:mc="http://schemas.openxmlformats.org/markup-compatibility/2006" xmlns:mv="urn:schemas-microsoft-com:mac:vml" xmlns:p="http://schemas.openxmlformats.org/presentationml/2006/main" xmlns:c="http://schemas.openxmlformats.org/drawingml/2006/chart" xmlns:dgm="http://schemas.openxmlformats.org/drawingml/2006/diagram" xmlns:o="urn:schemas-microsoft-com:office:office" xmlns:v="urn:schemas-microsoft-com:vml" xmlns:pvml="urn:schemas-microsoft-com:office:powerpoint" xmlns:com="http://schemas.openxmlformats.org/drawingml/2006/compatibility" xmlns:p14="http://schemas.microsoft.com/office/powerpoint/2010/main" xmlns:p15="http://schemas.microsoft.com/office/powerpoint/2012/main" xmlns:ahyp="http://schemas.microsoft.com/office/drawing/2018/hyperlinkcolor">
   <p:cSld>
     <p:bg>
@@ -23499,7 +21832,7 @@
     </p:bg>
     <p:spTree>
       <p:nvGrpSpPr>
-        <p:cNvPr id="321" name="Shape 321"/>
+        <p:cNvPr id="313" name="Shape 313"/>
         <p:cNvGrpSpPr/>
         <p:nvPr/>
       </p:nvGrpSpPr>
@@ -23513,7 +21846,7 @@
       </p:grpSpPr>
       <p:sp>
         <p:nvSpPr>
-          <p:cNvPr id="322" name="Google Shape;322;p42"/>
+          <p:cNvPr id="314" name="Google Shape;314;p41"/>
           <p:cNvSpPr txBox="1"/>
           <p:nvPr>
             <p:ph type="title"/>
@@ -23578,7 +21911,7 @@
       </p:sp>
       <p:pic>
         <p:nvPicPr>
-          <p:cNvPr descr="cv plot" id="323" name="Google Shape;323;p42"/>
+          <p:cNvPr descr="cv plot" id="315" name="Google Shape;315;p41"/>
           <p:cNvPicPr preferRelativeResize="0"/>
           <p:nvPr/>
         </p:nvPicPr>
@@ -23605,7 +21938,7 @@
       </p:pic>
       <p:graphicFrame>
         <p:nvGraphicFramePr>
-          <p:cNvPr id="324" name="Google Shape;324;p42"/>
+          <p:cNvPr id="316" name="Google Shape;316;p41"/>
           <p:cNvGraphicFramePr/>
           <p:nvPr/>
         </p:nvGraphicFramePr>
@@ -23618,7 +21951,7 @@
             <a:tbl>
               <a:tblPr>
                 <a:noFill/>
-                <a:tableStyleId>{D40CF775-971E-4647-BF06-4388D5D44E86}</a:tableStyleId>
+                <a:tableStyleId>{6DAA31DF-5E4C-4C29-BF81-0BB91B100737}</a:tableStyleId>
               </a:tblPr>
               <a:tblGrid>
                 <a:gridCol w="975350"/>
@@ -24001,7 +22334,7 @@
                             <a:srgbClr val="1B2A3A"/>
                           </a:solidFill>
                         </a:rPr>
-                        <a:t>136</a:t>
+                        <a:t>83</a:t>
                       </a:r>
                       <a:endParaRPr sz="1200" u="none" cap="none" strike="noStrike">
                         <a:latin typeface="Arial"/>
@@ -24090,7 +22423,7 @@
                             <a:srgbClr val="1B2A3A"/>
                           </a:solidFill>
                         </a:rPr>
-                        <a:t>8753</a:t>
+                        <a:t>918</a:t>
                       </a:r>
                       <a:endParaRPr sz="1200" u="none" cap="none" strike="noStrike">
                         <a:latin typeface="Arial"/>
@@ -24262,7 +22595,7 @@
                             <a:srgbClr val="1B2A3A"/>
                           </a:solidFill>
                         </a:rPr>
-                        <a:t>4</a:t>
+                        <a:t>2</a:t>
                       </a:r>
                       <a:r>
                         <a:rPr lang="en" sz="1200" u="none" cap="none" strike="noStrike">
@@ -24282,7 +22615,7 @@
                             <a:srgbClr val="1B2A3A"/>
                           </a:solidFill>
                         </a:rPr>
-                        <a:t>95</a:t>
+                        <a:t>06</a:t>
                       </a:r>
                       <a:r>
                         <a:rPr lang="en" sz="1200" u="none" cap="none" strike="noStrike">
@@ -24383,27 +22716,7 @@
                             <a:srgbClr val="1B2A3A"/>
                           </a:solidFill>
                         </a:rPr>
-                        <a:t>5</a:t>
-                      </a:r>
-                      <a:r>
-                        <a:rPr lang="en" sz="1200" u="none" cap="none" strike="noStrike">
-                          <a:solidFill>
-                            <a:srgbClr val="1B2A3A"/>
-                          </a:solidFill>
-                          <a:latin typeface="Arial"/>
-                          <a:ea typeface="Arial"/>
-                          <a:cs typeface="Arial"/>
-                          <a:sym typeface="Arial"/>
-                        </a:rPr>
-                        <a:t>.</a:t>
-                      </a:r>
-                      <a:r>
-                        <a:rPr lang="en" sz="1200">
-                          <a:solidFill>
-                            <a:srgbClr val="1B2A3A"/>
-                          </a:solidFill>
-                        </a:rPr>
-                        <a:t>22</a:t>
+                        <a:t>4.69</a:t>
                       </a:r>
                       <a:r>
                         <a:rPr lang="en" sz="1200" u="none" cap="none" strike="noStrike">
@@ -24587,27 +22900,7 @@
                             <a:srgbClr val="1B2A3A"/>
                           </a:solidFill>
                         </a:rPr>
-                        <a:t>8</a:t>
-                      </a:r>
-                      <a:r>
-                        <a:rPr lang="en" sz="1200" u="none" cap="none" strike="noStrike">
-                          <a:solidFill>
-                            <a:srgbClr val="1B2A3A"/>
-                          </a:solidFill>
-                          <a:latin typeface="Arial"/>
-                          <a:ea typeface="Arial"/>
-                          <a:cs typeface="Arial"/>
-                          <a:sym typeface="Arial"/>
-                        </a:rPr>
-                        <a:t>.</a:t>
-                      </a:r>
-                      <a:r>
-                        <a:rPr lang="en" sz="1200">
-                          <a:solidFill>
-                            <a:srgbClr val="1B2A3A"/>
-                          </a:solidFill>
-                        </a:rPr>
-                        <a:t>22</a:t>
+                        <a:t>3.65</a:t>
                       </a:r>
                       <a:r>
                         <a:rPr lang="en" sz="1200" u="none" cap="none" strike="noStrike">
@@ -24708,27 +23001,7 @@
                             <a:srgbClr val="1B2A3A"/>
                           </a:solidFill>
                         </a:rPr>
-                        <a:t>10</a:t>
-                      </a:r>
-                      <a:r>
-                        <a:rPr lang="en" sz="1200" u="none" cap="none" strike="noStrike">
-                          <a:solidFill>
-                            <a:srgbClr val="1B2A3A"/>
-                          </a:solidFill>
-                          <a:latin typeface="Arial"/>
-                          <a:ea typeface="Arial"/>
-                          <a:cs typeface="Arial"/>
-                          <a:sym typeface="Arial"/>
-                        </a:rPr>
-                        <a:t>.</a:t>
-                      </a:r>
-                      <a:r>
-                        <a:rPr lang="en" sz="1200">
-                          <a:solidFill>
-                            <a:srgbClr val="1B2A3A"/>
-                          </a:solidFill>
-                        </a:rPr>
-                        <a:t>25</a:t>
+                        <a:t>8.33</a:t>
                       </a:r>
                       <a:r>
                         <a:rPr lang="en" sz="1200" u="none" cap="none" strike="noStrike">
@@ -24796,7 +23069,7 @@
       </p:graphicFrame>
       <p:sp>
         <p:nvSpPr>
-          <p:cNvPr id="325" name="Google Shape;325;p42"/>
+          <p:cNvPr id="317" name="Google Shape;317;p41"/>
           <p:cNvSpPr/>
           <p:nvPr/>
         </p:nvSpPr>
@@ -24847,7 +23120,7 @@
       </p:sp>
       <p:sp>
         <p:nvSpPr>
-          <p:cNvPr id="326" name="Google Shape;326;p42"/>
+          <p:cNvPr id="318" name="Google Shape;318;p41"/>
           <p:cNvSpPr/>
           <p:nvPr/>
         </p:nvSpPr>
@@ -24913,7 +23186,7 @@
       </p:sp>
       <p:sp>
         <p:nvSpPr>
-          <p:cNvPr id="327" name="Google Shape;327;p42"/>
+          <p:cNvPr id="319" name="Google Shape;319;p41"/>
           <p:cNvSpPr/>
           <p:nvPr/>
         </p:nvSpPr>
@@ -24979,7 +23252,7 @@
       </p:sp>
       <p:sp>
         <p:nvSpPr>
-          <p:cNvPr id="328" name="Google Shape;328;p42"/>
+          <p:cNvPr id="320" name="Google Shape;320;p41"/>
           <p:cNvSpPr/>
           <p:nvPr/>
         </p:nvSpPr>
@@ -25051,7 +23324,7 @@
 </p:sld>
 </file>
 
-<file path=ppt/slides/slide15.xml><?xml version="1.0" encoding="utf-8"?>
+<file path=ppt/slides/slide14.xml><?xml version="1.0" encoding="utf-8"?>
 <p:sld xmlns:a="http://schemas.openxmlformats.org/drawingml/2006/main" xmlns:r="http://schemas.openxmlformats.org/officeDocument/2006/relationships" xmlns:mc="http://schemas.openxmlformats.org/markup-compatibility/2006" xmlns:mv="urn:schemas-microsoft-com:mac:vml" xmlns:p="http://schemas.openxmlformats.org/presentationml/2006/main" xmlns:c="http://schemas.openxmlformats.org/drawingml/2006/chart" xmlns:dgm="http://schemas.openxmlformats.org/drawingml/2006/diagram" xmlns:o="urn:schemas-microsoft-com:office:office" xmlns:v="urn:schemas-microsoft-com:vml" xmlns:pvml="urn:schemas-microsoft-com:office:powerpoint" xmlns:com="http://schemas.openxmlformats.org/drawingml/2006/compatibility" xmlns:p14="http://schemas.microsoft.com/office/powerpoint/2010/main" xmlns:p15="http://schemas.microsoft.com/office/powerpoint/2012/main" xmlns:ahyp="http://schemas.microsoft.com/office/drawing/2018/hyperlinkcolor">
   <p:cSld>
     <p:bg>
@@ -25063,7 +23336,7 @@
     </p:bg>
     <p:spTree>
       <p:nvGrpSpPr>
-        <p:cNvPr id="333" name="Shape 333"/>
+        <p:cNvPr id="325" name="Shape 325"/>
         <p:cNvGrpSpPr/>
         <p:nvPr/>
       </p:nvGrpSpPr>
@@ -25077,7 +23350,7 @@
       </p:grpSpPr>
       <p:sp>
         <p:nvSpPr>
-          <p:cNvPr id="334" name="Google Shape;334;p43"/>
+          <p:cNvPr id="326" name="Google Shape;326;p42"/>
           <p:cNvSpPr txBox="1"/>
           <p:nvPr>
             <p:ph type="title"/>
@@ -25142,7 +23415,7 @@
       </p:sp>
       <p:pic>
         <p:nvPicPr>
-          <p:cNvPr descr="bt plot" id="335" name="Google Shape;335;p43"/>
+          <p:cNvPr descr="bt plot" id="327" name="Google Shape;327;p42"/>
           <p:cNvPicPr preferRelativeResize="0"/>
           <p:nvPr/>
         </p:nvPicPr>
@@ -25169,7 +23442,7 @@
       </p:pic>
       <p:sp>
         <p:nvSpPr>
-          <p:cNvPr id="336" name="Google Shape;336;p43"/>
+          <p:cNvPr id="328" name="Google Shape;328;p42"/>
           <p:cNvSpPr/>
           <p:nvPr/>
         </p:nvSpPr>
@@ -25220,7 +23493,7 @@
       </p:sp>
       <p:sp>
         <p:nvSpPr>
-          <p:cNvPr id="337" name="Google Shape;337;p43"/>
+          <p:cNvPr id="329" name="Google Shape;329;p42"/>
           <p:cNvSpPr/>
           <p:nvPr/>
         </p:nvSpPr>
@@ -25286,7 +23559,7 @@
       </p:sp>
       <p:sp>
         <p:nvSpPr>
-          <p:cNvPr id="338" name="Google Shape;338;p43"/>
+          <p:cNvPr id="330" name="Google Shape;330;p42"/>
           <p:cNvSpPr/>
           <p:nvPr/>
         </p:nvSpPr>
@@ -25352,7 +23625,7 @@
       </p:sp>
       <p:sp>
         <p:nvSpPr>
-          <p:cNvPr id="339" name="Google Shape;339;p43"/>
+          <p:cNvPr id="331" name="Google Shape;331;p42"/>
           <p:cNvSpPr/>
           <p:nvPr/>
         </p:nvSpPr>
@@ -25418,7 +23691,7 @@
       </p:sp>
       <p:sp>
         <p:nvSpPr>
-          <p:cNvPr id="340" name="Google Shape;340;p43"/>
+          <p:cNvPr id="332" name="Google Shape;332;p42"/>
           <p:cNvSpPr/>
           <p:nvPr/>
         </p:nvSpPr>
@@ -25484,7 +23757,7 @@
       </p:sp>
       <p:sp>
         <p:nvSpPr>
-          <p:cNvPr id="341" name="Google Shape;341;p43"/>
+          <p:cNvPr id="333" name="Google Shape;333;p42"/>
           <p:cNvSpPr txBox="1"/>
           <p:nvPr/>
         </p:nvSpPr>
@@ -25535,12 +23808,12 @@
 </p:sld>
 </file>
 
-<file path=ppt/slides/slide16.xml><?xml version="1.0" encoding="utf-8"?>
+<file path=ppt/slides/slide15.xml><?xml version="1.0" encoding="utf-8"?>
 <p:sld xmlns:a="http://schemas.openxmlformats.org/drawingml/2006/main" xmlns:r="http://schemas.openxmlformats.org/officeDocument/2006/relationships" xmlns:mc="http://schemas.openxmlformats.org/markup-compatibility/2006" xmlns:mv="urn:schemas-microsoft-com:mac:vml" xmlns:p="http://schemas.openxmlformats.org/presentationml/2006/main" xmlns:c="http://schemas.openxmlformats.org/drawingml/2006/chart" xmlns:dgm="http://schemas.openxmlformats.org/drawingml/2006/diagram" xmlns:o="urn:schemas-microsoft-com:office:office" xmlns:v="urn:schemas-microsoft-com:vml" xmlns:pvml="urn:schemas-microsoft-com:office:powerpoint" xmlns:com="http://schemas.openxmlformats.org/drawingml/2006/compatibility" xmlns:p14="http://schemas.microsoft.com/office/powerpoint/2010/main" xmlns:p15="http://schemas.microsoft.com/office/powerpoint/2012/main" xmlns:ahyp="http://schemas.microsoft.com/office/drawing/2018/hyperlinkcolor">
   <p:cSld>
     <p:spTree>
       <p:nvGrpSpPr>
-        <p:cNvPr id="345" name="Shape 345"/>
+        <p:cNvPr id="337" name="Shape 337"/>
         <p:cNvGrpSpPr/>
         <p:nvPr/>
       </p:nvGrpSpPr>
@@ -25554,7 +23827,7 @@
       </p:grpSpPr>
       <p:sp>
         <p:nvSpPr>
-          <p:cNvPr id="346" name="Google Shape;346;p44"/>
+          <p:cNvPr id="338" name="Google Shape;338;p43"/>
           <p:cNvSpPr txBox="1"/>
           <p:nvPr>
             <p:ph idx="4294967295" type="ctrTitle"/>
@@ -25613,7 +23886,7 @@
       </p:sp>
       <p:sp>
         <p:nvSpPr>
-          <p:cNvPr id="347" name="Google Shape;347;p44"/>
+          <p:cNvPr id="339" name="Google Shape;339;p43"/>
           <p:cNvSpPr/>
           <p:nvPr/>
         </p:nvSpPr>
@@ -25670,7 +23943,7 @@
       </p:sp>
       <p:sp>
         <p:nvSpPr>
-          <p:cNvPr id="348" name="Google Shape;348;p44"/>
+          <p:cNvPr id="340" name="Google Shape;340;p43"/>
           <p:cNvSpPr txBox="1"/>
           <p:nvPr/>
         </p:nvSpPr>
@@ -25843,7 +24116,7 @@
       </p:sp>
       <p:sp>
         <p:nvSpPr>
-          <p:cNvPr id="349" name="Google Shape;349;p44"/>
+          <p:cNvPr id="341" name="Google Shape;341;p43"/>
           <p:cNvSpPr/>
           <p:nvPr/>
         </p:nvSpPr>
@@ -25902,7 +24175,7 @@
       </p:sp>
       <p:sp>
         <p:nvSpPr>
-          <p:cNvPr id="350" name="Google Shape;350;p44"/>
+          <p:cNvPr id="342" name="Google Shape;342;p43"/>
           <p:cNvSpPr txBox="1"/>
           <p:nvPr/>
         </p:nvSpPr>
@@ -25952,7 +24225,7 @@
       </p:sp>
       <p:sp>
         <p:nvSpPr>
-          <p:cNvPr id="351" name="Google Shape;351;p44"/>
+          <p:cNvPr id="343" name="Google Shape;343;p43"/>
           <p:cNvSpPr/>
           <p:nvPr/>
         </p:nvSpPr>
@@ -26009,7 +24282,7 @@
       </p:sp>
       <p:sp>
         <p:nvSpPr>
-          <p:cNvPr id="352" name="Google Shape;352;p44"/>
+          <p:cNvPr id="344" name="Google Shape;344;p43"/>
           <p:cNvSpPr txBox="1"/>
           <p:nvPr/>
         </p:nvSpPr>
@@ -26142,7 +24415,7 @@
       </p:sp>
       <p:sp>
         <p:nvSpPr>
-          <p:cNvPr id="353" name="Google Shape;353;p44"/>
+          <p:cNvPr id="345" name="Google Shape;345;p43"/>
           <p:cNvSpPr/>
           <p:nvPr/>
         </p:nvSpPr>
@@ -26201,7 +24474,7 @@
       </p:sp>
       <p:sp>
         <p:nvSpPr>
-          <p:cNvPr id="354" name="Google Shape;354;p44"/>
+          <p:cNvPr id="346" name="Google Shape;346;p43"/>
           <p:cNvSpPr/>
           <p:nvPr/>
         </p:nvSpPr>
@@ -26260,7 +24533,7 @@
       </p:sp>
       <p:sp>
         <p:nvSpPr>
-          <p:cNvPr id="355" name="Google Shape;355;p44"/>
+          <p:cNvPr id="347" name="Google Shape;347;p43"/>
           <p:cNvSpPr/>
           <p:nvPr/>
         </p:nvSpPr>
@@ -26317,7 +24590,7 @@
       </p:sp>
       <p:sp>
         <p:nvSpPr>
-          <p:cNvPr id="356" name="Google Shape;356;p44"/>
+          <p:cNvPr id="348" name="Google Shape;348;p43"/>
           <p:cNvSpPr/>
           <p:nvPr/>
         </p:nvSpPr>
@@ -26374,7 +24647,7 @@
       </p:sp>
       <p:sp>
         <p:nvSpPr>
-          <p:cNvPr id="357" name="Google Shape;357;p44"/>
+          <p:cNvPr id="349" name="Google Shape;349;p43"/>
           <p:cNvSpPr txBox="1"/>
           <p:nvPr/>
         </p:nvSpPr>
@@ -26455,7 +24728,7 @@
       </p:sp>
       <p:sp>
         <p:nvSpPr>
-          <p:cNvPr id="358" name="Google Shape;358;p44"/>
+          <p:cNvPr id="350" name="Google Shape;350;p43"/>
           <p:cNvSpPr txBox="1"/>
           <p:nvPr/>
         </p:nvSpPr>
@@ -26585,7 +24858,7 @@
       </p:sp>
       <p:sp>
         <p:nvSpPr>
-          <p:cNvPr id="359" name="Google Shape;359;p44"/>
+          <p:cNvPr id="351" name="Google Shape;351;p43"/>
           <p:cNvSpPr txBox="1"/>
           <p:nvPr/>
         </p:nvSpPr>
@@ -26658,7 +24931,7 @@
       </p:sp>
       <p:sp>
         <p:nvSpPr>
-          <p:cNvPr id="360" name="Google Shape;360;p44"/>
+          <p:cNvPr id="352" name="Google Shape;352;p43"/>
           <p:cNvSpPr txBox="1"/>
           <p:nvPr/>
         </p:nvSpPr>
@@ -26787,12 +25060,12 @@
 </p:sld>
 </file>
 
-<file path=ppt/slides/slide17.xml><?xml version="1.0" encoding="utf-8"?>
+<file path=ppt/slides/slide16.xml><?xml version="1.0" encoding="utf-8"?>
 <p:sld xmlns:a="http://schemas.openxmlformats.org/drawingml/2006/main" xmlns:r="http://schemas.openxmlformats.org/officeDocument/2006/relationships" xmlns:mc="http://schemas.openxmlformats.org/markup-compatibility/2006" xmlns:mv="urn:schemas-microsoft-com:mac:vml" xmlns:p="http://schemas.openxmlformats.org/presentationml/2006/main" xmlns:c="http://schemas.openxmlformats.org/drawingml/2006/chart" xmlns:dgm="http://schemas.openxmlformats.org/drawingml/2006/diagram" xmlns:o="urn:schemas-microsoft-com:office:office" xmlns:v="urn:schemas-microsoft-com:vml" xmlns:pvml="urn:schemas-microsoft-com:office:powerpoint" xmlns:com="http://schemas.openxmlformats.org/drawingml/2006/compatibility" xmlns:p14="http://schemas.microsoft.com/office/powerpoint/2010/main" xmlns:p15="http://schemas.microsoft.com/office/powerpoint/2012/main" xmlns:ahyp="http://schemas.microsoft.com/office/drawing/2018/hyperlinkcolor">
   <p:cSld>
     <p:spTree>
       <p:nvGrpSpPr>
-        <p:cNvPr id="364" name="Shape 364"/>
+        <p:cNvPr id="356" name="Shape 356"/>
         <p:cNvGrpSpPr/>
         <p:nvPr/>
       </p:nvGrpSpPr>
@@ -26806,7 +25079,7 @@
       </p:grpSpPr>
       <p:sp>
         <p:nvSpPr>
-          <p:cNvPr id="365" name="Google Shape;365;p45"/>
+          <p:cNvPr id="357" name="Google Shape;357;p44"/>
           <p:cNvSpPr txBox="1"/>
           <p:nvPr>
             <p:ph idx="4294967295" type="ctrTitle"/>
@@ -26874,7 +25147,7 @@
       </p:sp>
       <p:sp>
         <p:nvSpPr>
-          <p:cNvPr id="366" name="Google Shape;366;p45"/>
+          <p:cNvPr id="358" name="Google Shape;358;p44"/>
           <p:cNvSpPr/>
           <p:nvPr/>
         </p:nvSpPr>
@@ -26931,7 +25204,7 @@
       </p:sp>
       <p:sp>
         <p:nvSpPr>
-          <p:cNvPr id="367" name="Google Shape;367;p45"/>
+          <p:cNvPr id="359" name="Google Shape;359;p44"/>
           <p:cNvSpPr txBox="1"/>
           <p:nvPr/>
         </p:nvSpPr>
@@ -26980,7 +25253,7 @@
       </p:sp>
       <p:sp>
         <p:nvSpPr>
-          <p:cNvPr id="368" name="Google Shape;368;p45"/>
+          <p:cNvPr id="360" name="Google Shape;360;p44"/>
           <p:cNvSpPr txBox="1"/>
           <p:nvPr/>
         </p:nvSpPr>
@@ -27052,7 +25325,7 @@
       </p:sp>
       <p:sp>
         <p:nvSpPr>
-          <p:cNvPr id="369" name="Google Shape;369;p45"/>
+          <p:cNvPr id="361" name="Google Shape;361;p44"/>
           <p:cNvSpPr txBox="1"/>
           <p:nvPr/>
         </p:nvSpPr>
@@ -27124,7 +25397,7 @@
       </p:sp>
       <p:sp>
         <p:nvSpPr>
-          <p:cNvPr id="370" name="Google Shape;370;p45"/>
+          <p:cNvPr id="362" name="Google Shape;362;p44"/>
           <p:cNvSpPr txBox="1"/>
           <p:nvPr/>
         </p:nvSpPr>
@@ -27196,7 +25469,7 @@
       </p:sp>
       <p:graphicFrame>
         <p:nvGraphicFramePr>
-          <p:cNvPr id="371" name="Google Shape;371;p45"/>
+          <p:cNvPr id="363" name="Google Shape;363;p44"/>
           <p:cNvGraphicFramePr/>
           <p:nvPr/>
         </p:nvGraphicFramePr>
@@ -27209,7 +25482,7 @@
             <a:tbl>
               <a:tblPr bandRow="1" firstRow="1">
                 <a:noFill/>
-                <a:tableStyleId>{29DC7F4B-8063-4A96-8E9C-9EF12943423C}</a:tableStyleId>
+                <a:tableStyleId>{49EA4D2D-3105-4BA8-8EEB-5E88ECBEB799}</a:tableStyleId>
               </a:tblPr>
               <a:tblGrid>
                 <a:gridCol w="3789000"/>
@@ -27464,7 +25737,7 @@
       </p:graphicFrame>
       <p:sp>
         <p:nvSpPr>
-          <p:cNvPr id="372" name="Google Shape;372;p45"/>
+          <p:cNvPr id="364" name="Google Shape;364;p44"/>
           <p:cNvSpPr txBox="1"/>
           <p:nvPr/>
         </p:nvSpPr>
@@ -27520,12 +25793,12 @@
 </p:sld>
 </file>
 
-<file path=ppt/slides/slide18.xml><?xml version="1.0" encoding="utf-8"?>
+<file path=ppt/slides/slide17.xml><?xml version="1.0" encoding="utf-8"?>
 <p:sld xmlns:a="http://schemas.openxmlformats.org/drawingml/2006/main" xmlns:r="http://schemas.openxmlformats.org/officeDocument/2006/relationships" xmlns:mc="http://schemas.openxmlformats.org/markup-compatibility/2006" xmlns:mv="urn:schemas-microsoft-com:mac:vml" xmlns:p="http://schemas.openxmlformats.org/presentationml/2006/main" xmlns:c="http://schemas.openxmlformats.org/drawingml/2006/chart" xmlns:dgm="http://schemas.openxmlformats.org/drawingml/2006/diagram" xmlns:o="urn:schemas-microsoft-com:office:office" xmlns:v="urn:schemas-microsoft-com:vml" xmlns:pvml="urn:schemas-microsoft-com:office:powerpoint" xmlns:com="http://schemas.openxmlformats.org/drawingml/2006/compatibility" xmlns:p14="http://schemas.microsoft.com/office/powerpoint/2010/main" xmlns:p15="http://schemas.microsoft.com/office/powerpoint/2012/main" xmlns:ahyp="http://schemas.microsoft.com/office/drawing/2018/hyperlinkcolor">
   <p:cSld>
     <p:spTree>
       <p:nvGrpSpPr>
-        <p:cNvPr id="376" name="Shape 376"/>
+        <p:cNvPr id="368" name="Shape 368"/>
         <p:cNvGrpSpPr/>
         <p:nvPr/>
       </p:nvGrpSpPr>
@@ -27539,7 +25812,7 @@
       </p:grpSpPr>
       <p:sp>
         <p:nvSpPr>
-          <p:cNvPr id="377" name="Google Shape;377;p46"/>
+          <p:cNvPr id="369" name="Google Shape;369;p45"/>
           <p:cNvSpPr txBox="1"/>
           <p:nvPr>
             <p:ph idx="1" type="subTitle"/>
@@ -27691,7 +25964,7 @@
       </p:sp>
       <p:sp>
         <p:nvSpPr>
-          <p:cNvPr id="378" name="Google Shape;378;p46"/>
+          <p:cNvPr id="370" name="Google Shape;370;p45"/>
           <p:cNvSpPr txBox="1"/>
           <p:nvPr/>
         </p:nvSpPr>
@@ -27771,7 +26044,7 @@
       </p:sp>
       <p:sp>
         <p:nvSpPr>
-          <p:cNvPr id="379" name="Google Shape;379;p46"/>
+          <p:cNvPr id="371" name="Google Shape;371;p45"/>
           <p:cNvSpPr txBox="1"/>
           <p:nvPr/>
         </p:nvSpPr>
@@ -27851,7 +26124,7 @@
       </p:sp>
       <p:sp>
         <p:nvSpPr>
-          <p:cNvPr id="380" name="Google Shape;380;p46"/>
+          <p:cNvPr id="372" name="Google Shape;372;p45"/>
           <p:cNvSpPr txBox="1"/>
           <p:nvPr/>
         </p:nvSpPr>
@@ -27950,7 +26223,7 @@
       </p:sp>
       <p:sp>
         <p:nvSpPr>
-          <p:cNvPr id="381" name="Google Shape;381;p46"/>
+          <p:cNvPr id="373" name="Google Shape;373;p45"/>
           <p:cNvSpPr txBox="1"/>
           <p:nvPr/>
         </p:nvSpPr>
@@ -28049,7 +26322,7 @@
       </p:sp>
       <p:pic>
         <p:nvPicPr>
-          <p:cNvPr id="382" name="Google Shape;382;p46" title="WhatsApp Image 2026-10-24 at 20.25.17.jpeg"/>
+          <p:cNvPr id="374" name="Google Shape;374;p45" title="WhatsApp Image 2026-10-24 at 20.25.17.jpeg"/>
           <p:cNvPicPr preferRelativeResize="0"/>
           <p:nvPr/>
         </p:nvPicPr>
@@ -28077,7 +26350,7 @@
       </p:pic>
       <p:sp>
         <p:nvSpPr>
-          <p:cNvPr id="383" name="Google Shape;383;p46"/>
+          <p:cNvPr id="375" name="Google Shape;375;p45"/>
           <p:cNvSpPr txBox="1"/>
           <p:nvPr/>
         </p:nvSpPr>
@@ -28201,12 +26474,12 @@
 </p:sld>
 </file>
 
-<file path=ppt/slides/slide19.xml><?xml version="1.0" encoding="utf-8"?>
+<file path=ppt/slides/slide18.xml><?xml version="1.0" encoding="utf-8"?>
 <p:sld xmlns:a="http://schemas.openxmlformats.org/drawingml/2006/main" xmlns:r="http://schemas.openxmlformats.org/officeDocument/2006/relationships" xmlns:mc="http://schemas.openxmlformats.org/markup-compatibility/2006" xmlns:mv="urn:schemas-microsoft-com:mac:vml" xmlns:p="http://schemas.openxmlformats.org/presentationml/2006/main" xmlns:c="http://schemas.openxmlformats.org/drawingml/2006/chart" xmlns:dgm="http://schemas.openxmlformats.org/drawingml/2006/diagram" xmlns:o="urn:schemas-microsoft-com:office:office" xmlns:v="urn:schemas-microsoft-com:vml" xmlns:pvml="urn:schemas-microsoft-com:office:powerpoint" xmlns:com="http://schemas.openxmlformats.org/drawingml/2006/compatibility" xmlns:p14="http://schemas.microsoft.com/office/powerpoint/2010/main" xmlns:p15="http://schemas.microsoft.com/office/powerpoint/2012/main" xmlns:ahyp="http://schemas.microsoft.com/office/drawing/2018/hyperlinkcolor">
   <p:cSld>
     <p:spTree>
       <p:nvGrpSpPr>
-        <p:cNvPr id="387" name="Shape 387"/>
+        <p:cNvPr id="379" name="Shape 379"/>
         <p:cNvGrpSpPr/>
         <p:nvPr/>
       </p:nvGrpSpPr>
@@ -28220,7 +26493,7 @@
       </p:grpSpPr>
       <p:sp>
         <p:nvSpPr>
-          <p:cNvPr id="388" name="Google Shape;388;p47"/>
+          <p:cNvPr id="380" name="Google Shape;380;p46"/>
           <p:cNvSpPr txBox="1"/>
           <p:nvPr>
             <p:ph type="title"/>
@@ -28364,7 +26637,7 @@
       </p:sp>
       <p:sp>
         <p:nvSpPr>
-          <p:cNvPr id="389" name="Google Shape;389;p47"/>
+          <p:cNvPr id="381" name="Google Shape;381;p46"/>
           <p:cNvSpPr txBox="1"/>
           <p:nvPr/>
         </p:nvSpPr>
@@ -28489,7 +26762,7 @@
       </p:sp>
       <p:pic>
         <p:nvPicPr>
-          <p:cNvPr id="390" name="Google Shape;390;p47" title="WhatsApp Image 2026-10-24 at 20.25.17 (1).jpeg"/>
+          <p:cNvPr id="382" name="Google Shape;382;p46" title="WhatsApp Image 2026-10-24 at 20.25.17 (1).jpeg"/>
           <p:cNvPicPr preferRelativeResize="0"/>
           <p:nvPr/>
         </p:nvPicPr>
@@ -28515,6 +26788,255 @@
           </a:ln>
         </p:spPr>
       </p:pic>
+    </p:spTree>
+  </p:cSld>
+  <p:clrMapOvr>
+    <a:masterClrMapping/>
+  </p:clrMapOvr>
+</p:sld>
+</file>
+
+<file path=ppt/slides/slide19.xml><?xml version="1.0" encoding="utf-8"?>
+<p:sld xmlns:a="http://schemas.openxmlformats.org/drawingml/2006/main" xmlns:r="http://schemas.openxmlformats.org/officeDocument/2006/relationships" xmlns:mc="http://schemas.openxmlformats.org/markup-compatibility/2006" xmlns:mv="urn:schemas-microsoft-com:mac:vml" xmlns:p="http://schemas.openxmlformats.org/presentationml/2006/main" xmlns:c="http://schemas.openxmlformats.org/drawingml/2006/chart" xmlns:dgm="http://schemas.openxmlformats.org/drawingml/2006/diagram" xmlns:o="urn:schemas-microsoft-com:office:office" xmlns:v="urn:schemas-microsoft-com:vml" xmlns:pvml="urn:schemas-microsoft-com:office:powerpoint" xmlns:com="http://schemas.openxmlformats.org/drawingml/2006/compatibility" xmlns:p14="http://schemas.microsoft.com/office/powerpoint/2010/main" xmlns:p15="http://schemas.microsoft.com/office/powerpoint/2012/main" xmlns:ahyp="http://schemas.microsoft.com/office/drawing/2018/hyperlinkcolor">
+  <p:cSld>
+    <p:spTree>
+      <p:nvGrpSpPr>
+        <p:cNvPr id="386" name="Shape 386"/>
+        <p:cNvGrpSpPr/>
+        <p:nvPr/>
+      </p:nvGrpSpPr>
+      <p:grpSpPr>
+        <a:xfrm>
+          <a:off x="0" y="0"/>
+          <a:ext cx="0" cy="0"/>
+          <a:chOff x="0" y="0"/>
+          <a:chExt cx="0" cy="0"/>
+        </a:xfrm>
+      </p:grpSpPr>
+      <p:sp>
+        <p:nvSpPr>
+          <p:cNvPr id="387" name="Google Shape;387;p47"/>
+          <p:cNvSpPr txBox="1"/>
+          <p:nvPr>
+            <p:ph type="title"/>
+          </p:nvPr>
+        </p:nvSpPr>
+        <p:spPr>
+          <a:xfrm>
+            <a:off x="152400" y="155550"/>
+            <a:ext cx="8839200" cy="558300"/>
+          </a:xfrm>
+          <a:prstGeom prst="rect">
+            <a:avLst/>
+          </a:prstGeom>
+        </p:spPr>
+        <p:txBody>
+          <a:bodyPr anchorCtr="0" anchor="t" bIns="91425" lIns="91425" spcFirstLastPara="1" rIns="91425" wrap="square" tIns="91425">
+            <a:normAutofit fontScale="90000"/>
+          </a:bodyPr>
+          <a:lstStyle/>
+          <a:p>
+            <a:pPr indent="0" lvl="0" marL="0" rtl="0" algn="l">
+              <a:lnSpc>
+                <a:spcPct val="115000"/>
+              </a:lnSpc>
+              <a:spcBef>
+                <a:spcPts val="0"/>
+              </a:spcBef>
+              <a:spcAft>
+                <a:spcPts val="0"/>
+              </a:spcAft>
+              <a:buClr>
+                <a:schemeClr val="dk1"/>
+              </a:buClr>
+              <a:buSzPct val="30137"/>
+              <a:buFont typeface="Arial"/>
+              <a:buNone/>
+            </a:pPr>
+            <a:r>
+              <a:rPr b="1" lang="en" sz="3650">
+                <a:solidFill>
+                  <a:srgbClr val="1F3044"/>
+                </a:solidFill>
+              </a:rPr>
+              <a:t>     Residuals vs. Predicted Painting Costs</a:t>
+            </a:r>
+            <a:endParaRPr b="1" sz="3650">
+              <a:solidFill>
+                <a:srgbClr val="1F3044"/>
+              </a:solidFill>
+            </a:endParaRPr>
+          </a:p>
+          <a:p>
+            <a:pPr indent="0" lvl="0" marL="0" rtl="0" algn="l">
+              <a:lnSpc>
+                <a:spcPct val="115000"/>
+              </a:lnSpc>
+              <a:spcBef>
+                <a:spcPts val="0"/>
+              </a:spcBef>
+              <a:spcAft>
+                <a:spcPts val="0"/>
+              </a:spcAft>
+              <a:buClr>
+                <a:schemeClr val="dk1"/>
+              </a:buClr>
+              <a:buSzPct val="100000"/>
+              <a:buFont typeface="Arial"/>
+              <a:buNone/>
+            </a:pPr>
+            <a:r>
+              <a:t/>
+            </a:r>
+            <a:endParaRPr sz="1100"/>
+          </a:p>
+        </p:txBody>
+      </p:sp>
+      <p:pic>
+        <p:nvPicPr>
+          <p:cNvPr id="388" name="Google Shape;388;p47" title="WhatsApp Image 2026-10-24 at 20.25.18.jpeg"/>
+          <p:cNvPicPr preferRelativeResize="0"/>
+          <p:nvPr/>
+        </p:nvPicPr>
+        <p:blipFill>
+          <a:blip r:embed="rId3">
+            <a:alphaModFix/>
+          </a:blip>
+          <a:stretch>
+            <a:fillRect/>
+          </a:stretch>
+        </p:blipFill>
+        <p:spPr>
+          <a:xfrm>
+            <a:off x="152400" y="849375"/>
+            <a:ext cx="8839200" cy="2856166"/>
+          </a:xfrm>
+          <a:prstGeom prst="rect">
+            <a:avLst/>
+          </a:prstGeom>
+          <a:noFill/>
+          <a:ln>
+            <a:noFill/>
+          </a:ln>
+        </p:spPr>
+      </p:pic>
+      <p:sp>
+        <p:nvSpPr>
+          <p:cNvPr id="389" name="Google Shape;389;p47"/>
+          <p:cNvSpPr txBox="1"/>
+          <p:nvPr/>
+        </p:nvSpPr>
+        <p:spPr>
+          <a:xfrm>
+            <a:off x="570175" y="4098175"/>
+            <a:ext cx="8327100" cy="893100"/>
+          </a:xfrm>
+          <a:prstGeom prst="rect">
+            <a:avLst/>
+          </a:prstGeom>
+          <a:noFill/>
+          <a:ln>
+            <a:noFill/>
+          </a:ln>
+        </p:spPr>
+        <p:txBody>
+          <a:bodyPr anchorCtr="0" anchor="t" bIns="91425" lIns="91425" spcFirstLastPara="1" rIns="91425" wrap="square" tIns="91425">
+            <a:spAutoFit/>
+          </a:bodyPr>
+          <a:lstStyle/>
+          <a:p>
+            <a:pPr indent="0" lvl="0" marL="0" rtl="0" algn="ctr">
+              <a:lnSpc>
+                <a:spcPct val="115000"/>
+              </a:lnSpc>
+              <a:spcBef>
+                <a:spcPts val="0"/>
+              </a:spcBef>
+              <a:spcAft>
+                <a:spcPts val="0"/>
+              </a:spcAft>
+              <a:buClr>
+                <a:schemeClr val="dk1"/>
+              </a:buClr>
+              <a:buSzPts val="1100"/>
+              <a:buFont typeface="Arial"/>
+              <a:buNone/>
+            </a:pPr>
+            <a:r>
+              <a:rPr lang="en" sz="1000">
+                <a:solidFill>
+                  <a:srgbClr val="1F3044"/>
+                </a:solidFill>
+              </a:rPr>
+              <a:t>Residual = actual cost − predicted cost. The dashed horizontal line marks zero error; residuals around zero indicate closer predictions.</a:t>
+            </a:r>
+            <a:endParaRPr sz="1000">
+              <a:solidFill>
+                <a:srgbClr val="1F3044"/>
+              </a:solidFill>
+            </a:endParaRPr>
+          </a:p>
+          <a:p>
+            <a:pPr indent="0" lvl="0" marL="0" rtl="0" algn="l">
+              <a:lnSpc>
+                <a:spcPct val="115000"/>
+              </a:lnSpc>
+              <a:spcBef>
+                <a:spcPts val="200"/>
+              </a:spcBef>
+              <a:spcAft>
+                <a:spcPts val="0"/>
+              </a:spcAft>
+              <a:buClr>
+                <a:schemeClr val="dk1"/>
+              </a:buClr>
+              <a:buSzPts val="1100"/>
+              <a:buFont typeface="Arial"/>
+              <a:buNone/>
+            </a:pPr>
+            <a:r>
+              <a:rPr lang="en" sz="950">
+                <a:solidFill>
+                  <a:srgbClr val="5A6572"/>
+                </a:solidFill>
+              </a:rPr>
+              <a:t>    The spread grows for higher predicted costs, and Decision Tree shows several larger residuals. This suggests high-cost cases are harder to    estimate consistently</a:t>
+            </a:r>
+            <a:endParaRPr sz="950">
+              <a:solidFill>
+                <a:srgbClr val="5A6572"/>
+              </a:solidFill>
+            </a:endParaRPr>
+          </a:p>
+          <a:p>
+            <a:pPr indent="0" lvl="0" marL="0" rtl="0" algn="l">
+              <a:lnSpc>
+                <a:spcPct val="115000"/>
+              </a:lnSpc>
+              <a:spcBef>
+                <a:spcPts val="0"/>
+              </a:spcBef>
+              <a:spcAft>
+                <a:spcPts val="0"/>
+              </a:spcAft>
+              <a:buClr>
+                <a:schemeClr val="dk1"/>
+              </a:buClr>
+              <a:buSzPts val="1100"/>
+              <a:buFont typeface="Arial"/>
+              <a:buNone/>
+            </a:pPr>
+            <a:r>
+              <a:t/>
+            </a:r>
+            <a:endParaRPr sz="1100">
+              <a:solidFill>
+                <a:schemeClr val="dk1"/>
+              </a:solidFill>
+            </a:endParaRPr>
+          </a:p>
+        </p:txBody>
+      </p:sp>
     </p:spTree>
   </p:cSld>
   <p:clrMapOvr>
@@ -28632,7 +27154,7 @@
             <a:tbl>
               <a:tblPr>
                 <a:noFill/>
-                <a:tableStyleId>{DEF2F348-C15B-4A91-8320-6C4DE4650724}</a:tableStyleId>
+                <a:tableStyleId>{6374A41A-FDBA-4CF8-BAC2-0CB622B811FC}</a:tableStyleId>
               </a:tblPr>
               <a:tblGrid>
                 <a:gridCol w="1964700"/>
@@ -29748,7 +28270,7 @@
   <p:cSld>
     <p:spTree>
       <p:nvGrpSpPr>
-        <p:cNvPr id="394" name="Shape 394"/>
+        <p:cNvPr id="393" name="Shape 393"/>
         <p:cNvGrpSpPr/>
         <p:nvPr/>
       </p:nvGrpSpPr>
@@ -29762,256 +28284,7 @@
       </p:grpSpPr>
       <p:sp>
         <p:nvSpPr>
-          <p:cNvPr id="395" name="Google Shape;395;p48"/>
-          <p:cNvSpPr txBox="1"/>
-          <p:nvPr>
-            <p:ph type="title"/>
-          </p:nvPr>
-        </p:nvSpPr>
-        <p:spPr>
-          <a:xfrm>
-            <a:off x="152400" y="155550"/>
-            <a:ext cx="8839200" cy="558300"/>
-          </a:xfrm>
-          <a:prstGeom prst="rect">
-            <a:avLst/>
-          </a:prstGeom>
-        </p:spPr>
-        <p:txBody>
-          <a:bodyPr anchorCtr="0" anchor="t" bIns="91425" lIns="91425" spcFirstLastPara="1" rIns="91425" wrap="square" tIns="91425">
-            <a:normAutofit fontScale="90000"/>
-          </a:bodyPr>
-          <a:lstStyle/>
-          <a:p>
-            <a:pPr indent="0" lvl="0" marL="0" rtl="0" algn="l">
-              <a:lnSpc>
-                <a:spcPct val="115000"/>
-              </a:lnSpc>
-              <a:spcBef>
-                <a:spcPts val="0"/>
-              </a:spcBef>
-              <a:spcAft>
-                <a:spcPts val="0"/>
-              </a:spcAft>
-              <a:buClr>
-                <a:schemeClr val="dk1"/>
-              </a:buClr>
-              <a:buSzPct val="30137"/>
-              <a:buFont typeface="Arial"/>
-              <a:buNone/>
-            </a:pPr>
-            <a:r>
-              <a:rPr b="1" lang="en" sz="3650">
-                <a:solidFill>
-                  <a:srgbClr val="1F3044"/>
-                </a:solidFill>
-              </a:rPr>
-              <a:t>     Residuals vs. Predicted Painting Costs</a:t>
-            </a:r>
-            <a:endParaRPr b="1" sz="3650">
-              <a:solidFill>
-                <a:srgbClr val="1F3044"/>
-              </a:solidFill>
-            </a:endParaRPr>
-          </a:p>
-          <a:p>
-            <a:pPr indent="0" lvl="0" marL="0" rtl="0" algn="l">
-              <a:lnSpc>
-                <a:spcPct val="115000"/>
-              </a:lnSpc>
-              <a:spcBef>
-                <a:spcPts val="0"/>
-              </a:spcBef>
-              <a:spcAft>
-                <a:spcPts val="0"/>
-              </a:spcAft>
-              <a:buClr>
-                <a:schemeClr val="dk1"/>
-              </a:buClr>
-              <a:buSzPct val="100000"/>
-              <a:buFont typeface="Arial"/>
-              <a:buNone/>
-            </a:pPr>
-            <a:r>
-              <a:t/>
-            </a:r>
-            <a:endParaRPr sz="1100"/>
-          </a:p>
-        </p:txBody>
-      </p:sp>
-      <p:pic>
-        <p:nvPicPr>
-          <p:cNvPr id="396" name="Google Shape;396;p48" title="WhatsApp Image 2026-10-24 at 20.25.18.jpeg"/>
-          <p:cNvPicPr preferRelativeResize="0"/>
-          <p:nvPr/>
-        </p:nvPicPr>
-        <p:blipFill>
-          <a:blip r:embed="rId3">
-            <a:alphaModFix/>
-          </a:blip>
-          <a:stretch>
-            <a:fillRect/>
-          </a:stretch>
-        </p:blipFill>
-        <p:spPr>
-          <a:xfrm>
-            <a:off x="152400" y="849375"/>
-            <a:ext cx="8839200" cy="2856166"/>
-          </a:xfrm>
-          <a:prstGeom prst="rect">
-            <a:avLst/>
-          </a:prstGeom>
-          <a:noFill/>
-          <a:ln>
-            <a:noFill/>
-          </a:ln>
-        </p:spPr>
-      </p:pic>
-      <p:sp>
-        <p:nvSpPr>
-          <p:cNvPr id="397" name="Google Shape;397;p48"/>
-          <p:cNvSpPr txBox="1"/>
-          <p:nvPr/>
-        </p:nvSpPr>
-        <p:spPr>
-          <a:xfrm>
-            <a:off x="570175" y="4098175"/>
-            <a:ext cx="8327100" cy="893100"/>
-          </a:xfrm>
-          <a:prstGeom prst="rect">
-            <a:avLst/>
-          </a:prstGeom>
-          <a:noFill/>
-          <a:ln>
-            <a:noFill/>
-          </a:ln>
-        </p:spPr>
-        <p:txBody>
-          <a:bodyPr anchorCtr="0" anchor="t" bIns="91425" lIns="91425" spcFirstLastPara="1" rIns="91425" wrap="square" tIns="91425">
-            <a:spAutoFit/>
-          </a:bodyPr>
-          <a:lstStyle/>
-          <a:p>
-            <a:pPr indent="0" lvl="0" marL="0" rtl="0" algn="ctr">
-              <a:lnSpc>
-                <a:spcPct val="115000"/>
-              </a:lnSpc>
-              <a:spcBef>
-                <a:spcPts val="0"/>
-              </a:spcBef>
-              <a:spcAft>
-                <a:spcPts val="0"/>
-              </a:spcAft>
-              <a:buClr>
-                <a:schemeClr val="dk1"/>
-              </a:buClr>
-              <a:buSzPts val="1100"/>
-              <a:buFont typeface="Arial"/>
-              <a:buNone/>
-            </a:pPr>
-            <a:r>
-              <a:rPr lang="en" sz="1000">
-                <a:solidFill>
-                  <a:srgbClr val="1F3044"/>
-                </a:solidFill>
-              </a:rPr>
-              <a:t>Residual = actual cost − predicted cost. The dashed horizontal line marks zero error; residuals around zero indicate closer predictions.</a:t>
-            </a:r>
-            <a:endParaRPr sz="1000">
-              <a:solidFill>
-                <a:srgbClr val="1F3044"/>
-              </a:solidFill>
-            </a:endParaRPr>
-          </a:p>
-          <a:p>
-            <a:pPr indent="0" lvl="0" marL="0" rtl="0" algn="l">
-              <a:lnSpc>
-                <a:spcPct val="115000"/>
-              </a:lnSpc>
-              <a:spcBef>
-                <a:spcPts val="200"/>
-              </a:spcBef>
-              <a:spcAft>
-                <a:spcPts val="0"/>
-              </a:spcAft>
-              <a:buClr>
-                <a:schemeClr val="dk1"/>
-              </a:buClr>
-              <a:buSzPts val="1100"/>
-              <a:buFont typeface="Arial"/>
-              <a:buNone/>
-            </a:pPr>
-            <a:r>
-              <a:rPr lang="en" sz="950">
-                <a:solidFill>
-                  <a:srgbClr val="5A6572"/>
-                </a:solidFill>
-              </a:rPr>
-              <a:t>    The spread grows for higher predicted costs, and Decision Tree shows several larger residuals. This suggests high-cost cases are harder to    estimate consistently</a:t>
-            </a:r>
-            <a:endParaRPr sz="950">
-              <a:solidFill>
-                <a:srgbClr val="5A6572"/>
-              </a:solidFill>
-            </a:endParaRPr>
-          </a:p>
-          <a:p>
-            <a:pPr indent="0" lvl="0" marL="0" rtl="0" algn="l">
-              <a:lnSpc>
-                <a:spcPct val="115000"/>
-              </a:lnSpc>
-              <a:spcBef>
-                <a:spcPts val="0"/>
-              </a:spcBef>
-              <a:spcAft>
-                <a:spcPts val="0"/>
-              </a:spcAft>
-              <a:buClr>
-                <a:schemeClr val="dk1"/>
-              </a:buClr>
-              <a:buSzPts val="1100"/>
-              <a:buFont typeface="Arial"/>
-              <a:buNone/>
-            </a:pPr>
-            <a:r>
-              <a:t/>
-            </a:r>
-            <a:endParaRPr sz="1100">
-              <a:solidFill>
-                <a:schemeClr val="dk1"/>
-              </a:solidFill>
-            </a:endParaRPr>
-          </a:p>
-        </p:txBody>
-      </p:sp>
-    </p:spTree>
-  </p:cSld>
-  <p:clrMapOvr>
-    <a:masterClrMapping/>
-  </p:clrMapOvr>
-</p:sld>
-</file>
-
-<file path=ppt/slides/slide21.xml><?xml version="1.0" encoding="utf-8"?>
-<p:sld xmlns:a="http://schemas.openxmlformats.org/drawingml/2006/main" xmlns:r="http://schemas.openxmlformats.org/officeDocument/2006/relationships" xmlns:mc="http://schemas.openxmlformats.org/markup-compatibility/2006" xmlns:mv="urn:schemas-microsoft-com:mac:vml" xmlns:p="http://schemas.openxmlformats.org/presentationml/2006/main" xmlns:c="http://schemas.openxmlformats.org/drawingml/2006/chart" xmlns:dgm="http://schemas.openxmlformats.org/drawingml/2006/diagram" xmlns:o="urn:schemas-microsoft-com:office:office" xmlns:v="urn:schemas-microsoft-com:vml" xmlns:pvml="urn:schemas-microsoft-com:office:powerpoint" xmlns:com="http://schemas.openxmlformats.org/drawingml/2006/compatibility" xmlns:p14="http://schemas.microsoft.com/office/powerpoint/2010/main" xmlns:p15="http://schemas.microsoft.com/office/powerpoint/2012/main" xmlns:ahyp="http://schemas.microsoft.com/office/drawing/2018/hyperlinkcolor">
-  <p:cSld>
-    <p:spTree>
-      <p:nvGrpSpPr>
-        <p:cNvPr id="401" name="Shape 401"/>
-        <p:cNvGrpSpPr/>
-        <p:nvPr/>
-      </p:nvGrpSpPr>
-      <p:grpSpPr>
-        <a:xfrm>
-          <a:off x="0" y="0"/>
-          <a:ext cx="0" cy="0"/>
-          <a:chOff x="0" y="0"/>
-          <a:chExt cx="0" cy="0"/>
-        </a:xfrm>
-      </p:grpSpPr>
-      <p:sp>
-        <p:nvSpPr>
-          <p:cNvPr id="402" name="Google Shape;402;p49"/>
+          <p:cNvPr id="394" name="Google Shape;394;p48"/>
           <p:cNvSpPr txBox="1"/>
           <p:nvPr>
             <p:ph type="title"/>
@@ -30155,7 +28428,7 @@
       </p:sp>
       <p:pic>
         <p:nvPicPr>
-          <p:cNvPr id="403" name="Google Shape;403;p49" title="WhatsApp Image 2026-10-24 at 20.25.18 (1).jpeg"/>
+          <p:cNvPr id="395" name="Google Shape;395;p48" title="WhatsApp Image 2026-10-24 at 20.25.18 (1).jpeg"/>
           <p:cNvPicPr preferRelativeResize="0"/>
           <p:nvPr/>
         </p:nvPicPr>
@@ -30183,7 +28456,7 @@
       </p:pic>
       <p:sp>
         <p:nvSpPr>
-          <p:cNvPr id="404" name="Google Shape;404;p49"/>
+          <p:cNvPr id="396" name="Google Shape;396;p48"/>
           <p:cNvSpPr txBox="1"/>
           <p:nvPr/>
         </p:nvSpPr>
@@ -30306,12 +28579,12 @@
 </p:sld>
 </file>
 
-<file path=ppt/slides/slide22.xml><?xml version="1.0" encoding="utf-8"?>
+<file path=ppt/slides/slide21.xml><?xml version="1.0" encoding="utf-8"?>
 <p:sld xmlns:a="http://schemas.openxmlformats.org/drawingml/2006/main" xmlns:r="http://schemas.openxmlformats.org/officeDocument/2006/relationships" xmlns:mc="http://schemas.openxmlformats.org/markup-compatibility/2006" xmlns:mv="urn:schemas-microsoft-com:mac:vml" xmlns:p="http://schemas.openxmlformats.org/presentationml/2006/main" xmlns:c="http://schemas.openxmlformats.org/drawingml/2006/chart" xmlns:dgm="http://schemas.openxmlformats.org/drawingml/2006/diagram" xmlns:o="urn:schemas-microsoft-com:office:office" xmlns:v="urn:schemas-microsoft-com:vml" xmlns:pvml="urn:schemas-microsoft-com:office:powerpoint" xmlns:com="http://schemas.openxmlformats.org/drawingml/2006/compatibility" xmlns:p14="http://schemas.microsoft.com/office/powerpoint/2010/main" xmlns:p15="http://schemas.microsoft.com/office/powerpoint/2012/main" xmlns:ahyp="http://schemas.microsoft.com/office/drawing/2018/hyperlinkcolor">
   <p:cSld>
     <p:spTree>
       <p:nvGrpSpPr>
-        <p:cNvPr id="408" name="Shape 408"/>
+        <p:cNvPr id="400" name="Shape 400"/>
         <p:cNvGrpSpPr/>
         <p:nvPr/>
       </p:nvGrpSpPr>
@@ -30325,7 +28598,7 @@
       </p:grpSpPr>
       <p:sp>
         <p:nvSpPr>
-          <p:cNvPr id="409" name="Google Shape;409;p50"/>
+          <p:cNvPr id="401" name="Google Shape;401;p49"/>
           <p:cNvSpPr txBox="1"/>
           <p:nvPr>
             <p:ph type="title"/>
@@ -30485,7 +28758,7 @@
       </p:sp>
       <p:sp>
         <p:nvSpPr>
-          <p:cNvPr id="410" name="Google Shape;410;p50"/>
+          <p:cNvPr id="402" name="Google Shape;402;p49"/>
           <p:cNvSpPr txBox="1"/>
           <p:nvPr/>
         </p:nvSpPr>
@@ -30575,7 +28848,7 @@
       </p:sp>
       <p:pic>
         <p:nvPicPr>
-          <p:cNvPr id="411" name="Google Shape;411;p50" title="R2_Score.jpeg"/>
+          <p:cNvPr id="403" name="Google Shape;403;p49" title="R2_Score.jpeg"/>
           <p:cNvPicPr preferRelativeResize="0"/>
           <p:nvPr/>
         </p:nvPicPr>
@@ -30609,12 +28882,12 @@
 </p:sld>
 </file>
 
-<file path=ppt/slides/slide23.xml><?xml version="1.0" encoding="utf-8"?>
+<file path=ppt/slides/slide22.xml><?xml version="1.0" encoding="utf-8"?>
 <p:sld xmlns:a="http://schemas.openxmlformats.org/drawingml/2006/main" xmlns:r="http://schemas.openxmlformats.org/officeDocument/2006/relationships" xmlns:mc="http://schemas.openxmlformats.org/markup-compatibility/2006" xmlns:mv="urn:schemas-microsoft-com:mac:vml" xmlns:p="http://schemas.openxmlformats.org/presentationml/2006/main" xmlns:c="http://schemas.openxmlformats.org/drawingml/2006/chart" xmlns:dgm="http://schemas.openxmlformats.org/drawingml/2006/diagram" xmlns:o="urn:schemas-microsoft-com:office:office" xmlns:v="urn:schemas-microsoft-com:vml" xmlns:pvml="urn:schemas-microsoft-com:office:powerpoint" xmlns:com="http://schemas.openxmlformats.org/drawingml/2006/compatibility" xmlns:p14="http://schemas.microsoft.com/office/powerpoint/2010/main" xmlns:p15="http://schemas.microsoft.com/office/powerpoint/2012/main" xmlns:ahyp="http://schemas.microsoft.com/office/drawing/2018/hyperlinkcolor">
   <p:cSld>
     <p:spTree>
       <p:nvGrpSpPr>
-        <p:cNvPr id="416" name="Shape 416"/>
+        <p:cNvPr id="408" name="Shape 408"/>
         <p:cNvGrpSpPr/>
         <p:nvPr/>
       </p:nvGrpSpPr>
@@ -30628,7 +28901,7 @@
       </p:grpSpPr>
       <p:sp>
         <p:nvSpPr>
-          <p:cNvPr id="417" name="Google Shape;417;p51"/>
+          <p:cNvPr id="409" name="Google Shape;409;p50"/>
           <p:cNvSpPr/>
           <p:nvPr/>
         </p:nvSpPr>
@@ -30678,7 +28951,7 @@
       </p:sp>
       <p:cxnSp>
         <p:nvCxnSpPr>
-          <p:cNvPr id="418" name="Google Shape;418;p51"/>
+          <p:cNvPr id="410" name="Google Shape;410;p50"/>
           <p:cNvCxnSpPr/>
           <p:nvPr/>
         </p:nvCxnSpPr>
@@ -30704,7 +28977,7 @@
       </p:cxnSp>
       <p:sp>
         <p:nvSpPr>
-          <p:cNvPr id="419" name="Google Shape;419;p51"/>
+          <p:cNvPr id="411" name="Google Shape;411;p50"/>
           <p:cNvSpPr/>
           <p:nvPr/>
         </p:nvSpPr>
@@ -30761,7 +29034,7 @@
       </p:sp>
       <p:sp>
         <p:nvSpPr>
-          <p:cNvPr id="420" name="Google Shape;420;p51"/>
+          <p:cNvPr id="412" name="Google Shape;412;p50"/>
           <p:cNvSpPr txBox="1"/>
           <p:nvPr/>
         </p:nvSpPr>
@@ -30811,7 +29084,7 @@
       </p:sp>
       <p:cxnSp>
         <p:nvCxnSpPr>
-          <p:cNvPr id="421" name="Google Shape;421;p51"/>
+          <p:cNvPr id="413" name="Google Shape;413;p50"/>
           <p:cNvCxnSpPr/>
           <p:nvPr/>
         </p:nvCxnSpPr>
@@ -30837,7 +29110,7 @@
       </p:cxnSp>
       <p:sp>
         <p:nvSpPr>
-          <p:cNvPr id="422" name="Google Shape;422;p51"/>
+          <p:cNvPr id="414" name="Google Shape;414;p50"/>
           <p:cNvSpPr txBox="1"/>
           <p:nvPr/>
         </p:nvSpPr>
@@ -31015,7 +29288,7 @@
       </p:sp>
       <p:sp>
         <p:nvSpPr>
-          <p:cNvPr id="423" name="Google Shape;423;p51"/>
+          <p:cNvPr id="415" name="Google Shape;415;p50"/>
           <p:cNvSpPr txBox="1"/>
           <p:nvPr/>
         </p:nvSpPr>
@@ -31103,7 +29376,7 @@
       </p:sp>
       <p:sp>
         <p:nvSpPr>
-          <p:cNvPr id="424" name="Google Shape;424;p51"/>
+          <p:cNvPr id="416" name="Google Shape;416;p50"/>
           <p:cNvSpPr/>
           <p:nvPr/>
         </p:nvSpPr>
@@ -31153,7 +29426,7 @@
       </p:sp>
       <p:cxnSp>
         <p:nvCxnSpPr>
-          <p:cNvPr id="425" name="Google Shape;425;p51"/>
+          <p:cNvPr id="417" name="Google Shape;417;p50"/>
           <p:cNvCxnSpPr/>
           <p:nvPr/>
         </p:nvCxnSpPr>
@@ -31179,7 +29452,7 @@
       </p:cxnSp>
       <p:sp>
         <p:nvSpPr>
-          <p:cNvPr id="426" name="Google Shape;426;p51"/>
+          <p:cNvPr id="418" name="Google Shape;418;p50"/>
           <p:cNvSpPr txBox="1"/>
           <p:nvPr/>
         </p:nvSpPr>
@@ -31271,7 +29544,7 @@
       </p:sp>
       <p:pic>
         <p:nvPicPr>
-          <p:cNvPr id="427" name="Google Shape;427;p51"/>
+          <p:cNvPr id="419" name="Google Shape;419;p50"/>
           <p:cNvPicPr preferRelativeResize="0"/>
           <p:nvPr/>
         </p:nvPicPr>
@@ -31298,7 +29571,7 @@
       </p:pic>
       <p:sp>
         <p:nvSpPr>
-          <p:cNvPr id="428" name="Google Shape;428;p51"/>
+          <p:cNvPr id="420" name="Google Shape;420;p50"/>
           <p:cNvSpPr txBox="1"/>
           <p:nvPr/>
         </p:nvSpPr>
@@ -35339,133 +33612,9 @@
           <a:chExt cx="0" cy="0"/>
         </a:xfrm>
       </p:grpSpPr>
-      <p:cxnSp>
-        <p:nvCxnSpPr>
-          <p:cNvPr id="235" name="Google Shape;235;p36"/>
-          <p:cNvCxnSpPr/>
-          <p:nvPr/>
-        </p:nvCxnSpPr>
-        <p:spPr>
-          <a:xfrm>
-            <a:off x="0" y="758960"/>
-            <a:ext cx="9144000" cy="0"/>
-          </a:xfrm>
-          <a:prstGeom prst="straightConnector1">
-            <a:avLst/>
-          </a:prstGeom>
-          <a:noFill/>
-          <a:ln cap="flat" cmpd="sng" w="19050">
-            <a:solidFill>
-              <a:schemeClr val="dk1"/>
-            </a:solidFill>
-            <a:prstDash val="solid"/>
-            <a:miter lim="8000"/>
-            <a:headEnd len="sm" w="sm" type="none"/>
-            <a:tailEnd len="sm" w="sm" type="none"/>
-          </a:ln>
-        </p:spPr>
-      </p:cxnSp>
       <p:sp>
         <p:nvSpPr>
-          <p:cNvPr id="236" name="Google Shape;236;p36"/>
-          <p:cNvSpPr txBox="1"/>
-          <p:nvPr/>
-        </p:nvSpPr>
-        <p:spPr>
-          <a:xfrm>
-            <a:off x="0" y="86740"/>
-            <a:ext cx="9144000" cy="577200"/>
-          </a:xfrm>
-          <a:prstGeom prst="rect">
-            <a:avLst/>
-          </a:prstGeom>
-          <a:noFill/>
-          <a:ln>
-            <a:noFill/>
-          </a:ln>
-        </p:spPr>
-        <p:txBody>
-          <a:bodyPr anchorCtr="0" anchor="t" bIns="34275" lIns="68575" spcFirstLastPara="1" rIns="68575" wrap="square" tIns="34275">
-            <a:spAutoFit/>
-          </a:bodyPr>
-          <a:lstStyle/>
-          <a:p>
-            <a:pPr indent="0" lvl="0" marL="0" marR="0" rtl="0" algn="ctr">
-              <a:spcBef>
-                <a:spcPts val="0"/>
-              </a:spcBef>
-              <a:spcAft>
-                <a:spcPts val="0"/>
-              </a:spcAft>
-              <a:buNone/>
-            </a:pPr>
-            <a:r>
-              <a:rPr b="1" lang="en" sz="3300">
-                <a:solidFill>
-                  <a:schemeClr val="dk1"/>
-                </a:solidFill>
-              </a:rPr>
-              <a:t>Correlation Matrix</a:t>
-            </a:r>
-            <a:endParaRPr sz="1100"/>
-          </a:p>
-        </p:txBody>
-      </p:sp>
-      <p:pic>
-        <p:nvPicPr>
-          <p:cNvPr id="237" name="Google Shape;237;p36" title="CorrelationMatrix.png"/>
-          <p:cNvPicPr preferRelativeResize="0"/>
-          <p:nvPr/>
-        </p:nvPicPr>
-        <p:blipFill rotWithShape="1">
-          <a:blip r:embed="rId3">
-            <a:alphaModFix/>
-          </a:blip>
-          <a:srcRect b="0" l="-340" r="340" t="1970"/>
-          <a:stretch/>
-        </p:blipFill>
-        <p:spPr>
-          <a:xfrm>
-            <a:off x="1830462" y="790900"/>
-            <a:ext cx="5483075" cy="4352602"/>
-          </a:xfrm>
-          <a:prstGeom prst="rect">
-            <a:avLst/>
-          </a:prstGeom>
-          <a:noFill/>
-          <a:ln>
-            <a:noFill/>
-          </a:ln>
-        </p:spPr>
-      </p:pic>
-    </p:spTree>
-  </p:cSld>
-  <p:clrMapOvr>
-    <a:masterClrMapping/>
-  </p:clrMapOvr>
-</p:sld>
-</file>
-
-<file path=ppt/slides/slide9.xml><?xml version="1.0" encoding="utf-8"?>
-<p:sld xmlns:a="http://schemas.openxmlformats.org/drawingml/2006/main" xmlns:r="http://schemas.openxmlformats.org/officeDocument/2006/relationships" xmlns:mc="http://schemas.openxmlformats.org/markup-compatibility/2006" xmlns:mv="urn:schemas-microsoft-com:mac:vml" xmlns:p="http://schemas.openxmlformats.org/presentationml/2006/main" xmlns:c="http://schemas.openxmlformats.org/drawingml/2006/chart" xmlns:dgm="http://schemas.openxmlformats.org/drawingml/2006/diagram" xmlns:o="urn:schemas-microsoft-com:office:office" xmlns:v="urn:schemas-microsoft-com:vml" xmlns:pvml="urn:schemas-microsoft-com:office:powerpoint" xmlns:com="http://schemas.openxmlformats.org/drawingml/2006/compatibility" xmlns:p14="http://schemas.microsoft.com/office/powerpoint/2010/main" xmlns:p15="http://schemas.microsoft.com/office/powerpoint/2012/main" xmlns:ahyp="http://schemas.microsoft.com/office/drawing/2018/hyperlinkcolor">
-  <p:cSld>
-    <p:spTree>
-      <p:nvGrpSpPr>
-        <p:cNvPr id="242" name="Shape 242"/>
-        <p:cNvGrpSpPr/>
-        <p:nvPr/>
-      </p:nvGrpSpPr>
-      <p:grpSpPr>
-        <a:xfrm>
-          <a:off x="0" y="0"/>
-          <a:ext cx="0" cy="0"/>
-          <a:chOff x="0" y="0"/>
-          <a:chExt cx="0" cy="0"/>
-        </a:xfrm>
-      </p:grpSpPr>
-      <p:sp>
-        <p:nvSpPr>
-          <p:cNvPr id="243" name="Google Shape;243;p37"/>
+          <p:cNvPr id="235" name="Google Shape;235;p36"/>
           <p:cNvSpPr txBox="1"/>
           <p:nvPr>
             <p:ph type="ctrTitle"/>
@@ -35529,7 +33678,7 @@
       </p:sp>
       <p:sp>
         <p:nvSpPr>
-          <p:cNvPr id="244" name="Google Shape;244;p37"/>
+          <p:cNvPr id="236" name="Google Shape;236;p36"/>
           <p:cNvSpPr/>
           <p:nvPr/>
         </p:nvSpPr>
@@ -35586,7 +33735,7 @@
       </p:sp>
       <p:sp>
         <p:nvSpPr>
-          <p:cNvPr id="245" name="Google Shape;245;p37"/>
+          <p:cNvPr id="237" name="Google Shape;237;p36"/>
           <p:cNvSpPr txBox="1"/>
           <p:nvPr/>
         </p:nvSpPr>
@@ -35845,7 +33994,7 @@
       </p:sp>
       <p:sp>
         <p:nvSpPr>
-          <p:cNvPr id="246" name="Google Shape;246;p37"/>
+          <p:cNvPr id="238" name="Google Shape;238;p36"/>
           <p:cNvSpPr/>
           <p:nvPr/>
         </p:nvSpPr>
@@ -35904,7 +34053,7 @@
       </p:sp>
       <p:sp>
         <p:nvSpPr>
-          <p:cNvPr id="247" name="Google Shape;247;p37"/>
+          <p:cNvPr id="239" name="Google Shape;239;p36"/>
           <p:cNvSpPr txBox="1"/>
           <p:nvPr/>
         </p:nvSpPr>
@@ -35954,7 +34103,7 @@
       </p:sp>
       <p:sp>
         <p:nvSpPr>
-          <p:cNvPr id="248" name="Google Shape;248;p37"/>
+          <p:cNvPr id="240" name="Google Shape;240;p36"/>
           <p:cNvSpPr/>
           <p:nvPr/>
         </p:nvSpPr>
@@ -36011,7 +34160,7 @@
       </p:sp>
       <p:sp>
         <p:nvSpPr>
-          <p:cNvPr id="249" name="Google Shape;249;p37"/>
+          <p:cNvPr id="241" name="Google Shape;241;p36"/>
           <p:cNvSpPr txBox="1"/>
           <p:nvPr/>
         </p:nvSpPr>
@@ -36152,7 +34301,7 @@
       </p:sp>
       <p:sp>
         <p:nvSpPr>
-          <p:cNvPr id="250" name="Google Shape;250;p37"/>
+          <p:cNvPr id="242" name="Google Shape;242;p36"/>
           <p:cNvSpPr/>
           <p:nvPr/>
         </p:nvSpPr>
@@ -36211,7 +34360,7 @@
       </p:sp>
       <p:sp>
         <p:nvSpPr>
-          <p:cNvPr id="251" name="Google Shape;251;p37"/>
+          <p:cNvPr id="243" name="Google Shape;243;p36"/>
           <p:cNvSpPr/>
           <p:nvPr/>
         </p:nvSpPr>
@@ -36270,7 +34419,7 @@
       </p:sp>
       <p:sp>
         <p:nvSpPr>
-          <p:cNvPr id="252" name="Google Shape;252;p37"/>
+          <p:cNvPr id="244" name="Google Shape;244;p36"/>
           <p:cNvSpPr/>
           <p:nvPr/>
         </p:nvSpPr>
@@ -36327,7 +34476,7 @@
       </p:sp>
       <p:sp>
         <p:nvSpPr>
-          <p:cNvPr id="253" name="Google Shape;253;p37"/>
+          <p:cNvPr id="245" name="Google Shape;245;p36"/>
           <p:cNvSpPr/>
           <p:nvPr/>
         </p:nvSpPr>
@@ -36384,7 +34533,7 @@
       </p:sp>
       <p:sp>
         <p:nvSpPr>
-          <p:cNvPr id="254" name="Google Shape;254;p37"/>
+          <p:cNvPr id="246" name="Google Shape;246;p36"/>
           <p:cNvSpPr txBox="1"/>
           <p:nvPr/>
         </p:nvSpPr>
@@ -36457,7 +34606,7 @@
       </p:sp>
       <p:sp>
         <p:nvSpPr>
-          <p:cNvPr id="255" name="Google Shape;255;p37"/>
+          <p:cNvPr id="247" name="Google Shape;247;p36"/>
           <p:cNvSpPr txBox="1"/>
           <p:nvPr/>
         </p:nvSpPr>
@@ -36578,7 +34727,7 @@
       </p:sp>
       <p:sp>
         <p:nvSpPr>
-          <p:cNvPr id="256" name="Google Shape;256;p37"/>
+          <p:cNvPr id="248" name="Google Shape;248;p36"/>
           <p:cNvSpPr txBox="1"/>
           <p:nvPr/>
         </p:nvSpPr>
@@ -36651,7 +34800,7 @@
       </p:sp>
       <p:sp>
         <p:nvSpPr>
-          <p:cNvPr id="257" name="Google Shape;257;p37"/>
+          <p:cNvPr id="249" name="Google Shape;249;p36"/>
           <p:cNvSpPr txBox="1"/>
           <p:nvPr/>
         </p:nvSpPr>
@@ -36809,7 +34958,1795 @@
 </p:sld>
 </file>
 
+<file path=ppt/slides/slide9.xml><?xml version="1.0" encoding="utf-8"?>
+<p:sld xmlns:a="http://schemas.openxmlformats.org/drawingml/2006/main" xmlns:r="http://schemas.openxmlformats.org/officeDocument/2006/relationships" xmlns:mc="http://schemas.openxmlformats.org/markup-compatibility/2006" xmlns:mv="urn:schemas-microsoft-com:mac:vml" xmlns:p="http://schemas.openxmlformats.org/presentationml/2006/main" xmlns:c="http://schemas.openxmlformats.org/drawingml/2006/chart" xmlns:dgm="http://schemas.openxmlformats.org/drawingml/2006/diagram" xmlns:o="urn:schemas-microsoft-com:office:office" xmlns:v="urn:schemas-microsoft-com:vml" xmlns:pvml="urn:schemas-microsoft-com:office:powerpoint" xmlns:com="http://schemas.openxmlformats.org/drawingml/2006/compatibility" xmlns:p14="http://schemas.microsoft.com/office/powerpoint/2010/main" xmlns:p15="http://schemas.microsoft.com/office/powerpoint/2012/main" xmlns:ahyp="http://schemas.microsoft.com/office/drawing/2018/hyperlinkcolor">
+  <p:cSld>
+    <p:spTree>
+      <p:nvGrpSpPr>
+        <p:cNvPr id="254" name="Shape 254"/>
+        <p:cNvGrpSpPr/>
+        <p:nvPr/>
+      </p:nvGrpSpPr>
+      <p:grpSpPr>
+        <a:xfrm>
+          <a:off x="0" y="0"/>
+          <a:ext cx="0" cy="0"/>
+          <a:chOff x="0" y="0"/>
+          <a:chExt cx="0" cy="0"/>
+        </a:xfrm>
+      </p:grpSpPr>
+      <p:sp>
+        <p:nvSpPr>
+          <p:cNvPr id="255" name="Google Shape;255;p37"/>
+          <p:cNvSpPr txBox="1"/>
+          <p:nvPr>
+            <p:ph type="ctrTitle"/>
+          </p:nvPr>
+        </p:nvSpPr>
+        <p:spPr>
+          <a:xfrm flipH="1">
+            <a:off x="-4" y="146957"/>
+            <a:ext cx="9144001" cy="734785"/>
+          </a:xfrm>
+          <a:prstGeom prst="rect">
+            <a:avLst/>
+          </a:prstGeom>
+          <a:noFill/>
+          <a:ln>
+            <a:noFill/>
+          </a:ln>
+        </p:spPr>
+        <p:txBody>
+          <a:bodyPr anchorCtr="0" anchor="b" bIns="34275" lIns="68575" spcFirstLastPara="1" rIns="68575" wrap="square" tIns="34275">
+            <a:noAutofit/>
+          </a:bodyPr>
+          <a:lstStyle/>
+          <a:p>
+            <a:pPr indent="0" lvl="0" marL="0" rtl="0" algn="l">
+              <a:lnSpc>
+                <a:spcPct val="90000"/>
+              </a:lnSpc>
+              <a:spcBef>
+                <a:spcPts val="0"/>
+              </a:spcBef>
+              <a:spcAft>
+                <a:spcPts val="0"/>
+              </a:spcAft>
+              <a:buClr>
+                <a:schemeClr val="dk1"/>
+              </a:buClr>
+              <a:buSzPts val="2100"/>
+              <a:buFont typeface="Play"/>
+              <a:buNone/>
+            </a:pPr>
+            <a:r>
+              <a:rPr lang="en" sz="2100"/>
+              <a:t>                       </a:t>
+            </a:r>
+            <a:r>
+              <a:rPr b="1" lang="en" sz="3300">
+                <a:latin typeface="Arial"/>
+                <a:ea typeface="Arial"/>
+                <a:cs typeface="Arial"/>
+                <a:sym typeface="Arial"/>
+              </a:rPr>
+              <a:t>Linear Regression: Implementation</a:t>
+            </a:r>
+            <a:br>
+              <a:rPr lang="en" sz="2100"/>
+            </a:br>
+            <a:endParaRPr sz="2100"/>
+          </a:p>
+        </p:txBody>
+      </p:sp>
+      <p:sp>
+        <p:nvSpPr>
+          <p:cNvPr id="256" name="Google Shape;256;p37"/>
+          <p:cNvSpPr/>
+          <p:nvPr/>
+        </p:nvSpPr>
+        <p:spPr>
+          <a:xfrm>
+            <a:off x="155121" y="700496"/>
+            <a:ext cx="8752115" cy="34289"/>
+          </a:xfrm>
+          <a:prstGeom prst="rect">
+            <a:avLst/>
+          </a:prstGeom>
+          <a:solidFill>
+            <a:srgbClr val="BFBFBF"/>
+          </a:solidFill>
+          <a:ln cap="flat" cmpd="sng" w="19050">
+            <a:solidFill>
+              <a:srgbClr val="082836"/>
+            </a:solidFill>
+            <a:prstDash val="solid"/>
+            <a:miter lim="8000"/>
+            <a:headEnd len="sm" w="sm" type="none"/>
+            <a:tailEnd len="sm" w="sm" type="none"/>
+          </a:ln>
+        </p:spPr>
+        <p:txBody>
+          <a:bodyPr anchorCtr="0" anchor="ctr" bIns="34275" lIns="68575" spcFirstLastPara="1" rIns="68575" wrap="square" tIns="34275">
+            <a:noAutofit/>
+          </a:bodyPr>
+          <a:lstStyle/>
+          <a:p>
+            <a:pPr indent="0" lvl="0" marL="0" marR="0" rtl="0" algn="ctr">
+              <a:spcBef>
+                <a:spcPts val="0"/>
+              </a:spcBef>
+              <a:spcAft>
+                <a:spcPts val="0"/>
+              </a:spcAft>
+              <a:buNone/>
+            </a:pPr>
+            <a:r>
+              <a:t/>
+            </a:r>
+            <a:endParaRPr sz="1400">
+              <a:solidFill>
+                <a:schemeClr val="lt1"/>
+              </a:solidFill>
+              <a:latin typeface="Arial"/>
+              <a:ea typeface="Arial"/>
+              <a:cs typeface="Arial"/>
+              <a:sym typeface="Arial"/>
+            </a:endParaRPr>
+          </a:p>
+        </p:txBody>
+      </p:sp>
+      <p:sp>
+        <p:nvSpPr>
+          <p:cNvPr id="257" name="Google Shape;257;p37"/>
+          <p:cNvSpPr txBox="1"/>
+          <p:nvPr/>
+        </p:nvSpPr>
+        <p:spPr>
+          <a:xfrm>
+            <a:off x="1175657" y="2416628"/>
+            <a:ext cx="138548" cy="276999"/>
+          </a:xfrm>
+          <a:prstGeom prst="rect">
+            <a:avLst/>
+          </a:prstGeom>
+          <a:noFill/>
+          <a:ln>
+            <a:noFill/>
+          </a:ln>
+        </p:spPr>
+        <p:txBody>
+          <a:bodyPr anchorCtr="0" anchor="t" bIns="34275" lIns="68575" spcFirstLastPara="1" rIns="68575" wrap="square" tIns="34275">
+            <a:spAutoFit/>
+          </a:bodyPr>
+          <a:lstStyle/>
+          <a:p>
+            <a:pPr indent="0" lvl="0" marL="0" marR="0" rtl="0" algn="l">
+              <a:spcBef>
+                <a:spcPts val="0"/>
+              </a:spcBef>
+              <a:spcAft>
+                <a:spcPts val="0"/>
+              </a:spcAft>
+              <a:buNone/>
+            </a:pPr>
+            <a:r>
+              <a:t/>
+            </a:r>
+            <a:endParaRPr sz="1400">
+              <a:solidFill>
+                <a:schemeClr val="dk1"/>
+              </a:solidFill>
+              <a:latin typeface="Arial"/>
+              <a:ea typeface="Arial"/>
+              <a:cs typeface="Arial"/>
+              <a:sym typeface="Arial"/>
+            </a:endParaRPr>
+          </a:p>
+        </p:txBody>
+      </p:sp>
+      <p:sp>
+        <p:nvSpPr>
+          <p:cNvPr id="258" name="Google Shape;258;p37"/>
+          <p:cNvSpPr txBox="1"/>
+          <p:nvPr/>
+        </p:nvSpPr>
+        <p:spPr>
+          <a:xfrm>
+            <a:off x="215860" y="1036671"/>
+            <a:ext cx="2341048" cy="438581"/>
+          </a:xfrm>
+          <a:prstGeom prst="rect">
+            <a:avLst/>
+          </a:prstGeom>
+          <a:noFill/>
+          <a:ln>
+            <a:noFill/>
+          </a:ln>
+        </p:spPr>
+        <p:txBody>
+          <a:bodyPr anchorCtr="0" anchor="t" bIns="34275" lIns="68575" spcFirstLastPara="1" rIns="68575" wrap="square" tIns="34275">
+            <a:spAutoFit/>
+          </a:bodyPr>
+          <a:lstStyle/>
+          <a:p>
+            <a:pPr indent="0" lvl="0" marL="0" marR="0" rtl="0" algn="l">
+              <a:spcBef>
+                <a:spcPts val="0"/>
+              </a:spcBef>
+              <a:spcAft>
+                <a:spcPts val="0"/>
+              </a:spcAft>
+              <a:buNone/>
+            </a:pPr>
+            <a:r>
+              <a:rPr b="1" lang="en" sz="2400">
+                <a:solidFill>
+                  <a:schemeClr val="dk1"/>
+                </a:solidFill>
+                <a:latin typeface="Arial"/>
+                <a:ea typeface="Arial"/>
+                <a:cs typeface="Arial"/>
+                <a:sym typeface="Arial"/>
+              </a:rPr>
+              <a:t>Model Pipeline</a:t>
+            </a:r>
+            <a:endParaRPr b="1" sz="2400">
+              <a:solidFill>
+                <a:schemeClr val="dk1"/>
+              </a:solidFill>
+              <a:latin typeface="Arial"/>
+              <a:ea typeface="Arial"/>
+              <a:cs typeface="Arial"/>
+              <a:sym typeface="Arial"/>
+            </a:endParaRPr>
+          </a:p>
+        </p:txBody>
+      </p:sp>
+      <p:sp>
+        <p:nvSpPr>
+          <p:cNvPr id="259" name="Google Shape;259;p37"/>
+          <p:cNvSpPr/>
+          <p:nvPr/>
+        </p:nvSpPr>
+        <p:spPr>
+          <a:xfrm>
+            <a:off x="363927" y="1749631"/>
+            <a:ext cx="1600200" cy="648300"/>
+          </a:xfrm>
+          <a:prstGeom prst="roundRect">
+            <a:avLst>
+              <a:gd fmla="val 16667" name="adj"/>
+            </a:avLst>
+          </a:prstGeom>
+          <a:solidFill>
+            <a:srgbClr val="D9E5F8"/>
+          </a:solidFill>
+          <a:ln cap="flat" cmpd="sng" w="19050">
+            <a:solidFill>
+              <a:srgbClr val="F2F2F2"/>
+            </a:solidFill>
+            <a:prstDash val="solid"/>
+            <a:miter lim="8000"/>
+            <a:headEnd len="sm" w="sm" type="none"/>
+            <a:tailEnd len="sm" w="sm" type="none"/>
+          </a:ln>
+          <a:effectLst>
+            <a:outerShdw blurRad="50800" rotWithShape="0" algn="tl" dir="2700000" dist="38100">
+              <a:srgbClr val="000000">
+                <a:alpha val="40000"/>
+              </a:srgbClr>
+            </a:outerShdw>
+          </a:effectLst>
+        </p:spPr>
+        <p:txBody>
+          <a:bodyPr anchorCtr="0" anchor="ctr" bIns="34275" lIns="68575" spcFirstLastPara="1" rIns="68575" wrap="square" tIns="34275">
+            <a:noAutofit/>
+          </a:bodyPr>
+          <a:lstStyle/>
+          <a:p>
+            <a:pPr indent="0" lvl="0" marL="0" marR="0" rtl="0" algn="ctr">
+              <a:spcBef>
+                <a:spcPts val="0"/>
+              </a:spcBef>
+              <a:spcAft>
+                <a:spcPts val="0"/>
+              </a:spcAft>
+              <a:buNone/>
+            </a:pPr>
+            <a:r>
+              <a:rPr lang="en" sz="1400">
+                <a:solidFill>
+                  <a:schemeClr val="dk1"/>
+                </a:solidFill>
+                <a:latin typeface="Arial"/>
+                <a:ea typeface="Arial"/>
+                <a:cs typeface="Arial"/>
+                <a:sym typeface="Arial"/>
+              </a:rPr>
+              <a:t>Input Feature</a:t>
+            </a:r>
+            <a:endParaRPr sz="1400">
+              <a:solidFill>
+                <a:schemeClr val="lt1"/>
+              </a:solidFill>
+              <a:latin typeface="Arial"/>
+              <a:ea typeface="Arial"/>
+              <a:cs typeface="Arial"/>
+              <a:sym typeface="Arial"/>
+            </a:endParaRPr>
+          </a:p>
+        </p:txBody>
+      </p:sp>
+      <p:sp>
+        <p:nvSpPr>
+          <p:cNvPr id="260" name="Google Shape;260;p37"/>
+          <p:cNvSpPr txBox="1"/>
+          <p:nvPr/>
+        </p:nvSpPr>
+        <p:spPr>
+          <a:xfrm>
+            <a:off x="1964125" y="1852912"/>
+            <a:ext cx="819600" cy="700200"/>
+          </a:xfrm>
+          <a:prstGeom prst="rect">
+            <a:avLst/>
+          </a:prstGeom>
+          <a:noFill/>
+          <a:ln>
+            <a:noFill/>
+          </a:ln>
+        </p:spPr>
+        <p:txBody>
+          <a:bodyPr anchorCtr="0" anchor="t" bIns="34275" lIns="68575" spcFirstLastPara="1" rIns="68575" wrap="square" tIns="34275">
+            <a:spAutoFit/>
+          </a:bodyPr>
+          <a:lstStyle/>
+          <a:p>
+            <a:pPr indent="0" lvl="0" marL="0" marR="0" rtl="0" algn="l">
+              <a:spcBef>
+                <a:spcPts val="0"/>
+              </a:spcBef>
+              <a:spcAft>
+                <a:spcPts val="0"/>
+              </a:spcAft>
+              <a:buNone/>
+            </a:pPr>
+            <a:r>
+              <a:rPr b="1" lang="en" sz="2700">
+                <a:solidFill>
+                  <a:schemeClr val="dk1"/>
+                </a:solidFill>
+                <a:latin typeface="Arial"/>
+                <a:ea typeface="Arial"/>
+                <a:cs typeface="Arial"/>
+                <a:sym typeface="Arial"/>
+              </a:rPr>
+              <a:t>→</a:t>
+            </a:r>
+            <a:endParaRPr sz="1100"/>
+          </a:p>
+          <a:p>
+            <a:pPr indent="0" lvl="0" marL="0" marR="0" rtl="0" algn="l">
+              <a:spcBef>
+                <a:spcPts val="0"/>
+              </a:spcBef>
+              <a:spcAft>
+                <a:spcPts val="0"/>
+              </a:spcAft>
+              <a:buNone/>
+            </a:pPr>
+            <a:r>
+              <a:t/>
+            </a:r>
+            <a:endParaRPr sz="1400">
+              <a:solidFill>
+                <a:schemeClr val="dk1"/>
+              </a:solidFill>
+              <a:latin typeface="Arial"/>
+              <a:ea typeface="Arial"/>
+              <a:cs typeface="Arial"/>
+              <a:sym typeface="Arial"/>
+            </a:endParaRPr>
+          </a:p>
+        </p:txBody>
+      </p:sp>
+      <p:sp>
+        <p:nvSpPr>
+          <p:cNvPr id="261" name="Google Shape;261;p37"/>
+          <p:cNvSpPr/>
+          <p:nvPr/>
+        </p:nvSpPr>
+        <p:spPr>
+          <a:xfrm>
+            <a:off x="2388970" y="1790879"/>
+            <a:ext cx="1600200" cy="648300"/>
+          </a:xfrm>
+          <a:prstGeom prst="roundRect">
+            <a:avLst>
+              <a:gd fmla="val 16667" name="adj"/>
+            </a:avLst>
+          </a:prstGeom>
+          <a:solidFill>
+            <a:srgbClr val="F2CDED"/>
+          </a:solidFill>
+          <a:ln cap="flat" cmpd="sng" w="19050">
+            <a:solidFill>
+              <a:srgbClr val="082836"/>
+            </a:solidFill>
+            <a:prstDash val="solid"/>
+            <a:miter lim="8000"/>
+            <a:headEnd len="sm" w="sm" type="none"/>
+            <a:tailEnd len="sm" w="sm" type="none"/>
+          </a:ln>
+          <a:effectLst>
+            <a:outerShdw blurRad="50800" rotWithShape="0" algn="tl" dir="2700000" dist="38100">
+              <a:srgbClr val="000000">
+                <a:alpha val="40000"/>
+              </a:srgbClr>
+            </a:outerShdw>
+          </a:effectLst>
+        </p:spPr>
+        <p:txBody>
+          <a:bodyPr anchorCtr="0" anchor="ctr" bIns="34275" lIns="68575" spcFirstLastPara="1" rIns="68575" wrap="square" tIns="34275">
+            <a:noAutofit/>
+          </a:bodyPr>
+          <a:lstStyle/>
+          <a:p>
+            <a:pPr indent="0" lvl="0" marL="0" marR="0" rtl="0" algn="ctr">
+              <a:spcBef>
+                <a:spcPts val="0"/>
+              </a:spcBef>
+              <a:spcAft>
+                <a:spcPts val="0"/>
+              </a:spcAft>
+              <a:buNone/>
+            </a:pPr>
+            <a:r>
+              <a:rPr lang="en" sz="1400">
+                <a:solidFill>
+                  <a:schemeClr val="dk1"/>
+                </a:solidFill>
+                <a:latin typeface="Arial"/>
+                <a:ea typeface="Arial"/>
+                <a:cs typeface="Arial"/>
+                <a:sym typeface="Arial"/>
+              </a:rPr>
+              <a:t>Preprocessing</a:t>
+            </a:r>
+            <a:endParaRPr sz="1400">
+              <a:solidFill>
+                <a:schemeClr val="lt1"/>
+              </a:solidFill>
+              <a:latin typeface="Arial"/>
+              <a:ea typeface="Arial"/>
+              <a:cs typeface="Arial"/>
+              <a:sym typeface="Arial"/>
+            </a:endParaRPr>
+          </a:p>
+        </p:txBody>
+      </p:sp>
+      <p:sp>
+        <p:nvSpPr>
+          <p:cNvPr id="262" name="Google Shape;262;p37"/>
+          <p:cNvSpPr/>
+          <p:nvPr/>
+        </p:nvSpPr>
+        <p:spPr>
+          <a:xfrm>
+            <a:off x="4453425" y="1823055"/>
+            <a:ext cx="1681800" cy="648300"/>
+          </a:xfrm>
+          <a:prstGeom prst="roundRect">
+            <a:avLst>
+              <a:gd fmla="val 16667" name="adj"/>
+            </a:avLst>
+          </a:prstGeom>
+          <a:solidFill>
+            <a:srgbClr val="BFBFBF"/>
+          </a:solidFill>
+          <a:ln cap="flat" cmpd="sng" w="19050">
+            <a:solidFill>
+              <a:srgbClr val="082836"/>
+            </a:solidFill>
+            <a:prstDash val="solid"/>
+            <a:miter lim="8000"/>
+            <a:headEnd len="sm" w="sm" type="none"/>
+            <a:tailEnd len="sm" w="sm" type="none"/>
+          </a:ln>
+          <a:effectLst>
+            <a:outerShdw blurRad="50800" rotWithShape="0" algn="tl" dir="2700000" dist="38100">
+              <a:srgbClr val="000000">
+                <a:alpha val="40000"/>
+              </a:srgbClr>
+            </a:outerShdw>
+          </a:effectLst>
+        </p:spPr>
+        <p:txBody>
+          <a:bodyPr anchorCtr="0" anchor="ctr" bIns="34275" lIns="68575" spcFirstLastPara="1" rIns="68575" wrap="square" tIns="34275">
+            <a:noAutofit/>
+          </a:bodyPr>
+          <a:lstStyle/>
+          <a:p>
+            <a:pPr indent="0" lvl="0" marL="0" marR="0" rtl="0" algn="ctr">
+              <a:spcBef>
+                <a:spcPts val="0"/>
+              </a:spcBef>
+              <a:spcAft>
+                <a:spcPts val="0"/>
+              </a:spcAft>
+              <a:buNone/>
+            </a:pPr>
+            <a:r>
+              <a:rPr lang="en" sz="1400">
+                <a:solidFill>
+                  <a:schemeClr val="dk1"/>
+                </a:solidFill>
+                <a:latin typeface="Arial"/>
+                <a:ea typeface="Arial"/>
+                <a:cs typeface="Arial"/>
+                <a:sym typeface="Arial"/>
+              </a:rPr>
+              <a:t>Linear Regression</a:t>
+            </a:r>
+            <a:endParaRPr sz="1400">
+              <a:solidFill>
+                <a:schemeClr val="dk1"/>
+              </a:solidFill>
+              <a:latin typeface="Arial"/>
+              <a:ea typeface="Arial"/>
+              <a:cs typeface="Arial"/>
+              <a:sym typeface="Arial"/>
+            </a:endParaRPr>
+          </a:p>
+        </p:txBody>
+      </p:sp>
+      <p:sp>
+        <p:nvSpPr>
+          <p:cNvPr id="263" name="Google Shape;263;p37"/>
+          <p:cNvSpPr/>
+          <p:nvPr/>
+        </p:nvSpPr>
+        <p:spPr>
+          <a:xfrm>
+            <a:off x="6599470" y="1823053"/>
+            <a:ext cx="1681800" cy="648300"/>
+          </a:xfrm>
+          <a:prstGeom prst="roundRect">
+            <a:avLst>
+              <a:gd fmla="val 16667" name="adj"/>
+            </a:avLst>
+          </a:prstGeom>
+          <a:solidFill>
+            <a:srgbClr val="C1F0C7"/>
+          </a:solidFill>
+          <a:ln cap="flat" cmpd="sng" w="19050">
+            <a:solidFill>
+              <a:srgbClr val="082836"/>
+            </a:solidFill>
+            <a:prstDash val="solid"/>
+            <a:miter lim="8000"/>
+            <a:headEnd len="sm" w="sm" type="none"/>
+            <a:tailEnd len="sm" w="sm" type="none"/>
+          </a:ln>
+          <a:effectLst>
+            <a:outerShdw blurRad="50800" rotWithShape="0" algn="tl" dir="2700000" dist="38100">
+              <a:srgbClr val="000000">
+                <a:alpha val="40000"/>
+              </a:srgbClr>
+            </a:outerShdw>
+          </a:effectLst>
+        </p:spPr>
+        <p:txBody>
+          <a:bodyPr anchorCtr="0" anchor="ctr" bIns="34275" lIns="68575" spcFirstLastPara="1" rIns="68575" wrap="square" tIns="34275">
+            <a:noAutofit/>
+          </a:bodyPr>
+          <a:lstStyle/>
+          <a:p>
+            <a:pPr indent="0" lvl="0" marL="0" marR="0" rtl="0" algn="ctr">
+              <a:spcBef>
+                <a:spcPts val="0"/>
+              </a:spcBef>
+              <a:spcAft>
+                <a:spcPts val="0"/>
+              </a:spcAft>
+              <a:buNone/>
+            </a:pPr>
+            <a:r>
+              <a:rPr lang="en" sz="1400">
+                <a:solidFill>
+                  <a:schemeClr val="dk1"/>
+                </a:solidFill>
+                <a:latin typeface="Arial"/>
+                <a:ea typeface="Arial"/>
+                <a:cs typeface="Arial"/>
+                <a:sym typeface="Arial"/>
+              </a:rPr>
+              <a:t>Predicted </a:t>
+            </a:r>
+            <a:endParaRPr sz="1100"/>
+          </a:p>
+          <a:p>
+            <a:pPr indent="0" lvl="0" marL="0" marR="0" rtl="0" algn="ctr">
+              <a:spcBef>
+                <a:spcPts val="0"/>
+              </a:spcBef>
+              <a:spcAft>
+                <a:spcPts val="0"/>
+              </a:spcAft>
+              <a:buNone/>
+            </a:pPr>
+            <a:r>
+              <a:rPr lang="en" sz="1400">
+                <a:solidFill>
+                  <a:schemeClr val="dk1"/>
+                </a:solidFill>
+                <a:latin typeface="Arial"/>
+                <a:ea typeface="Arial"/>
+                <a:cs typeface="Arial"/>
+                <a:sym typeface="Arial"/>
+              </a:rPr>
+              <a:t>amount_inr</a:t>
+            </a:r>
+            <a:endParaRPr sz="1400">
+              <a:solidFill>
+                <a:schemeClr val="lt1"/>
+              </a:solidFill>
+              <a:latin typeface="Arial"/>
+              <a:ea typeface="Arial"/>
+              <a:cs typeface="Arial"/>
+              <a:sym typeface="Arial"/>
+            </a:endParaRPr>
+          </a:p>
+        </p:txBody>
+      </p:sp>
+      <p:sp>
+        <p:nvSpPr>
+          <p:cNvPr id="264" name="Google Shape;264;p37"/>
+          <p:cNvSpPr txBox="1"/>
+          <p:nvPr/>
+        </p:nvSpPr>
+        <p:spPr>
+          <a:xfrm>
+            <a:off x="4025047" y="1847115"/>
+            <a:ext cx="954900" cy="700200"/>
+          </a:xfrm>
+          <a:prstGeom prst="rect">
+            <a:avLst/>
+          </a:prstGeom>
+          <a:noFill/>
+          <a:ln>
+            <a:noFill/>
+          </a:ln>
+        </p:spPr>
+        <p:txBody>
+          <a:bodyPr anchorCtr="0" anchor="t" bIns="34275" lIns="68575" spcFirstLastPara="1" rIns="68575" wrap="square" tIns="34275">
+            <a:spAutoFit/>
+          </a:bodyPr>
+          <a:lstStyle/>
+          <a:p>
+            <a:pPr indent="0" lvl="0" marL="0" marR="0" rtl="0" algn="l">
+              <a:spcBef>
+                <a:spcPts val="0"/>
+              </a:spcBef>
+              <a:spcAft>
+                <a:spcPts val="0"/>
+              </a:spcAft>
+              <a:buNone/>
+            </a:pPr>
+            <a:r>
+              <a:rPr b="1" lang="en" sz="2700">
+                <a:solidFill>
+                  <a:schemeClr val="dk1"/>
+                </a:solidFill>
+                <a:latin typeface="Arial"/>
+                <a:ea typeface="Arial"/>
+                <a:cs typeface="Arial"/>
+                <a:sym typeface="Arial"/>
+              </a:rPr>
+              <a:t>→</a:t>
+            </a:r>
+            <a:endParaRPr sz="1100"/>
+          </a:p>
+          <a:p>
+            <a:pPr indent="0" lvl="0" marL="0" marR="0" rtl="0" algn="l">
+              <a:spcBef>
+                <a:spcPts val="0"/>
+              </a:spcBef>
+              <a:spcAft>
+                <a:spcPts val="0"/>
+              </a:spcAft>
+              <a:buNone/>
+            </a:pPr>
+            <a:r>
+              <a:t/>
+            </a:r>
+            <a:endParaRPr sz="1400">
+              <a:solidFill>
+                <a:schemeClr val="dk1"/>
+              </a:solidFill>
+              <a:latin typeface="Arial"/>
+              <a:ea typeface="Arial"/>
+              <a:cs typeface="Arial"/>
+              <a:sym typeface="Arial"/>
+            </a:endParaRPr>
+          </a:p>
+        </p:txBody>
+      </p:sp>
+      <p:sp>
+        <p:nvSpPr>
+          <p:cNvPr id="265" name="Google Shape;265;p37"/>
+          <p:cNvSpPr txBox="1"/>
+          <p:nvPr/>
+        </p:nvSpPr>
+        <p:spPr>
+          <a:xfrm>
+            <a:off x="6110514" y="1847113"/>
+            <a:ext cx="1075200" cy="700200"/>
+          </a:xfrm>
+          <a:prstGeom prst="rect">
+            <a:avLst/>
+          </a:prstGeom>
+          <a:noFill/>
+          <a:ln>
+            <a:noFill/>
+          </a:ln>
+        </p:spPr>
+        <p:txBody>
+          <a:bodyPr anchorCtr="0" anchor="t" bIns="34275" lIns="68575" spcFirstLastPara="1" rIns="68575" wrap="square" tIns="34275">
+            <a:spAutoFit/>
+          </a:bodyPr>
+          <a:lstStyle/>
+          <a:p>
+            <a:pPr indent="0" lvl="0" marL="0" marR="0" rtl="0" algn="l">
+              <a:spcBef>
+                <a:spcPts val="0"/>
+              </a:spcBef>
+              <a:spcAft>
+                <a:spcPts val="0"/>
+              </a:spcAft>
+              <a:buNone/>
+            </a:pPr>
+            <a:r>
+              <a:rPr b="1" lang="en" sz="2700">
+                <a:solidFill>
+                  <a:schemeClr val="dk1"/>
+                </a:solidFill>
+                <a:latin typeface="Arial"/>
+                <a:ea typeface="Arial"/>
+                <a:cs typeface="Arial"/>
+                <a:sym typeface="Arial"/>
+              </a:rPr>
+              <a:t>→</a:t>
+            </a:r>
+            <a:endParaRPr sz="1100"/>
+          </a:p>
+          <a:p>
+            <a:pPr indent="0" lvl="0" marL="0" marR="0" rtl="0" algn="l">
+              <a:spcBef>
+                <a:spcPts val="0"/>
+              </a:spcBef>
+              <a:spcAft>
+                <a:spcPts val="0"/>
+              </a:spcAft>
+              <a:buNone/>
+            </a:pPr>
+            <a:r>
+              <a:t/>
+            </a:r>
+            <a:endParaRPr sz="1400">
+              <a:solidFill>
+                <a:schemeClr val="dk1"/>
+              </a:solidFill>
+              <a:latin typeface="Arial"/>
+              <a:ea typeface="Arial"/>
+              <a:cs typeface="Arial"/>
+              <a:sym typeface="Arial"/>
+            </a:endParaRPr>
+          </a:p>
+        </p:txBody>
+      </p:sp>
+      <p:sp>
+        <p:nvSpPr>
+          <p:cNvPr id="266" name="Google Shape;266;p37"/>
+          <p:cNvSpPr txBox="1"/>
+          <p:nvPr/>
+        </p:nvSpPr>
+        <p:spPr>
+          <a:xfrm>
+            <a:off x="246726" y="2754800"/>
+            <a:ext cx="3787800" cy="408000"/>
+          </a:xfrm>
+          <a:prstGeom prst="rect">
+            <a:avLst/>
+          </a:prstGeom>
+          <a:noFill/>
+          <a:ln>
+            <a:noFill/>
+          </a:ln>
+        </p:spPr>
+        <p:txBody>
+          <a:bodyPr anchorCtr="0" anchor="t" bIns="34275" lIns="68575" spcFirstLastPara="1" rIns="68575" wrap="square" tIns="34275">
+            <a:spAutoFit/>
+          </a:bodyPr>
+          <a:lstStyle/>
+          <a:p>
+            <a:pPr indent="0" lvl="0" marL="0" marR="0" rtl="0" algn="l">
+              <a:spcBef>
+                <a:spcPts val="0"/>
+              </a:spcBef>
+              <a:spcAft>
+                <a:spcPts val="0"/>
+              </a:spcAft>
+              <a:buNone/>
+            </a:pPr>
+            <a:r>
+              <a:rPr b="1" lang="en" sz="2200">
+                <a:solidFill>
+                  <a:schemeClr val="dk1"/>
+                </a:solidFill>
+                <a:latin typeface="Arial"/>
+                <a:ea typeface="Arial"/>
+                <a:cs typeface="Arial"/>
+                <a:sym typeface="Arial"/>
+              </a:rPr>
+              <a:t>Evaluation matrices</a:t>
+            </a:r>
+            <a:endParaRPr b="1" sz="2200">
+              <a:solidFill>
+                <a:schemeClr val="dk1"/>
+              </a:solidFill>
+              <a:latin typeface="Arial"/>
+              <a:ea typeface="Arial"/>
+              <a:cs typeface="Arial"/>
+              <a:sym typeface="Arial"/>
+            </a:endParaRPr>
+          </a:p>
+        </p:txBody>
+      </p:sp>
+      <p:sp>
+        <p:nvSpPr>
+          <p:cNvPr id="267" name="Google Shape;267;p37"/>
+          <p:cNvSpPr/>
+          <p:nvPr/>
+        </p:nvSpPr>
+        <p:spPr>
+          <a:xfrm>
+            <a:off x="468628" y="3348293"/>
+            <a:ext cx="2315100" cy="1469700"/>
+          </a:xfrm>
+          <a:prstGeom prst="roundRect">
+            <a:avLst>
+              <a:gd fmla="val 16667" name="adj"/>
+            </a:avLst>
+          </a:prstGeom>
+          <a:solidFill>
+            <a:srgbClr val="D8D8D8"/>
+          </a:solidFill>
+          <a:ln cap="flat" cmpd="sng" w="19050">
+            <a:solidFill>
+              <a:srgbClr val="082836"/>
+            </a:solidFill>
+            <a:prstDash val="solid"/>
+            <a:miter lim="8000"/>
+            <a:headEnd len="sm" w="sm" type="none"/>
+            <a:tailEnd len="sm" w="sm" type="none"/>
+          </a:ln>
+          <a:effectLst>
+            <a:outerShdw blurRad="50800" rotWithShape="0" algn="tl" dir="2700000" dist="38100">
+              <a:srgbClr val="000000">
+                <a:alpha val="40000"/>
+              </a:srgbClr>
+            </a:outerShdw>
+          </a:effectLst>
+        </p:spPr>
+        <p:txBody>
+          <a:bodyPr anchorCtr="0" anchor="ctr" bIns="34275" lIns="68575" spcFirstLastPara="1" rIns="68575" wrap="square" tIns="34275">
+            <a:noAutofit/>
+          </a:bodyPr>
+          <a:lstStyle/>
+          <a:p>
+            <a:pPr indent="0" lvl="0" marL="0" marR="0" rtl="0" algn="ctr">
+              <a:spcBef>
+                <a:spcPts val="0"/>
+              </a:spcBef>
+              <a:spcAft>
+                <a:spcPts val="0"/>
+              </a:spcAft>
+              <a:buNone/>
+            </a:pPr>
+            <a:r>
+              <a:t/>
+            </a:r>
+            <a:endParaRPr sz="1400">
+              <a:solidFill>
+                <a:schemeClr val="lt1"/>
+              </a:solidFill>
+              <a:latin typeface="Arial"/>
+              <a:ea typeface="Arial"/>
+              <a:cs typeface="Arial"/>
+              <a:sym typeface="Arial"/>
+            </a:endParaRPr>
+          </a:p>
+        </p:txBody>
+      </p:sp>
+      <p:sp>
+        <p:nvSpPr>
+          <p:cNvPr id="268" name="Google Shape;268;p37"/>
+          <p:cNvSpPr/>
+          <p:nvPr/>
+        </p:nvSpPr>
+        <p:spPr>
+          <a:xfrm>
+            <a:off x="3137765" y="3316842"/>
+            <a:ext cx="2235300" cy="1469700"/>
+          </a:xfrm>
+          <a:prstGeom prst="roundRect">
+            <a:avLst>
+              <a:gd fmla="val 16667" name="adj"/>
+            </a:avLst>
+          </a:prstGeom>
+          <a:solidFill>
+            <a:srgbClr val="D8D8D8"/>
+          </a:solidFill>
+          <a:ln cap="flat" cmpd="sng" w="19050">
+            <a:solidFill>
+              <a:srgbClr val="082836"/>
+            </a:solidFill>
+            <a:prstDash val="solid"/>
+            <a:miter lim="8000"/>
+            <a:headEnd len="sm" w="sm" type="none"/>
+            <a:tailEnd len="sm" w="sm" type="none"/>
+          </a:ln>
+          <a:effectLst>
+            <a:outerShdw blurRad="50800" rotWithShape="0" algn="tl" dir="2700000" dist="38100">
+              <a:srgbClr val="000000">
+                <a:alpha val="40000"/>
+              </a:srgbClr>
+            </a:outerShdw>
+          </a:effectLst>
+        </p:spPr>
+        <p:txBody>
+          <a:bodyPr anchorCtr="0" anchor="ctr" bIns="34275" lIns="68575" spcFirstLastPara="1" rIns="68575" wrap="square" tIns="34275">
+            <a:noAutofit/>
+          </a:bodyPr>
+          <a:lstStyle/>
+          <a:p>
+            <a:pPr indent="0" lvl="0" marL="0" marR="0" rtl="0" algn="ctr">
+              <a:spcBef>
+                <a:spcPts val="0"/>
+              </a:spcBef>
+              <a:spcAft>
+                <a:spcPts val="0"/>
+              </a:spcAft>
+              <a:buNone/>
+            </a:pPr>
+            <a:r>
+              <a:t/>
+            </a:r>
+            <a:endParaRPr sz="1400">
+              <a:solidFill>
+                <a:schemeClr val="lt1"/>
+              </a:solidFill>
+              <a:latin typeface="Arial"/>
+              <a:ea typeface="Arial"/>
+              <a:cs typeface="Arial"/>
+              <a:sym typeface="Arial"/>
+            </a:endParaRPr>
+          </a:p>
+        </p:txBody>
+      </p:sp>
+      <p:sp>
+        <p:nvSpPr>
+          <p:cNvPr id="269" name="Google Shape;269;p37"/>
+          <p:cNvSpPr/>
+          <p:nvPr/>
+        </p:nvSpPr>
+        <p:spPr>
+          <a:xfrm>
+            <a:off x="5827858" y="3316906"/>
+            <a:ext cx="2235300" cy="1469700"/>
+          </a:xfrm>
+          <a:prstGeom prst="roundRect">
+            <a:avLst>
+              <a:gd fmla="val 16667" name="adj"/>
+            </a:avLst>
+          </a:prstGeom>
+          <a:solidFill>
+            <a:srgbClr val="D8D8D8"/>
+          </a:solidFill>
+          <a:ln cap="flat" cmpd="sng" w="19050">
+            <a:solidFill>
+              <a:srgbClr val="082836"/>
+            </a:solidFill>
+            <a:prstDash val="solid"/>
+            <a:miter lim="8000"/>
+            <a:headEnd len="sm" w="sm" type="none"/>
+            <a:tailEnd len="sm" w="sm" type="none"/>
+          </a:ln>
+          <a:effectLst>
+            <a:outerShdw blurRad="50800" rotWithShape="0" algn="tl" dir="2700000" dist="38100">
+              <a:srgbClr val="000000">
+                <a:alpha val="40000"/>
+              </a:srgbClr>
+            </a:outerShdw>
+          </a:effectLst>
+        </p:spPr>
+        <p:txBody>
+          <a:bodyPr anchorCtr="0" anchor="ctr" bIns="34275" lIns="68575" spcFirstLastPara="1" rIns="68575" wrap="square" tIns="34275">
+            <a:noAutofit/>
+          </a:bodyPr>
+          <a:lstStyle/>
+          <a:p>
+            <a:pPr indent="0" lvl="0" marL="0" marR="0" rtl="0" algn="ctr">
+              <a:spcBef>
+                <a:spcPts val="0"/>
+              </a:spcBef>
+              <a:spcAft>
+                <a:spcPts val="0"/>
+              </a:spcAft>
+              <a:buNone/>
+            </a:pPr>
+            <a:r>
+              <a:t/>
+            </a:r>
+            <a:endParaRPr sz="1400">
+              <a:solidFill>
+                <a:schemeClr val="lt1"/>
+              </a:solidFill>
+              <a:latin typeface="Arial"/>
+              <a:ea typeface="Arial"/>
+              <a:cs typeface="Arial"/>
+              <a:sym typeface="Arial"/>
+            </a:endParaRPr>
+          </a:p>
+        </p:txBody>
+      </p:sp>
+      <p:sp>
+        <p:nvSpPr>
+          <p:cNvPr id="270" name="Google Shape;270;p37"/>
+          <p:cNvSpPr txBox="1"/>
+          <p:nvPr/>
+        </p:nvSpPr>
+        <p:spPr>
+          <a:xfrm>
+            <a:off x="537006" y="3478427"/>
+            <a:ext cx="1871400" cy="284700"/>
+          </a:xfrm>
+          <a:prstGeom prst="rect">
+            <a:avLst/>
+          </a:prstGeom>
+          <a:noFill/>
+          <a:ln>
+            <a:noFill/>
+          </a:ln>
+        </p:spPr>
+        <p:txBody>
+          <a:bodyPr anchorCtr="0" anchor="t" bIns="34275" lIns="68575" spcFirstLastPara="1" rIns="68575" wrap="square" tIns="34275">
+            <a:spAutoFit/>
+          </a:bodyPr>
+          <a:lstStyle/>
+          <a:p>
+            <a:pPr indent="0" lvl="0" marL="0" marR="0" rtl="0" algn="l">
+              <a:spcBef>
+                <a:spcPts val="0"/>
+              </a:spcBef>
+              <a:spcAft>
+                <a:spcPts val="0"/>
+              </a:spcAft>
+              <a:buNone/>
+            </a:pPr>
+            <a:r>
+              <a:rPr b="1" lang="en" sz="1400">
+                <a:solidFill>
+                  <a:schemeClr val="dk1"/>
+                </a:solidFill>
+                <a:latin typeface="Arial"/>
+                <a:ea typeface="Arial"/>
+                <a:cs typeface="Arial"/>
+                <a:sym typeface="Arial"/>
+              </a:rPr>
+              <a:t>1. MAE</a:t>
+            </a:r>
+            <a:endParaRPr b="1" sz="1400">
+              <a:solidFill>
+                <a:schemeClr val="dk1"/>
+              </a:solidFill>
+              <a:latin typeface="Arial"/>
+              <a:ea typeface="Arial"/>
+              <a:cs typeface="Arial"/>
+              <a:sym typeface="Arial"/>
+            </a:endParaRPr>
+          </a:p>
+        </p:txBody>
+      </p:sp>
+      <p:sp>
+        <p:nvSpPr>
+          <p:cNvPr id="271" name="Google Shape;271;p37"/>
+          <p:cNvSpPr txBox="1"/>
+          <p:nvPr/>
+        </p:nvSpPr>
+        <p:spPr>
+          <a:xfrm>
+            <a:off x="591671" y="3782310"/>
+            <a:ext cx="2408400" cy="1023600"/>
+          </a:xfrm>
+          <a:prstGeom prst="rect">
+            <a:avLst/>
+          </a:prstGeom>
+          <a:noFill/>
+          <a:ln>
+            <a:noFill/>
+          </a:ln>
+        </p:spPr>
+        <p:txBody>
+          <a:bodyPr anchorCtr="0" anchor="t" bIns="34275" lIns="68575" spcFirstLastPara="1" rIns="68575" wrap="square" tIns="34275">
+            <a:spAutoFit/>
+          </a:bodyPr>
+          <a:lstStyle/>
+          <a:p>
+            <a:pPr indent="0" lvl="0" marL="0" marR="0" rtl="0" algn="l">
+              <a:spcBef>
+                <a:spcPts val="0"/>
+              </a:spcBef>
+              <a:spcAft>
+                <a:spcPts val="0"/>
+              </a:spcAft>
+              <a:buNone/>
+            </a:pPr>
+            <a:r>
+              <a:rPr lang="en" sz="1200">
+                <a:solidFill>
+                  <a:schemeClr val="dk1"/>
+                </a:solidFill>
+                <a:latin typeface="Arial"/>
+                <a:ea typeface="Arial"/>
+                <a:cs typeface="Arial"/>
+                <a:sym typeface="Arial"/>
+              </a:rPr>
+              <a:t>Average absolute difference between actual and predicted costs. Lower MAE indicates </a:t>
+            </a:r>
+            <a:endParaRPr sz="1100"/>
+          </a:p>
+          <a:p>
+            <a:pPr indent="0" lvl="0" marL="0" marR="0" rtl="0" algn="l">
+              <a:spcBef>
+                <a:spcPts val="0"/>
+              </a:spcBef>
+              <a:spcAft>
+                <a:spcPts val="0"/>
+              </a:spcAft>
+              <a:buNone/>
+            </a:pPr>
+            <a:r>
+              <a:rPr lang="en" sz="1200">
+                <a:solidFill>
+                  <a:schemeClr val="dk1"/>
+                </a:solidFill>
+                <a:latin typeface="Arial"/>
+                <a:ea typeface="Arial"/>
+                <a:cs typeface="Arial"/>
+                <a:sym typeface="Arial"/>
+              </a:rPr>
+              <a:t>better prediction</a:t>
+            </a:r>
+            <a:endParaRPr sz="1100"/>
+          </a:p>
+          <a:p>
+            <a:pPr indent="0" lvl="0" marL="0" marR="0" rtl="0" algn="l">
+              <a:spcBef>
+                <a:spcPts val="0"/>
+              </a:spcBef>
+              <a:spcAft>
+                <a:spcPts val="0"/>
+              </a:spcAft>
+              <a:buNone/>
+            </a:pPr>
+            <a:r>
+              <a:t/>
+            </a:r>
+            <a:endParaRPr sz="1400">
+              <a:solidFill>
+                <a:schemeClr val="dk1"/>
+              </a:solidFill>
+              <a:latin typeface="Arial"/>
+              <a:ea typeface="Arial"/>
+              <a:cs typeface="Arial"/>
+              <a:sym typeface="Arial"/>
+            </a:endParaRPr>
+          </a:p>
+        </p:txBody>
+      </p:sp>
+      <p:sp>
+        <p:nvSpPr>
+          <p:cNvPr id="272" name="Google Shape;272;p37"/>
+          <p:cNvSpPr txBox="1"/>
+          <p:nvPr/>
+        </p:nvSpPr>
+        <p:spPr>
+          <a:xfrm>
+            <a:off x="3181687" y="3412660"/>
+            <a:ext cx="1872900" cy="300000"/>
+          </a:xfrm>
+          <a:prstGeom prst="rect">
+            <a:avLst/>
+          </a:prstGeom>
+          <a:noFill/>
+          <a:ln>
+            <a:noFill/>
+          </a:ln>
+        </p:spPr>
+        <p:txBody>
+          <a:bodyPr anchorCtr="0" anchor="t" bIns="34275" lIns="68575" spcFirstLastPara="1" rIns="68575" wrap="square" tIns="34275">
+            <a:spAutoFit/>
+          </a:bodyPr>
+          <a:lstStyle/>
+          <a:p>
+            <a:pPr indent="0" lvl="0" marL="0" marR="0" rtl="0" algn="l">
+              <a:spcBef>
+                <a:spcPts val="0"/>
+              </a:spcBef>
+              <a:spcAft>
+                <a:spcPts val="0"/>
+              </a:spcAft>
+              <a:buNone/>
+            </a:pPr>
+            <a:r>
+              <a:rPr b="1" lang="en" sz="1500">
+                <a:solidFill>
+                  <a:schemeClr val="dk1"/>
+                </a:solidFill>
+                <a:latin typeface="Arial"/>
+                <a:ea typeface="Arial"/>
+                <a:cs typeface="Arial"/>
+                <a:sym typeface="Arial"/>
+              </a:rPr>
+              <a:t>2. RMSE</a:t>
+            </a:r>
+            <a:endParaRPr b="1" sz="1500">
+              <a:solidFill>
+                <a:schemeClr val="dk1"/>
+              </a:solidFill>
+              <a:latin typeface="Arial"/>
+              <a:ea typeface="Arial"/>
+              <a:cs typeface="Arial"/>
+              <a:sym typeface="Arial"/>
+            </a:endParaRPr>
+          </a:p>
+        </p:txBody>
+      </p:sp>
+      <p:sp>
+        <p:nvSpPr>
+          <p:cNvPr id="273" name="Google Shape;273;p37"/>
+          <p:cNvSpPr txBox="1"/>
+          <p:nvPr/>
+        </p:nvSpPr>
+        <p:spPr>
+          <a:xfrm>
+            <a:off x="3273554" y="3763116"/>
+            <a:ext cx="1963800" cy="992700"/>
+          </a:xfrm>
+          <a:prstGeom prst="rect">
+            <a:avLst/>
+          </a:prstGeom>
+          <a:noFill/>
+          <a:ln>
+            <a:noFill/>
+          </a:ln>
+        </p:spPr>
+        <p:txBody>
+          <a:bodyPr anchorCtr="0" anchor="t" bIns="34275" lIns="68575" spcFirstLastPara="1" rIns="68575" wrap="square" tIns="34275">
+            <a:spAutoFit/>
+          </a:bodyPr>
+          <a:lstStyle/>
+          <a:p>
+            <a:pPr indent="0" lvl="0" marL="0" marR="0" rtl="0" algn="l">
+              <a:spcBef>
+                <a:spcPts val="0"/>
+              </a:spcBef>
+              <a:spcAft>
+                <a:spcPts val="0"/>
+              </a:spcAft>
+              <a:buNone/>
+            </a:pPr>
+            <a:r>
+              <a:rPr lang="en" sz="1200">
+                <a:solidFill>
+                  <a:schemeClr val="dk1"/>
+                </a:solidFill>
+                <a:latin typeface="Arial"/>
+                <a:ea typeface="Arial"/>
+                <a:cs typeface="Arial"/>
+                <a:sym typeface="Arial"/>
+              </a:rPr>
+              <a:t>Measures the difference between actual and predicted values, giving more penalty to larger errors..</a:t>
+            </a:r>
+            <a:endParaRPr sz="1400">
+              <a:solidFill>
+                <a:schemeClr val="dk1"/>
+              </a:solidFill>
+              <a:latin typeface="Arial"/>
+              <a:ea typeface="Arial"/>
+              <a:cs typeface="Arial"/>
+              <a:sym typeface="Arial"/>
+            </a:endParaRPr>
+          </a:p>
+        </p:txBody>
+      </p:sp>
+      <p:sp>
+        <p:nvSpPr>
+          <p:cNvPr id="274" name="Google Shape;274;p37"/>
+          <p:cNvSpPr txBox="1"/>
+          <p:nvPr/>
+        </p:nvSpPr>
+        <p:spPr>
+          <a:xfrm>
+            <a:off x="5827850" y="3412654"/>
+            <a:ext cx="1963800" cy="515700"/>
+          </a:xfrm>
+          <a:prstGeom prst="rect">
+            <a:avLst/>
+          </a:prstGeom>
+          <a:noFill/>
+          <a:ln>
+            <a:noFill/>
+          </a:ln>
+        </p:spPr>
+        <p:txBody>
+          <a:bodyPr anchorCtr="0" anchor="t" bIns="34275" lIns="68575" spcFirstLastPara="1" rIns="68575" wrap="square" tIns="34275">
+            <a:spAutoFit/>
+          </a:bodyPr>
+          <a:lstStyle/>
+          <a:p>
+            <a:pPr indent="0" lvl="0" marL="0" marR="0" rtl="0" algn="l">
+              <a:spcBef>
+                <a:spcPts val="0"/>
+              </a:spcBef>
+              <a:spcAft>
+                <a:spcPts val="0"/>
+              </a:spcAft>
+              <a:buNone/>
+            </a:pPr>
+            <a:r>
+              <a:rPr b="1" lang="en" sz="1500">
+                <a:solidFill>
+                  <a:schemeClr val="dk1"/>
+                </a:solidFill>
+                <a:latin typeface="Arial"/>
+                <a:ea typeface="Arial"/>
+                <a:cs typeface="Arial"/>
+                <a:sym typeface="Arial"/>
+              </a:rPr>
+              <a:t>3. R² Score</a:t>
+            </a:r>
+            <a:endParaRPr sz="1500">
+              <a:solidFill>
+                <a:schemeClr val="dk1"/>
+              </a:solidFill>
+              <a:latin typeface="Arial"/>
+              <a:ea typeface="Arial"/>
+              <a:cs typeface="Arial"/>
+              <a:sym typeface="Arial"/>
+            </a:endParaRPr>
+          </a:p>
+          <a:p>
+            <a:pPr indent="0" lvl="0" marL="0" marR="0" rtl="0" algn="l">
+              <a:spcBef>
+                <a:spcPts val="0"/>
+              </a:spcBef>
+              <a:spcAft>
+                <a:spcPts val="0"/>
+              </a:spcAft>
+              <a:buNone/>
+            </a:pPr>
+            <a:r>
+              <a:t/>
+            </a:r>
+            <a:endParaRPr sz="1400">
+              <a:solidFill>
+                <a:schemeClr val="dk1"/>
+              </a:solidFill>
+              <a:latin typeface="Arial"/>
+              <a:ea typeface="Arial"/>
+              <a:cs typeface="Arial"/>
+              <a:sym typeface="Arial"/>
+            </a:endParaRPr>
+          </a:p>
+        </p:txBody>
+      </p:sp>
+      <p:sp>
+        <p:nvSpPr>
+          <p:cNvPr id="275" name="Google Shape;275;p37"/>
+          <p:cNvSpPr txBox="1"/>
+          <p:nvPr/>
+        </p:nvSpPr>
+        <p:spPr>
+          <a:xfrm>
+            <a:off x="5884150" y="3774722"/>
+            <a:ext cx="2122800" cy="1054200"/>
+          </a:xfrm>
+          <a:prstGeom prst="rect">
+            <a:avLst/>
+          </a:prstGeom>
+          <a:noFill/>
+          <a:ln>
+            <a:noFill/>
+          </a:ln>
+        </p:spPr>
+        <p:txBody>
+          <a:bodyPr anchorCtr="0" anchor="t" bIns="34275" lIns="68575" spcFirstLastPara="1" rIns="68575" wrap="square" tIns="34275">
+            <a:spAutoFit/>
+          </a:bodyPr>
+          <a:lstStyle/>
+          <a:p>
+            <a:pPr indent="0" lvl="0" marL="0" marR="0" rtl="0" algn="l">
+              <a:spcBef>
+                <a:spcPts val="0"/>
+              </a:spcBef>
+              <a:spcAft>
+                <a:spcPts val="0"/>
+              </a:spcAft>
+              <a:buNone/>
+            </a:pPr>
+            <a:r>
+              <a:rPr lang="en" sz="1200">
+                <a:solidFill>
+                  <a:schemeClr val="dk1"/>
+                </a:solidFill>
+                <a:latin typeface="Arial"/>
+                <a:ea typeface="Arial"/>
+                <a:cs typeface="Arial"/>
+                <a:sym typeface="Arial"/>
+              </a:rPr>
+              <a:t>Shows how well the model explains variations in the target co</a:t>
+            </a:r>
+            <a:r>
+              <a:rPr lang="en" sz="1200">
+                <a:solidFill>
+                  <a:schemeClr val="dk1"/>
+                </a:solidFill>
+              </a:rPr>
+              <a:t>lumn</a:t>
+            </a:r>
+            <a:r>
+              <a:rPr lang="en" sz="1200">
+                <a:solidFill>
+                  <a:schemeClr val="dk1"/>
+                </a:solidFill>
+                <a:latin typeface="Arial"/>
+                <a:ea typeface="Arial"/>
+                <a:cs typeface="Arial"/>
+                <a:sym typeface="Arial"/>
+              </a:rPr>
+              <a:t>. A value closer to 1 indicates a better fit</a:t>
+            </a:r>
+            <a:r>
+              <a:rPr lang="en" sz="1400">
+                <a:solidFill>
+                  <a:schemeClr val="dk1"/>
+                </a:solidFill>
+                <a:latin typeface="Arial"/>
+                <a:ea typeface="Arial"/>
+                <a:cs typeface="Arial"/>
+                <a:sym typeface="Arial"/>
+              </a:rPr>
+              <a:t>.</a:t>
+            </a:r>
+            <a:endParaRPr sz="1100"/>
+          </a:p>
+          <a:p>
+            <a:pPr indent="0" lvl="0" marL="0" marR="0" rtl="0" algn="l">
+              <a:spcBef>
+                <a:spcPts val="0"/>
+              </a:spcBef>
+              <a:spcAft>
+                <a:spcPts val="0"/>
+              </a:spcAft>
+              <a:buNone/>
+            </a:pPr>
+            <a:r>
+              <a:t/>
+            </a:r>
+            <a:endParaRPr sz="1400">
+              <a:solidFill>
+                <a:schemeClr val="dk1"/>
+              </a:solidFill>
+              <a:latin typeface="Arial"/>
+              <a:ea typeface="Arial"/>
+              <a:cs typeface="Arial"/>
+              <a:sym typeface="Arial"/>
+            </a:endParaRPr>
+          </a:p>
+        </p:txBody>
+      </p:sp>
+    </p:spTree>
+  </p:cSld>
+  <p:clrMapOvr>
+    <a:masterClrMapping/>
+  </p:clrMapOvr>
+</p:sld>
+</file>
+
 <file path=ppt/theme/theme1.xml><?xml version="1.0" encoding="utf-8"?>
+<a:theme xmlns:a="http://schemas.openxmlformats.org/drawingml/2006/main" xmlns:r="http://schemas.openxmlformats.org/officeDocument/2006/relationships" name="Decision Tree Model: Implementation &amp; Evaluation">
+  <a:themeElements>
+    <a:clrScheme name="Decision Tree Model: Implementation &amp; Evaluation">
+      <a:dk1>
+        <a:srgbClr val="1B2A3A"/>
+      </a:dk1>
+      <a:lt1>
+        <a:srgbClr val="FFFFFF"/>
+      </a:lt1>
+      <a:dk2>
+        <a:srgbClr val="545F6B"/>
+      </a:dk2>
+      <a:lt2>
+        <a:srgbClr val="E8EAEB"/>
+      </a:lt2>
+      <a:accent1>
+        <a:srgbClr val="B85A14"/>
+      </a:accent1>
+      <a:accent2>
+        <a:srgbClr val="5B6672"/>
+      </a:accent2>
+      <a:accent3>
+        <a:srgbClr val="9AA0A6"/>
+      </a:accent3>
+      <a:accent4>
+        <a:srgbClr val="767F89"/>
+      </a:accent4>
+      <a:accent5>
+        <a:srgbClr val="989FA6"/>
+      </a:accent5>
+      <a:accent6>
+        <a:srgbClr val="BBBFC4"/>
+      </a:accent6>
+      <a:hlink>
+        <a:srgbClr val="0563C1"/>
+      </a:hlink>
+      <a:folHlink>
+        <a:srgbClr val="954F72"/>
+      </a:folHlink>
+    </a:clrScheme>
+    <a:fontScheme name="Office">
+      <a:majorFont>
+        <a:latin typeface="Arial"/>
+        <a:ea typeface=""/>
+        <a:cs typeface=""/>
+        <a:font script="Jpan" typeface="ＭＳ Ｐゴシック"/>
+        <a:font script="Hang" typeface="맑은 고딕"/>
+        <a:font script="Hans" typeface="宋体"/>
+        <a:font script="Hant" typeface="新細明體"/>
+        <a:font script="Arab" typeface="Times New Roman"/>
+        <a:font script="Hebr" typeface="Times New Roman"/>
+        <a:font script="Thai" typeface="Angsana New"/>
+        <a:font script="Ethi" typeface="Nyala"/>
+        <a:font script="Beng" typeface="Vrinda"/>
+        <a:font script="Gujr" typeface="Shruti"/>
+        <a:font script="Khmr" typeface="MoolBoran"/>
+        <a:font script="Knda" typeface="Tunga"/>
+        <a:font script="Guru" typeface="Raavi"/>
+        <a:font script="Cans" typeface="Euphemia"/>
+        <a:font script="Cher" typeface="Plantagenet Cherokee"/>
+        <a:font script="Yiii" typeface="Microsoft Yi Baiti"/>
+        <a:font script="Tibt" typeface="Microsoft Himalaya"/>
+        <a:font script="Thaa" typeface="MV Boli"/>
+        <a:font script="Deva" typeface="Mangal"/>
+        <a:font script="Telu" typeface="Gautami"/>
+        <a:font script="Taml" typeface="Latha"/>
+        <a:font script="Syrc" typeface="Estrangelo Edessa"/>
+        <a:font script="Orya" typeface="Kalinga"/>
+        <a:font script="Mlym" typeface="Kartika"/>
+        <a:font script="Laoo" typeface="DokChampa"/>
+        <a:font script="Sinh" typeface="Iskoola Pota"/>
+        <a:font script="Mong" typeface="Mongolian Baiti"/>
+        <a:font script="Viet" typeface="Times New Roman"/>
+        <a:font script="Uigh" typeface="Microsoft Uighur"/>
+        <a:font script="Geor" typeface="Sylfaen"/>
+      </a:majorFont>
+      <a:minorFont>
+        <a:latin typeface="Arial"/>
+        <a:ea typeface=""/>
+        <a:cs typeface=""/>
+        <a:font script="Jpan" typeface="ＭＳ Ｐゴシック"/>
+        <a:font script="Hang" typeface="맑은 고딕"/>
+        <a:font script="Hans" typeface="宋体"/>
+        <a:font script="Hant" typeface="新細明體"/>
+        <a:font script="Arab" typeface="Arial"/>
+        <a:font script="Hebr" typeface="Arial"/>
+        <a:font script="Thai" typeface="Cordia New"/>
+        <a:font script="Ethi" typeface="Nyala"/>
+        <a:font script="Beng" typeface="Vrinda"/>
+        <a:font script="Gujr" typeface="Shruti"/>
+        <a:font script="Khmr" typeface="DaunPenh"/>
+        <a:font script="Knda" typeface="Tunga"/>
+        <a:font script="Guru" typeface="Raavi"/>
+        <a:font script="Cans" typeface="Euphemia"/>
+        <a:font script="Cher" typeface="Plantagenet Cherokee"/>
+        <a:font script="Yiii" typeface="Microsoft Yi Baiti"/>
+        <a:font script="Tibt" typeface="Microsoft Himalaya"/>
+        <a:font script="Thaa" typeface="MV Boli"/>
+        <a:font script="Deva" typeface="Mangal"/>
+        <a:font script="Telu" typeface="Gautami"/>
+        <a:font script="Taml" typeface="Latha"/>
+        <a:font script="Syrc" typeface="Estrangelo Edessa"/>
+        <a:font script="Orya" typeface="Kalinga"/>
+        <a:font script="Mlym" typeface="Kartika"/>
+        <a:font script="Laoo" typeface="DokChampa"/>
+        <a:font script="Sinh" typeface="Iskoola Pota"/>
+        <a:font script="Mong" typeface="Mongolian Baiti"/>
+        <a:font script="Viet" typeface="Arial"/>
+        <a:font script="Uigh" typeface="Microsoft Uighur"/>
+        <a:font script="Geor" typeface="Sylfaen"/>
+      </a:minorFont>
+    </a:fontScheme>
+    <a:fmtScheme name="Office">
+      <a:fillStyleLst>
+        <a:solidFill>
+          <a:schemeClr val="phClr"/>
+        </a:solidFill>
+        <a:gradFill rotWithShape="1">
+          <a:gsLst>
+            <a:gs pos="0">
+              <a:schemeClr val="phClr">
+                <a:tint val="50000"/>
+                <a:satMod val="300000"/>
+              </a:schemeClr>
+            </a:gs>
+            <a:gs pos="35000">
+              <a:schemeClr val="phClr">
+                <a:tint val="37000"/>
+                <a:satMod val="300000"/>
+              </a:schemeClr>
+            </a:gs>
+            <a:gs pos="100000">
+              <a:schemeClr val="phClr">
+                <a:tint val="15000"/>
+                <a:satMod val="350000"/>
+              </a:schemeClr>
+            </a:gs>
+          </a:gsLst>
+          <a:lin ang="16200000" scaled="1"/>
+        </a:gradFill>
+        <a:gradFill rotWithShape="1">
+          <a:gsLst>
+            <a:gs pos="0">
+              <a:schemeClr val="phClr">
+                <a:tint val="100000"/>
+                <a:shade val="100000"/>
+                <a:satMod val="130000"/>
+              </a:schemeClr>
+            </a:gs>
+            <a:gs pos="100000">
+              <a:schemeClr val="phClr">
+                <a:tint val="50000"/>
+                <a:shade val="100000"/>
+                <a:satMod val="350000"/>
+              </a:schemeClr>
+            </a:gs>
+          </a:gsLst>
+          <a:lin ang="16200000" scaled="0"/>
+        </a:gradFill>
+      </a:fillStyleLst>
+      <a:lnStyleLst>
+        <a:ln w="9525" cap="flat" cmpd="sng" algn="ctr">
+          <a:solidFill>
+            <a:schemeClr val="phClr">
+              <a:shade val="95000"/>
+              <a:satMod val="105000"/>
+            </a:schemeClr>
+          </a:solidFill>
+          <a:prstDash val="solid"/>
+        </a:ln>
+        <a:ln w="25400" cap="flat" cmpd="sng" algn="ctr">
+          <a:solidFill>
+            <a:schemeClr val="phClr"/>
+          </a:solidFill>
+          <a:prstDash val="solid"/>
+        </a:ln>
+        <a:ln w="38100" cap="flat" cmpd="sng" algn="ctr">
+          <a:solidFill>
+            <a:schemeClr val="phClr"/>
+          </a:solidFill>
+          <a:prstDash val="solid"/>
+        </a:ln>
+      </a:lnStyleLst>
+      <a:effectStyleLst>
+        <a:effectStyle>
+          <a:effectLst>
+            <a:outerShdw blurRad="40000" dist="20000" dir="5400000" rotWithShape="0">
+              <a:srgbClr val="000000">
+                <a:alpha val="38000"/>
+              </a:srgbClr>
+            </a:outerShdw>
+          </a:effectLst>
+        </a:effectStyle>
+        <a:effectStyle>
+          <a:effectLst>
+            <a:outerShdw blurRad="40000" dist="23000" dir="5400000" rotWithShape="0">
+              <a:srgbClr val="000000">
+                <a:alpha val="35000"/>
+              </a:srgbClr>
+            </a:outerShdw>
+          </a:effectLst>
+        </a:effectStyle>
+        <a:effectStyle>
+          <a:effectLst>
+            <a:outerShdw blurRad="40000" dist="23000" dir="5400000" rotWithShape="0">
+              <a:srgbClr val="000000">
+                <a:alpha val="35000"/>
+              </a:srgbClr>
+            </a:outerShdw>
+          </a:effectLst>
+          <a:scene3d>
+            <a:camera prst="orthographicFront">
+              <a:rot lat="0" lon="0" rev="0"/>
+            </a:camera>
+            <a:lightRig rig="threePt" dir="t">
+              <a:rot lat="0" lon="0" rev="1200000"/>
+            </a:lightRig>
+          </a:scene3d>
+          <a:sp3d>
+            <a:bevelT w="63500" h="25400"/>
+          </a:sp3d>
+        </a:effectStyle>
+      </a:effectStyleLst>
+      <a:bgFillStyleLst>
+        <a:solidFill>
+          <a:schemeClr val="phClr"/>
+        </a:solidFill>
+        <a:gradFill rotWithShape="1">
+          <a:gsLst>
+            <a:gs pos="0">
+              <a:schemeClr val="phClr">
+                <a:tint val="40000"/>
+                <a:satMod val="350000"/>
+              </a:schemeClr>
+            </a:gs>
+            <a:gs pos="40000">
+              <a:schemeClr val="phClr">
+                <a:tint val="45000"/>
+                <a:shade val="99000"/>
+                <a:satMod val="350000"/>
+              </a:schemeClr>
+            </a:gs>
+            <a:gs pos="100000">
+              <a:schemeClr val="phClr">
+                <a:shade val="20000"/>
+                <a:satMod val="255000"/>
+              </a:schemeClr>
+            </a:gs>
+          </a:gsLst>
+          <a:path path="circle">
+            <a:fillToRect l="50000" t="-80000" r="50000" b="180000"/>
+          </a:path>
+        </a:gradFill>
+        <a:gradFill rotWithShape="1">
+          <a:gsLst>
+            <a:gs pos="0">
+              <a:schemeClr val="phClr">
+                <a:tint val="80000"/>
+                <a:satMod val="300000"/>
+              </a:schemeClr>
+            </a:gs>
+            <a:gs pos="100000">
+              <a:schemeClr val="phClr">
+                <a:shade val="30000"/>
+                <a:satMod val="200000"/>
+              </a:schemeClr>
+            </a:gs>
+          </a:gsLst>
+          <a:path path="circle">
+            <a:fillToRect l="50000" t="50000" r="50000" b="50000"/>
+          </a:path>
+        </a:gradFill>
+      </a:bgFillStyleLst>
+    </a:fmtScheme>
+  </a:themeElements>
+</a:theme>
+</file>
+
+<file path=ppt/theme/theme2.xml><?xml version="1.0" encoding="utf-8"?>
 <a:theme xmlns:a="http://schemas.openxmlformats.org/drawingml/2006/main" xmlns:r="http://schemas.openxmlformats.org/officeDocument/2006/relationships">
   <a:themeElements>
     <a:clrScheme name="Default">
@@ -37088,7 +37025,7 @@
 </a:theme>
 </file>
 
-<file path=ppt/theme/theme2.xml><?xml version="1.0" encoding="utf-8"?>
+<file path=ppt/theme/theme3.xml><?xml version="1.0" encoding="utf-8"?>
 <a:theme xmlns:a="http://schemas.openxmlformats.org/drawingml/2006/main" xmlns:r="http://schemas.openxmlformats.org/officeDocument/2006/relationships" name="Simple Light">
   <a:themeElements>
     <a:clrScheme name="Simple Light">
@@ -37127,285 +37064,6 @@
       </a:hlink>
       <a:folHlink>
         <a:srgbClr val="0097A7"/>
-      </a:folHlink>
-    </a:clrScheme>
-    <a:fontScheme name="Office">
-      <a:majorFont>
-        <a:latin typeface="Arial"/>
-        <a:ea typeface=""/>
-        <a:cs typeface=""/>
-        <a:font script="Jpan" typeface="ＭＳ Ｐゴシック"/>
-        <a:font script="Hang" typeface="맑은 고딕"/>
-        <a:font script="Hans" typeface="宋体"/>
-        <a:font script="Hant" typeface="新細明體"/>
-        <a:font script="Arab" typeface="Times New Roman"/>
-        <a:font script="Hebr" typeface="Times New Roman"/>
-        <a:font script="Thai" typeface="Angsana New"/>
-        <a:font script="Ethi" typeface="Nyala"/>
-        <a:font script="Beng" typeface="Vrinda"/>
-        <a:font script="Gujr" typeface="Shruti"/>
-        <a:font script="Khmr" typeface="MoolBoran"/>
-        <a:font script="Knda" typeface="Tunga"/>
-        <a:font script="Guru" typeface="Raavi"/>
-        <a:font script="Cans" typeface="Euphemia"/>
-        <a:font script="Cher" typeface="Plantagenet Cherokee"/>
-        <a:font script="Yiii" typeface="Microsoft Yi Baiti"/>
-        <a:font script="Tibt" typeface="Microsoft Himalaya"/>
-        <a:font script="Thaa" typeface="MV Boli"/>
-        <a:font script="Deva" typeface="Mangal"/>
-        <a:font script="Telu" typeface="Gautami"/>
-        <a:font script="Taml" typeface="Latha"/>
-        <a:font script="Syrc" typeface="Estrangelo Edessa"/>
-        <a:font script="Orya" typeface="Kalinga"/>
-        <a:font script="Mlym" typeface="Kartika"/>
-        <a:font script="Laoo" typeface="DokChampa"/>
-        <a:font script="Sinh" typeface="Iskoola Pota"/>
-        <a:font script="Mong" typeface="Mongolian Baiti"/>
-        <a:font script="Viet" typeface="Times New Roman"/>
-        <a:font script="Uigh" typeface="Microsoft Uighur"/>
-        <a:font script="Geor" typeface="Sylfaen"/>
-      </a:majorFont>
-      <a:minorFont>
-        <a:latin typeface="Arial"/>
-        <a:ea typeface=""/>
-        <a:cs typeface=""/>
-        <a:font script="Jpan" typeface="ＭＳ Ｐゴシック"/>
-        <a:font script="Hang" typeface="맑은 고딕"/>
-        <a:font script="Hans" typeface="宋体"/>
-        <a:font script="Hant" typeface="新細明體"/>
-        <a:font script="Arab" typeface="Arial"/>
-        <a:font script="Hebr" typeface="Arial"/>
-        <a:font script="Thai" typeface="Cordia New"/>
-        <a:font script="Ethi" typeface="Nyala"/>
-        <a:font script="Beng" typeface="Vrinda"/>
-        <a:font script="Gujr" typeface="Shruti"/>
-        <a:font script="Khmr" typeface="DaunPenh"/>
-        <a:font script="Knda" typeface="Tunga"/>
-        <a:font script="Guru" typeface="Raavi"/>
-        <a:font script="Cans" typeface="Euphemia"/>
-        <a:font script="Cher" typeface="Plantagenet Cherokee"/>
-        <a:font script="Yiii" typeface="Microsoft Yi Baiti"/>
-        <a:font script="Tibt" typeface="Microsoft Himalaya"/>
-        <a:font script="Thaa" typeface="MV Boli"/>
-        <a:font script="Deva" typeface="Mangal"/>
-        <a:font script="Telu" typeface="Gautami"/>
-        <a:font script="Taml" typeface="Latha"/>
-        <a:font script="Syrc" typeface="Estrangelo Edessa"/>
-        <a:font script="Orya" typeface="Kalinga"/>
-        <a:font script="Mlym" typeface="Kartika"/>
-        <a:font script="Laoo" typeface="DokChampa"/>
-        <a:font script="Sinh" typeface="Iskoola Pota"/>
-        <a:font script="Mong" typeface="Mongolian Baiti"/>
-        <a:font script="Viet" typeface="Arial"/>
-        <a:font script="Uigh" typeface="Microsoft Uighur"/>
-        <a:font script="Geor" typeface="Sylfaen"/>
-      </a:minorFont>
-    </a:fontScheme>
-    <a:fmtScheme name="Office">
-      <a:fillStyleLst>
-        <a:solidFill>
-          <a:schemeClr val="phClr"/>
-        </a:solidFill>
-        <a:gradFill rotWithShape="1">
-          <a:gsLst>
-            <a:gs pos="0">
-              <a:schemeClr val="phClr">
-                <a:tint val="50000"/>
-                <a:satMod val="300000"/>
-              </a:schemeClr>
-            </a:gs>
-            <a:gs pos="35000">
-              <a:schemeClr val="phClr">
-                <a:tint val="37000"/>
-                <a:satMod val="300000"/>
-              </a:schemeClr>
-            </a:gs>
-            <a:gs pos="100000">
-              <a:schemeClr val="phClr">
-                <a:tint val="15000"/>
-                <a:satMod val="350000"/>
-              </a:schemeClr>
-            </a:gs>
-          </a:gsLst>
-          <a:lin ang="16200000" scaled="1"/>
-        </a:gradFill>
-        <a:gradFill rotWithShape="1">
-          <a:gsLst>
-            <a:gs pos="0">
-              <a:schemeClr val="phClr">
-                <a:tint val="100000"/>
-                <a:shade val="100000"/>
-                <a:satMod val="130000"/>
-              </a:schemeClr>
-            </a:gs>
-            <a:gs pos="100000">
-              <a:schemeClr val="phClr">
-                <a:tint val="50000"/>
-                <a:shade val="100000"/>
-                <a:satMod val="350000"/>
-              </a:schemeClr>
-            </a:gs>
-          </a:gsLst>
-          <a:lin ang="16200000" scaled="0"/>
-        </a:gradFill>
-      </a:fillStyleLst>
-      <a:lnStyleLst>
-        <a:ln w="9525" cap="flat" cmpd="sng" algn="ctr">
-          <a:solidFill>
-            <a:schemeClr val="phClr">
-              <a:shade val="95000"/>
-              <a:satMod val="105000"/>
-            </a:schemeClr>
-          </a:solidFill>
-          <a:prstDash val="solid"/>
-        </a:ln>
-        <a:ln w="25400" cap="flat" cmpd="sng" algn="ctr">
-          <a:solidFill>
-            <a:schemeClr val="phClr"/>
-          </a:solidFill>
-          <a:prstDash val="solid"/>
-        </a:ln>
-        <a:ln w="38100" cap="flat" cmpd="sng" algn="ctr">
-          <a:solidFill>
-            <a:schemeClr val="phClr"/>
-          </a:solidFill>
-          <a:prstDash val="solid"/>
-        </a:ln>
-      </a:lnStyleLst>
-      <a:effectStyleLst>
-        <a:effectStyle>
-          <a:effectLst>
-            <a:outerShdw blurRad="40000" dist="20000" dir="5400000" rotWithShape="0">
-              <a:srgbClr val="000000">
-                <a:alpha val="38000"/>
-              </a:srgbClr>
-            </a:outerShdw>
-          </a:effectLst>
-        </a:effectStyle>
-        <a:effectStyle>
-          <a:effectLst>
-            <a:outerShdw blurRad="40000" dist="23000" dir="5400000" rotWithShape="0">
-              <a:srgbClr val="000000">
-                <a:alpha val="35000"/>
-              </a:srgbClr>
-            </a:outerShdw>
-          </a:effectLst>
-        </a:effectStyle>
-        <a:effectStyle>
-          <a:effectLst>
-            <a:outerShdw blurRad="40000" dist="23000" dir="5400000" rotWithShape="0">
-              <a:srgbClr val="000000">
-                <a:alpha val="35000"/>
-              </a:srgbClr>
-            </a:outerShdw>
-          </a:effectLst>
-          <a:scene3d>
-            <a:camera prst="orthographicFront">
-              <a:rot lat="0" lon="0" rev="0"/>
-            </a:camera>
-            <a:lightRig rig="threePt" dir="t">
-              <a:rot lat="0" lon="0" rev="1200000"/>
-            </a:lightRig>
-          </a:scene3d>
-          <a:sp3d>
-            <a:bevelT w="63500" h="25400"/>
-          </a:sp3d>
-        </a:effectStyle>
-      </a:effectStyleLst>
-      <a:bgFillStyleLst>
-        <a:solidFill>
-          <a:schemeClr val="phClr"/>
-        </a:solidFill>
-        <a:gradFill rotWithShape="1">
-          <a:gsLst>
-            <a:gs pos="0">
-              <a:schemeClr val="phClr">
-                <a:tint val="40000"/>
-                <a:satMod val="350000"/>
-              </a:schemeClr>
-            </a:gs>
-            <a:gs pos="40000">
-              <a:schemeClr val="phClr">
-                <a:tint val="45000"/>
-                <a:shade val="99000"/>
-                <a:satMod val="350000"/>
-              </a:schemeClr>
-            </a:gs>
-            <a:gs pos="100000">
-              <a:schemeClr val="phClr">
-                <a:shade val="20000"/>
-                <a:satMod val="255000"/>
-              </a:schemeClr>
-            </a:gs>
-          </a:gsLst>
-          <a:path path="circle">
-            <a:fillToRect l="50000" t="-80000" r="50000" b="180000"/>
-          </a:path>
-        </a:gradFill>
-        <a:gradFill rotWithShape="1">
-          <a:gsLst>
-            <a:gs pos="0">
-              <a:schemeClr val="phClr">
-                <a:tint val="80000"/>
-                <a:satMod val="300000"/>
-              </a:schemeClr>
-            </a:gs>
-            <a:gs pos="100000">
-              <a:schemeClr val="phClr">
-                <a:shade val="30000"/>
-                <a:satMod val="200000"/>
-              </a:schemeClr>
-            </a:gs>
-          </a:gsLst>
-          <a:path path="circle">
-            <a:fillToRect l="50000" t="50000" r="50000" b="50000"/>
-          </a:path>
-        </a:gradFill>
-      </a:bgFillStyleLst>
-    </a:fmtScheme>
-  </a:themeElements>
-</a:theme>
-</file>
-
-<file path=ppt/theme/theme3.xml><?xml version="1.0" encoding="utf-8"?>
-<a:theme xmlns:a="http://schemas.openxmlformats.org/drawingml/2006/main" xmlns:r="http://schemas.openxmlformats.org/officeDocument/2006/relationships" name="Decision Tree Model: Implementation &amp; Evaluation">
-  <a:themeElements>
-    <a:clrScheme name="Decision Tree Model: Implementation &amp; Evaluation">
-      <a:dk1>
-        <a:srgbClr val="1B2A3A"/>
-      </a:dk1>
-      <a:lt1>
-        <a:srgbClr val="FFFFFF"/>
-      </a:lt1>
-      <a:dk2>
-        <a:srgbClr val="545F6B"/>
-      </a:dk2>
-      <a:lt2>
-        <a:srgbClr val="E8EAEB"/>
-      </a:lt2>
-      <a:accent1>
-        <a:srgbClr val="B85A14"/>
-      </a:accent1>
-      <a:accent2>
-        <a:srgbClr val="5B6672"/>
-      </a:accent2>
-      <a:accent3>
-        <a:srgbClr val="9AA0A6"/>
-      </a:accent3>
-      <a:accent4>
-        <a:srgbClr val="767F89"/>
-      </a:accent4>
-      <a:accent5>
-        <a:srgbClr val="989FA6"/>
-      </a:accent5>
-      <a:accent6>
-        <a:srgbClr val="BBBFC4"/>
-      </a:accent6>
-      <a:hlink>
-        <a:srgbClr val="0563C1"/>
-      </a:hlink>
-      <a:folHlink>
-        <a:srgbClr val="954F72"/>
       </a:folHlink>
     </a:clrScheme>
     <a:fontScheme name="Office">
